--- a/SecondaSuddivisioneGruppi/Logica/Materiale PPT/PPT VERSIONE FINALE.pptx
+++ b/SecondaSuddivisioneGruppi/Logica/Materiale PPT/PPT VERSIONE FINALE.pptx
@@ -5,56 +5,77 @@
     <p:sldMasterId id="2147483659" r:id="rId1"/>
   </p:sldMasterIdLst>
   <p:notesMasterIdLst>
-    <p:notesMasterId r:id="rId14"/>
+    <p:notesMasterId r:id="rId16"/>
   </p:notesMasterIdLst>
   <p:sldIdLst>
     <p:sldId id="256" r:id="rId2"/>
-    <p:sldId id="257" r:id="rId3"/>
-    <p:sldId id="258" r:id="rId4"/>
-    <p:sldId id="259" r:id="rId5"/>
-    <p:sldId id="260" r:id="rId6"/>
-    <p:sldId id="261" r:id="rId7"/>
-    <p:sldId id="262" r:id="rId8"/>
-    <p:sldId id="263" r:id="rId9"/>
-    <p:sldId id="264" r:id="rId10"/>
-    <p:sldId id="265" r:id="rId11"/>
-    <p:sldId id="266" r:id="rId12"/>
-    <p:sldId id="267" r:id="rId13"/>
+    <p:sldId id="268" r:id="rId3"/>
+    <p:sldId id="269" r:id="rId4"/>
+    <p:sldId id="257" r:id="rId5"/>
+    <p:sldId id="258" r:id="rId6"/>
+    <p:sldId id="259" r:id="rId7"/>
+    <p:sldId id="260" r:id="rId8"/>
+    <p:sldId id="261" r:id="rId9"/>
+    <p:sldId id="262" r:id="rId10"/>
+    <p:sldId id="263" r:id="rId11"/>
+    <p:sldId id="264" r:id="rId12"/>
+    <p:sldId id="265" r:id="rId13"/>
+    <p:sldId id="266" r:id="rId14"/>
+    <p:sldId id="267" r:id="rId15"/>
   </p:sldIdLst>
   <p:sldSz cx="12192000" cy="6858000"/>
   <p:notesSz cx="6858000" cy="9144000"/>
   <p:embeddedFontLst>
     <p:embeddedFont>
       <p:font typeface="Inter" panose="020B0604020202020204" charset="0"/>
-      <p:regular r:id="rId15"/>
-      <p:bold r:id="rId16"/>
-      <p:italic r:id="rId17"/>
-      <p:boldItalic r:id="rId18"/>
+      <p:regular r:id="rId17"/>
+      <p:bold r:id="rId18"/>
+      <p:italic r:id="rId19"/>
+      <p:boldItalic r:id="rId20"/>
     </p:embeddedFont>
     <p:embeddedFont>
       <p:font typeface="Inter Black" panose="020B0604020202020204" charset="0"/>
-      <p:bold r:id="rId19"/>
-      <p:boldItalic r:id="rId20"/>
+      <p:bold r:id="rId21"/>
+      <p:boldItalic r:id="rId22"/>
     </p:embeddedFont>
     <p:embeddedFont>
       <p:font typeface="Inter SemiBold" panose="020B0604020202020204" charset="0"/>
-      <p:regular r:id="rId21"/>
-      <p:bold r:id="rId22"/>
-      <p:italic r:id="rId23"/>
-      <p:boldItalic r:id="rId24"/>
+      <p:regular r:id="rId23"/>
+      <p:bold r:id="rId24"/>
+      <p:italic r:id="rId25"/>
+      <p:boldItalic r:id="rId26"/>
     </p:embeddedFont>
     <p:embeddedFont>
       <p:font typeface="Outfit" panose="020B0604020202020204" charset="0"/>
-      <p:regular r:id="rId25"/>
-      <p:bold r:id="rId26"/>
+      <p:regular r:id="rId27"/>
+      <p:bold r:id="rId28"/>
     </p:embeddedFont>
     <p:embeddedFont>
       <p:font typeface="Outfit Black" panose="020B0604020202020204" charset="0"/>
-      <p:bold r:id="rId27"/>
+      <p:bold r:id="rId29"/>
     </p:embeddedFont>
     <p:embeddedFont>
       <p:font typeface="Outfit ExtraBold" panose="020B0604020202020204" charset="0"/>
-      <p:bold r:id="rId28"/>
+      <p:bold r:id="rId30"/>
+    </p:embeddedFont>
+    <p:embeddedFont>
+      <p:font typeface="Plus Jakarta Sans" panose="020B0604020202020204" charset="0"/>
+      <p:regular r:id="rId31"/>
+      <p:bold r:id="rId32"/>
+      <p:italic r:id="rId33"/>
+      <p:boldItalic r:id="rId34"/>
+    </p:embeddedFont>
+    <p:embeddedFont>
+      <p:font typeface="Plus Jakarta Sans SemiBold" panose="020B0604020202020204" charset="0"/>
+      <p:regular r:id="rId35"/>
+      <p:bold r:id="rId36"/>
+      <p:italic r:id="rId37"/>
+      <p:boldItalic r:id="rId38"/>
+    </p:embeddedFont>
+    <p:embeddedFont>
+      <p:font typeface="Poppins" panose="00000500000000000000" pitchFamily="2" charset="0"/>
+      <p:regular r:id="rId39"/>
+      <p:bold r:id="rId40"/>
     </p:embeddedFont>
   </p:embeddedFontLst>
   <p:defaultTextStyle>
@@ -855,6 +876,214 @@
   <p:cSld>
     <p:spTree>
       <p:nvGrpSpPr>
+        <p:cNvPr id="1" name="Shape 222"/>
+        <p:cNvGrpSpPr/>
+        <p:nvPr/>
+      </p:nvGrpSpPr>
+      <p:grpSpPr>
+        <a:xfrm>
+          <a:off x="0" y="0"/>
+          <a:ext cx="0" cy="0"/>
+          <a:chOff x="0" y="0"/>
+          <a:chExt cx="0" cy="0"/>
+        </a:xfrm>
+      </p:grpSpPr>
+      <p:sp>
+        <p:nvSpPr>
+          <p:cNvPr id="223" name="Google Shape;223;p8:notes"/>
+          <p:cNvSpPr txBox="1">
+            <a:spLocks noGrp="1"/>
+          </p:cNvSpPr>
+          <p:nvPr>
+            <p:ph type="body" idx="1"/>
+          </p:nvPr>
+        </p:nvSpPr>
+        <p:spPr>
+          <a:xfrm>
+            <a:off x="685800" y="4343400"/>
+            <a:ext cx="5486400" cy="4114800"/>
+          </a:xfrm>
+          <a:prstGeom prst="rect">
+            <a:avLst/>
+          </a:prstGeom>
+        </p:spPr>
+        <p:txBody>
+          <a:bodyPr spcFirstLastPara="1" wrap="square" lIns="91425" tIns="91425" rIns="91425" bIns="91425" anchor="t" anchorCtr="0">
+            <a:noAutofit/>
+          </a:bodyPr>
+          <a:lstStyle/>
+          <a:p>
+            <a:pPr marL="0" lvl="0" indent="0" algn="l" rtl="0">
+              <a:spcBef>
+                <a:spcPts val="0"/>
+              </a:spcBef>
+              <a:spcAft>
+                <a:spcPts val="0"/>
+              </a:spcAft>
+              <a:buNone/>
+            </a:pPr>
+            <a:endParaRPr/>
+          </a:p>
+        </p:txBody>
+      </p:sp>
+      <p:sp>
+        <p:nvSpPr>
+          <p:cNvPr id="224" name="Google Shape;224;p8:notes"/>
+          <p:cNvSpPr>
+            <a:spLocks noGrp="1" noRot="1" noChangeAspect="1"/>
+          </p:cNvSpPr>
+          <p:nvPr>
+            <p:ph type="sldImg" idx="2"/>
+          </p:nvPr>
+        </p:nvSpPr>
+        <p:spPr>
+          <a:xfrm>
+            <a:off x="1143225" y="685800"/>
+            <a:ext cx="4572225" cy="3429000"/>
+          </a:xfrm>
+          <a:custGeom>
+            <a:avLst/>
+            <a:gdLst/>
+            <a:ahLst/>
+            <a:cxnLst/>
+            <a:rect l="l" t="t" r="r" b="b"/>
+            <a:pathLst>
+              <a:path w="120000" h="120000" extrusionOk="0">
+                <a:moveTo>
+                  <a:pt x="0" y="0"/>
+                </a:moveTo>
+                <a:lnTo>
+                  <a:pt x="120000" y="0"/>
+                </a:lnTo>
+                <a:lnTo>
+                  <a:pt x="120000" y="120000"/>
+                </a:lnTo>
+                <a:lnTo>
+                  <a:pt x="0" y="120000"/>
+                </a:lnTo>
+                <a:close/>
+              </a:path>
+            </a:pathLst>
+          </a:custGeom>
+        </p:spPr>
+      </p:sp>
+    </p:spTree>
+  </p:cSld>
+  <p:clrMapOvr>
+    <a:masterClrMapping/>
+  </p:clrMapOvr>
+</p:notes>
+</file>
+
+<file path=ppt/notesSlides/notesSlide11.xml><?xml version="1.0" encoding="utf-8"?>
+<p:notes xmlns:a="http://schemas.openxmlformats.org/drawingml/2006/main" xmlns:r="http://schemas.openxmlformats.org/officeDocument/2006/relationships" xmlns:p="http://schemas.openxmlformats.org/presentationml/2006/main" showMasterSp="0" showMasterPhAnim="0">
+  <p:cSld>
+    <p:spTree>
+      <p:nvGrpSpPr>
+        <p:cNvPr id="1" name="Shape 238"/>
+        <p:cNvGrpSpPr/>
+        <p:nvPr/>
+      </p:nvGrpSpPr>
+      <p:grpSpPr>
+        <a:xfrm>
+          <a:off x="0" y="0"/>
+          <a:ext cx="0" cy="0"/>
+          <a:chOff x="0" y="0"/>
+          <a:chExt cx="0" cy="0"/>
+        </a:xfrm>
+      </p:grpSpPr>
+      <p:sp>
+        <p:nvSpPr>
+          <p:cNvPr id="239" name="Google Shape;239;p9:notes"/>
+          <p:cNvSpPr txBox="1">
+            <a:spLocks noGrp="1"/>
+          </p:cNvSpPr>
+          <p:nvPr>
+            <p:ph type="body" idx="1"/>
+          </p:nvPr>
+        </p:nvSpPr>
+        <p:spPr>
+          <a:xfrm>
+            <a:off x="685800" y="4343400"/>
+            <a:ext cx="5486400" cy="4114800"/>
+          </a:xfrm>
+          <a:prstGeom prst="rect">
+            <a:avLst/>
+          </a:prstGeom>
+        </p:spPr>
+        <p:txBody>
+          <a:bodyPr spcFirstLastPara="1" wrap="square" lIns="91425" tIns="91425" rIns="91425" bIns="91425" anchor="t" anchorCtr="0">
+            <a:noAutofit/>
+          </a:bodyPr>
+          <a:lstStyle/>
+          <a:p>
+            <a:pPr marL="0" lvl="0" indent="0" algn="l" rtl="0">
+              <a:spcBef>
+                <a:spcPts val="0"/>
+              </a:spcBef>
+              <a:spcAft>
+                <a:spcPts val="0"/>
+              </a:spcAft>
+              <a:buNone/>
+            </a:pPr>
+            <a:endParaRPr/>
+          </a:p>
+        </p:txBody>
+      </p:sp>
+      <p:sp>
+        <p:nvSpPr>
+          <p:cNvPr id="240" name="Google Shape;240;p9:notes"/>
+          <p:cNvSpPr>
+            <a:spLocks noGrp="1" noRot="1" noChangeAspect="1"/>
+          </p:cNvSpPr>
+          <p:nvPr>
+            <p:ph type="sldImg" idx="2"/>
+          </p:nvPr>
+        </p:nvSpPr>
+        <p:spPr>
+          <a:xfrm>
+            <a:off x="1143225" y="685800"/>
+            <a:ext cx="4572225" cy="3429000"/>
+          </a:xfrm>
+          <a:custGeom>
+            <a:avLst/>
+            <a:gdLst/>
+            <a:ahLst/>
+            <a:cxnLst/>
+            <a:rect l="l" t="t" r="r" b="b"/>
+            <a:pathLst>
+              <a:path w="120000" h="120000" extrusionOk="0">
+                <a:moveTo>
+                  <a:pt x="0" y="0"/>
+                </a:moveTo>
+                <a:lnTo>
+                  <a:pt x="120000" y="0"/>
+                </a:lnTo>
+                <a:lnTo>
+                  <a:pt x="120000" y="120000"/>
+                </a:lnTo>
+                <a:lnTo>
+                  <a:pt x="0" y="120000"/>
+                </a:lnTo>
+                <a:close/>
+              </a:path>
+            </a:pathLst>
+          </a:custGeom>
+        </p:spPr>
+      </p:sp>
+    </p:spTree>
+  </p:cSld>
+  <p:clrMapOvr>
+    <a:masterClrMapping/>
+  </p:clrMapOvr>
+</p:notes>
+</file>
+
+<file path=ppt/notesSlides/notesSlide12.xml><?xml version="1.0" encoding="utf-8"?>
+<p:notes xmlns:a="http://schemas.openxmlformats.org/drawingml/2006/main" xmlns:r="http://schemas.openxmlformats.org/officeDocument/2006/relationships" xmlns:p="http://schemas.openxmlformats.org/presentationml/2006/main" showMasterSp="0" showMasterPhAnim="0">
+  <p:cSld>
+    <p:spTree>
+      <p:nvGrpSpPr>
         <p:cNvPr id="1" name="Shape 254"/>
         <p:cNvGrpSpPr/>
         <p:nvPr/>
@@ -954,7 +1183,7 @@
 </p:notes>
 </file>
 
-<file path=ppt/notesSlides/notesSlide11.xml><?xml version="1.0" encoding="utf-8"?>
+<file path=ppt/notesSlides/notesSlide13.xml><?xml version="1.0" encoding="utf-8"?>
 <p:notes xmlns:a="http://schemas.openxmlformats.org/drawingml/2006/main" xmlns:r="http://schemas.openxmlformats.org/officeDocument/2006/relationships" xmlns:p="http://schemas.openxmlformats.org/presentationml/2006/main" showMasterSp="0" showMasterPhAnim="0">
   <p:cSld>
     <p:spTree>
@@ -1058,7 +1287,7 @@
 </p:notes>
 </file>
 
-<file path=ppt/notesSlides/notesSlide12.xml><?xml version="1.0" encoding="utf-8"?>
+<file path=ppt/notesSlides/notesSlide14.xml><?xml version="1.0" encoding="utf-8"?>
 <p:notes xmlns:a="http://schemas.openxmlformats.org/drawingml/2006/main" xmlns:r="http://schemas.openxmlformats.org/officeDocument/2006/relationships" xmlns:p="http://schemas.openxmlformats.org/presentationml/2006/main" showMasterSp="0" showMasterPhAnim="0">
   <p:cSld>
     <p:spTree>
@@ -1167,6 +1396,214 @@
   <p:cSld>
     <p:spTree>
       <p:nvGrpSpPr>
+        <p:cNvPr id="1" name="Shape 89"/>
+        <p:cNvGrpSpPr/>
+        <p:nvPr/>
+      </p:nvGrpSpPr>
+      <p:grpSpPr>
+        <a:xfrm>
+          <a:off x="0" y="0"/>
+          <a:ext cx="0" cy="0"/>
+          <a:chOff x="0" y="0"/>
+          <a:chExt cx="0" cy="0"/>
+        </a:xfrm>
+      </p:grpSpPr>
+      <p:sp>
+        <p:nvSpPr>
+          <p:cNvPr id="90" name="Google Shape;90;p2:notes"/>
+          <p:cNvSpPr txBox="1">
+            <a:spLocks noGrp="1"/>
+          </p:cNvSpPr>
+          <p:nvPr>
+            <p:ph type="body" idx="1"/>
+          </p:nvPr>
+        </p:nvSpPr>
+        <p:spPr>
+          <a:xfrm>
+            <a:off x="685800" y="4343400"/>
+            <a:ext cx="5486400" cy="4114800"/>
+          </a:xfrm>
+          <a:prstGeom prst="rect">
+            <a:avLst/>
+          </a:prstGeom>
+        </p:spPr>
+        <p:txBody>
+          <a:bodyPr spcFirstLastPara="1" wrap="square" lIns="91425" tIns="91425" rIns="91425" bIns="91425" anchor="t" anchorCtr="0">
+            <a:noAutofit/>
+          </a:bodyPr>
+          <a:lstStyle/>
+          <a:p>
+            <a:pPr marL="0" lvl="0" indent="0" algn="l" rtl="0">
+              <a:spcBef>
+                <a:spcPts val="0"/>
+              </a:spcBef>
+              <a:spcAft>
+                <a:spcPts val="0"/>
+              </a:spcAft>
+              <a:buNone/>
+            </a:pPr>
+            <a:endParaRPr/>
+          </a:p>
+        </p:txBody>
+      </p:sp>
+      <p:sp>
+        <p:nvSpPr>
+          <p:cNvPr id="91" name="Google Shape;91;p2:notes"/>
+          <p:cNvSpPr>
+            <a:spLocks noGrp="1" noRot="1" noChangeAspect="1"/>
+          </p:cNvSpPr>
+          <p:nvPr>
+            <p:ph type="sldImg" idx="2"/>
+          </p:nvPr>
+        </p:nvSpPr>
+        <p:spPr>
+          <a:xfrm>
+            <a:off x="1143225" y="685800"/>
+            <a:ext cx="4572225" cy="3429000"/>
+          </a:xfrm>
+          <a:custGeom>
+            <a:avLst/>
+            <a:gdLst/>
+            <a:ahLst/>
+            <a:cxnLst/>
+            <a:rect l="l" t="t" r="r" b="b"/>
+            <a:pathLst>
+              <a:path w="120000" h="120000" extrusionOk="0">
+                <a:moveTo>
+                  <a:pt x="0" y="0"/>
+                </a:moveTo>
+                <a:lnTo>
+                  <a:pt x="120000" y="0"/>
+                </a:lnTo>
+                <a:lnTo>
+                  <a:pt x="120000" y="120000"/>
+                </a:lnTo>
+                <a:lnTo>
+                  <a:pt x="0" y="120000"/>
+                </a:lnTo>
+                <a:close/>
+              </a:path>
+            </a:pathLst>
+          </a:custGeom>
+        </p:spPr>
+      </p:sp>
+    </p:spTree>
+  </p:cSld>
+  <p:clrMapOvr>
+    <a:masterClrMapping/>
+  </p:clrMapOvr>
+</p:notes>
+</file>
+
+<file path=ppt/notesSlides/notesSlide3.xml><?xml version="1.0" encoding="utf-8"?>
+<p:notes xmlns:a="http://schemas.openxmlformats.org/drawingml/2006/main" xmlns:r="http://schemas.openxmlformats.org/officeDocument/2006/relationships" xmlns:p="http://schemas.openxmlformats.org/presentationml/2006/main" showMasterSp="0" showMasterPhAnim="0">
+  <p:cSld>
+    <p:spTree>
+      <p:nvGrpSpPr>
+        <p:cNvPr id="1" name="Shape 123"/>
+        <p:cNvGrpSpPr/>
+        <p:nvPr/>
+      </p:nvGrpSpPr>
+      <p:grpSpPr>
+        <a:xfrm>
+          <a:off x="0" y="0"/>
+          <a:ext cx="0" cy="0"/>
+          <a:chOff x="0" y="0"/>
+          <a:chExt cx="0" cy="0"/>
+        </a:xfrm>
+      </p:grpSpPr>
+      <p:sp>
+        <p:nvSpPr>
+          <p:cNvPr id="124" name="Google Shape;124;p3:notes"/>
+          <p:cNvSpPr txBox="1">
+            <a:spLocks noGrp="1"/>
+          </p:cNvSpPr>
+          <p:nvPr>
+            <p:ph type="body" idx="1"/>
+          </p:nvPr>
+        </p:nvSpPr>
+        <p:spPr>
+          <a:xfrm>
+            <a:off x="685800" y="4343400"/>
+            <a:ext cx="5486400" cy="4114800"/>
+          </a:xfrm>
+          <a:prstGeom prst="rect">
+            <a:avLst/>
+          </a:prstGeom>
+        </p:spPr>
+        <p:txBody>
+          <a:bodyPr spcFirstLastPara="1" wrap="square" lIns="91425" tIns="91425" rIns="91425" bIns="91425" anchor="t" anchorCtr="0">
+            <a:noAutofit/>
+          </a:bodyPr>
+          <a:lstStyle/>
+          <a:p>
+            <a:pPr marL="0" lvl="0" indent="0" algn="l" rtl="0">
+              <a:spcBef>
+                <a:spcPts val="0"/>
+              </a:spcBef>
+              <a:spcAft>
+                <a:spcPts val="0"/>
+              </a:spcAft>
+              <a:buNone/>
+            </a:pPr>
+            <a:endParaRPr/>
+          </a:p>
+        </p:txBody>
+      </p:sp>
+      <p:sp>
+        <p:nvSpPr>
+          <p:cNvPr id="125" name="Google Shape;125;p3:notes"/>
+          <p:cNvSpPr>
+            <a:spLocks noGrp="1" noRot="1" noChangeAspect="1"/>
+          </p:cNvSpPr>
+          <p:nvPr>
+            <p:ph type="sldImg" idx="2"/>
+          </p:nvPr>
+        </p:nvSpPr>
+        <p:spPr>
+          <a:xfrm>
+            <a:off x="1143225" y="685800"/>
+            <a:ext cx="4572225" cy="3429000"/>
+          </a:xfrm>
+          <a:custGeom>
+            <a:avLst/>
+            <a:gdLst/>
+            <a:ahLst/>
+            <a:cxnLst/>
+            <a:rect l="l" t="t" r="r" b="b"/>
+            <a:pathLst>
+              <a:path w="120000" h="120000" extrusionOk="0">
+                <a:moveTo>
+                  <a:pt x="0" y="0"/>
+                </a:moveTo>
+                <a:lnTo>
+                  <a:pt x="120000" y="0"/>
+                </a:lnTo>
+                <a:lnTo>
+                  <a:pt x="120000" y="120000"/>
+                </a:lnTo>
+                <a:lnTo>
+                  <a:pt x="0" y="120000"/>
+                </a:lnTo>
+                <a:close/>
+              </a:path>
+            </a:pathLst>
+          </a:custGeom>
+        </p:spPr>
+      </p:sp>
+    </p:spTree>
+  </p:cSld>
+  <p:clrMapOvr>
+    <a:masterClrMapping/>
+  </p:clrMapOvr>
+</p:notes>
+</file>
+
+<file path=ppt/notesSlides/notesSlide4.xml><?xml version="1.0" encoding="utf-8"?>
+<p:notes xmlns:a="http://schemas.openxmlformats.org/drawingml/2006/main" xmlns:r="http://schemas.openxmlformats.org/officeDocument/2006/relationships" xmlns:p="http://schemas.openxmlformats.org/presentationml/2006/main" showMasterSp="0" showMasterPhAnim="0">
+  <p:cSld>
+    <p:spTree>
+      <p:nvGrpSpPr>
         <p:cNvPr id="1" name="Shape 100"/>
         <p:cNvGrpSpPr/>
         <p:nvPr/>
@@ -1266,7 +1703,7 @@
 </p:notes>
 </file>
 
-<file path=ppt/notesSlides/notesSlide3.xml><?xml version="1.0" encoding="utf-8"?>
+<file path=ppt/notesSlides/notesSlide5.xml><?xml version="1.0" encoding="utf-8"?>
 <p:notes xmlns:a="http://schemas.openxmlformats.org/drawingml/2006/main" xmlns:r="http://schemas.openxmlformats.org/officeDocument/2006/relationships" xmlns:p="http://schemas.openxmlformats.org/presentationml/2006/main" showMasterSp="0" showMasterPhAnim="0">
   <p:cSld>
     <p:spTree>
@@ -1370,7 +1807,7 @@
 </p:notes>
 </file>
 
-<file path=ppt/notesSlides/notesSlide4.xml><?xml version="1.0" encoding="utf-8"?>
+<file path=ppt/notesSlides/notesSlide6.xml><?xml version="1.0" encoding="utf-8"?>
 <p:notes xmlns:a="http://schemas.openxmlformats.org/drawingml/2006/main" xmlns:r="http://schemas.openxmlformats.org/officeDocument/2006/relationships" xmlns:p="http://schemas.openxmlformats.org/presentationml/2006/main" showMasterSp="0" showMasterPhAnim="0">
   <p:cSld>
     <p:spTree>
@@ -1474,7 +1911,7 @@
 </p:notes>
 </file>
 
-<file path=ppt/notesSlides/notesSlide5.xml><?xml version="1.0" encoding="utf-8"?>
+<file path=ppt/notesSlides/notesSlide7.xml><?xml version="1.0" encoding="utf-8"?>
 <p:notes xmlns:a="http://schemas.openxmlformats.org/drawingml/2006/main" xmlns:r="http://schemas.openxmlformats.org/officeDocument/2006/relationships" xmlns:p="http://schemas.openxmlformats.org/presentationml/2006/main" showMasterSp="0" showMasterPhAnim="0">
   <p:cSld>
     <p:spTree>
@@ -1578,7 +2015,7 @@
 </p:notes>
 </file>
 
-<file path=ppt/notesSlides/notesSlide6.xml><?xml version="1.0" encoding="utf-8"?>
+<file path=ppt/notesSlides/notesSlide8.xml><?xml version="1.0" encoding="utf-8"?>
 <p:notes xmlns:a="http://schemas.openxmlformats.org/drawingml/2006/main" xmlns:r="http://schemas.openxmlformats.org/officeDocument/2006/relationships" xmlns:p="http://schemas.openxmlformats.org/presentationml/2006/main" showMasterSp="0" showMasterPhAnim="0">
   <p:cSld>
     <p:spTree>
@@ -1682,7 +2119,7 @@
 </p:notes>
 </file>
 
-<file path=ppt/notesSlides/notesSlide7.xml><?xml version="1.0" encoding="utf-8"?>
+<file path=ppt/notesSlides/notesSlide9.xml><?xml version="1.0" encoding="utf-8"?>
 <p:notes xmlns:a="http://schemas.openxmlformats.org/drawingml/2006/main" xmlns:r="http://schemas.openxmlformats.org/officeDocument/2006/relationships" xmlns:p="http://schemas.openxmlformats.org/presentationml/2006/main" showMasterSp="0" showMasterPhAnim="0">
   <p:cSld>
     <p:spTree>
@@ -1751,214 +2188,6 @@
           <a:xfrm>
             <a:off x="381000" y="685800"/>
             <a:ext cx="6096000" cy="3429000"/>
-          </a:xfrm>
-          <a:custGeom>
-            <a:avLst/>
-            <a:gdLst/>
-            <a:ahLst/>
-            <a:cxnLst/>
-            <a:rect l="l" t="t" r="r" b="b"/>
-            <a:pathLst>
-              <a:path w="120000" h="120000" extrusionOk="0">
-                <a:moveTo>
-                  <a:pt x="0" y="0"/>
-                </a:moveTo>
-                <a:lnTo>
-                  <a:pt x="120000" y="0"/>
-                </a:lnTo>
-                <a:lnTo>
-                  <a:pt x="120000" y="120000"/>
-                </a:lnTo>
-                <a:lnTo>
-                  <a:pt x="0" y="120000"/>
-                </a:lnTo>
-                <a:close/>
-              </a:path>
-            </a:pathLst>
-          </a:custGeom>
-        </p:spPr>
-      </p:sp>
-    </p:spTree>
-  </p:cSld>
-  <p:clrMapOvr>
-    <a:masterClrMapping/>
-  </p:clrMapOvr>
-</p:notes>
-</file>
-
-<file path=ppt/notesSlides/notesSlide8.xml><?xml version="1.0" encoding="utf-8"?>
-<p:notes xmlns:a="http://schemas.openxmlformats.org/drawingml/2006/main" xmlns:r="http://schemas.openxmlformats.org/officeDocument/2006/relationships" xmlns:p="http://schemas.openxmlformats.org/presentationml/2006/main" showMasterSp="0" showMasterPhAnim="0">
-  <p:cSld>
-    <p:spTree>
-      <p:nvGrpSpPr>
-        <p:cNvPr id="1" name="Shape 222"/>
-        <p:cNvGrpSpPr/>
-        <p:nvPr/>
-      </p:nvGrpSpPr>
-      <p:grpSpPr>
-        <a:xfrm>
-          <a:off x="0" y="0"/>
-          <a:ext cx="0" cy="0"/>
-          <a:chOff x="0" y="0"/>
-          <a:chExt cx="0" cy="0"/>
-        </a:xfrm>
-      </p:grpSpPr>
-      <p:sp>
-        <p:nvSpPr>
-          <p:cNvPr id="223" name="Google Shape;223;p8:notes"/>
-          <p:cNvSpPr txBox="1">
-            <a:spLocks noGrp="1"/>
-          </p:cNvSpPr>
-          <p:nvPr>
-            <p:ph type="body" idx="1"/>
-          </p:nvPr>
-        </p:nvSpPr>
-        <p:spPr>
-          <a:xfrm>
-            <a:off x="685800" y="4343400"/>
-            <a:ext cx="5486400" cy="4114800"/>
-          </a:xfrm>
-          <a:prstGeom prst="rect">
-            <a:avLst/>
-          </a:prstGeom>
-        </p:spPr>
-        <p:txBody>
-          <a:bodyPr spcFirstLastPara="1" wrap="square" lIns="91425" tIns="91425" rIns="91425" bIns="91425" anchor="t" anchorCtr="0">
-            <a:noAutofit/>
-          </a:bodyPr>
-          <a:lstStyle/>
-          <a:p>
-            <a:pPr marL="0" lvl="0" indent="0" algn="l" rtl="0">
-              <a:spcBef>
-                <a:spcPts val="0"/>
-              </a:spcBef>
-              <a:spcAft>
-                <a:spcPts val="0"/>
-              </a:spcAft>
-              <a:buNone/>
-            </a:pPr>
-            <a:endParaRPr/>
-          </a:p>
-        </p:txBody>
-      </p:sp>
-      <p:sp>
-        <p:nvSpPr>
-          <p:cNvPr id="224" name="Google Shape;224;p8:notes"/>
-          <p:cNvSpPr>
-            <a:spLocks noGrp="1" noRot="1" noChangeAspect="1"/>
-          </p:cNvSpPr>
-          <p:nvPr>
-            <p:ph type="sldImg" idx="2"/>
-          </p:nvPr>
-        </p:nvSpPr>
-        <p:spPr>
-          <a:xfrm>
-            <a:off x="1143225" y="685800"/>
-            <a:ext cx="4572225" cy="3429000"/>
-          </a:xfrm>
-          <a:custGeom>
-            <a:avLst/>
-            <a:gdLst/>
-            <a:ahLst/>
-            <a:cxnLst/>
-            <a:rect l="l" t="t" r="r" b="b"/>
-            <a:pathLst>
-              <a:path w="120000" h="120000" extrusionOk="0">
-                <a:moveTo>
-                  <a:pt x="0" y="0"/>
-                </a:moveTo>
-                <a:lnTo>
-                  <a:pt x="120000" y="0"/>
-                </a:lnTo>
-                <a:lnTo>
-                  <a:pt x="120000" y="120000"/>
-                </a:lnTo>
-                <a:lnTo>
-                  <a:pt x="0" y="120000"/>
-                </a:lnTo>
-                <a:close/>
-              </a:path>
-            </a:pathLst>
-          </a:custGeom>
-        </p:spPr>
-      </p:sp>
-    </p:spTree>
-  </p:cSld>
-  <p:clrMapOvr>
-    <a:masterClrMapping/>
-  </p:clrMapOvr>
-</p:notes>
-</file>
-
-<file path=ppt/notesSlides/notesSlide9.xml><?xml version="1.0" encoding="utf-8"?>
-<p:notes xmlns:a="http://schemas.openxmlformats.org/drawingml/2006/main" xmlns:r="http://schemas.openxmlformats.org/officeDocument/2006/relationships" xmlns:p="http://schemas.openxmlformats.org/presentationml/2006/main" showMasterSp="0" showMasterPhAnim="0">
-  <p:cSld>
-    <p:spTree>
-      <p:nvGrpSpPr>
-        <p:cNvPr id="1" name="Shape 238"/>
-        <p:cNvGrpSpPr/>
-        <p:nvPr/>
-      </p:nvGrpSpPr>
-      <p:grpSpPr>
-        <a:xfrm>
-          <a:off x="0" y="0"/>
-          <a:ext cx="0" cy="0"/>
-          <a:chOff x="0" y="0"/>
-          <a:chExt cx="0" cy="0"/>
-        </a:xfrm>
-      </p:grpSpPr>
-      <p:sp>
-        <p:nvSpPr>
-          <p:cNvPr id="239" name="Google Shape;239;p9:notes"/>
-          <p:cNvSpPr txBox="1">
-            <a:spLocks noGrp="1"/>
-          </p:cNvSpPr>
-          <p:nvPr>
-            <p:ph type="body" idx="1"/>
-          </p:nvPr>
-        </p:nvSpPr>
-        <p:spPr>
-          <a:xfrm>
-            <a:off x="685800" y="4343400"/>
-            <a:ext cx="5486400" cy="4114800"/>
-          </a:xfrm>
-          <a:prstGeom prst="rect">
-            <a:avLst/>
-          </a:prstGeom>
-        </p:spPr>
-        <p:txBody>
-          <a:bodyPr spcFirstLastPara="1" wrap="square" lIns="91425" tIns="91425" rIns="91425" bIns="91425" anchor="t" anchorCtr="0">
-            <a:noAutofit/>
-          </a:bodyPr>
-          <a:lstStyle/>
-          <a:p>
-            <a:pPr marL="0" lvl="0" indent="0" algn="l" rtl="0">
-              <a:spcBef>
-                <a:spcPts val="0"/>
-              </a:spcBef>
-              <a:spcAft>
-                <a:spcPts val="0"/>
-              </a:spcAft>
-              <a:buNone/>
-            </a:pPr>
-            <a:endParaRPr/>
-          </a:p>
-        </p:txBody>
-      </p:sp>
-      <p:sp>
-        <p:nvSpPr>
-          <p:cNvPr id="240" name="Google Shape;240;p9:notes"/>
-          <p:cNvSpPr>
-            <a:spLocks noGrp="1" noRot="1" noChangeAspect="1"/>
-          </p:cNvSpPr>
-          <p:nvPr>
-            <p:ph type="sldImg" idx="2"/>
-          </p:nvPr>
-        </p:nvSpPr>
-        <p:spPr>
-          <a:xfrm>
-            <a:off x="1143225" y="685800"/>
-            <a:ext cx="4572225" cy="3429000"/>
           </a:xfrm>
           <a:custGeom>
             <a:avLst/>
@@ -12403,6 +12632,1095 @@
     </p:bg>
     <p:spTree>
       <p:nvGrpSpPr>
+        <p:cNvPr id="1" name="Shape 225"/>
+        <p:cNvGrpSpPr/>
+        <p:nvPr/>
+      </p:nvGrpSpPr>
+      <p:grpSpPr>
+        <a:xfrm>
+          <a:off x="0" y="0"/>
+          <a:ext cx="0" cy="0"/>
+          <a:chOff x="0" y="0"/>
+          <a:chExt cx="0" cy="0"/>
+        </a:xfrm>
+      </p:grpSpPr>
+      <p:pic>
+        <p:nvPicPr>
+          <p:cNvPr id="226" name="Google Shape;226;p20" descr="image.png"/>
+          <p:cNvPicPr preferRelativeResize="0"/>
+          <p:nvPr/>
+        </p:nvPicPr>
+        <p:blipFill rotWithShape="1">
+          <a:blip r:embed="rId3">
+            <a:alphaModFix/>
+          </a:blip>
+          <a:srcRect/>
+          <a:stretch/>
+        </p:blipFill>
+        <p:spPr>
+          <a:xfrm>
+            <a:off x="0" y="0"/>
+            <a:ext cx="12192000" cy="6858000"/>
+          </a:xfrm>
+          <a:prstGeom prst="rect">
+            <a:avLst/>
+          </a:prstGeom>
+          <a:noFill/>
+          <a:ln>
+            <a:noFill/>
+          </a:ln>
+        </p:spPr>
+      </p:pic>
+      <p:pic>
+        <p:nvPicPr>
+          <p:cNvPr id="227" name="Google Shape;227;p20" descr="image.png"/>
+          <p:cNvPicPr preferRelativeResize="0"/>
+          <p:nvPr/>
+        </p:nvPicPr>
+        <p:blipFill rotWithShape="1">
+          <a:blip r:embed="rId4">
+            <a:alphaModFix/>
+          </a:blip>
+          <a:srcRect/>
+          <a:stretch/>
+        </p:blipFill>
+        <p:spPr>
+          <a:xfrm>
+            <a:off x="762000" y="2952005"/>
+            <a:ext cx="5191125" cy="1921668"/>
+          </a:xfrm>
+          <a:prstGeom prst="rect">
+            <a:avLst/>
+          </a:prstGeom>
+          <a:noFill/>
+          <a:ln>
+            <a:noFill/>
+          </a:ln>
+        </p:spPr>
+      </p:pic>
+      <p:pic>
+        <p:nvPicPr>
+          <p:cNvPr id="228" name="Google Shape;228;p20" descr="image.png"/>
+          <p:cNvPicPr preferRelativeResize="0"/>
+          <p:nvPr/>
+        </p:nvPicPr>
+        <p:blipFill rotWithShape="1">
+          <a:blip r:embed="rId5">
+            <a:alphaModFix/>
+          </a:blip>
+          <a:srcRect/>
+          <a:stretch/>
+        </p:blipFill>
+        <p:spPr>
+          <a:xfrm>
+            <a:off x="6238875" y="2952005"/>
+            <a:ext cx="5191125" cy="1921668"/>
+          </a:xfrm>
+          <a:prstGeom prst="rect">
+            <a:avLst/>
+          </a:prstGeom>
+          <a:noFill/>
+          <a:ln>
+            <a:noFill/>
+          </a:ln>
+        </p:spPr>
+      </p:pic>
+      <p:sp>
+        <p:nvSpPr>
+          <p:cNvPr id="229" name="Google Shape;229;p20"/>
+          <p:cNvSpPr txBox="1"/>
+          <p:nvPr/>
+        </p:nvSpPr>
+        <p:spPr>
+          <a:xfrm>
+            <a:off x="904875" y="571500"/>
+            <a:ext cx="11051381" cy="409575"/>
+          </a:xfrm>
+          <a:prstGeom prst="rect">
+            <a:avLst/>
+          </a:prstGeom>
+          <a:noFill/>
+          <a:ln>
+            <a:noFill/>
+          </a:ln>
+        </p:spPr>
+        <p:txBody>
+          <a:bodyPr spcFirstLastPara="1" wrap="square" lIns="0" tIns="0" rIns="0" bIns="0" anchor="t" anchorCtr="0">
+            <a:spAutoFit/>
+          </a:bodyPr>
+          <a:lstStyle/>
+          <a:p>
+            <a:pPr marL="0" marR="0" lvl="0" indent="0" algn="l" rtl="0">
+              <a:spcBef>
+                <a:spcPts val="0"/>
+              </a:spcBef>
+              <a:spcAft>
+                <a:spcPts val="0"/>
+              </a:spcAft>
+              <a:buNone/>
+            </a:pPr>
+            <a:r>
+              <a:rPr lang="en-US" sz="2850" b="0" i="0" u="none" strike="noStrike" cap="none">
+                <a:solidFill>
+                  <a:srgbClr val="FFFFFF"/>
+                </a:solidFill>
+                <a:latin typeface="Outfit Black"/>
+                <a:ea typeface="Outfit Black"/>
+                <a:cs typeface="Outfit Black"/>
+                <a:sym typeface="Outfit Black"/>
+              </a:rPr>
+              <a:t>MACRO 3: NUOVO SITO ATTRATTIVO</a:t>
+            </a:r>
+            <a:endParaRPr/>
+          </a:p>
+        </p:txBody>
+      </p:sp>
+      <p:sp>
+        <p:nvSpPr>
+          <p:cNvPr id="230" name="Google Shape;230;p20"/>
+          <p:cNvSpPr/>
+          <p:nvPr/>
+        </p:nvSpPr>
+        <p:spPr>
+          <a:xfrm>
+            <a:off x="762000" y="571500"/>
+            <a:ext cx="47625" cy="409575"/>
+          </a:xfrm>
+          <a:prstGeom prst="rect">
+            <a:avLst/>
+          </a:prstGeom>
+          <a:solidFill>
+            <a:srgbClr val="F95707"/>
+          </a:solidFill>
+          <a:ln>
+            <a:noFill/>
+          </a:ln>
+        </p:spPr>
+        <p:txBody>
+          <a:bodyPr spcFirstLastPara="1" wrap="square" lIns="91425" tIns="45700" rIns="91425" bIns="45700" anchor="ctr" anchorCtr="0">
+            <a:noAutofit/>
+          </a:bodyPr>
+          <a:lstStyle/>
+          <a:p>
+            <a:pPr marL="0" marR="0" lvl="0" indent="0" algn="ctr" rtl="0">
+              <a:spcBef>
+                <a:spcPts val="0"/>
+              </a:spcBef>
+              <a:spcAft>
+                <a:spcPts val="0"/>
+              </a:spcAft>
+              <a:buNone/>
+            </a:pPr>
+            <a:endParaRPr sz="1800" b="0" i="0" u="none" strike="noStrike" cap="none">
+              <a:solidFill>
+                <a:schemeClr val="dk1"/>
+              </a:solidFill>
+              <a:latin typeface="Calibri"/>
+              <a:ea typeface="Calibri"/>
+              <a:cs typeface="Calibri"/>
+              <a:sym typeface="Calibri"/>
+            </a:endParaRPr>
+          </a:p>
+        </p:txBody>
+      </p:sp>
+      <p:sp>
+        <p:nvSpPr>
+          <p:cNvPr id="231" name="Google Shape;231;p20"/>
+          <p:cNvSpPr txBox="1"/>
+          <p:nvPr/>
+        </p:nvSpPr>
+        <p:spPr>
+          <a:xfrm>
+            <a:off x="762000" y="1057275"/>
+            <a:ext cx="10668000" cy="243780"/>
+          </a:xfrm>
+          <a:prstGeom prst="rect">
+            <a:avLst/>
+          </a:prstGeom>
+          <a:noFill/>
+          <a:ln>
+            <a:noFill/>
+          </a:ln>
+        </p:spPr>
+        <p:txBody>
+          <a:bodyPr spcFirstLastPara="1" wrap="square" lIns="0" tIns="0" rIns="0" bIns="0" anchor="t" anchorCtr="0">
+            <a:spAutoFit/>
+          </a:bodyPr>
+          <a:lstStyle/>
+          <a:p>
+            <a:pPr marL="0" marR="0" lvl="0" indent="0" algn="l" rtl="0">
+              <a:lnSpc>
+                <a:spcPct val="160000"/>
+              </a:lnSpc>
+              <a:spcBef>
+                <a:spcPts val="0"/>
+              </a:spcBef>
+              <a:spcAft>
+                <a:spcPts val="0"/>
+              </a:spcAft>
+              <a:buNone/>
+            </a:pPr>
+            <a:r>
+              <a:rPr lang="en-US" sz="1200" b="0" i="0" u="none" strike="noStrike" cap="none">
+                <a:solidFill>
+                  <a:srgbClr val="A3A3A3"/>
+                </a:solidFill>
+                <a:latin typeface="Inter"/>
+                <a:ea typeface="Inter"/>
+                <a:cs typeface="Inter"/>
+                <a:sym typeface="Inter"/>
+              </a:rPr>
+              <a:t>Progettato specificamente per le esigenze del mobile web e dell'instant ordering.</a:t>
+            </a:r>
+            <a:endParaRPr/>
+          </a:p>
+        </p:txBody>
+      </p:sp>
+      <p:sp>
+        <p:nvSpPr>
+          <p:cNvPr id="232" name="Google Shape;232;p20"/>
+          <p:cNvSpPr txBox="1"/>
+          <p:nvPr/>
+        </p:nvSpPr>
+        <p:spPr>
+          <a:xfrm>
+            <a:off x="1104900" y="3294905"/>
+            <a:ext cx="4730591" cy="219075"/>
+          </a:xfrm>
+          <a:prstGeom prst="rect">
+            <a:avLst/>
+          </a:prstGeom>
+          <a:noFill/>
+          <a:ln>
+            <a:noFill/>
+          </a:ln>
+        </p:spPr>
+        <p:txBody>
+          <a:bodyPr spcFirstLastPara="1" wrap="square" lIns="266700" tIns="0" rIns="0" bIns="0" anchor="t" anchorCtr="0">
+            <a:spAutoFit/>
+          </a:bodyPr>
+          <a:lstStyle/>
+          <a:p>
+            <a:pPr marL="0" marR="0" lvl="0" indent="0" algn="l" rtl="0">
+              <a:spcBef>
+                <a:spcPts val="0"/>
+              </a:spcBef>
+              <a:spcAft>
+                <a:spcPts val="0"/>
+              </a:spcAft>
+              <a:buNone/>
+            </a:pPr>
+            <a:r>
+              <a:rPr lang="en-US" sz="1500" b="0" i="0" u="none" strike="noStrike" cap="none">
+                <a:solidFill>
+                  <a:srgbClr val="F95707"/>
+                </a:solidFill>
+                <a:latin typeface="Outfit ExtraBold"/>
+                <a:ea typeface="Outfit ExtraBold"/>
+                <a:cs typeface="Outfit ExtraBold"/>
+                <a:sym typeface="Outfit ExtraBold"/>
+              </a:rPr>
+              <a:t>VELOCITÀ E PERFORMANCE</a:t>
+            </a:r>
+            <a:endParaRPr/>
+          </a:p>
+        </p:txBody>
+      </p:sp>
+      <p:sp>
+        <p:nvSpPr>
+          <p:cNvPr id="233" name="Google Shape;233;p20"/>
+          <p:cNvSpPr txBox="1"/>
+          <p:nvPr/>
+        </p:nvSpPr>
+        <p:spPr>
+          <a:xfrm>
+            <a:off x="1104900" y="3647330"/>
+            <a:ext cx="4505325" cy="883443"/>
+          </a:xfrm>
+          <a:prstGeom prst="rect">
+            <a:avLst/>
+          </a:prstGeom>
+          <a:noFill/>
+          <a:ln>
+            <a:noFill/>
+          </a:ln>
+        </p:spPr>
+        <p:txBody>
+          <a:bodyPr spcFirstLastPara="1" wrap="square" lIns="0" tIns="0" rIns="0" bIns="0" anchor="t" anchorCtr="0">
+            <a:spAutoFit/>
+          </a:bodyPr>
+          <a:lstStyle/>
+          <a:p>
+            <a:pPr marL="0" marR="0" lvl="0" indent="0" algn="l" rtl="0">
+              <a:lnSpc>
+                <a:spcPct val="159981"/>
+              </a:lnSpc>
+              <a:spcBef>
+                <a:spcPts val="0"/>
+              </a:spcBef>
+              <a:spcAft>
+                <a:spcPts val="0"/>
+              </a:spcAft>
+              <a:buNone/>
+            </a:pPr>
+            <a:r>
+              <a:rPr lang="en-US" sz="1087" b="0" i="0" u="none" strike="noStrike" cap="none">
+                <a:solidFill>
+                  <a:srgbClr val="A3A3A3"/>
+                </a:solidFill>
+                <a:latin typeface="Inter"/>
+                <a:ea typeface="Inter"/>
+                <a:cs typeface="Inter"/>
+                <a:sym typeface="Inter"/>
+              </a:rPr>
+              <a:t>Il nuovo portale web è leggerissimo e ottimizzato per caricarsi istantaneamente anche sotto copertura di rete minima. Riduzione dei tempi di caricamento del 65% rispetto alla versione precedente, abbattendo il tasso di abbandono del carrello.</a:t>
+            </a:r>
+            <a:endParaRPr/>
+          </a:p>
+        </p:txBody>
+      </p:sp>
+      <p:sp>
+        <p:nvSpPr>
+          <p:cNvPr id="234" name="Google Shape;234;p20"/>
+          <p:cNvSpPr txBox="1"/>
+          <p:nvPr/>
+        </p:nvSpPr>
+        <p:spPr>
+          <a:xfrm>
+            <a:off x="6581775" y="3294905"/>
+            <a:ext cx="4730591" cy="219075"/>
+          </a:xfrm>
+          <a:prstGeom prst="rect">
+            <a:avLst/>
+          </a:prstGeom>
+          <a:noFill/>
+          <a:ln>
+            <a:noFill/>
+          </a:ln>
+        </p:spPr>
+        <p:txBody>
+          <a:bodyPr spcFirstLastPara="1" wrap="square" lIns="238125" tIns="0" rIns="0" bIns="0" anchor="t" anchorCtr="0">
+            <a:spAutoFit/>
+          </a:bodyPr>
+          <a:lstStyle/>
+          <a:p>
+            <a:pPr marL="0" marR="0" lvl="0" indent="0" algn="l" rtl="0">
+              <a:spcBef>
+                <a:spcPts val="0"/>
+              </a:spcBef>
+              <a:spcAft>
+                <a:spcPts val="0"/>
+              </a:spcAft>
+              <a:buNone/>
+            </a:pPr>
+            <a:r>
+              <a:rPr lang="en-US" sz="1500" b="0" i="0" u="none" strike="noStrike" cap="none">
+                <a:solidFill>
+                  <a:srgbClr val="F95707"/>
+                </a:solidFill>
+                <a:latin typeface="Outfit ExtraBold"/>
+                <a:ea typeface="Outfit ExtraBold"/>
+                <a:cs typeface="Outfit ExtraBold"/>
+                <a:sym typeface="Outfit ExtraBold"/>
+              </a:rPr>
+              <a:t>APPROCCIO MOBILE-FIRST</a:t>
+            </a:r>
+            <a:endParaRPr/>
+          </a:p>
+        </p:txBody>
+      </p:sp>
+      <p:sp>
+        <p:nvSpPr>
+          <p:cNvPr id="235" name="Google Shape;235;p20"/>
+          <p:cNvSpPr txBox="1"/>
+          <p:nvPr/>
+        </p:nvSpPr>
+        <p:spPr>
+          <a:xfrm>
+            <a:off x="6581775" y="3647330"/>
+            <a:ext cx="4505325" cy="883443"/>
+          </a:xfrm>
+          <a:prstGeom prst="rect">
+            <a:avLst/>
+          </a:prstGeom>
+          <a:noFill/>
+          <a:ln>
+            <a:noFill/>
+          </a:ln>
+        </p:spPr>
+        <p:txBody>
+          <a:bodyPr spcFirstLastPara="1" wrap="square" lIns="0" tIns="0" rIns="0" bIns="0" anchor="t" anchorCtr="0">
+            <a:spAutoFit/>
+          </a:bodyPr>
+          <a:lstStyle/>
+          <a:p>
+            <a:pPr marL="0" marR="0" lvl="0" indent="0" algn="l" rtl="0">
+              <a:lnSpc>
+                <a:spcPct val="159981"/>
+              </a:lnSpc>
+              <a:spcBef>
+                <a:spcPts val="0"/>
+              </a:spcBef>
+              <a:spcAft>
+                <a:spcPts val="0"/>
+              </a:spcAft>
+              <a:buNone/>
+            </a:pPr>
+            <a:r>
+              <a:rPr lang="en-US" sz="1087" b="0" i="0" u="none" strike="noStrike" cap="none">
+                <a:solidFill>
+                  <a:srgbClr val="A3A3A3"/>
+                </a:solidFill>
+                <a:latin typeface="Inter"/>
+                <a:ea typeface="Inter"/>
+                <a:cs typeface="Inter"/>
+                <a:sym typeface="Inter"/>
+              </a:rPr>
+              <a:t>Ogni elemento grafico è pensato per gli schermi verticali degli smartphone. Menu interattivo con foto HD a pieno schermo, navigazione tramite swipe e totale integrazione dinamica con il database centrale dell'app mobile.</a:t>
+            </a:r>
+            <a:endParaRPr/>
+          </a:p>
+        </p:txBody>
+      </p:sp>
+      <p:pic>
+        <p:nvPicPr>
+          <p:cNvPr id="236" name="Google Shape;236;p20" descr="image.png"/>
+          <p:cNvPicPr preferRelativeResize="0"/>
+          <p:nvPr/>
+        </p:nvPicPr>
+        <p:blipFill rotWithShape="1">
+          <a:blip r:embed="rId6">
+            <a:alphaModFix/>
+          </a:blip>
+          <a:srcRect/>
+          <a:stretch/>
+        </p:blipFill>
+        <p:spPr>
+          <a:xfrm>
+            <a:off x="1104900" y="3304430"/>
+            <a:ext cx="171450" cy="190500"/>
+          </a:xfrm>
+          <a:prstGeom prst="rect">
+            <a:avLst/>
+          </a:prstGeom>
+          <a:noFill/>
+          <a:ln>
+            <a:noFill/>
+          </a:ln>
+        </p:spPr>
+      </p:pic>
+      <p:pic>
+        <p:nvPicPr>
+          <p:cNvPr id="237" name="Google Shape;237;p20" descr="image.png"/>
+          <p:cNvPicPr preferRelativeResize="0"/>
+          <p:nvPr/>
+        </p:nvPicPr>
+        <p:blipFill rotWithShape="1">
+          <a:blip r:embed="rId7">
+            <a:alphaModFix/>
+          </a:blip>
+          <a:srcRect/>
+          <a:stretch/>
+        </p:blipFill>
+        <p:spPr>
+          <a:xfrm>
+            <a:off x="6581775" y="3304430"/>
+            <a:ext cx="142875" cy="190500"/>
+          </a:xfrm>
+          <a:prstGeom prst="rect">
+            <a:avLst/>
+          </a:prstGeom>
+          <a:noFill/>
+          <a:ln>
+            <a:noFill/>
+          </a:ln>
+        </p:spPr>
+      </p:pic>
+    </p:spTree>
+  </p:cSld>
+  <p:clrMapOvr>
+    <a:masterClrMapping/>
+  </p:clrMapOvr>
+</p:sld>
+</file>
+
+<file path=ppt/slides/slide11.xml><?xml version="1.0" encoding="utf-8"?>
+<p:sld xmlns:a="http://schemas.openxmlformats.org/drawingml/2006/main" xmlns:r="http://schemas.openxmlformats.org/officeDocument/2006/relationships" xmlns:p="http://schemas.openxmlformats.org/presentationml/2006/main">
+  <p:cSld>
+    <p:bg>
+      <p:bgPr>
+        <a:solidFill>
+          <a:srgbClr val="0C0B0A"/>
+        </a:solidFill>
+        <a:effectLst/>
+      </p:bgPr>
+    </p:bg>
+    <p:spTree>
+      <p:nvGrpSpPr>
+        <p:cNvPr id="1" name="Shape 241"/>
+        <p:cNvGrpSpPr/>
+        <p:nvPr/>
+      </p:nvGrpSpPr>
+      <p:grpSpPr>
+        <a:xfrm>
+          <a:off x="0" y="0"/>
+          <a:ext cx="0" cy="0"/>
+          <a:chOff x="0" y="0"/>
+          <a:chExt cx="0" cy="0"/>
+        </a:xfrm>
+      </p:grpSpPr>
+      <p:pic>
+        <p:nvPicPr>
+          <p:cNvPr id="242" name="Google Shape;242;p21" descr="image.png"/>
+          <p:cNvPicPr preferRelativeResize="0"/>
+          <p:nvPr/>
+        </p:nvPicPr>
+        <p:blipFill rotWithShape="1">
+          <a:blip r:embed="rId3">
+            <a:alphaModFix/>
+          </a:blip>
+          <a:srcRect/>
+          <a:stretch/>
+        </p:blipFill>
+        <p:spPr>
+          <a:xfrm>
+            <a:off x="0" y="0"/>
+            <a:ext cx="12192000" cy="6858000"/>
+          </a:xfrm>
+          <a:prstGeom prst="rect">
+            <a:avLst/>
+          </a:prstGeom>
+          <a:noFill/>
+          <a:ln>
+            <a:noFill/>
+          </a:ln>
+        </p:spPr>
+      </p:pic>
+      <p:sp>
+        <p:nvSpPr>
+          <p:cNvPr id="243" name="Google Shape;243;p21"/>
+          <p:cNvSpPr txBox="1"/>
+          <p:nvPr/>
+        </p:nvSpPr>
+        <p:spPr>
+          <a:xfrm>
+            <a:off x="904875" y="571500"/>
+            <a:ext cx="4950618" cy="819150"/>
+          </a:xfrm>
+          <a:prstGeom prst="rect">
+            <a:avLst/>
+          </a:prstGeom>
+          <a:noFill/>
+          <a:ln>
+            <a:noFill/>
+          </a:ln>
+        </p:spPr>
+        <p:txBody>
+          <a:bodyPr spcFirstLastPara="1" wrap="square" lIns="0" tIns="0" rIns="0" bIns="0" anchor="t" anchorCtr="0">
+            <a:spAutoFit/>
+          </a:bodyPr>
+          <a:lstStyle/>
+          <a:p>
+            <a:pPr marL="0" marR="0" lvl="0" indent="0" algn="l" rtl="0">
+              <a:spcBef>
+                <a:spcPts val="0"/>
+              </a:spcBef>
+              <a:spcAft>
+                <a:spcPts val="0"/>
+              </a:spcAft>
+              <a:buNone/>
+            </a:pPr>
+            <a:r>
+              <a:rPr lang="en-US" sz="2850" b="0" i="0" u="none" strike="noStrike" cap="none">
+                <a:solidFill>
+                  <a:srgbClr val="FFFFFF"/>
+                </a:solidFill>
+                <a:latin typeface="Outfit Black"/>
+                <a:ea typeface="Outfit Black"/>
+                <a:cs typeface="Outfit Black"/>
+                <a:sym typeface="Outfit Black"/>
+              </a:rPr>
+              <a:t>MACRO 4: PROMO &amp; FILOSOFIA</a:t>
+            </a:r>
+            <a:endParaRPr/>
+          </a:p>
+        </p:txBody>
+      </p:sp>
+      <p:sp>
+        <p:nvSpPr>
+          <p:cNvPr id="244" name="Google Shape;244;p21"/>
+          <p:cNvSpPr/>
+          <p:nvPr/>
+        </p:nvSpPr>
+        <p:spPr>
+          <a:xfrm>
+            <a:off x="762000" y="571500"/>
+            <a:ext cx="47625" cy="819150"/>
+          </a:xfrm>
+          <a:prstGeom prst="rect">
+            <a:avLst/>
+          </a:prstGeom>
+          <a:solidFill>
+            <a:srgbClr val="F95707"/>
+          </a:solidFill>
+          <a:ln>
+            <a:noFill/>
+          </a:ln>
+        </p:spPr>
+        <p:txBody>
+          <a:bodyPr spcFirstLastPara="1" wrap="square" lIns="91425" tIns="45700" rIns="91425" bIns="45700" anchor="ctr" anchorCtr="0">
+            <a:noAutofit/>
+          </a:bodyPr>
+          <a:lstStyle/>
+          <a:p>
+            <a:pPr marL="0" marR="0" lvl="0" indent="0" algn="ctr" rtl="0">
+              <a:spcBef>
+                <a:spcPts val="0"/>
+              </a:spcBef>
+              <a:spcAft>
+                <a:spcPts val="0"/>
+              </a:spcAft>
+              <a:buNone/>
+            </a:pPr>
+            <a:endParaRPr sz="1800" b="0" i="0" u="none" strike="noStrike" cap="none">
+              <a:solidFill>
+                <a:schemeClr val="dk1"/>
+              </a:solidFill>
+              <a:latin typeface="Calibri"/>
+              <a:ea typeface="Calibri"/>
+              <a:cs typeface="Calibri"/>
+              <a:sym typeface="Calibri"/>
+            </a:endParaRPr>
+          </a:p>
+        </p:txBody>
+      </p:sp>
+      <p:pic>
+        <p:nvPicPr>
+          <p:cNvPr id="245" name="Google Shape;245;p21" descr="image.png"/>
+          <p:cNvPicPr preferRelativeResize="0"/>
+          <p:nvPr/>
+        </p:nvPicPr>
+        <p:blipFill rotWithShape="1">
+          <a:blip r:embed="rId4">
+            <a:alphaModFix/>
+          </a:blip>
+          <a:srcRect/>
+          <a:stretch/>
+        </p:blipFill>
+        <p:spPr>
+          <a:xfrm>
+            <a:off x="6096000" y="0"/>
+            <a:ext cx="6096000" cy="6858000"/>
+          </a:xfrm>
+          <a:prstGeom prst="rect">
+            <a:avLst/>
+          </a:prstGeom>
+          <a:noFill/>
+          <a:ln>
+            <a:noFill/>
+          </a:ln>
+        </p:spPr>
+      </p:pic>
+      <p:sp>
+        <p:nvSpPr>
+          <p:cNvPr id="246" name="Google Shape;246;p21"/>
+          <p:cNvSpPr txBox="1"/>
+          <p:nvPr/>
+        </p:nvSpPr>
+        <p:spPr>
+          <a:xfrm>
+            <a:off x="762000" y="2624137"/>
+            <a:ext cx="5100637" cy="266700"/>
+          </a:xfrm>
+          <a:prstGeom prst="rect">
+            <a:avLst/>
+          </a:prstGeom>
+          <a:noFill/>
+          <a:ln>
+            <a:noFill/>
+          </a:ln>
+        </p:spPr>
+        <p:txBody>
+          <a:bodyPr spcFirstLastPara="1" wrap="square" lIns="0" tIns="0" rIns="0" bIns="0" anchor="t" anchorCtr="0">
+            <a:spAutoFit/>
+          </a:bodyPr>
+          <a:lstStyle/>
+          <a:p>
+            <a:pPr marL="0" marR="0" lvl="0" indent="0" algn="l" rtl="0">
+              <a:spcBef>
+                <a:spcPts val="0"/>
+              </a:spcBef>
+              <a:spcAft>
+                <a:spcPts val="0"/>
+              </a:spcAft>
+              <a:buNone/>
+            </a:pPr>
+            <a:r>
+              <a:rPr lang="en-US" sz="1800" b="0" i="0" u="none" strike="noStrike" cap="none">
+                <a:solidFill>
+                  <a:srgbClr val="FFFFFF"/>
+                </a:solidFill>
+                <a:latin typeface="Outfit ExtraBold"/>
+                <a:ea typeface="Outfit ExtraBold"/>
+                <a:cs typeface="Outfit ExtraBold"/>
+                <a:sym typeface="Outfit ExtraBold"/>
+              </a:rPr>
+              <a:t>ETICA, TERRITORIO E COINVOLGIMENTO</a:t>
+            </a:r>
+            <a:endParaRPr/>
+          </a:p>
+        </p:txBody>
+      </p:sp>
+      <p:sp>
+        <p:nvSpPr>
+          <p:cNvPr id="247" name="Google Shape;247;p21"/>
+          <p:cNvSpPr txBox="1"/>
+          <p:nvPr/>
+        </p:nvSpPr>
+        <p:spPr>
+          <a:xfrm>
+            <a:off x="762000" y="3005137"/>
+            <a:ext cx="4857750" cy="457200"/>
+          </a:xfrm>
+          <a:prstGeom prst="rect">
+            <a:avLst/>
+          </a:prstGeom>
+          <a:noFill/>
+          <a:ln>
+            <a:noFill/>
+          </a:ln>
+        </p:spPr>
+        <p:txBody>
+          <a:bodyPr spcFirstLastPara="1" wrap="square" lIns="0" tIns="0" rIns="0" bIns="0" anchor="t" anchorCtr="0">
+            <a:spAutoFit/>
+          </a:bodyPr>
+          <a:lstStyle/>
+          <a:p>
+            <a:pPr marL="0" marR="0" lvl="0" indent="0" algn="l" rtl="0">
+              <a:lnSpc>
+                <a:spcPct val="160000"/>
+              </a:lnSpc>
+              <a:spcBef>
+                <a:spcPts val="0"/>
+              </a:spcBef>
+              <a:spcAft>
+                <a:spcPts val="0"/>
+              </a:spcAft>
+              <a:buNone/>
+            </a:pPr>
+            <a:r>
+              <a:rPr lang="en-US" sz="1125" b="0" i="0" u="none" strike="noStrike" cap="none">
+                <a:solidFill>
+                  <a:srgbClr val="A3A3A3"/>
+                </a:solidFill>
+                <a:latin typeface="Inter"/>
+                <a:ea typeface="Inter"/>
+                <a:cs typeface="Inter"/>
+                <a:sym typeface="Inter"/>
+              </a:rPr>
+              <a:t>Uniamo la convenienza delle promozioni a un forte posizionamento valoriale.</a:t>
+            </a:r>
+            <a:endParaRPr/>
+          </a:p>
+        </p:txBody>
+      </p:sp>
+      <p:sp>
+        <p:nvSpPr>
+          <p:cNvPr id="248" name="Google Shape;248;p21"/>
+          <p:cNvSpPr txBox="1"/>
+          <p:nvPr/>
+        </p:nvSpPr>
+        <p:spPr>
+          <a:xfrm>
+            <a:off x="1095375" y="3652837"/>
+            <a:ext cx="4524375" cy="428625"/>
+          </a:xfrm>
+          <a:prstGeom prst="rect">
+            <a:avLst/>
+          </a:prstGeom>
+          <a:noFill/>
+          <a:ln>
+            <a:noFill/>
+          </a:ln>
+        </p:spPr>
+        <p:txBody>
+          <a:bodyPr spcFirstLastPara="1" wrap="square" lIns="0" tIns="0" rIns="0" bIns="0" anchor="t" anchorCtr="0">
+            <a:spAutoFit/>
+          </a:bodyPr>
+          <a:lstStyle/>
+          <a:p>
+            <a:pPr marL="0" marR="0" lvl="0" indent="0" algn="l" rtl="0">
+              <a:lnSpc>
+                <a:spcPct val="149955"/>
+              </a:lnSpc>
+              <a:spcBef>
+                <a:spcPts val="0"/>
+              </a:spcBef>
+              <a:spcAft>
+                <a:spcPts val="0"/>
+              </a:spcAft>
+              <a:buNone/>
+            </a:pPr>
+            <a:r>
+              <a:rPr lang="en-US" sz="1125" b="1" i="0" u="none" strike="noStrike" cap="none">
+                <a:solidFill>
+                  <a:srgbClr val="B3B3B3"/>
+                </a:solidFill>
+                <a:latin typeface="Inter"/>
+                <a:ea typeface="Inter"/>
+                <a:cs typeface="Inter"/>
+                <a:sym typeface="Inter"/>
+              </a:rPr>
+              <a:t>Passaporto Digitale:</a:t>
+            </a:r>
+            <a:r>
+              <a:rPr lang="en-US" sz="1125" b="0" i="0" u="none" strike="noStrike" cap="none">
+                <a:solidFill>
+                  <a:srgbClr val="B3B3B3"/>
+                </a:solidFill>
+                <a:latin typeface="Inter"/>
+                <a:ea typeface="Inter"/>
+                <a:cs typeface="Inter"/>
+                <a:sym typeface="Inter"/>
+              </a:rPr>
+              <a:t> Accumulo di punti reali completando "missioni" nei nostri store fisici o ordinando online.</a:t>
+            </a:r>
+            <a:endParaRPr/>
+          </a:p>
+        </p:txBody>
+      </p:sp>
+      <p:sp>
+        <p:nvSpPr>
+          <p:cNvPr id="249" name="Google Shape;249;p21"/>
+          <p:cNvSpPr txBox="1"/>
+          <p:nvPr/>
+        </p:nvSpPr>
+        <p:spPr>
+          <a:xfrm>
+            <a:off x="1095375" y="4233862"/>
+            <a:ext cx="4524375" cy="428625"/>
+          </a:xfrm>
+          <a:prstGeom prst="rect">
+            <a:avLst/>
+          </a:prstGeom>
+          <a:noFill/>
+          <a:ln>
+            <a:noFill/>
+          </a:ln>
+        </p:spPr>
+        <p:txBody>
+          <a:bodyPr spcFirstLastPara="1" wrap="square" lIns="0" tIns="0" rIns="0" bIns="0" anchor="t" anchorCtr="0">
+            <a:spAutoFit/>
+          </a:bodyPr>
+          <a:lstStyle/>
+          <a:p>
+            <a:pPr marL="0" marR="0" lvl="0" indent="0" algn="l" rtl="0">
+              <a:lnSpc>
+                <a:spcPct val="149955"/>
+              </a:lnSpc>
+              <a:spcBef>
+                <a:spcPts val="0"/>
+              </a:spcBef>
+              <a:spcAft>
+                <a:spcPts val="0"/>
+              </a:spcAft>
+              <a:buNone/>
+            </a:pPr>
+            <a:r>
+              <a:rPr lang="en-US" sz="1125" b="1" i="0" u="none" strike="noStrike" cap="none">
+                <a:solidFill>
+                  <a:srgbClr val="B3B3B3"/>
+                </a:solidFill>
+                <a:latin typeface="Inter"/>
+                <a:ea typeface="Inter"/>
+                <a:cs typeface="Inter"/>
+                <a:sym typeface="Inter"/>
+              </a:rPr>
+              <a:t>Combo Etiche:</a:t>
+            </a:r>
+            <a:r>
+              <a:rPr lang="en-US" sz="1125" b="0" i="0" u="none" strike="noStrike" cap="none">
+                <a:solidFill>
+                  <a:srgbClr val="B3B3B3"/>
+                </a:solidFill>
+                <a:latin typeface="Inter"/>
+                <a:ea typeface="Inter"/>
+                <a:cs typeface="Inter"/>
+                <a:sym typeface="Inter"/>
+              </a:rPr>
+              <a:t> Menu speciali con parte del ricavato devoluto ad associazioni no-profit del territorio.</a:t>
+            </a:r>
+            <a:endParaRPr/>
+          </a:p>
+        </p:txBody>
+      </p:sp>
+      <p:sp>
+        <p:nvSpPr>
+          <p:cNvPr id="250" name="Google Shape;250;p21"/>
+          <p:cNvSpPr txBox="1"/>
+          <p:nvPr/>
+        </p:nvSpPr>
+        <p:spPr>
+          <a:xfrm>
+            <a:off x="1095375" y="4814887"/>
+            <a:ext cx="4524375" cy="428625"/>
+          </a:xfrm>
+          <a:prstGeom prst="rect">
+            <a:avLst/>
+          </a:prstGeom>
+          <a:noFill/>
+          <a:ln>
+            <a:noFill/>
+          </a:ln>
+        </p:spPr>
+        <p:txBody>
+          <a:bodyPr spcFirstLastPara="1" wrap="square" lIns="0" tIns="0" rIns="0" bIns="0" anchor="t" anchorCtr="0">
+            <a:spAutoFit/>
+          </a:bodyPr>
+          <a:lstStyle/>
+          <a:p>
+            <a:pPr marL="0" marR="0" lvl="0" indent="0" algn="l" rtl="0">
+              <a:lnSpc>
+                <a:spcPct val="149955"/>
+              </a:lnSpc>
+              <a:spcBef>
+                <a:spcPts val="0"/>
+              </a:spcBef>
+              <a:spcAft>
+                <a:spcPts val="0"/>
+              </a:spcAft>
+              <a:buNone/>
+            </a:pPr>
+            <a:r>
+              <a:rPr lang="en-US" sz="1125" b="1" i="0" u="none" strike="noStrike" cap="none">
+                <a:solidFill>
+                  <a:srgbClr val="B3B3B3"/>
+                </a:solidFill>
+                <a:latin typeface="Inter"/>
+                <a:ea typeface="Inter"/>
+                <a:cs typeface="Inter"/>
+                <a:sym typeface="Inter"/>
+              </a:rPr>
+              <a:t>Food Truck Network:</a:t>
+            </a:r>
+            <a:r>
+              <a:rPr lang="en-US" sz="1125" b="0" i="0" u="none" strike="noStrike" cap="none">
+                <a:solidFill>
+                  <a:srgbClr val="B3B3B3"/>
+                </a:solidFill>
+                <a:latin typeface="Inter"/>
+                <a:ea typeface="Inter"/>
+                <a:cs typeface="Inter"/>
+                <a:sym typeface="Inter"/>
+              </a:rPr>
+              <a:t> Stand itineranti nei grandi eventi per convertire i clienti fisici all'utilizzo dell'app mobile.</a:t>
+            </a:r>
+            <a:endParaRPr/>
+          </a:p>
+        </p:txBody>
+      </p:sp>
+      <p:pic>
+        <p:nvPicPr>
+          <p:cNvPr id="251" name="Google Shape;251;p21" descr="image.png"/>
+          <p:cNvPicPr preferRelativeResize="0"/>
+          <p:nvPr/>
+        </p:nvPicPr>
+        <p:blipFill rotWithShape="1">
+          <a:blip r:embed="rId5">
+            <a:alphaModFix/>
+          </a:blip>
+          <a:srcRect/>
+          <a:stretch/>
+        </p:blipFill>
+        <p:spPr>
+          <a:xfrm>
+            <a:off x="762000" y="3676650"/>
+            <a:ext cx="152400" cy="180975"/>
+          </a:xfrm>
+          <a:prstGeom prst="rect">
+            <a:avLst/>
+          </a:prstGeom>
+          <a:noFill/>
+          <a:ln>
+            <a:noFill/>
+          </a:ln>
+        </p:spPr>
+      </p:pic>
+      <p:pic>
+        <p:nvPicPr>
+          <p:cNvPr id="252" name="Google Shape;252;p21" descr="image.png"/>
+          <p:cNvPicPr preferRelativeResize="0"/>
+          <p:nvPr/>
+        </p:nvPicPr>
+        <p:blipFill rotWithShape="1">
+          <a:blip r:embed="rId6">
+            <a:alphaModFix/>
+          </a:blip>
+          <a:srcRect/>
+          <a:stretch/>
+        </p:blipFill>
+        <p:spPr>
+          <a:xfrm>
+            <a:off x="762000" y="4257675"/>
+            <a:ext cx="190500" cy="180975"/>
+          </a:xfrm>
+          <a:prstGeom prst="rect">
+            <a:avLst/>
+          </a:prstGeom>
+          <a:noFill/>
+          <a:ln>
+            <a:noFill/>
+          </a:ln>
+        </p:spPr>
+      </p:pic>
+      <p:pic>
+        <p:nvPicPr>
+          <p:cNvPr id="253" name="Google Shape;253;p21" descr="image.png"/>
+          <p:cNvPicPr preferRelativeResize="0"/>
+          <p:nvPr/>
+        </p:nvPicPr>
+        <p:blipFill rotWithShape="1">
+          <a:blip r:embed="rId7">
+            <a:alphaModFix/>
+          </a:blip>
+          <a:srcRect/>
+          <a:stretch/>
+        </p:blipFill>
+        <p:spPr>
+          <a:xfrm>
+            <a:off x="762000" y="4838700"/>
+            <a:ext cx="219075" cy="180975"/>
+          </a:xfrm>
+          <a:prstGeom prst="rect">
+            <a:avLst/>
+          </a:prstGeom>
+          <a:noFill/>
+          <a:ln>
+            <a:noFill/>
+          </a:ln>
+        </p:spPr>
+      </p:pic>
+    </p:spTree>
+  </p:cSld>
+  <p:clrMapOvr>
+    <a:masterClrMapping/>
+  </p:clrMapOvr>
+</p:sld>
+</file>
+
+<file path=ppt/slides/slide12.xml><?xml version="1.0" encoding="utf-8"?>
+<p:sld xmlns:a="http://schemas.openxmlformats.org/drawingml/2006/main" xmlns:r="http://schemas.openxmlformats.org/officeDocument/2006/relationships" xmlns:p="http://schemas.openxmlformats.org/presentationml/2006/main">
+  <p:cSld>
+    <p:bg>
+      <p:bgPr>
+        <a:solidFill>
+          <a:srgbClr val="0C0B0A"/>
+        </a:solidFill>
+        <a:effectLst/>
+      </p:bgPr>
+    </p:bg>
+    <p:spTree>
+      <p:nvGrpSpPr>
         <p:cNvPr id="1" name="Shape 257"/>
         <p:cNvGrpSpPr/>
         <p:nvPr/>
@@ -12915,7 +14233,7 @@
 </p:sld>
 </file>
 
-<file path=ppt/slides/slide11.xml><?xml version="1.0" encoding="utf-8"?>
+<file path=ppt/slides/slide13.xml><?xml version="1.0" encoding="utf-8"?>
 <p:sld xmlns:a="http://schemas.openxmlformats.org/drawingml/2006/main" xmlns:r="http://schemas.openxmlformats.org/officeDocument/2006/relationships" xmlns:p="http://schemas.openxmlformats.org/presentationml/2006/main">
   <p:cSld>
     <p:bg>
@@ -13802,7 +15120,7 @@
 </p:sld>
 </file>
 
-<file path=ppt/slides/slide12.xml><?xml version="1.0" encoding="utf-8"?>
+<file path=ppt/slides/slide14.xml><?xml version="1.0" encoding="utf-8"?>
 <p:sld xmlns:a="http://schemas.openxmlformats.org/drawingml/2006/main" xmlns:r="http://schemas.openxmlformats.org/officeDocument/2006/relationships" xmlns:p="http://schemas.openxmlformats.org/presentationml/2006/main">
   <p:cSld>
     <p:bg>
@@ -14034,6 +15352,2316 @@
 <file path=ppt/slides/slide2.xml><?xml version="1.0" encoding="utf-8"?>
 <p:sld xmlns:a="http://schemas.openxmlformats.org/drawingml/2006/main" xmlns:r="http://schemas.openxmlformats.org/officeDocument/2006/relationships" xmlns:p="http://schemas.openxmlformats.org/presentationml/2006/main">
   <p:cSld>
+    <p:spTree>
+      <p:nvGrpSpPr>
+        <p:cNvPr id="1" name="Shape 92"/>
+        <p:cNvGrpSpPr/>
+        <p:nvPr/>
+      </p:nvGrpSpPr>
+      <p:grpSpPr>
+        <a:xfrm>
+          <a:off x="0" y="0"/>
+          <a:ext cx="0" cy="0"/>
+          <a:chOff x="0" y="0"/>
+          <a:chExt cx="0" cy="0"/>
+        </a:xfrm>
+      </p:grpSpPr>
+      <p:pic>
+        <p:nvPicPr>
+          <p:cNvPr id="93" name="Google Shape;93;p14" descr="image.png"/>
+          <p:cNvPicPr preferRelativeResize="0"/>
+          <p:nvPr/>
+        </p:nvPicPr>
+        <p:blipFill rotWithShape="1">
+          <a:blip r:embed="rId3">
+            <a:alphaModFix/>
+          </a:blip>
+          <a:srcRect/>
+          <a:stretch/>
+        </p:blipFill>
+        <p:spPr>
+          <a:xfrm>
+            <a:off x="0" y="0"/>
+            <a:ext cx="12192000" cy="6858000"/>
+          </a:xfrm>
+          <a:prstGeom prst="rect">
+            <a:avLst/>
+          </a:prstGeom>
+          <a:noFill/>
+          <a:ln>
+            <a:noFill/>
+          </a:ln>
+        </p:spPr>
+      </p:pic>
+      <p:pic>
+        <p:nvPicPr>
+          <p:cNvPr id="94" name="Google Shape;94;p14" descr="image.png"/>
+          <p:cNvPicPr preferRelativeResize="0"/>
+          <p:nvPr/>
+        </p:nvPicPr>
+        <p:blipFill rotWithShape="1">
+          <a:blip r:embed="rId4">
+            <a:alphaModFix/>
+          </a:blip>
+          <a:srcRect/>
+          <a:stretch/>
+        </p:blipFill>
+        <p:spPr>
+          <a:xfrm>
+            <a:off x="771525" y="1882229"/>
+            <a:ext cx="3397299" cy="3836491"/>
+          </a:xfrm>
+          <a:prstGeom prst="rect">
+            <a:avLst/>
+          </a:prstGeom>
+          <a:noFill/>
+          <a:ln>
+            <a:noFill/>
+          </a:ln>
+        </p:spPr>
+      </p:pic>
+      <p:pic>
+        <p:nvPicPr>
+          <p:cNvPr id="95" name="Google Shape;95;p14" descr="image.png"/>
+          <p:cNvPicPr preferRelativeResize="0"/>
+          <p:nvPr/>
+        </p:nvPicPr>
+        <p:blipFill rotWithShape="1">
+          <a:blip r:embed="rId5">
+            <a:alphaModFix/>
+          </a:blip>
+          <a:srcRect/>
+          <a:stretch/>
+        </p:blipFill>
+        <p:spPr>
+          <a:xfrm>
+            <a:off x="4397424" y="1882229"/>
+            <a:ext cx="3397299" cy="3836491"/>
+          </a:xfrm>
+          <a:prstGeom prst="rect">
+            <a:avLst/>
+          </a:prstGeom>
+          <a:noFill/>
+          <a:ln>
+            <a:noFill/>
+          </a:ln>
+        </p:spPr>
+      </p:pic>
+      <p:pic>
+        <p:nvPicPr>
+          <p:cNvPr id="96" name="Google Shape;96;p14" descr="image.png"/>
+          <p:cNvPicPr preferRelativeResize="0"/>
+          <p:nvPr/>
+        </p:nvPicPr>
+        <p:blipFill rotWithShape="1">
+          <a:blip r:embed="rId6">
+            <a:alphaModFix/>
+          </a:blip>
+          <a:srcRect/>
+          <a:stretch/>
+        </p:blipFill>
+        <p:spPr>
+          <a:xfrm>
+            <a:off x="8023324" y="1882229"/>
+            <a:ext cx="3397299" cy="3836491"/>
+          </a:xfrm>
+          <a:prstGeom prst="rect">
+            <a:avLst/>
+          </a:prstGeom>
+          <a:noFill/>
+          <a:ln>
+            <a:noFill/>
+          </a:ln>
+        </p:spPr>
+      </p:pic>
+      <p:pic>
+        <p:nvPicPr>
+          <p:cNvPr id="97" name="Google Shape;97;p14" descr="image.png"/>
+          <p:cNvPicPr preferRelativeResize="0"/>
+          <p:nvPr/>
+        </p:nvPicPr>
+        <p:blipFill rotWithShape="1">
+          <a:blip r:embed="rId7">
+            <a:alphaModFix/>
+          </a:blip>
+          <a:srcRect/>
+          <a:stretch/>
+        </p:blipFill>
+        <p:spPr>
+          <a:xfrm>
+            <a:off x="1066800" y="3101429"/>
+            <a:ext cx="2806749" cy="1089570"/>
+          </a:xfrm>
+          <a:prstGeom prst="rect">
+            <a:avLst/>
+          </a:prstGeom>
+          <a:noFill/>
+          <a:ln>
+            <a:noFill/>
+          </a:ln>
+        </p:spPr>
+      </p:pic>
+      <p:pic>
+        <p:nvPicPr>
+          <p:cNvPr id="98" name="Google Shape;98;p14" descr="image.png"/>
+          <p:cNvPicPr preferRelativeResize="0"/>
+          <p:nvPr/>
+        </p:nvPicPr>
+        <p:blipFill rotWithShape="1">
+          <a:blip r:embed="rId8">
+            <a:alphaModFix/>
+          </a:blip>
+          <a:srcRect/>
+          <a:stretch/>
+        </p:blipFill>
+        <p:spPr>
+          <a:xfrm>
+            <a:off x="1066800" y="4333875"/>
+            <a:ext cx="2806749" cy="1089570"/>
+          </a:xfrm>
+          <a:prstGeom prst="rect">
+            <a:avLst/>
+          </a:prstGeom>
+          <a:noFill/>
+          <a:ln>
+            <a:noFill/>
+          </a:ln>
+        </p:spPr>
+      </p:pic>
+      <p:pic>
+        <p:nvPicPr>
+          <p:cNvPr id="99" name="Google Shape;99;p14" descr="image.png"/>
+          <p:cNvPicPr preferRelativeResize="0"/>
+          <p:nvPr/>
+        </p:nvPicPr>
+        <p:blipFill rotWithShape="1">
+          <a:blip r:embed="rId7">
+            <a:alphaModFix/>
+          </a:blip>
+          <a:srcRect/>
+          <a:stretch/>
+        </p:blipFill>
+        <p:spPr>
+          <a:xfrm>
+            <a:off x="4692699" y="3101429"/>
+            <a:ext cx="2806749" cy="1089570"/>
+          </a:xfrm>
+          <a:prstGeom prst="rect">
+            <a:avLst/>
+          </a:prstGeom>
+          <a:noFill/>
+          <a:ln>
+            <a:noFill/>
+          </a:ln>
+        </p:spPr>
+      </p:pic>
+      <p:pic>
+        <p:nvPicPr>
+          <p:cNvPr id="100" name="Google Shape;100;p14" descr="image.png"/>
+          <p:cNvPicPr preferRelativeResize="0"/>
+          <p:nvPr/>
+        </p:nvPicPr>
+        <p:blipFill rotWithShape="1">
+          <a:blip r:embed="rId8">
+            <a:alphaModFix/>
+          </a:blip>
+          <a:srcRect/>
+          <a:stretch/>
+        </p:blipFill>
+        <p:spPr>
+          <a:xfrm>
+            <a:off x="4692699" y="4333875"/>
+            <a:ext cx="2806749" cy="1089570"/>
+          </a:xfrm>
+          <a:prstGeom prst="rect">
+            <a:avLst/>
+          </a:prstGeom>
+          <a:noFill/>
+          <a:ln>
+            <a:noFill/>
+          </a:ln>
+        </p:spPr>
+      </p:pic>
+      <p:pic>
+        <p:nvPicPr>
+          <p:cNvPr id="101" name="Google Shape;101;p14" descr="image.png"/>
+          <p:cNvPicPr preferRelativeResize="0"/>
+          <p:nvPr/>
+        </p:nvPicPr>
+        <p:blipFill rotWithShape="1">
+          <a:blip r:embed="rId7">
+            <a:alphaModFix/>
+          </a:blip>
+          <a:srcRect/>
+          <a:stretch/>
+        </p:blipFill>
+        <p:spPr>
+          <a:xfrm>
+            <a:off x="8318599" y="3101429"/>
+            <a:ext cx="2806749" cy="1089570"/>
+          </a:xfrm>
+          <a:prstGeom prst="rect">
+            <a:avLst/>
+          </a:prstGeom>
+          <a:noFill/>
+          <a:ln>
+            <a:noFill/>
+          </a:ln>
+        </p:spPr>
+      </p:pic>
+      <p:pic>
+        <p:nvPicPr>
+          <p:cNvPr id="102" name="Google Shape;102;p14" descr="image.png"/>
+          <p:cNvPicPr preferRelativeResize="0"/>
+          <p:nvPr/>
+        </p:nvPicPr>
+        <p:blipFill rotWithShape="1">
+          <a:blip r:embed="rId8">
+            <a:alphaModFix/>
+          </a:blip>
+          <a:srcRect/>
+          <a:stretch/>
+        </p:blipFill>
+        <p:spPr>
+          <a:xfrm>
+            <a:off x="8318599" y="4333875"/>
+            <a:ext cx="2806749" cy="1089570"/>
+          </a:xfrm>
+          <a:prstGeom prst="rect">
+            <a:avLst/>
+          </a:prstGeom>
+          <a:noFill/>
+          <a:ln>
+            <a:noFill/>
+          </a:ln>
+        </p:spPr>
+      </p:pic>
+      <p:sp>
+        <p:nvSpPr>
+          <p:cNvPr id="103" name="Google Shape;103;p14"/>
+          <p:cNvSpPr txBox="1"/>
+          <p:nvPr/>
+        </p:nvSpPr>
+        <p:spPr>
+          <a:xfrm>
+            <a:off x="962025" y="581025"/>
+            <a:ext cx="10981372" cy="409575"/>
+          </a:xfrm>
+          <a:prstGeom prst="rect">
+            <a:avLst/>
+          </a:prstGeom>
+          <a:noFill/>
+          <a:ln>
+            <a:noFill/>
+          </a:ln>
+        </p:spPr>
+        <p:txBody>
+          <a:bodyPr spcFirstLastPara="1" wrap="square" lIns="0" tIns="0" rIns="0" bIns="0" anchor="t" anchorCtr="0">
+            <a:spAutoFit/>
+          </a:bodyPr>
+          <a:lstStyle/>
+          <a:p>
+            <a:pPr marL="0" marR="0" lvl="0" indent="0" algn="l" rtl="0">
+              <a:spcBef>
+                <a:spcPts val="0"/>
+              </a:spcBef>
+              <a:spcAft>
+                <a:spcPts val="0"/>
+              </a:spcAft>
+              <a:buNone/>
+            </a:pPr>
+            <a:r>
+              <a:rPr lang="en-US" sz="2850" b="1" i="0" u="none" strike="noStrike" cap="none">
+                <a:solidFill>
+                  <a:srgbClr val="FFFFFF"/>
+                </a:solidFill>
+                <a:latin typeface="Poppins"/>
+                <a:ea typeface="Poppins"/>
+                <a:cs typeface="Poppins"/>
+                <a:sym typeface="Poppins"/>
+              </a:rPr>
+              <a:t>SFIDE RISCONTRATE &amp; SOLUZIONI</a:t>
+            </a:r>
+            <a:endParaRPr/>
+          </a:p>
+        </p:txBody>
+      </p:sp>
+      <p:sp>
+        <p:nvSpPr>
+          <p:cNvPr id="104" name="Google Shape;104;p14"/>
+          <p:cNvSpPr/>
+          <p:nvPr/>
+        </p:nvSpPr>
+        <p:spPr>
+          <a:xfrm>
+            <a:off x="771525" y="581025"/>
+            <a:ext cx="47625" cy="409575"/>
+          </a:xfrm>
+          <a:prstGeom prst="rect">
+            <a:avLst/>
+          </a:prstGeom>
+          <a:solidFill>
+            <a:srgbClr val="FF5500"/>
+          </a:solidFill>
+          <a:ln>
+            <a:noFill/>
+          </a:ln>
+        </p:spPr>
+        <p:txBody>
+          <a:bodyPr spcFirstLastPara="1" wrap="square" lIns="91425" tIns="45700" rIns="91425" bIns="45700" anchor="ctr" anchorCtr="0">
+            <a:noAutofit/>
+          </a:bodyPr>
+          <a:lstStyle/>
+          <a:p>
+            <a:pPr marL="0" marR="0" lvl="0" indent="0" algn="ctr" rtl="0">
+              <a:spcBef>
+                <a:spcPts val="0"/>
+              </a:spcBef>
+              <a:spcAft>
+                <a:spcPts val="0"/>
+              </a:spcAft>
+              <a:buNone/>
+            </a:pPr>
+            <a:endParaRPr sz="1800" b="0" i="0" u="none" strike="noStrike" cap="none">
+              <a:solidFill>
+                <a:schemeClr val="dk1"/>
+              </a:solidFill>
+              <a:latin typeface="Calibri"/>
+              <a:ea typeface="Calibri"/>
+              <a:cs typeface="Calibri"/>
+              <a:sym typeface="Calibri"/>
+            </a:endParaRPr>
+          </a:p>
+        </p:txBody>
+      </p:sp>
+      <p:sp>
+        <p:nvSpPr>
+          <p:cNvPr id="105" name="Google Shape;105;p14"/>
+          <p:cNvSpPr txBox="1"/>
+          <p:nvPr/>
+        </p:nvSpPr>
+        <p:spPr>
+          <a:xfrm>
+            <a:off x="1066800" y="2768054"/>
+            <a:ext cx="2947087" cy="219075"/>
+          </a:xfrm>
+          <a:prstGeom prst="rect">
+            <a:avLst/>
+          </a:prstGeom>
+          <a:noFill/>
+          <a:ln>
+            <a:noFill/>
+          </a:ln>
+        </p:spPr>
+        <p:txBody>
+          <a:bodyPr spcFirstLastPara="1" wrap="square" lIns="0" tIns="0" rIns="0" bIns="0" anchor="t" anchorCtr="0">
+            <a:spAutoFit/>
+          </a:bodyPr>
+          <a:lstStyle/>
+          <a:p>
+            <a:pPr marL="0" marR="0" lvl="0" indent="0" algn="l" rtl="0">
+              <a:spcBef>
+                <a:spcPts val="0"/>
+              </a:spcBef>
+              <a:spcAft>
+                <a:spcPts val="0"/>
+              </a:spcAft>
+              <a:buNone/>
+            </a:pPr>
+            <a:r>
+              <a:rPr lang="en-US" sz="1500" b="1" i="0" u="none" strike="noStrike" cap="none" dirty="0">
+                <a:solidFill>
+                  <a:srgbClr val="FFFFFF"/>
+                </a:solidFill>
+                <a:latin typeface="Poppins"/>
+                <a:ea typeface="Poppins"/>
+                <a:cs typeface="Poppins"/>
+                <a:sym typeface="Poppins"/>
+              </a:rPr>
+              <a:t>Costi di </a:t>
+            </a:r>
+            <a:r>
+              <a:rPr lang="en-US" sz="1500" b="1" i="0" u="none" strike="noStrike" cap="none" dirty="0" err="1">
+                <a:solidFill>
+                  <a:srgbClr val="FFFFFF"/>
+                </a:solidFill>
+                <a:latin typeface="Poppins"/>
+                <a:ea typeface="Poppins"/>
+                <a:cs typeface="Poppins"/>
+                <a:sym typeface="Poppins"/>
+              </a:rPr>
+              <a:t>Consegna</a:t>
+            </a:r>
+            <a:endParaRPr dirty="0"/>
+          </a:p>
+        </p:txBody>
+      </p:sp>
+      <p:sp>
+        <p:nvSpPr>
+          <p:cNvPr id="106" name="Google Shape;106;p14"/>
+          <p:cNvSpPr txBox="1"/>
+          <p:nvPr/>
+        </p:nvSpPr>
+        <p:spPr>
+          <a:xfrm>
+            <a:off x="4692699" y="2768054"/>
+            <a:ext cx="2947087" cy="219075"/>
+          </a:xfrm>
+          <a:prstGeom prst="rect">
+            <a:avLst/>
+          </a:prstGeom>
+          <a:noFill/>
+          <a:ln>
+            <a:noFill/>
+          </a:ln>
+        </p:spPr>
+        <p:txBody>
+          <a:bodyPr spcFirstLastPara="1" wrap="square" lIns="0" tIns="0" rIns="0" bIns="0" anchor="t" anchorCtr="0">
+            <a:spAutoFit/>
+          </a:bodyPr>
+          <a:lstStyle/>
+          <a:p>
+            <a:pPr marL="0" marR="0" lvl="0" indent="0" algn="l" rtl="0">
+              <a:spcBef>
+                <a:spcPts val="0"/>
+              </a:spcBef>
+              <a:spcAft>
+                <a:spcPts val="0"/>
+              </a:spcAft>
+              <a:buNone/>
+            </a:pPr>
+            <a:r>
+              <a:rPr lang="en-US" sz="1500" b="1" i="0" u="none" strike="noStrike" cap="none" dirty="0" err="1">
+                <a:solidFill>
+                  <a:srgbClr val="FFFFFF"/>
+                </a:solidFill>
+                <a:latin typeface="Poppins"/>
+                <a:ea typeface="Poppins"/>
+                <a:cs typeface="Poppins"/>
+                <a:sym typeface="Poppins"/>
+              </a:rPr>
+              <a:t>Frizione</a:t>
+            </a:r>
+            <a:r>
+              <a:rPr lang="en-US" sz="1500" b="1" i="0" u="none" strike="noStrike" cap="none" dirty="0">
+                <a:solidFill>
+                  <a:srgbClr val="FFFFFF"/>
+                </a:solidFill>
+                <a:latin typeface="Poppins"/>
+                <a:ea typeface="Poppins"/>
+                <a:cs typeface="Poppins"/>
+                <a:sym typeface="Poppins"/>
+              </a:rPr>
+              <a:t> </a:t>
+            </a:r>
+            <a:r>
+              <a:rPr lang="en-US" sz="1500" b="1" i="0" u="none" strike="noStrike" cap="none" dirty="0" err="1">
+                <a:solidFill>
+                  <a:srgbClr val="FFFFFF"/>
+                </a:solidFill>
+                <a:latin typeface="Poppins"/>
+                <a:ea typeface="Poppins"/>
+                <a:cs typeface="Poppins"/>
+                <a:sym typeface="Poppins"/>
+              </a:rPr>
+              <a:t>d'acquisto</a:t>
+            </a:r>
+            <a:endParaRPr dirty="0"/>
+          </a:p>
+        </p:txBody>
+      </p:sp>
+      <p:sp>
+        <p:nvSpPr>
+          <p:cNvPr id="107" name="Google Shape;107;p14"/>
+          <p:cNvSpPr txBox="1"/>
+          <p:nvPr/>
+        </p:nvSpPr>
+        <p:spPr>
+          <a:xfrm>
+            <a:off x="8318599" y="2768054"/>
+            <a:ext cx="2947087" cy="219075"/>
+          </a:xfrm>
+          <a:prstGeom prst="rect">
+            <a:avLst/>
+          </a:prstGeom>
+          <a:noFill/>
+          <a:ln>
+            <a:noFill/>
+          </a:ln>
+        </p:spPr>
+        <p:txBody>
+          <a:bodyPr spcFirstLastPara="1" wrap="square" lIns="0" tIns="0" rIns="0" bIns="0" anchor="t" anchorCtr="0">
+            <a:spAutoFit/>
+          </a:bodyPr>
+          <a:lstStyle/>
+          <a:p>
+            <a:pPr marL="0" marR="0" lvl="0" indent="0" algn="l" rtl="0">
+              <a:spcBef>
+                <a:spcPts val="0"/>
+              </a:spcBef>
+              <a:spcAft>
+                <a:spcPts val="0"/>
+              </a:spcAft>
+              <a:buNone/>
+            </a:pPr>
+            <a:r>
+              <a:rPr lang="en-US" sz="1500" b="1" i="0" u="none" strike="noStrike" cap="none" dirty="0" err="1">
+                <a:solidFill>
+                  <a:srgbClr val="FFFFFF"/>
+                </a:solidFill>
+                <a:latin typeface="Poppins"/>
+                <a:ea typeface="Poppins"/>
+                <a:cs typeface="Poppins"/>
+                <a:sym typeface="Poppins"/>
+              </a:rPr>
+              <a:t>Fidelizzazione</a:t>
+            </a:r>
+            <a:r>
+              <a:rPr lang="en-US" sz="1500" b="1" i="0" u="none" strike="noStrike" cap="none" dirty="0">
+                <a:solidFill>
+                  <a:srgbClr val="FFFFFF"/>
+                </a:solidFill>
+                <a:latin typeface="Poppins"/>
+                <a:ea typeface="Poppins"/>
+                <a:cs typeface="Poppins"/>
+                <a:sym typeface="Poppins"/>
+              </a:rPr>
+              <a:t> &amp; Loop</a:t>
+            </a:r>
+            <a:endParaRPr dirty="0"/>
+          </a:p>
+        </p:txBody>
+      </p:sp>
+      <p:pic>
+        <p:nvPicPr>
+          <p:cNvPr id="108" name="Google Shape;108;p14" descr="image.png"/>
+          <p:cNvPicPr preferRelativeResize="0"/>
+          <p:nvPr/>
+        </p:nvPicPr>
+        <p:blipFill rotWithShape="1">
+          <a:blip r:embed="rId9">
+            <a:alphaModFix/>
+          </a:blip>
+          <a:srcRect/>
+          <a:stretch/>
+        </p:blipFill>
+        <p:spPr>
+          <a:xfrm>
+            <a:off x="1066800" y="2196554"/>
+            <a:ext cx="342900" cy="342900"/>
+          </a:xfrm>
+          <a:prstGeom prst="rect">
+            <a:avLst/>
+          </a:prstGeom>
+          <a:noFill/>
+          <a:ln>
+            <a:noFill/>
+          </a:ln>
+        </p:spPr>
+      </p:pic>
+      <p:sp>
+        <p:nvSpPr>
+          <p:cNvPr id="109" name="Google Shape;109;p14"/>
+          <p:cNvSpPr txBox="1"/>
+          <p:nvPr/>
+        </p:nvSpPr>
+        <p:spPr>
+          <a:xfrm>
+            <a:off x="1295400" y="3244304"/>
+            <a:ext cx="2507032" cy="161925"/>
+          </a:xfrm>
+          <a:prstGeom prst="rect">
+            <a:avLst/>
+          </a:prstGeom>
+          <a:noFill/>
+          <a:ln>
+            <a:noFill/>
+          </a:ln>
+        </p:spPr>
+        <p:txBody>
+          <a:bodyPr spcFirstLastPara="1" wrap="square" lIns="0" tIns="0" rIns="0" bIns="0" anchor="t" anchorCtr="0">
+            <a:spAutoFit/>
+          </a:bodyPr>
+          <a:lstStyle/>
+          <a:p>
+            <a:pPr marL="0" marR="0" lvl="0" indent="0" algn="l" rtl="0">
+              <a:spcBef>
+                <a:spcPts val="0"/>
+              </a:spcBef>
+              <a:spcAft>
+                <a:spcPts val="0"/>
+              </a:spcAft>
+              <a:buNone/>
+            </a:pPr>
+            <a:r>
+              <a:rPr lang="en-US" sz="1125" b="0" i="0" u="none" strike="noStrike" cap="none">
+                <a:solidFill>
+                  <a:srgbClr val="F87171"/>
+                </a:solidFill>
+                <a:latin typeface="Plus Jakarta Sans SemiBold"/>
+                <a:ea typeface="Plus Jakarta Sans SemiBold"/>
+                <a:cs typeface="Plus Jakarta Sans SemiBold"/>
+                <a:sym typeface="Plus Jakarta Sans SemiBold"/>
+              </a:rPr>
+              <a:t>PROBLEMA</a:t>
+            </a:r>
+            <a:endParaRPr/>
+          </a:p>
+        </p:txBody>
+      </p:sp>
+      <p:sp>
+        <p:nvSpPr>
+          <p:cNvPr id="110" name="Google Shape;110;p14"/>
+          <p:cNvSpPr txBox="1"/>
+          <p:nvPr/>
+        </p:nvSpPr>
+        <p:spPr>
+          <a:xfrm>
+            <a:off x="1295400" y="3453854"/>
+            <a:ext cx="2387649" cy="594270"/>
+          </a:xfrm>
+          <a:prstGeom prst="rect">
+            <a:avLst/>
+          </a:prstGeom>
+          <a:noFill/>
+          <a:ln>
+            <a:noFill/>
+          </a:ln>
+        </p:spPr>
+        <p:txBody>
+          <a:bodyPr spcFirstLastPara="1" wrap="square" lIns="0" tIns="0" rIns="0" bIns="0" anchor="t" anchorCtr="0">
+            <a:spAutoFit/>
+          </a:bodyPr>
+          <a:lstStyle/>
+          <a:p>
+            <a:pPr marL="0" marR="0" lvl="0" indent="0" algn="l" rtl="0">
+              <a:lnSpc>
+                <a:spcPct val="160000"/>
+              </a:lnSpc>
+              <a:spcBef>
+                <a:spcPts val="0"/>
+              </a:spcBef>
+              <a:spcAft>
+                <a:spcPts val="0"/>
+              </a:spcAft>
+              <a:buNone/>
+            </a:pPr>
+            <a:r>
+              <a:rPr lang="en-US" sz="975" b="0" i="0" u="none" strike="noStrike" cap="none">
+                <a:solidFill>
+                  <a:srgbClr val="E4E4E7"/>
+                </a:solidFill>
+                <a:latin typeface="Plus Jakarta Sans"/>
+                <a:ea typeface="Plus Jakarta Sans"/>
+                <a:cs typeface="Plus Jakarta Sans"/>
+                <a:sym typeface="Plus Jakarta Sans"/>
+              </a:rPr>
+              <a:t>Le piattaforme terze erodono i margini fino al 30% per transazione e limitano il controllo sulla qualità.</a:t>
+            </a:r>
+            <a:endParaRPr/>
+          </a:p>
+        </p:txBody>
+      </p:sp>
+      <p:sp>
+        <p:nvSpPr>
+          <p:cNvPr id="111" name="Google Shape;111;p14"/>
+          <p:cNvSpPr txBox="1"/>
+          <p:nvPr/>
+        </p:nvSpPr>
+        <p:spPr>
+          <a:xfrm>
+            <a:off x="1295400" y="4476750"/>
+            <a:ext cx="2507032" cy="161925"/>
+          </a:xfrm>
+          <a:prstGeom prst="rect">
+            <a:avLst/>
+          </a:prstGeom>
+          <a:noFill/>
+          <a:ln>
+            <a:noFill/>
+          </a:ln>
+        </p:spPr>
+        <p:txBody>
+          <a:bodyPr spcFirstLastPara="1" wrap="square" lIns="0" tIns="0" rIns="0" bIns="0" anchor="t" anchorCtr="0">
+            <a:spAutoFit/>
+          </a:bodyPr>
+          <a:lstStyle/>
+          <a:p>
+            <a:pPr marL="0" marR="0" lvl="0" indent="0" algn="l" rtl="0">
+              <a:spcBef>
+                <a:spcPts val="0"/>
+              </a:spcBef>
+              <a:spcAft>
+                <a:spcPts val="0"/>
+              </a:spcAft>
+              <a:buNone/>
+            </a:pPr>
+            <a:r>
+              <a:rPr lang="en-US" sz="1125" b="0" i="0" u="none" strike="noStrike" cap="none">
+                <a:solidFill>
+                  <a:srgbClr val="34D399"/>
+                </a:solidFill>
+                <a:latin typeface="Plus Jakarta Sans SemiBold"/>
+                <a:ea typeface="Plus Jakarta Sans SemiBold"/>
+                <a:cs typeface="Plus Jakarta Sans SemiBold"/>
+                <a:sym typeface="Plus Jakarta Sans SemiBold"/>
+              </a:rPr>
+              <a:t>SOLUZIONE</a:t>
+            </a:r>
+            <a:endParaRPr/>
+          </a:p>
+        </p:txBody>
+      </p:sp>
+      <p:sp>
+        <p:nvSpPr>
+          <p:cNvPr id="112" name="Google Shape;112;p14"/>
+          <p:cNvSpPr txBox="1"/>
+          <p:nvPr/>
+        </p:nvSpPr>
+        <p:spPr>
+          <a:xfrm>
+            <a:off x="1295400" y="4686300"/>
+            <a:ext cx="2387649" cy="594270"/>
+          </a:xfrm>
+          <a:prstGeom prst="rect">
+            <a:avLst/>
+          </a:prstGeom>
+          <a:noFill/>
+          <a:ln>
+            <a:noFill/>
+          </a:ln>
+        </p:spPr>
+        <p:txBody>
+          <a:bodyPr spcFirstLastPara="1" wrap="square" lIns="0" tIns="0" rIns="0" bIns="0" anchor="t" anchorCtr="0">
+            <a:spAutoFit/>
+          </a:bodyPr>
+          <a:lstStyle/>
+          <a:p>
+            <a:pPr marL="0" marR="0" lvl="0" indent="0" algn="l" rtl="0">
+              <a:lnSpc>
+                <a:spcPct val="160000"/>
+              </a:lnSpc>
+              <a:spcBef>
+                <a:spcPts val="0"/>
+              </a:spcBef>
+              <a:spcAft>
+                <a:spcPts val="0"/>
+              </a:spcAft>
+              <a:buNone/>
+            </a:pPr>
+            <a:r>
+              <a:rPr lang="en-US" sz="975" b="0" i="0" u="none" strike="noStrike" cap="none">
+                <a:solidFill>
+                  <a:srgbClr val="E4E4E7"/>
+                </a:solidFill>
+                <a:latin typeface="Plus Jakarta Sans"/>
+                <a:ea typeface="Plus Jakarta Sans"/>
+                <a:cs typeface="Plus Jakarta Sans"/>
+                <a:sym typeface="Plus Jakarta Sans"/>
+              </a:rPr>
+              <a:t>Creazione di un servizio di delivery proprietario, flotta interna e disintermediazione totale dei canali.</a:t>
+            </a:r>
+            <a:endParaRPr/>
+          </a:p>
+        </p:txBody>
+      </p:sp>
+      <p:pic>
+        <p:nvPicPr>
+          <p:cNvPr id="113" name="Google Shape;113;p14" descr="image.png"/>
+          <p:cNvPicPr preferRelativeResize="0"/>
+          <p:nvPr/>
+        </p:nvPicPr>
+        <p:blipFill rotWithShape="1">
+          <a:blip r:embed="rId10">
+            <a:alphaModFix/>
+          </a:blip>
+          <a:srcRect/>
+          <a:stretch/>
+        </p:blipFill>
+        <p:spPr>
+          <a:xfrm>
+            <a:off x="4692699" y="2196554"/>
+            <a:ext cx="390525" cy="342900"/>
+          </a:xfrm>
+          <a:prstGeom prst="rect">
+            <a:avLst/>
+          </a:prstGeom>
+          <a:noFill/>
+          <a:ln>
+            <a:noFill/>
+          </a:ln>
+        </p:spPr>
+      </p:pic>
+      <p:sp>
+        <p:nvSpPr>
+          <p:cNvPr id="114" name="Google Shape;114;p14"/>
+          <p:cNvSpPr txBox="1"/>
+          <p:nvPr/>
+        </p:nvSpPr>
+        <p:spPr>
+          <a:xfrm>
+            <a:off x="4921299" y="3244304"/>
+            <a:ext cx="2507032" cy="161925"/>
+          </a:xfrm>
+          <a:prstGeom prst="rect">
+            <a:avLst/>
+          </a:prstGeom>
+          <a:noFill/>
+          <a:ln>
+            <a:noFill/>
+          </a:ln>
+        </p:spPr>
+        <p:txBody>
+          <a:bodyPr spcFirstLastPara="1" wrap="square" lIns="0" tIns="0" rIns="0" bIns="0" anchor="t" anchorCtr="0">
+            <a:spAutoFit/>
+          </a:bodyPr>
+          <a:lstStyle/>
+          <a:p>
+            <a:pPr marL="0" marR="0" lvl="0" indent="0" algn="l" rtl="0">
+              <a:spcBef>
+                <a:spcPts val="0"/>
+              </a:spcBef>
+              <a:spcAft>
+                <a:spcPts val="0"/>
+              </a:spcAft>
+              <a:buNone/>
+            </a:pPr>
+            <a:r>
+              <a:rPr lang="en-US" sz="1125" b="0" i="0" u="none" strike="noStrike" cap="none" dirty="0">
+                <a:solidFill>
+                  <a:srgbClr val="F87171"/>
+                </a:solidFill>
+                <a:latin typeface="Plus Jakarta Sans SemiBold"/>
+                <a:ea typeface="Plus Jakarta Sans SemiBold"/>
+                <a:cs typeface="Plus Jakarta Sans SemiBold"/>
+                <a:sym typeface="Plus Jakarta Sans SemiBold"/>
+              </a:rPr>
+              <a:t>PROBLEMA</a:t>
+            </a:r>
+            <a:endParaRPr dirty="0"/>
+          </a:p>
+        </p:txBody>
+      </p:sp>
+      <p:sp>
+        <p:nvSpPr>
+          <p:cNvPr id="115" name="Google Shape;115;p14"/>
+          <p:cNvSpPr txBox="1"/>
+          <p:nvPr/>
+        </p:nvSpPr>
+        <p:spPr>
+          <a:xfrm>
+            <a:off x="4921299" y="3453854"/>
+            <a:ext cx="2387649" cy="594270"/>
+          </a:xfrm>
+          <a:prstGeom prst="rect">
+            <a:avLst/>
+          </a:prstGeom>
+          <a:noFill/>
+          <a:ln>
+            <a:noFill/>
+          </a:ln>
+        </p:spPr>
+        <p:txBody>
+          <a:bodyPr spcFirstLastPara="1" wrap="square" lIns="0" tIns="0" rIns="0" bIns="0" anchor="t" anchorCtr="0">
+            <a:spAutoFit/>
+          </a:bodyPr>
+          <a:lstStyle/>
+          <a:p>
+            <a:pPr marL="0" marR="0" lvl="0" indent="0" algn="l" rtl="0">
+              <a:lnSpc>
+                <a:spcPct val="160000"/>
+              </a:lnSpc>
+              <a:spcBef>
+                <a:spcPts val="0"/>
+              </a:spcBef>
+              <a:spcAft>
+                <a:spcPts val="0"/>
+              </a:spcAft>
+              <a:buNone/>
+            </a:pPr>
+            <a:r>
+              <a:rPr lang="en-US" sz="975" b="0" i="0" u="none" strike="noStrike" cap="none">
+                <a:solidFill>
+                  <a:srgbClr val="E4E4E7"/>
+                </a:solidFill>
+                <a:latin typeface="Plus Jakarta Sans"/>
+                <a:ea typeface="Plus Jakarta Sans"/>
+                <a:cs typeface="Plus Jakarta Sans"/>
+                <a:sym typeface="Plus Jakarta Sans"/>
+              </a:rPr>
+              <a:t>Sito precedente lento e non ottimizzato mobile, con un tasso di abbandono carrello superiore al 60%.</a:t>
+            </a:r>
+            <a:endParaRPr/>
+          </a:p>
+        </p:txBody>
+      </p:sp>
+      <p:sp>
+        <p:nvSpPr>
+          <p:cNvPr id="116" name="Google Shape;116;p14"/>
+          <p:cNvSpPr txBox="1"/>
+          <p:nvPr/>
+        </p:nvSpPr>
+        <p:spPr>
+          <a:xfrm>
+            <a:off x="4921299" y="4476750"/>
+            <a:ext cx="2507032" cy="161925"/>
+          </a:xfrm>
+          <a:prstGeom prst="rect">
+            <a:avLst/>
+          </a:prstGeom>
+          <a:noFill/>
+          <a:ln>
+            <a:noFill/>
+          </a:ln>
+        </p:spPr>
+        <p:txBody>
+          <a:bodyPr spcFirstLastPara="1" wrap="square" lIns="0" tIns="0" rIns="0" bIns="0" anchor="t" anchorCtr="0">
+            <a:spAutoFit/>
+          </a:bodyPr>
+          <a:lstStyle/>
+          <a:p>
+            <a:pPr marL="0" marR="0" lvl="0" indent="0" algn="l" rtl="0">
+              <a:spcBef>
+                <a:spcPts val="0"/>
+              </a:spcBef>
+              <a:spcAft>
+                <a:spcPts val="0"/>
+              </a:spcAft>
+              <a:buNone/>
+            </a:pPr>
+            <a:r>
+              <a:rPr lang="en-US" sz="1125" b="0" i="0" u="none" strike="noStrike" cap="none">
+                <a:solidFill>
+                  <a:srgbClr val="34D399"/>
+                </a:solidFill>
+                <a:latin typeface="Plus Jakarta Sans SemiBold"/>
+                <a:ea typeface="Plus Jakarta Sans SemiBold"/>
+                <a:cs typeface="Plus Jakarta Sans SemiBold"/>
+                <a:sym typeface="Plus Jakarta Sans SemiBold"/>
+              </a:rPr>
+              <a:t>SOLUZIONE</a:t>
+            </a:r>
+            <a:endParaRPr/>
+          </a:p>
+        </p:txBody>
+      </p:sp>
+      <p:sp>
+        <p:nvSpPr>
+          <p:cNvPr id="117" name="Google Shape;117;p14"/>
+          <p:cNvSpPr txBox="1"/>
+          <p:nvPr/>
+        </p:nvSpPr>
+        <p:spPr>
+          <a:xfrm>
+            <a:off x="4921299" y="4686300"/>
+            <a:ext cx="2387649" cy="594270"/>
+          </a:xfrm>
+          <a:prstGeom prst="rect">
+            <a:avLst/>
+          </a:prstGeom>
+          <a:noFill/>
+          <a:ln>
+            <a:noFill/>
+          </a:ln>
+        </p:spPr>
+        <p:txBody>
+          <a:bodyPr spcFirstLastPara="1" wrap="square" lIns="0" tIns="0" rIns="0" bIns="0" anchor="t" anchorCtr="0">
+            <a:spAutoFit/>
+          </a:bodyPr>
+          <a:lstStyle/>
+          <a:p>
+            <a:pPr marL="0" marR="0" lvl="0" indent="0" algn="l" rtl="0">
+              <a:lnSpc>
+                <a:spcPct val="160000"/>
+              </a:lnSpc>
+              <a:spcBef>
+                <a:spcPts val="0"/>
+              </a:spcBef>
+              <a:spcAft>
+                <a:spcPts val="0"/>
+              </a:spcAft>
+              <a:buNone/>
+            </a:pPr>
+            <a:r>
+              <a:rPr lang="en-US" sz="975" b="0" i="0" u="none" strike="noStrike" cap="none" dirty="0" err="1">
+                <a:solidFill>
+                  <a:srgbClr val="E4E4E7"/>
+                </a:solidFill>
+                <a:latin typeface="Plus Jakarta Sans"/>
+                <a:ea typeface="Plus Jakarta Sans"/>
+                <a:cs typeface="Plus Jakarta Sans"/>
+                <a:sym typeface="Plus Jakarta Sans"/>
+              </a:rPr>
+              <a:t>Riprogettazione</a:t>
+            </a:r>
+            <a:r>
+              <a:rPr lang="en-US" sz="975" b="0" i="0" u="none" strike="noStrike" cap="none" dirty="0">
+                <a:solidFill>
+                  <a:srgbClr val="E4E4E7"/>
+                </a:solidFill>
+                <a:latin typeface="Plus Jakarta Sans"/>
+                <a:ea typeface="Plus Jakarta Sans"/>
+                <a:cs typeface="Plus Jakarta Sans"/>
+                <a:sym typeface="Plus Jakarta Sans"/>
+              </a:rPr>
+              <a:t> con </a:t>
+            </a:r>
+            <a:r>
+              <a:rPr lang="en-US" sz="975" b="0" i="0" u="none" strike="noStrike" cap="none" dirty="0" err="1">
+                <a:solidFill>
+                  <a:srgbClr val="E4E4E7"/>
+                </a:solidFill>
+                <a:latin typeface="Plus Jakarta Sans"/>
+                <a:ea typeface="Plus Jakarta Sans"/>
+                <a:cs typeface="Plus Jakarta Sans"/>
+                <a:sym typeface="Plus Jakarta Sans"/>
+              </a:rPr>
+              <a:t>approccio</a:t>
+            </a:r>
+            <a:r>
+              <a:rPr lang="en-US" sz="975" b="0" i="0" u="none" strike="noStrike" cap="none" dirty="0">
+                <a:solidFill>
+                  <a:srgbClr val="E4E4E7"/>
+                </a:solidFill>
+                <a:latin typeface="Plus Jakarta Sans"/>
+                <a:ea typeface="Plus Jakarta Sans"/>
+                <a:cs typeface="Plus Jakarta Sans"/>
+                <a:sym typeface="Plus Jakarta Sans"/>
+              </a:rPr>
+              <a:t> mobile-first ultra-veloce, checkout "3-click" e </a:t>
+            </a:r>
+            <a:r>
+              <a:rPr lang="en-US" sz="975" b="0" i="0" u="none" strike="noStrike" cap="none" dirty="0" err="1">
+                <a:solidFill>
+                  <a:srgbClr val="E4E4E7"/>
+                </a:solidFill>
+                <a:latin typeface="Plus Jakarta Sans"/>
+                <a:ea typeface="Plus Jakarta Sans"/>
+                <a:cs typeface="Plus Jakarta Sans"/>
+                <a:sym typeface="Plus Jakarta Sans"/>
+              </a:rPr>
+              <a:t>pagamenti</a:t>
+            </a:r>
+            <a:r>
+              <a:rPr lang="en-US" sz="975" b="0" i="0" u="none" strike="noStrike" cap="none" dirty="0">
+                <a:solidFill>
+                  <a:srgbClr val="E4E4E7"/>
+                </a:solidFill>
+                <a:latin typeface="Plus Jakarta Sans"/>
+                <a:ea typeface="Plus Jakarta Sans"/>
+                <a:cs typeface="Plus Jakarta Sans"/>
+                <a:sym typeface="Plus Jakarta Sans"/>
+              </a:rPr>
+              <a:t> Apple/Google Pay.</a:t>
+            </a:r>
+            <a:endParaRPr dirty="0"/>
+          </a:p>
+        </p:txBody>
+      </p:sp>
+      <p:pic>
+        <p:nvPicPr>
+          <p:cNvPr id="118" name="Google Shape;118;p14" descr="image.png"/>
+          <p:cNvPicPr preferRelativeResize="0"/>
+          <p:nvPr/>
+        </p:nvPicPr>
+        <p:blipFill rotWithShape="1">
+          <a:blip r:embed="rId11">
+            <a:alphaModFix/>
+          </a:blip>
+          <a:srcRect/>
+          <a:stretch/>
+        </p:blipFill>
+        <p:spPr>
+          <a:xfrm>
+            <a:off x="8318599" y="2196554"/>
+            <a:ext cx="304800" cy="342900"/>
+          </a:xfrm>
+          <a:prstGeom prst="rect">
+            <a:avLst/>
+          </a:prstGeom>
+          <a:noFill/>
+          <a:ln>
+            <a:noFill/>
+          </a:ln>
+        </p:spPr>
+      </p:pic>
+      <p:sp>
+        <p:nvSpPr>
+          <p:cNvPr id="119" name="Google Shape;119;p14"/>
+          <p:cNvSpPr txBox="1"/>
+          <p:nvPr/>
+        </p:nvSpPr>
+        <p:spPr>
+          <a:xfrm>
+            <a:off x="8547199" y="3244304"/>
+            <a:ext cx="2507032" cy="161925"/>
+          </a:xfrm>
+          <a:prstGeom prst="rect">
+            <a:avLst/>
+          </a:prstGeom>
+          <a:noFill/>
+          <a:ln>
+            <a:noFill/>
+          </a:ln>
+        </p:spPr>
+        <p:txBody>
+          <a:bodyPr spcFirstLastPara="1" wrap="square" lIns="0" tIns="0" rIns="0" bIns="0" anchor="t" anchorCtr="0">
+            <a:spAutoFit/>
+          </a:bodyPr>
+          <a:lstStyle/>
+          <a:p>
+            <a:pPr marL="0" marR="0" lvl="0" indent="0" algn="l" rtl="0">
+              <a:spcBef>
+                <a:spcPts val="0"/>
+              </a:spcBef>
+              <a:spcAft>
+                <a:spcPts val="0"/>
+              </a:spcAft>
+              <a:buNone/>
+            </a:pPr>
+            <a:r>
+              <a:rPr lang="en-US" sz="1125" b="0" i="0" u="none" strike="noStrike" cap="none" dirty="0">
+                <a:solidFill>
+                  <a:srgbClr val="F87171"/>
+                </a:solidFill>
+                <a:latin typeface="Plus Jakarta Sans SemiBold"/>
+                <a:ea typeface="Plus Jakarta Sans SemiBold"/>
+                <a:cs typeface="Plus Jakarta Sans SemiBold"/>
+                <a:sym typeface="Plus Jakarta Sans SemiBold"/>
+              </a:rPr>
+              <a:t>PROBLEMA</a:t>
+            </a:r>
+            <a:endParaRPr dirty="0"/>
+          </a:p>
+        </p:txBody>
+      </p:sp>
+      <p:sp>
+        <p:nvSpPr>
+          <p:cNvPr id="120" name="Google Shape;120;p14"/>
+          <p:cNvSpPr txBox="1"/>
+          <p:nvPr/>
+        </p:nvSpPr>
+        <p:spPr>
+          <a:xfrm>
+            <a:off x="8547199" y="3453854"/>
+            <a:ext cx="2387649" cy="594270"/>
+          </a:xfrm>
+          <a:prstGeom prst="rect">
+            <a:avLst/>
+          </a:prstGeom>
+          <a:noFill/>
+          <a:ln>
+            <a:noFill/>
+          </a:ln>
+        </p:spPr>
+        <p:txBody>
+          <a:bodyPr spcFirstLastPara="1" wrap="square" lIns="0" tIns="0" rIns="0" bIns="0" anchor="t" anchorCtr="0">
+            <a:spAutoFit/>
+          </a:bodyPr>
+          <a:lstStyle/>
+          <a:p>
+            <a:pPr marL="0" marR="0" lvl="0" indent="0" algn="l" rtl="0">
+              <a:lnSpc>
+                <a:spcPct val="160000"/>
+              </a:lnSpc>
+              <a:spcBef>
+                <a:spcPts val="0"/>
+              </a:spcBef>
+              <a:spcAft>
+                <a:spcPts val="0"/>
+              </a:spcAft>
+              <a:buNone/>
+            </a:pPr>
+            <a:r>
+              <a:rPr lang="en-US" sz="975" b="0" i="0" u="none" strike="noStrike" cap="none">
+                <a:solidFill>
+                  <a:srgbClr val="E4E4E7"/>
+                </a:solidFill>
+                <a:latin typeface="Plus Jakarta Sans"/>
+                <a:ea typeface="Plus Jakarta Sans"/>
+                <a:cs typeface="Plus Jakarta Sans"/>
+                <a:sym typeface="Plus Jakarta Sans"/>
+              </a:rPr>
+              <a:t>I follower social visualizzano i post passivamente senza completare l'ordine sul web.</a:t>
+            </a:r>
+            <a:endParaRPr/>
+          </a:p>
+        </p:txBody>
+      </p:sp>
+      <p:sp>
+        <p:nvSpPr>
+          <p:cNvPr id="121" name="Google Shape;121;p14"/>
+          <p:cNvSpPr txBox="1"/>
+          <p:nvPr/>
+        </p:nvSpPr>
+        <p:spPr>
+          <a:xfrm>
+            <a:off x="8547199" y="4476750"/>
+            <a:ext cx="2507032" cy="161925"/>
+          </a:xfrm>
+          <a:prstGeom prst="rect">
+            <a:avLst/>
+          </a:prstGeom>
+          <a:noFill/>
+          <a:ln>
+            <a:noFill/>
+          </a:ln>
+        </p:spPr>
+        <p:txBody>
+          <a:bodyPr spcFirstLastPara="1" wrap="square" lIns="0" tIns="0" rIns="0" bIns="0" anchor="t" anchorCtr="0">
+            <a:spAutoFit/>
+          </a:bodyPr>
+          <a:lstStyle/>
+          <a:p>
+            <a:pPr marL="0" marR="0" lvl="0" indent="0" algn="l" rtl="0">
+              <a:spcBef>
+                <a:spcPts val="0"/>
+              </a:spcBef>
+              <a:spcAft>
+                <a:spcPts val="0"/>
+              </a:spcAft>
+              <a:buNone/>
+            </a:pPr>
+            <a:r>
+              <a:rPr lang="en-US" sz="1125" b="0" i="0" u="none" strike="noStrike" cap="none" dirty="0">
+                <a:solidFill>
+                  <a:srgbClr val="34D399"/>
+                </a:solidFill>
+                <a:latin typeface="Plus Jakarta Sans SemiBold"/>
+                <a:ea typeface="Plus Jakarta Sans SemiBold"/>
+                <a:cs typeface="Plus Jakarta Sans SemiBold"/>
+                <a:sym typeface="Plus Jakarta Sans SemiBold"/>
+              </a:rPr>
+              <a:t>SOLUZIONE</a:t>
+            </a:r>
+            <a:endParaRPr dirty="0"/>
+          </a:p>
+        </p:txBody>
+      </p:sp>
+      <p:sp>
+        <p:nvSpPr>
+          <p:cNvPr id="122" name="Google Shape;122;p14"/>
+          <p:cNvSpPr txBox="1"/>
+          <p:nvPr/>
+        </p:nvSpPr>
+        <p:spPr>
+          <a:xfrm>
+            <a:off x="8547199" y="4686300"/>
+            <a:ext cx="2387649" cy="594270"/>
+          </a:xfrm>
+          <a:prstGeom prst="rect">
+            <a:avLst/>
+          </a:prstGeom>
+          <a:noFill/>
+          <a:ln>
+            <a:noFill/>
+          </a:ln>
+        </p:spPr>
+        <p:txBody>
+          <a:bodyPr spcFirstLastPara="1" wrap="square" lIns="0" tIns="0" rIns="0" bIns="0" anchor="t" anchorCtr="0">
+            <a:spAutoFit/>
+          </a:bodyPr>
+          <a:lstStyle/>
+          <a:p>
+            <a:pPr marL="0" marR="0" lvl="0" indent="0" algn="l" rtl="0">
+              <a:lnSpc>
+                <a:spcPct val="160000"/>
+              </a:lnSpc>
+              <a:spcBef>
+                <a:spcPts val="0"/>
+              </a:spcBef>
+              <a:spcAft>
+                <a:spcPts val="0"/>
+              </a:spcAft>
+              <a:buNone/>
+            </a:pPr>
+            <a:r>
+              <a:rPr lang="en-US" sz="975" b="0" i="0" u="none" strike="noStrike" cap="none" dirty="0" err="1">
+                <a:solidFill>
+                  <a:srgbClr val="E4E4E7"/>
+                </a:solidFill>
+                <a:latin typeface="Plus Jakarta Sans"/>
+                <a:ea typeface="Plus Jakarta Sans"/>
+                <a:cs typeface="Plus Jakarta Sans"/>
+                <a:sym typeface="Plus Jakarta Sans"/>
+              </a:rPr>
+              <a:t>Integrazione</a:t>
+            </a:r>
+            <a:r>
+              <a:rPr lang="en-US" sz="975" b="0" i="0" u="none" strike="noStrike" cap="none" dirty="0">
+                <a:solidFill>
+                  <a:srgbClr val="E4E4E7"/>
+                </a:solidFill>
+                <a:latin typeface="Plus Jakarta Sans"/>
+                <a:ea typeface="Plus Jakarta Sans"/>
+                <a:cs typeface="Plus Jakarta Sans"/>
+                <a:sym typeface="Plus Jakarta Sans"/>
+              </a:rPr>
+              <a:t> </a:t>
+            </a:r>
+            <a:r>
+              <a:rPr lang="en-US" sz="975" b="0" i="0" u="none" strike="noStrike" cap="none" dirty="0" err="1">
+                <a:solidFill>
+                  <a:srgbClr val="E4E4E7"/>
+                </a:solidFill>
+                <a:latin typeface="Plus Jakarta Sans"/>
+                <a:ea typeface="Plus Jakarta Sans"/>
+                <a:cs typeface="Plus Jakarta Sans"/>
+                <a:sym typeface="Plus Jakarta Sans"/>
+              </a:rPr>
+              <a:t>automatica</a:t>
+            </a:r>
+            <a:r>
+              <a:rPr lang="en-US" sz="975" b="0" i="0" u="none" strike="noStrike" cap="none" dirty="0">
+                <a:solidFill>
+                  <a:srgbClr val="E4E4E7"/>
+                </a:solidFill>
+                <a:latin typeface="Plus Jakarta Sans"/>
+                <a:ea typeface="Plus Jakarta Sans"/>
+                <a:cs typeface="Plus Jakarta Sans"/>
+                <a:sym typeface="Plus Jakarta Sans"/>
+              </a:rPr>
+              <a:t> Instagram/FB Shop e chatbot </a:t>
+            </a:r>
+            <a:r>
+              <a:rPr lang="en-US" sz="975" b="0" i="0" u="none" strike="noStrike" cap="none" dirty="0" err="1">
+                <a:solidFill>
+                  <a:srgbClr val="E4E4E7"/>
+                </a:solidFill>
+                <a:latin typeface="Plus Jakarta Sans"/>
+                <a:ea typeface="Plus Jakarta Sans"/>
+                <a:cs typeface="Plus Jakarta Sans"/>
+                <a:sym typeface="Plus Jakarta Sans"/>
+              </a:rPr>
+              <a:t>intelligenti</a:t>
+            </a:r>
+            <a:r>
+              <a:rPr lang="en-US" sz="975" b="0" i="0" u="none" strike="noStrike" cap="none" dirty="0">
+                <a:solidFill>
+                  <a:srgbClr val="E4E4E7"/>
+                </a:solidFill>
+                <a:latin typeface="Plus Jakarta Sans"/>
+                <a:ea typeface="Plus Jakarta Sans"/>
+                <a:cs typeface="Plus Jakarta Sans"/>
+                <a:sym typeface="Plus Jakarta Sans"/>
+              </a:rPr>
+              <a:t> per </a:t>
+            </a:r>
+            <a:r>
+              <a:rPr lang="en-US" sz="975" b="0" i="0" u="none" strike="noStrike" cap="none" dirty="0" err="1">
+                <a:solidFill>
+                  <a:srgbClr val="E4E4E7"/>
+                </a:solidFill>
+                <a:latin typeface="Plus Jakarta Sans"/>
+                <a:ea typeface="Plus Jakarta Sans"/>
+                <a:cs typeface="Plus Jakarta Sans"/>
+                <a:sym typeface="Plus Jakarta Sans"/>
+              </a:rPr>
+              <a:t>inviare</a:t>
+            </a:r>
+            <a:r>
+              <a:rPr lang="en-US" sz="975" b="0" i="0" u="none" strike="noStrike" cap="none" dirty="0">
+                <a:solidFill>
+                  <a:srgbClr val="E4E4E7"/>
+                </a:solidFill>
+                <a:latin typeface="Plus Jakarta Sans"/>
+                <a:ea typeface="Plus Jakarta Sans"/>
+                <a:cs typeface="Plus Jakarta Sans"/>
+                <a:sym typeface="Plus Jakarta Sans"/>
+              </a:rPr>
+              <a:t> coupon </a:t>
+            </a:r>
+            <a:r>
+              <a:rPr lang="en-US" sz="975" b="0" i="0" u="none" strike="noStrike" cap="none" dirty="0" err="1">
+                <a:solidFill>
+                  <a:srgbClr val="E4E4E7"/>
+                </a:solidFill>
+                <a:latin typeface="Plus Jakarta Sans"/>
+                <a:ea typeface="Plus Jakarta Sans"/>
+                <a:cs typeface="Plus Jakarta Sans"/>
+                <a:sym typeface="Plus Jakarta Sans"/>
+              </a:rPr>
+              <a:t>diretti</a:t>
+            </a:r>
+            <a:r>
+              <a:rPr lang="en-US" sz="975" b="0" i="0" u="none" strike="noStrike" cap="none" dirty="0">
+                <a:solidFill>
+                  <a:srgbClr val="E4E4E7"/>
+                </a:solidFill>
+                <a:latin typeface="Plus Jakarta Sans"/>
+                <a:ea typeface="Plus Jakarta Sans"/>
+                <a:cs typeface="Plus Jakarta Sans"/>
+                <a:sym typeface="Plus Jakarta Sans"/>
+              </a:rPr>
+              <a:t> </a:t>
+            </a:r>
+            <a:r>
+              <a:rPr lang="en-US" sz="975" b="0" i="0" u="none" strike="noStrike" cap="none" dirty="0" err="1">
+                <a:solidFill>
+                  <a:srgbClr val="E4E4E7"/>
+                </a:solidFill>
+                <a:latin typeface="Plus Jakarta Sans"/>
+                <a:ea typeface="Plus Jakarta Sans"/>
+                <a:cs typeface="Plus Jakarta Sans"/>
+                <a:sym typeface="Plus Jakarta Sans"/>
+              </a:rPr>
+              <a:t>nei</a:t>
+            </a:r>
+            <a:r>
+              <a:rPr lang="en-US" sz="975" b="0" i="0" u="none" strike="noStrike" cap="none" dirty="0">
+                <a:solidFill>
+                  <a:srgbClr val="E4E4E7"/>
+                </a:solidFill>
+                <a:latin typeface="Plus Jakarta Sans"/>
+                <a:ea typeface="Plus Jakarta Sans"/>
+                <a:cs typeface="Plus Jakarta Sans"/>
+                <a:sym typeface="Plus Jakarta Sans"/>
+              </a:rPr>
+              <a:t> </a:t>
+            </a:r>
+            <a:r>
+              <a:rPr lang="en-US" sz="975" b="0" i="0" u="none" strike="noStrike" cap="none" dirty="0" err="1">
+                <a:solidFill>
+                  <a:srgbClr val="E4E4E7"/>
+                </a:solidFill>
+                <a:latin typeface="Plus Jakarta Sans"/>
+                <a:ea typeface="Plus Jakarta Sans"/>
+                <a:cs typeface="Plus Jakarta Sans"/>
+                <a:sym typeface="Plus Jakarta Sans"/>
+              </a:rPr>
+              <a:t>messaggi</a:t>
+            </a:r>
+            <a:r>
+              <a:rPr lang="en-US" sz="975" b="0" i="0" u="none" strike="noStrike" cap="none" dirty="0">
+                <a:solidFill>
+                  <a:srgbClr val="E4E4E7"/>
+                </a:solidFill>
+                <a:latin typeface="Plus Jakarta Sans"/>
+                <a:ea typeface="Plus Jakarta Sans"/>
+                <a:cs typeface="Plus Jakarta Sans"/>
+                <a:sym typeface="Plus Jakarta Sans"/>
+              </a:rPr>
+              <a:t> </a:t>
+            </a:r>
+            <a:r>
+              <a:rPr lang="en-US" sz="975" b="0" i="0" u="none" strike="noStrike" cap="none" dirty="0" err="1">
+                <a:solidFill>
+                  <a:srgbClr val="E4E4E7"/>
+                </a:solidFill>
+                <a:latin typeface="Plus Jakarta Sans"/>
+                <a:ea typeface="Plus Jakarta Sans"/>
+                <a:cs typeface="Plus Jakarta Sans"/>
+                <a:sym typeface="Plus Jakarta Sans"/>
+              </a:rPr>
+              <a:t>privati</a:t>
+            </a:r>
+            <a:r>
+              <a:rPr lang="en-US" sz="975" b="0" i="0" u="none" strike="noStrike" cap="none" dirty="0">
+                <a:solidFill>
+                  <a:srgbClr val="E4E4E7"/>
+                </a:solidFill>
+                <a:latin typeface="Plus Jakarta Sans"/>
+                <a:ea typeface="Plus Jakarta Sans"/>
+                <a:cs typeface="Plus Jakarta Sans"/>
+                <a:sym typeface="Plus Jakarta Sans"/>
+              </a:rPr>
+              <a:t>.</a:t>
+            </a:r>
+            <a:endParaRPr dirty="0"/>
+          </a:p>
+        </p:txBody>
+      </p:sp>
+    </p:spTree>
+  </p:cSld>
+  <p:clrMapOvr>
+    <a:masterClrMapping/>
+  </p:clrMapOvr>
+</p:sld>
+</file>
+
+<file path=ppt/slides/slide3.xml><?xml version="1.0" encoding="utf-8"?>
+<p:sld xmlns:a="http://schemas.openxmlformats.org/drawingml/2006/main" xmlns:r="http://schemas.openxmlformats.org/officeDocument/2006/relationships" xmlns:p="http://schemas.openxmlformats.org/presentationml/2006/main">
+  <p:cSld>
+    <p:spTree>
+      <p:nvGrpSpPr>
+        <p:cNvPr id="1" name="Shape 126"/>
+        <p:cNvGrpSpPr/>
+        <p:nvPr/>
+      </p:nvGrpSpPr>
+      <p:grpSpPr>
+        <a:xfrm>
+          <a:off x="0" y="0"/>
+          <a:ext cx="0" cy="0"/>
+          <a:chOff x="0" y="0"/>
+          <a:chExt cx="0" cy="0"/>
+        </a:xfrm>
+      </p:grpSpPr>
+      <p:pic>
+        <p:nvPicPr>
+          <p:cNvPr id="127" name="Google Shape;127;p15" descr="image.png"/>
+          <p:cNvPicPr preferRelativeResize="0"/>
+          <p:nvPr/>
+        </p:nvPicPr>
+        <p:blipFill rotWithShape="1">
+          <a:blip r:embed="rId3">
+            <a:alphaModFix/>
+          </a:blip>
+          <a:srcRect/>
+          <a:stretch/>
+        </p:blipFill>
+        <p:spPr>
+          <a:xfrm>
+            <a:off x="0" y="0"/>
+            <a:ext cx="12192000" cy="6858000"/>
+          </a:xfrm>
+          <a:prstGeom prst="rect">
+            <a:avLst/>
+          </a:prstGeom>
+          <a:noFill/>
+          <a:ln>
+            <a:noFill/>
+          </a:ln>
+        </p:spPr>
+      </p:pic>
+      <p:pic>
+        <p:nvPicPr>
+          <p:cNvPr id="128" name="Google Shape;128;p15" descr="image.png"/>
+          <p:cNvPicPr preferRelativeResize="0"/>
+          <p:nvPr/>
+        </p:nvPicPr>
+        <p:blipFill rotWithShape="1">
+          <a:blip r:embed="rId4">
+            <a:alphaModFix/>
+          </a:blip>
+          <a:srcRect/>
+          <a:stretch/>
+        </p:blipFill>
+        <p:spPr>
+          <a:xfrm>
+            <a:off x="771525" y="2322165"/>
+            <a:ext cx="3397299" cy="2956470"/>
+          </a:xfrm>
+          <a:prstGeom prst="rect">
+            <a:avLst/>
+          </a:prstGeom>
+          <a:noFill/>
+          <a:ln>
+            <a:noFill/>
+          </a:ln>
+        </p:spPr>
+      </p:pic>
+      <p:pic>
+        <p:nvPicPr>
+          <p:cNvPr id="129" name="Google Shape;129;p15" descr="image.png"/>
+          <p:cNvPicPr preferRelativeResize="0"/>
+          <p:nvPr/>
+        </p:nvPicPr>
+        <p:blipFill rotWithShape="1">
+          <a:blip r:embed="rId5">
+            <a:alphaModFix/>
+          </a:blip>
+          <a:srcRect/>
+          <a:stretch/>
+        </p:blipFill>
+        <p:spPr>
+          <a:xfrm>
+            <a:off x="4397424" y="2322165"/>
+            <a:ext cx="3397299" cy="2956470"/>
+          </a:xfrm>
+          <a:prstGeom prst="rect">
+            <a:avLst/>
+          </a:prstGeom>
+          <a:noFill/>
+          <a:ln>
+            <a:noFill/>
+          </a:ln>
+        </p:spPr>
+      </p:pic>
+      <p:pic>
+        <p:nvPicPr>
+          <p:cNvPr id="130" name="Google Shape;130;p15" descr="image.png"/>
+          <p:cNvPicPr preferRelativeResize="0"/>
+          <p:nvPr/>
+        </p:nvPicPr>
+        <p:blipFill rotWithShape="1">
+          <a:blip r:embed="rId6">
+            <a:alphaModFix/>
+          </a:blip>
+          <a:srcRect/>
+          <a:stretch/>
+        </p:blipFill>
+        <p:spPr>
+          <a:xfrm>
+            <a:off x="8023324" y="2322165"/>
+            <a:ext cx="3397299" cy="2956470"/>
+          </a:xfrm>
+          <a:prstGeom prst="rect">
+            <a:avLst/>
+          </a:prstGeom>
+          <a:noFill/>
+          <a:ln>
+            <a:noFill/>
+          </a:ln>
+        </p:spPr>
+      </p:pic>
+      <p:sp>
+        <p:nvSpPr>
+          <p:cNvPr id="131" name="Google Shape;131;p15"/>
+          <p:cNvSpPr txBox="1"/>
+          <p:nvPr/>
+        </p:nvSpPr>
+        <p:spPr>
+          <a:xfrm>
+            <a:off x="962025" y="581025"/>
+            <a:ext cx="10981372" cy="409575"/>
+          </a:xfrm>
+          <a:prstGeom prst="rect">
+            <a:avLst/>
+          </a:prstGeom>
+          <a:noFill/>
+          <a:ln>
+            <a:noFill/>
+          </a:ln>
+        </p:spPr>
+        <p:txBody>
+          <a:bodyPr spcFirstLastPara="1" wrap="square" lIns="0" tIns="0" rIns="0" bIns="0" anchor="t" anchorCtr="0">
+            <a:spAutoFit/>
+          </a:bodyPr>
+          <a:lstStyle/>
+          <a:p>
+            <a:pPr marL="0" marR="0" lvl="0" indent="0" algn="l" rtl="0">
+              <a:spcBef>
+                <a:spcPts val="0"/>
+              </a:spcBef>
+              <a:spcAft>
+                <a:spcPts val="0"/>
+              </a:spcAft>
+              <a:buNone/>
+            </a:pPr>
+            <a:r>
+              <a:rPr lang="en-US" sz="2850" b="1" i="0" u="none" strike="noStrike" cap="none">
+                <a:solidFill>
+                  <a:srgbClr val="FFFFFF"/>
+                </a:solidFill>
+                <a:latin typeface="Poppins"/>
+                <a:ea typeface="Poppins"/>
+                <a:cs typeface="Poppins"/>
+                <a:sym typeface="Poppins"/>
+              </a:rPr>
+              <a:t>SOLUZIONI CREATIVE OUT-OF-THE-BOX</a:t>
+            </a:r>
+            <a:endParaRPr/>
+          </a:p>
+        </p:txBody>
+      </p:sp>
+      <p:sp>
+        <p:nvSpPr>
+          <p:cNvPr id="132" name="Google Shape;132;p15"/>
+          <p:cNvSpPr/>
+          <p:nvPr/>
+        </p:nvSpPr>
+        <p:spPr>
+          <a:xfrm>
+            <a:off x="771525" y="581025"/>
+            <a:ext cx="47625" cy="409575"/>
+          </a:xfrm>
+          <a:prstGeom prst="rect">
+            <a:avLst/>
+          </a:prstGeom>
+          <a:solidFill>
+            <a:srgbClr val="FF5500"/>
+          </a:solidFill>
+          <a:ln>
+            <a:noFill/>
+          </a:ln>
+        </p:spPr>
+        <p:txBody>
+          <a:bodyPr spcFirstLastPara="1" wrap="square" lIns="91425" tIns="45700" rIns="91425" bIns="45700" anchor="ctr" anchorCtr="0">
+            <a:noAutofit/>
+          </a:bodyPr>
+          <a:lstStyle/>
+          <a:p>
+            <a:pPr marL="0" marR="0" lvl="0" indent="0" algn="ctr" rtl="0">
+              <a:spcBef>
+                <a:spcPts val="0"/>
+              </a:spcBef>
+              <a:spcAft>
+                <a:spcPts val="0"/>
+              </a:spcAft>
+              <a:buNone/>
+            </a:pPr>
+            <a:endParaRPr sz="1800" b="0" i="0" u="none" strike="noStrike" cap="none">
+              <a:solidFill>
+                <a:schemeClr val="dk1"/>
+              </a:solidFill>
+              <a:latin typeface="Calibri"/>
+              <a:ea typeface="Calibri"/>
+              <a:cs typeface="Calibri"/>
+              <a:sym typeface="Calibri"/>
+            </a:endParaRPr>
+          </a:p>
+        </p:txBody>
+      </p:sp>
+      <p:sp>
+        <p:nvSpPr>
+          <p:cNvPr id="133" name="Google Shape;133;p15"/>
+          <p:cNvSpPr txBox="1"/>
+          <p:nvPr/>
+        </p:nvSpPr>
+        <p:spPr>
+          <a:xfrm>
+            <a:off x="1066800" y="3207990"/>
+            <a:ext cx="2947087" cy="219075"/>
+          </a:xfrm>
+          <a:prstGeom prst="rect">
+            <a:avLst/>
+          </a:prstGeom>
+          <a:noFill/>
+          <a:ln>
+            <a:noFill/>
+          </a:ln>
+        </p:spPr>
+        <p:txBody>
+          <a:bodyPr spcFirstLastPara="1" wrap="square" lIns="0" tIns="0" rIns="0" bIns="0" anchor="t" anchorCtr="0">
+            <a:spAutoFit/>
+          </a:bodyPr>
+          <a:lstStyle/>
+          <a:p>
+            <a:pPr marL="0" marR="0" lvl="0" indent="0" algn="l" rtl="0">
+              <a:spcBef>
+                <a:spcPts val="0"/>
+              </a:spcBef>
+              <a:spcAft>
+                <a:spcPts val="0"/>
+              </a:spcAft>
+              <a:buNone/>
+            </a:pPr>
+            <a:r>
+              <a:rPr lang="en-US" sz="1500" b="1" i="0" u="none" strike="noStrike" cap="none">
+                <a:solidFill>
+                  <a:srgbClr val="FFFFFF"/>
+                </a:solidFill>
+                <a:latin typeface="Poppins"/>
+                <a:ea typeface="Poppins"/>
+                <a:cs typeface="Poppins"/>
+                <a:sym typeface="Poppins"/>
+              </a:rPr>
+              <a:t>Configuratore AR 3D</a:t>
+            </a:r>
+            <a:endParaRPr/>
+          </a:p>
+        </p:txBody>
+      </p:sp>
+      <p:sp>
+        <p:nvSpPr>
+          <p:cNvPr id="134" name="Google Shape;134;p15"/>
+          <p:cNvSpPr txBox="1"/>
+          <p:nvPr/>
+        </p:nvSpPr>
+        <p:spPr>
+          <a:xfrm>
+            <a:off x="1066800" y="3541365"/>
+            <a:ext cx="2806749" cy="213270"/>
+          </a:xfrm>
+          <a:prstGeom prst="rect">
+            <a:avLst/>
+          </a:prstGeom>
+          <a:noFill/>
+          <a:ln>
+            <a:noFill/>
+          </a:ln>
+        </p:spPr>
+        <p:txBody>
+          <a:bodyPr spcFirstLastPara="1" wrap="square" lIns="0" tIns="0" rIns="0" bIns="0" anchor="t" anchorCtr="0">
+            <a:spAutoFit/>
+          </a:bodyPr>
+          <a:lstStyle/>
+          <a:p>
+            <a:pPr marL="0" marR="0" lvl="0" indent="0" algn="l" rtl="0">
+              <a:lnSpc>
+                <a:spcPct val="159904"/>
+              </a:lnSpc>
+              <a:spcBef>
+                <a:spcPts val="0"/>
+              </a:spcBef>
+              <a:spcAft>
+                <a:spcPts val="0"/>
+              </a:spcAft>
+              <a:buNone/>
+            </a:pPr>
+            <a:r>
+              <a:rPr lang="en-US" sz="1050" b="0" i="0" u="none" strike="noStrike" cap="none">
+                <a:solidFill>
+                  <a:srgbClr val="FFFFFF"/>
+                </a:solidFill>
+                <a:latin typeface="Plus Jakarta Sans SemiBold"/>
+                <a:ea typeface="Plus Jakarta Sans SemiBold"/>
+                <a:cs typeface="Plus Jakarta Sans SemiBold"/>
+                <a:sym typeface="Plus Jakarta Sans SemiBold"/>
+              </a:rPr>
+              <a:t>VISUALIZZAZIONE INTERATTIVA</a:t>
+            </a:r>
+            <a:endParaRPr/>
+          </a:p>
+        </p:txBody>
+      </p:sp>
+      <p:sp>
+        <p:nvSpPr>
+          <p:cNvPr id="135" name="Google Shape;135;p15"/>
+          <p:cNvSpPr txBox="1"/>
+          <p:nvPr/>
+        </p:nvSpPr>
+        <p:spPr>
+          <a:xfrm>
+            <a:off x="1066800" y="3868935"/>
+            <a:ext cx="2806749" cy="928687"/>
+          </a:xfrm>
+          <a:prstGeom prst="rect">
+            <a:avLst/>
+          </a:prstGeom>
+          <a:noFill/>
+          <a:ln>
+            <a:noFill/>
+          </a:ln>
+        </p:spPr>
+        <p:txBody>
+          <a:bodyPr spcFirstLastPara="1" wrap="square" lIns="0" tIns="0" rIns="0" bIns="0" anchor="t" anchorCtr="0">
+            <a:spAutoFit/>
+          </a:bodyPr>
+          <a:lstStyle/>
+          <a:p>
+            <a:pPr marL="0" marR="0" lvl="0" indent="0" algn="l" rtl="0">
+              <a:lnSpc>
+                <a:spcPct val="149948"/>
+              </a:lnSpc>
+              <a:spcBef>
+                <a:spcPts val="0"/>
+              </a:spcBef>
+              <a:spcAft>
+                <a:spcPts val="0"/>
+              </a:spcAft>
+              <a:buNone/>
+            </a:pPr>
+            <a:r>
+              <a:rPr lang="en-US" sz="975" b="0" i="0" u="none" strike="noStrike" cap="none">
+                <a:solidFill>
+                  <a:srgbClr val="A1A1AA"/>
+                </a:solidFill>
+                <a:latin typeface="Plus Jakarta Sans"/>
+                <a:ea typeface="Plus Jakarta Sans"/>
+                <a:cs typeface="Plus Jakarta Sans"/>
+                <a:sym typeface="Plus Jakarta Sans"/>
+              </a:rPr>
+              <a:t>Un configuratore 3D in-app e un filtro Instagram in Realtà Aumentata (AR) per comporre virtualmente il proprio burger strato dopo strato. Risolve l'indecisione sulla scelta degli ingredienti extra, aumentando lo scontrino medio stimato del 18%.</a:t>
+            </a:r>
+            <a:endParaRPr/>
+          </a:p>
+        </p:txBody>
+      </p:sp>
+      <p:sp>
+        <p:nvSpPr>
+          <p:cNvPr id="136" name="Google Shape;136;p15"/>
+          <p:cNvSpPr txBox="1"/>
+          <p:nvPr/>
+        </p:nvSpPr>
+        <p:spPr>
+          <a:xfrm>
+            <a:off x="4692699" y="3207990"/>
+            <a:ext cx="2947087" cy="219075"/>
+          </a:xfrm>
+          <a:prstGeom prst="rect">
+            <a:avLst/>
+          </a:prstGeom>
+          <a:noFill/>
+          <a:ln>
+            <a:noFill/>
+          </a:ln>
+        </p:spPr>
+        <p:txBody>
+          <a:bodyPr spcFirstLastPara="1" wrap="square" lIns="0" tIns="0" rIns="0" bIns="0" anchor="t" anchorCtr="0">
+            <a:spAutoFit/>
+          </a:bodyPr>
+          <a:lstStyle/>
+          <a:p>
+            <a:pPr marL="0" marR="0" lvl="0" indent="0" algn="l" rtl="0">
+              <a:spcBef>
+                <a:spcPts val="0"/>
+              </a:spcBef>
+              <a:spcAft>
+                <a:spcPts val="0"/>
+              </a:spcAft>
+              <a:buNone/>
+            </a:pPr>
+            <a:r>
+              <a:rPr lang="en-US" sz="1500" b="1" i="0" u="none" strike="noStrike" cap="none">
+                <a:solidFill>
+                  <a:srgbClr val="FFFFFF"/>
+                </a:solidFill>
+                <a:latin typeface="Poppins"/>
+                <a:ea typeface="Poppins"/>
+                <a:cs typeface="Poppins"/>
+                <a:sym typeface="Poppins"/>
+              </a:rPr>
+              <a:t>"Waiting-Time" Experience</a:t>
+            </a:r>
+            <a:endParaRPr/>
+          </a:p>
+        </p:txBody>
+      </p:sp>
+      <p:sp>
+        <p:nvSpPr>
+          <p:cNvPr id="137" name="Google Shape;137;p15"/>
+          <p:cNvSpPr txBox="1"/>
+          <p:nvPr/>
+        </p:nvSpPr>
+        <p:spPr>
+          <a:xfrm>
+            <a:off x="4692699" y="3541365"/>
+            <a:ext cx="2806749" cy="213270"/>
+          </a:xfrm>
+          <a:prstGeom prst="rect">
+            <a:avLst/>
+          </a:prstGeom>
+          <a:noFill/>
+          <a:ln>
+            <a:noFill/>
+          </a:ln>
+        </p:spPr>
+        <p:txBody>
+          <a:bodyPr spcFirstLastPara="1" wrap="square" lIns="0" tIns="0" rIns="0" bIns="0" anchor="t" anchorCtr="0">
+            <a:spAutoFit/>
+          </a:bodyPr>
+          <a:lstStyle/>
+          <a:p>
+            <a:pPr marL="0" marR="0" lvl="0" indent="0" algn="l" rtl="0">
+              <a:lnSpc>
+                <a:spcPct val="159904"/>
+              </a:lnSpc>
+              <a:spcBef>
+                <a:spcPts val="0"/>
+              </a:spcBef>
+              <a:spcAft>
+                <a:spcPts val="0"/>
+              </a:spcAft>
+              <a:buNone/>
+            </a:pPr>
+            <a:r>
+              <a:rPr lang="en-US" sz="1050" b="0" i="0" u="none" strike="noStrike" cap="none">
+                <a:solidFill>
+                  <a:srgbClr val="FFFFFF"/>
+                </a:solidFill>
+                <a:latin typeface="Plus Jakarta Sans SemiBold"/>
+                <a:ea typeface="Plus Jakarta Sans SemiBold"/>
+                <a:cs typeface="Plus Jakarta Sans SemiBold"/>
+                <a:sym typeface="Plus Jakarta Sans SemiBold"/>
+              </a:rPr>
+              <a:t>INTRATTENIMENTO &amp; ENGAGEMENT</a:t>
+            </a:r>
+            <a:endParaRPr/>
+          </a:p>
+        </p:txBody>
+      </p:sp>
+      <p:sp>
+        <p:nvSpPr>
+          <p:cNvPr id="138" name="Google Shape;138;p15"/>
+          <p:cNvSpPr txBox="1"/>
+          <p:nvPr/>
+        </p:nvSpPr>
+        <p:spPr>
+          <a:xfrm>
+            <a:off x="4692699" y="3868935"/>
+            <a:ext cx="2806749" cy="1114425"/>
+          </a:xfrm>
+          <a:prstGeom prst="rect">
+            <a:avLst/>
+          </a:prstGeom>
+          <a:noFill/>
+          <a:ln>
+            <a:noFill/>
+          </a:ln>
+        </p:spPr>
+        <p:txBody>
+          <a:bodyPr spcFirstLastPara="1" wrap="square" lIns="0" tIns="0" rIns="0" bIns="0" anchor="t" anchorCtr="0">
+            <a:spAutoFit/>
+          </a:bodyPr>
+          <a:lstStyle/>
+          <a:p>
+            <a:pPr marL="0" marR="0" lvl="0" indent="0" algn="l" rtl="0">
+              <a:lnSpc>
+                <a:spcPct val="149948"/>
+              </a:lnSpc>
+              <a:spcBef>
+                <a:spcPts val="0"/>
+              </a:spcBef>
+              <a:spcAft>
+                <a:spcPts val="0"/>
+              </a:spcAft>
+              <a:buNone/>
+            </a:pPr>
+            <a:r>
+              <a:rPr lang="en-US" sz="975" b="0" i="0" u="none" strike="noStrike" cap="none">
+                <a:solidFill>
+                  <a:srgbClr val="A1A1AA"/>
+                </a:solidFill>
+                <a:latin typeface="Plus Jakarta Sans"/>
+                <a:ea typeface="Plus Jakarta Sans"/>
+                <a:cs typeface="Plus Jakarta Sans"/>
+                <a:sym typeface="Plus Jakarta Sans"/>
+              </a:rPr>
+              <a:t>Trasforma il "tempo morto" dell'attesa della consegna in un'esperienza branded. Tramite notifiche push divertenti e geo-localizzate ("Il rider sta piegando in curva", "La piastra è bollente") e una playlist Spotify esclusiva co-brandizzata sbloccata alla spedizione.</a:t>
+            </a:r>
+            <a:endParaRPr/>
+          </a:p>
+        </p:txBody>
+      </p:sp>
+      <p:sp>
+        <p:nvSpPr>
+          <p:cNvPr id="139" name="Google Shape;139;p15"/>
+          <p:cNvSpPr txBox="1"/>
+          <p:nvPr/>
+        </p:nvSpPr>
+        <p:spPr>
+          <a:xfrm>
+            <a:off x="8318599" y="3207990"/>
+            <a:ext cx="2947087" cy="219075"/>
+          </a:xfrm>
+          <a:prstGeom prst="rect">
+            <a:avLst/>
+          </a:prstGeom>
+          <a:noFill/>
+          <a:ln>
+            <a:noFill/>
+          </a:ln>
+        </p:spPr>
+        <p:txBody>
+          <a:bodyPr spcFirstLastPara="1" wrap="square" lIns="0" tIns="0" rIns="0" bIns="0" anchor="t" anchorCtr="0">
+            <a:spAutoFit/>
+          </a:bodyPr>
+          <a:lstStyle/>
+          <a:p>
+            <a:pPr marL="0" marR="0" lvl="0" indent="0" algn="l" rtl="0">
+              <a:spcBef>
+                <a:spcPts val="0"/>
+              </a:spcBef>
+              <a:spcAft>
+                <a:spcPts val="0"/>
+              </a:spcAft>
+              <a:buNone/>
+            </a:pPr>
+            <a:r>
+              <a:rPr lang="en-US" sz="1500" b="1" i="0" u="none" strike="noStrike" cap="none">
+                <a:solidFill>
+                  <a:srgbClr val="FFFFFF"/>
+                </a:solidFill>
+                <a:latin typeface="Poppins"/>
+                <a:ea typeface="Poppins"/>
+                <a:cs typeface="Poppins"/>
+                <a:sym typeface="Poppins"/>
+              </a:rPr>
+              <a:t>"Secret Menu" Gamification</a:t>
+            </a:r>
+            <a:endParaRPr/>
+          </a:p>
+        </p:txBody>
+      </p:sp>
+      <p:sp>
+        <p:nvSpPr>
+          <p:cNvPr id="140" name="Google Shape;140;p15"/>
+          <p:cNvSpPr txBox="1"/>
+          <p:nvPr/>
+        </p:nvSpPr>
+        <p:spPr>
+          <a:xfrm>
+            <a:off x="8318599" y="3541365"/>
+            <a:ext cx="2806749" cy="213270"/>
+          </a:xfrm>
+          <a:prstGeom prst="rect">
+            <a:avLst/>
+          </a:prstGeom>
+          <a:noFill/>
+          <a:ln>
+            <a:noFill/>
+          </a:ln>
+        </p:spPr>
+        <p:txBody>
+          <a:bodyPr spcFirstLastPara="1" wrap="square" lIns="0" tIns="0" rIns="0" bIns="0" anchor="t" anchorCtr="0">
+            <a:spAutoFit/>
+          </a:bodyPr>
+          <a:lstStyle/>
+          <a:p>
+            <a:pPr marL="0" marR="0" lvl="0" indent="0" algn="l" rtl="0">
+              <a:lnSpc>
+                <a:spcPct val="159904"/>
+              </a:lnSpc>
+              <a:spcBef>
+                <a:spcPts val="0"/>
+              </a:spcBef>
+              <a:spcAft>
+                <a:spcPts val="0"/>
+              </a:spcAft>
+              <a:buNone/>
+            </a:pPr>
+            <a:r>
+              <a:rPr lang="en-US" sz="1050" b="0" i="0" u="none" strike="noStrike" cap="none">
+                <a:solidFill>
+                  <a:srgbClr val="FFFFFF"/>
+                </a:solidFill>
+                <a:latin typeface="Plus Jakarta Sans SemiBold"/>
+                <a:ea typeface="Plus Jakarta Sans SemiBold"/>
+                <a:cs typeface="Plus Jakarta Sans SemiBold"/>
+                <a:sym typeface="Plus Jakarta Sans SemiBold"/>
+              </a:rPr>
+              <a:t>COLLEZIONISMO &amp; FOMO</a:t>
+            </a:r>
+            <a:endParaRPr/>
+          </a:p>
+        </p:txBody>
+      </p:sp>
+      <p:sp>
+        <p:nvSpPr>
+          <p:cNvPr id="141" name="Google Shape;141;p15"/>
+          <p:cNvSpPr txBox="1"/>
+          <p:nvPr/>
+        </p:nvSpPr>
+        <p:spPr>
+          <a:xfrm>
+            <a:off x="8318599" y="3868935"/>
+            <a:ext cx="2806749" cy="928687"/>
+          </a:xfrm>
+          <a:prstGeom prst="rect">
+            <a:avLst/>
+          </a:prstGeom>
+          <a:noFill/>
+          <a:ln>
+            <a:noFill/>
+          </a:ln>
+        </p:spPr>
+        <p:txBody>
+          <a:bodyPr spcFirstLastPara="1" wrap="square" lIns="0" tIns="0" rIns="0" bIns="0" anchor="t" anchorCtr="0">
+            <a:spAutoFit/>
+          </a:bodyPr>
+          <a:lstStyle/>
+          <a:p>
+            <a:pPr marL="0" marR="0" lvl="0" indent="0" algn="l" rtl="0">
+              <a:lnSpc>
+                <a:spcPct val="149948"/>
+              </a:lnSpc>
+              <a:spcBef>
+                <a:spcPts val="0"/>
+              </a:spcBef>
+              <a:spcAft>
+                <a:spcPts val="0"/>
+              </a:spcAft>
+              <a:buNone/>
+            </a:pPr>
+            <a:r>
+              <a:rPr lang="en-US" sz="975" b="0" i="0" u="none" strike="noStrike" cap="none">
+                <a:solidFill>
+                  <a:srgbClr val="A1A1AA"/>
+                </a:solidFill>
+                <a:latin typeface="Plus Jakarta Sans"/>
+                <a:ea typeface="Plus Jakarta Sans"/>
+                <a:cs typeface="Plus Jakarta Sans"/>
+                <a:sym typeface="Plus Jakarta Sans"/>
+              </a:rPr>
+              <a:t>Incentiva la ricorrenza degli ordini tramite ricette "segrete" a tempo limitato sbloccabili solo con il completamento di sfide digitali in-app (es. effettuare un ordine durante una serata piovosa o collezionare 3 badge con ordini di salse speciali).</a:t>
+            </a:r>
+            <a:endParaRPr/>
+          </a:p>
+        </p:txBody>
+      </p:sp>
+      <p:pic>
+        <p:nvPicPr>
+          <p:cNvPr id="142" name="Google Shape;142;p15" descr="image.png"/>
+          <p:cNvPicPr preferRelativeResize="0"/>
+          <p:nvPr/>
+        </p:nvPicPr>
+        <p:blipFill rotWithShape="1">
+          <a:blip r:embed="rId7">
+            <a:alphaModFix/>
+          </a:blip>
+          <a:srcRect/>
+          <a:stretch/>
+        </p:blipFill>
+        <p:spPr>
+          <a:xfrm>
+            <a:off x="1066800" y="2636490"/>
+            <a:ext cx="390525" cy="342900"/>
+          </a:xfrm>
+          <a:prstGeom prst="rect">
+            <a:avLst/>
+          </a:prstGeom>
+          <a:noFill/>
+          <a:ln>
+            <a:noFill/>
+          </a:ln>
+        </p:spPr>
+      </p:pic>
+      <p:pic>
+        <p:nvPicPr>
+          <p:cNvPr id="143" name="Google Shape;143;p15" descr="image.png"/>
+          <p:cNvPicPr preferRelativeResize="0"/>
+          <p:nvPr/>
+        </p:nvPicPr>
+        <p:blipFill rotWithShape="1">
+          <a:blip r:embed="rId8">
+            <a:alphaModFix/>
+          </a:blip>
+          <a:srcRect/>
+          <a:stretch/>
+        </p:blipFill>
+        <p:spPr>
+          <a:xfrm>
+            <a:off x="4692699" y="2636490"/>
+            <a:ext cx="342900" cy="342900"/>
+          </a:xfrm>
+          <a:prstGeom prst="rect">
+            <a:avLst/>
+          </a:prstGeom>
+          <a:noFill/>
+          <a:ln>
+            <a:noFill/>
+          </a:ln>
+        </p:spPr>
+      </p:pic>
+      <p:pic>
+        <p:nvPicPr>
+          <p:cNvPr id="144" name="Google Shape;144;p15" descr="image.png"/>
+          <p:cNvPicPr preferRelativeResize="0"/>
+          <p:nvPr/>
+        </p:nvPicPr>
+        <p:blipFill rotWithShape="1">
+          <a:blip r:embed="rId9">
+            <a:alphaModFix/>
+          </a:blip>
+          <a:srcRect/>
+          <a:stretch/>
+        </p:blipFill>
+        <p:spPr>
+          <a:xfrm>
+            <a:off x="8318599" y="2636490"/>
+            <a:ext cx="342900" cy="342900"/>
+          </a:xfrm>
+          <a:prstGeom prst="rect">
+            <a:avLst/>
+          </a:prstGeom>
+          <a:noFill/>
+          <a:ln>
+            <a:noFill/>
+          </a:ln>
+        </p:spPr>
+      </p:pic>
+    </p:spTree>
+  </p:cSld>
+  <p:clrMapOvr>
+    <a:masterClrMapping/>
+  </p:clrMapOvr>
+</p:sld>
+</file>
+
+<file path=ppt/slides/slide4.xml><?xml version="1.0" encoding="utf-8"?>
+<p:sld xmlns:a="http://schemas.openxmlformats.org/drawingml/2006/main" xmlns:r="http://schemas.openxmlformats.org/officeDocument/2006/relationships" xmlns:p="http://schemas.openxmlformats.org/presentationml/2006/main">
+  <p:cSld>
     <p:bg>
       <p:bgPr>
         <a:solidFill>
@@ -14971,7 +18599,7 @@
 </p:sld>
 </file>
 
-<file path=ppt/slides/slide3.xml><?xml version="1.0" encoding="utf-8"?>
+<file path=ppt/slides/slide5.xml><?xml version="1.0" encoding="utf-8"?>
 <p:sld xmlns:a="http://schemas.openxmlformats.org/drawingml/2006/main" xmlns:r="http://schemas.openxmlformats.org/officeDocument/2006/relationships" xmlns:p="http://schemas.openxmlformats.org/presentationml/2006/main">
   <p:cSld>
     <p:bg>
@@ -15496,7 +19124,7 @@
 </p:sld>
 </file>
 
-<file path=ppt/slides/slide4.xml><?xml version="1.0" encoding="utf-8"?>
+<file path=ppt/slides/slide6.xml><?xml version="1.0" encoding="utf-8"?>
 <p:sld xmlns:a="http://schemas.openxmlformats.org/drawingml/2006/main" xmlns:r="http://schemas.openxmlformats.org/officeDocument/2006/relationships" xmlns:p="http://schemas.openxmlformats.org/presentationml/2006/main">
   <p:cSld>
     <p:bg>
@@ -16279,7 +19907,7 @@
 </p:sld>
 </file>
 
-<file path=ppt/slides/slide5.xml><?xml version="1.0" encoding="utf-8"?>
+<file path=ppt/slides/slide7.xml><?xml version="1.0" encoding="utf-8"?>
 <p:sld xmlns:a="http://schemas.openxmlformats.org/drawingml/2006/main" xmlns:r="http://schemas.openxmlformats.org/officeDocument/2006/relationships" xmlns:p="http://schemas.openxmlformats.org/presentationml/2006/main">
   <p:cSld>
     <p:bg>
@@ -17118,7 +20746,7 @@
 </p:sld>
 </file>
 
-<file path=ppt/slides/slide6.xml><?xml version="1.0" encoding="utf-8"?>
+<file path=ppt/slides/slide8.xml><?xml version="1.0" encoding="utf-8"?>
 <p:sld xmlns:a="http://schemas.openxmlformats.org/drawingml/2006/main" xmlns:r="http://schemas.openxmlformats.org/officeDocument/2006/relationships" xmlns:p="http://schemas.openxmlformats.org/presentationml/2006/main">
   <p:cSld>
     <p:bg>
@@ -18319,7 +21947,7 @@
 </p:sld>
 </file>
 
-<file path=ppt/slides/slide7.xml><?xml version="1.0" encoding="utf-8"?>
+<file path=ppt/slides/slide9.xml><?xml version="1.0" encoding="utf-8"?>
 <p:sld xmlns:a="http://schemas.openxmlformats.org/drawingml/2006/main" xmlns:r="http://schemas.openxmlformats.org/officeDocument/2006/relationships" xmlns:p="http://schemas.openxmlformats.org/presentationml/2006/main">
   <p:cSld>
     <p:bg>
@@ -19382,1095 +23010,6 @@
           <a:xfrm>
             <a:off x="781050" y="4581532"/>
             <a:ext cx="171450" cy="180975"/>
-          </a:xfrm>
-          <a:prstGeom prst="rect">
-            <a:avLst/>
-          </a:prstGeom>
-          <a:noFill/>
-          <a:ln>
-            <a:noFill/>
-          </a:ln>
-        </p:spPr>
-      </p:pic>
-    </p:spTree>
-  </p:cSld>
-  <p:clrMapOvr>
-    <a:masterClrMapping/>
-  </p:clrMapOvr>
-</p:sld>
-</file>
-
-<file path=ppt/slides/slide8.xml><?xml version="1.0" encoding="utf-8"?>
-<p:sld xmlns:a="http://schemas.openxmlformats.org/drawingml/2006/main" xmlns:r="http://schemas.openxmlformats.org/officeDocument/2006/relationships" xmlns:p="http://schemas.openxmlformats.org/presentationml/2006/main">
-  <p:cSld>
-    <p:bg>
-      <p:bgPr>
-        <a:solidFill>
-          <a:srgbClr val="0C0B0A"/>
-        </a:solidFill>
-        <a:effectLst/>
-      </p:bgPr>
-    </p:bg>
-    <p:spTree>
-      <p:nvGrpSpPr>
-        <p:cNvPr id="1" name="Shape 225"/>
-        <p:cNvGrpSpPr/>
-        <p:nvPr/>
-      </p:nvGrpSpPr>
-      <p:grpSpPr>
-        <a:xfrm>
-          <a:off x="0" y="0"/>
-          <a:ext cx="0" cy="0"/>
-          <a:chOff x="0" y="0"/>
-          <a:chExt cx="0" cy="0"/>
-        </a:xfrm>
-      </p:grpSpPr>
-      <p:pic>
-        <p:nvPicPr>
-          <p:cNvPr id="226" name="Google Shape;226;p20" descr="image.png"/>
-          <p:cNvPicPr preferRelativeResize="0"/>
-          <p:nvPr/>
-        </p:nvPicPr>
-        <p:blipFill rotWithShape="1">
-          <a:blip r:embed="rId3">
-            <a:alphaModFix/>
-          </a:blip>
-          <a:srcRect/>
-          <a:stretch/>
-        </p:blipFill>
-        <p:spPr>
-          <a:xfrm>
-            <a:off x="0" y="0"/>
-            <a:ext cx="12192000" cy="6858000"/>
-          </a:xfrm>
-          <a:prstGeom prst="rect">
-            <a:avLst/>
-          </a:prstGeom>
-          <a:noFill/>
-          <a:ln>
-            <a:noFill/>
-          </a:ln>
-        </p:spPr>
-      </p:pic>
-      <p:pic>
-        <p:nvPicPr>
-          <p:cNvPr id="227" name="Google Shape;227;p20" descr="image.png"/>
-          <p:cNvPicPr preferRelativeResize="0"/>
-          <p:nvPr/>
-        </p:nvPicPr>
-        <p:blipFill rotWithShape="1">
-          <a:blip r:embed="rId4">
-            <a:alphaModFix/>
-          </a:blip>
-          <a:srcRect/>
-          <a:stretch/>
-        </p:blipFill>
-        <p:spPr>
-          <a:xfrm>
-            <a:off x="762000" y="2952005"/>
-            <a:ext cx="5191125" cy="1921668"/>
-          </a:xfrm>
-          <a:prstGeom prst="rect">
-            <a:avLst/>
-          </a:prstGeom>
-          <a:noFill/>
-          <a:ln>
-            <a:noFill/>
-          </a:ln>
-        </p:spPr>
-      </p:pic>
-      <p:pic>
-        <p:nvPicPr>
-          <p:cNvPr id="228" name="Google Shape;228;p20" descr="image.png"/>
-          <p:cNvPicPr preferRelativeResize="0"/>
-          <p:nvPr/>
-        </p:nvPicPr>
-        <p:blipFill rotWithShape="1">
-          <a:blip r:embed="rId5">
-            <a:alphaModFix/>
-          </a:blip>
-          <a:srcRect/>
-          <a:stretch/>
-        </p:blipFill>
-        <p:spPr>
-          <a:xfrm>
-            <a:off x="6238875" y="2952005"/>
-            <a:ext cx="5191125" cy="1921668"/>
-          </a:xfrm>
-          <a:prstGeom prst="rect">
-            <a:avLst/>
-          </a:prstGeom>
-          <a:noFill/>
-          <a:ln>
-            <a:noFill/>
-          </a:ln>
-        </p:spPr>
-      </p:pic>
-      <p:sp>
-        <p:nvSpPr>
-          <p:cNvPr id="229" name="Google Shape;229;p20"/>
-          <p:cNvSpPr txBox="1"/>
-          <p:nvPr/>
-        </p:nvSpPr>
-        <p:spPr>
-          <a:xfrm>
-            <a:off x="904875" y="571500"/>
-            <a:ext cx="11051381" cy="409575"/>
-          </a:xfrm>
-          <a:prstGeom prst="rect">
-            <a:avLst/>
-          </a:prstGeom>
-          <a:noFill/>
-          <a:ln>
-            <a:noFill/>
-          </a:ln>
-        </p:spPr>
-        <p:txBody>
-          <a:bodyPr spcFirstLastPara="1" wrap="square" lIns="0" tIns="0" rIns="0" bIns="0" anchor="t" anchorCtr="0">
-            <a:spAutoFit/>
-          </a:bodyPr>
-          <a:lstStyle/>
-          <a:p>
-            <a:pPr marL="0" marR="0" lvl="0" indent="0" algn="l" rtl="0">
-              <a:spcBef>
-                <a:spcPts val="0"/>
-              </a:spcBef>
-              <a:spcAft>
-                <a:spcPts val="0"/>
-              </a:spcAft>
-              <a:buNone/>
-            </a:pPr>
-            <a:r>
-              <a:rPr lang="en-US" sz="2850" b="0" i="0" u="none" strike="noStrike" cap="none">
-                <a:solidFill>
-                  <a:srgbClr val="FFFFFF"/>
-                </a:solidFill>
-                <a:latin typeface="Outfit Black"/>
-                <a:ea typeface="Outfit Black"/>
-                <a:cs typeface="Outfit Black"/>
-                <a:sym typeface="Outfit Black"/>
-              </a:rPr>
-              <a:t>MACRO 3: NUOVO SITO ATTRATTIVO</a:t>
-            </a:r>
-            <a:endParaRPr/>
-          </a:p>
-        </p:txBody>
-      </p:sp>
-      <p:sp>
-        <p:nvSpPr>
-          <p:cNvPr id="230" name="Google Shape;230;p20"/>
-          <p:cNvSpPr/>
-          <p:nvPr/>
-        </p:nvSpPr>
-        <p:spPr>
-          <a:xfrm>
-            <a:off x="762000" y="571500"/>
-            <a:ext cx="47625" cy="409575"/>
-          </a:xfrm>
-          <a:prstGeom prst="rect">
-            <a:avLst/>
-          </a:prstGeom>
-          <a:solidFill>
-            <a:srgbClr val="F95707"/>
-          </a:solidFill>
-          <a:ln>
-            <a:noFill/>
-          </a:ln>
-        </p:spPr>
-        <p:txBody>
-          <a:bodyPr spcFirstLastPara="1" wrap="square" lIns="91425" tIns="45700" rIns="91425" bIns="45700" anchor="ctr" anchorCtr="0">
-            <a:noAutofit/>
-          </a:bodyPr>
-          <a:lstStyle/>
-          <a:p>
-            <a:pPr marL="0" marR="0" lvl="0" indent="0" algn="ctr" rtl="0">
-              <a:spcBef>
-                <a:spcPts val="0"/>
-              </a:spcBef>
-              <a:spcAft>
-                <a:spcPts val="0"/>
-              </a:spcAft>
-              <a:buNone/>
-            </a:pPr>
-            <a:endParaRPr sz="1800" b="0" i="0" u="none" strike="noStrike" cap="none">
-              <a:solidFill>
-                <a:schemeClr val="dk1"/>
-              </a:solidFill>
-              <a:latin typeface="Calibri"/>
-              <a:ea typeface="Calibri"/>
-              <a:cs typeface="Calibri"/>
-              <a:sym typeface="Calibri"/>
-            </a:endParaRPr>
-          </a:p>
-        </p:txBody>
-      </p:sp>
-      <p:sp>
-        <p:nvSpPr>
-          <p:cNvPr id="231" name="Google Shape;231;p20"/>
-          <p:cNvSpPr txBox="1"/>
-          <p:nvPr/>
-        </p:nvSpPr>
-        <p:spPr>
-          <a:xfrm>
-            <a:off x="762000" y="1057275"/>
-            <a:ext cx="10668000" cy="243780"/>
-          </a:xfrm>
-          <a:prstGeom prst="rect">
-            <a:avLst/>
-          </a:prstGeom>
-          <a:noFill/>
-          <a:ln>
-            <a:noFill/>
-          </a:ln>
-        </p:spPr>
-        <p:txBody>
-          <a:bodyPr spcFirstLastPara="1" wrap="square" lIns="0" tIns="0" rIns="0" bIns="0" anchor="t" anchorCtr="0">
-            <a:spAutoFit/>
-          </a:bodyPr>
-          <a:lstStyle/>
-          <a:p>
-            <a:pPr marL="0" marR="0" lvl="0" indent="0" algn="l" rtl="0">
-              <a:lnSpc>
-                <a:spcPct val="160000"/>
-              </a:lnSpc>
-              <a:spcBef>
-                <a:spcPts val="0"/>
-              </a:spcBef>
-              <a:spcAft>
-                <a:spcPts val="0"/>
-              </a:spcAft>
-              <a:buNone/>
-            </a:pPr>
-            <a:r>
-              <a:rPr lang="en-US" sz="1200" b="0" i="0" u="none" strike="noStrike" cap="none">
-                <a:solidFill>
-                  <a:srgbClr val="A3A3A3"/>
-                </a:solidFill>
-                <a:latin typeface="Inter"/>
-                <a:ea typeface="Inter"/>
-                <a:cs typeface="Inter"/>
-                <a:sym typeface="Inter"/>
-              </a:rPr>
-              <a:t>Progettato specificamente per le esigenze del mobile web e dell'instant ordering.</a:t>
-            </a:r>
-            <a:endParaRPr/>
-          </a:p>
-        </p:txBody>
-      </p:sp>
-      <p:sp>
-        <p:nvSpPr>
-          <p:cNvPr id="232" name="Google Shape;232;p20"/>
-          <p:cNvSpPr txBox="1"/>
-          <p:nvPr/>
-        </p:nvSpPr>
-        <p:spPr>
-          <a:xfrm>
-            <a:off x="1104900" y="3294905"/>
-            <a:ext cx="4730591" cy="219075"/>
-          </a:xfrm>
-          <a:prstGeom prst="rect">
-            <a:avLst/>
-          </a:prstGeom>
-          <a:noFill/>
-          <a:ln>
-            <a:noFill/>
-          </a:ln>
-        </p:spPr>
-        <p:txBody>
-          <a:bodyPr spcFirstLastPara="1" wrap="square" lIns="266700" tIns="0" rIns="0" bIns="0" anchor="t" anchorCtr="0">
-            <a:spAutoFit/>
-          </a:bodyPr>
-          <a:lstStyle/>
-          <a:p>
-            <a:pPr marL="0" marR="0" lvl="0" indent="0" algn="l" rtl="0">
-              <a:spcBef>
-                <a:spcPts val="0"/>
-              </a:spcBef>
-              <a:spcAft>
-                <a:spcPts val="0"/>
-              </a:spcAft>
-              <a:buNone/>
-            </a:pPr>
-            <a:r>
-              <a:rPr lang="en-US" sz="1500" b="0" i="0" u="none" strike="noStrike" cap="none">
-                <a:solidFill>
-                  <a:srgbClr val="F95707"/>
-                </a:solidFill>
-                <a:latin typeface="Outfit ExtraBold"/>
-                <a:ea typeface="Outfit ExtraBold"/>
-                <a:cs typeface="Outfit ExtraBold"/>
-                <a:sym typeface="Outfit ExtraBold"/>
-              </a:rPr>
-              <a:t>VELOCITÀ E PERFORMANCE</a:t>
-            </a:r>
-            <a:endParaRPr/>
-          </a:p>
-        </p:txBody>
-      </p:sp>
-      <p:sp>
-        <p:nvSpPr>
-          <p:cNvPr id="233" name="Google Shape;233;p20"/>
-          <p:cNvSpPr txBox="1"/>
-          <p:nvPr/>
-        </p:nvSpPr>
-        <p:spPr>
-          <a:xfrm>
-            <a:off x="1104900" y="3647330"/>
-            <a:ext cx="4505325" cy="883443"/>
-          </a:xfrm>
-          <a:prstGeom prst="rect">
-            <a:avLst/>
-          </a:prstGeom>
-          <a:noFill/>
-          <a:ln>
-            <a:noFill/>
-          </a:ln>
-        </p:spPr>
-        <p:txBody>
-          <a:bodyPr spcFirstLastPara="1" wrap="square" lIns="0" tIns="0" rIns="0" bIns="0" anchor="t" anchorCtr="0">
-            <a:spAutoFit/>
-          </a:bodyPr>
-          <a:lstStyle/>
-          <a:p>
-            <a:pPr marL="0" marR="0" lvl="0" indent="0" algn="l" rtl="0">
-              <a:lnSpc>
-                <a:spcPct val="159981"/>
-              </a:lnSpc>
-              <a:spcBef>
-                <a:spcPts val="0"/>
-              </a:spcBef>
-              <a:spcAft>
-                <a:spcPts val="0"/>
-              </a:spcAft>
-              <a:buNone/>
-            </a:pPr>
-            <a:r>
-              <a:rPr lang="en-US" sz="1087" b="0" i="0" u="none" strike="noStrike" cap="none">
-                <a:solidFill>
-                  <a:srgbClr val="A3A3A3"/>
-                </a:solidFill>
-                <a:latin typeface="Inter"/>
-                <a:ea typeface="Inter"/>
-                <a:cs typeface="Inter"/>
-                <a:sym typeface="Inter"/>
-              </a:rPr>
-              <a:t>Il nuovo portale web è leggerissimo e ottimizzato per caricarsi istantaneamente anche sotto copertura di rete minima. Riduzione dei tempi di caricamento del 65% rispetto alla versione precedente, abbattendo il tasso di abbandono del carrello.</a:t>
-            </a:r>
-            <a:endParaRPr/>
-          </a:p>
-        </p:txBody>
-      </p:sp>
-      <p:sp>
-        <p:nvSpPr>
-          <p:cNvPr id="234" name="Google Shape;234;p20"/>
-          <p:cNvSpPr txBox="1"/>
-          <p:nvPr/>
-        </p:nvSpPr>
-        <p:spPr>
-          <a:xfrm>
-            <a:off x="6581775" y="3294905"/>
-            <a:ext cx="4730591" cy="219075"/>
-          </a:xfrm>
-          <a:prstGeom prst="rect">
-            <a:avLst/>
-          </a:prstGeom>
-          <a:noFill/>
-          <a:ln>
-            <a:noFill/>
-          </a:ln>
-        </p:spPr>
-        <p:txBody>
-          <a:bodyPr spcFirstLastPara="1" wrap="square" lIns="238125" tIns="0" rIns="0" bIns="0" anchor="t" anchorCtr="0">
-            <a:spAutoFit/>
-          </a:bodyPr>
-          <a:lstStyle/>
-          <a:p>
-            <a:pPr marL="0" marR="0" lvl="0" indent="0" algn="l" rtl="0">
-              <a:spcBef>
-                <a:spcPts val="0"/>
-              </a:spcBef>
-              <a:spcAft>
-                <a:spcPts val="0"/>
-              </a:spcAft>
-              <a:buNone/>
-            </a:pPr>
-            <a:r>
-              <a:rPr lang="en-US" sz="1500" b="0" i="0" u="none" strike="noStrike" cap="none">
-                <a:solidFill>
-                  <a:srgbClr val="F95707"/>
-                </a:solidFill>
-                <a:latin typeface="Outfit ExtraBold"/>
-                <a:ea typeface="Outfit ExtraBold"/>
-                <a:cs typeface="Outfit ExtraBold"/>
-                <a:sym typeface="Outfit ExtraBold"/>
-              </a:rPr>
-              <a:t>APPROCCIO MOBILE-FIRST</a:t>
-            </a:r>
-            <a:endParaRPr/>
-          </a:p>
-        </p:txBody>
-      </p:sp>
-      <p:sp>
-        <p:nvSpPr>
-          <p:cNvPr id="235" name="Google Shape;235;p20"/>
-          <p:cNvSpPr txBox="1"/>
-          <p:nvPr/>
-        </p:nvSpPr>
-        <p:spPr>
-          <a:xfrm>
-            <a:off x="6581775" y="3647330"/>
-            <a:ext cx="4505325" cy="883443"/>
-          </a:xfrm>
-          <a:prstGeom prst="rect">
-            <a:avLst/>
-          </a:prstGeom>
-          <a:noFill/>
-          <a:ln>
-            <a:noFill/>
-          </a:ln>
-        </p:spPr>
-        <p:txBody>
-          <a:bodyPr spcFirstLastPara="1" wrap="square" lIns="0" tIns="0" rIns="0" bIns="0" anchor="t" anchorCtr="0">
-            <a:spAutoFit/>
-          </a:bodyPr>
-          <a:lstStyle/>
-          <a:p>
-            <a:pPr marL="0" marR="0" lvl="0" indent="0" algn="l" rtl="0">
-              <a:lnSpc>
-                <a:spcPct val="159981"/>
-              </a:lnSpc>
-              <a:spcBef>
-                <a:spcPts val="0"/>
-              </a:spcBef>
-              <a:spcAft>
-                <a:spcPts val="0"/>
-              </a:spcAft>
-              <a:buNone/>
-            </a:pPr>
-            <a:r>
-              <a:rPr lang="en-US" sz="1087" b="0" i="0" u="none" strike="noStrike" cap="none">
-                <a:solidFill>
-                  <a:srgbClr val="A3A3A3"/>
-                </a:solidFill>
-                <a:latin typeface="Inter"/>
-                <a:ea typeface="Inter"/>
-                <a:cs typeface="Inter"/>
-                <a:sym typeface="Inter"/>
-              </a:rPr>
-              <a:t>Ogni elemento grafico è pensato per gli schermi verticali degli smartphone. Menu interattivo con foto HD a pieno schermo, navigazione tramite swipe e totale integrazione dinamica con il database centrale dell'app mobile.</a:t>
-            </a:r>
-            <a:endParaRPr/>
-          </a:p>
-        </p:txBody>
-      </p:sp>
-      <p:pic>
-        <p:nvPicPr>
-          <p:cNvPr id="236" name="Google Shape;236;p20" descr="image.png"/>
-          <p:cNvPicPr preferRelativeResize="0"/>
-          <p:nvPr/>
-        </p:nvPicPr>
-        <p:blipFill rotWithShape="1">
-          <a:blip r:embed="rId6">
-            <a:alphaModFix/>
-          </a:blip>
-          <a:srcRect/>
-          <a:stretch/>
-        </p:blipFill>
-        <p:spPr>
-          <a:xfrm>
-            <a:off x="1104900" y="3304430"/>
-            <a:ext cx="171450" cy="190500"/>
-          </a:xfrm>
-          <a:prstGeom prst="rect">
-            <a:avLst/>
-          </a:prstGeom>
-          <a:noFill/>
-          <a:ln>
-            <a:noFill/>
-          </a:ln>
-        </p:spPr>
-      </p:pic>
-      <p:pic>
-        <p:nvPicPr>
-          <p:cNvPr id="237" name="Google Shape;237;p20" descr="image.png"/>
-          <p:cNvPicPr preferRelativeResize="0"/>
-          <p:nvPr/>
-        </p:nvPicPr>
-        <p:blipFill rotWithShape="1">
-          <a:blip r:embed="rId7">
-            <a:alphaModFix/>
-          </a:blip>
-          <a:srcRect/>
-          <a:stretch/>
-        </p:blipFill>
-        <p:spPr>
-          <a:xfrm>
-            <a:off x="6581775" y="3304430"/>
-            <a:ext cx="142875" cy="190500"/>
-          </a:xfrm>
-          <a:prstGeom prst="rect">
-            <a:avLst/>
-          </a:prstGeom>
-          <a:noFill/>
-          <a:ln>
-            <a:noFill/>
-          </a:ln>
-        </p:spPr>
-      </p:pic>
-    </p:spTree>
-  </p:cSld>
-  <p:clrMapOvr>
-    <a:masterClrMapping/>
-  </p:clrMapOvr>
-</p:sld>
-</file>
-
-<file path=ppt/slides/slide9.xml><?xml version="1.0" encoding="utf-8"?>
-<p:sld xmlns:a="http://schemas.openxmlformats.org/drawingml/2006/main" xmlns:r="http://schemas.openxmlformats.org/officeDocument/2006/relationships" xmlns:p="http://schemas.openxmlformats.org/presentationml/2006/main">
-  <p:cSld>
-    <p:bg>
-      <p:bgPr>
-        <a:solidFill>
-          <a:srgbClr val="0C0B0A"/>
-        </a:solidFill>
-        <a:effectLst/>
-      </p:bgPr>
-    </p:bg>
-    <p:spTree>
-      <p:nvGrpSpPr>
-        <p:cNvPr id="1" name="Shape 241"/>
-        <p:cNvGrpSpPr/>
-        <p:nvPr/>
-      </p:nvGrpSpPr>
-      <p:grpSpPr>
-        <a:xfrm>
-          <a:off x="0" y="0"/>
-          <a:ext cx="0" cy="0"/>
-          <a:chOff x="0" y="0"/>
-          <a:chExt cx="0" cy="0"/>
-        </a:xfrm>
-      </p:grpSpPr>
-      <p:pic>
-        <p:nvPicPr>
-          <p:cNvPr id="242" name="Google Shape;242;p21" descr="image.png"/>
-          <p:cNvPicPr preferRelativeResize="0"/>
-          <p:nvPr/>
-        </p:nvPicPr>
-        <p:blipFill rotWithShape="1">
-          <a:blip r:embed="rId3">
-            <a:alphaModFix/>
-          </a:blip>
-          <a:srcRect/>
-          <a:stretch/>
-        </p:blipFill>
-        <p:spPr>
-          <a:xfrm>
-            <a:off x="0" y="0"/>
-            <a:ext cx="12192000" cy="6858000"/>
-          </a:xfrm>
-          <a:prstGeom prst="rect">
-            <a:avLst/>
-          </a:prstGeom>
-          <a:noFill/>
-          <a:ln>
-            <a:noFill/>
-          </a:ln>
-        </p:spPr>
-      </p:pic>
-      <p:sp>
-        <p:nvSpPr>
-          <p:cNvPr id="243" name="Google Shape;243;p21"/>
-          <p:cNvSpPr txBox="1"/>
-          <p:nvPr/>
-        </p:nvSpPr>
-        <p:spPr>
-          <a:xfrm>
-            <a:off x="904875" y="571500"/>
-            <a:ext cx="4950618" cy="819150"/>
-          </a:xfrm>
-          <a:prstGeom prst="rect">
-            <a:avLst/>
-          </a:prstGeom>
-          <a:noFill/>
-          <a:ln>
-            <a:noFill/>
-          </a:ln>
-        </p:spPr>
-        <p:txBody>
-          <a:bodyPr spcFirstLastPara="1" wrap="square" lIns="0" tIns="0" rIns="0" bIns="0" anchor="t" anchorCtr="0">
-            <a:spAutoFit/>
-          </a:bodyPr>
-          <a:lstStyle/>
-          <a:p>
-            <a:pPr marL="0" marR="0" lvl="0" indent="0" algn="l" rtl="0">
-              <a:spcBef>
-                <a:spcPts val="0"/>
-              </a:spcBef>
-              <a:spcAft>
-                <a:spcPts val="0"/>
-              </a:spcAft>
-              <a:buNone/>
-            </a:pPr>
-            <a:r>
-              <a:rPr lang="en-US" sz="2850" b="0" i="0" u="none" strike="noStrike" cap="none">
-                <a:solidFill>
-                  <a:srgbClr val="FFFFFF"/>
-                </a:solidFill>
-                <a:latin typeface="Outfit Black"/>
-                <a:ea typeface="Outfit Black"/>
-                <a:cs typeface="Outfit Black"/>
-                <a:sym typeface="Outfit Black"/>
-              </a:rPr>
-              <a:t>MACRO 4: PROMO &amp; FILOSOFIA</a:t>
-            </a:r>
-            <a:endParaRPr/>
-          </a:p>
-        </p:txBody>
-      </p:sp>
-      <p:sp>
-        <p:nvSpPr>
-          <p:cNvPr id="244" name="Google Shape;244;p21"/>
-          <p:cNvSpPr/>
-          <p:nvPr/>
-        </p:nvSpPr>
-        <p:spPr>
-          <a:xfrm>
-            <a:off x="762000" y="571500"/>
-            <a:ext cx="47625" cy="819150"/>
-          </a:xfrm>
-          <a:prstGeom prst="rect">
-            <a:avLst/>
-          </a:prstGeom>
-          <a:solidFill>
-            <a:srgbClr val="F95707"/>
-          </a:solidFill>
-          <a:ln>
-            <a:noFill/>
-          </a:ln>
-        </p:spPr>
-        <p:txBody>
-          <a:bodyPr spcFirstLastPara="1" wrap="square" lIns="91425" tIns="45700" rIns="91425" bIns="45700" anchor="ctr" anchorCtr="0">
-            <a:noAutofit/>
-          </a:bodyPr>
-          <a:lstStyle/>
-          <a:p>
-            <a:pPr marL="0" marR="0" lvl="0" indent="0" algn="ctr" rtl="0">
-              <a:spcBef>
-                <a:spcPts val="0"/>
-              </a:spcBef>
-              <a:spcAft>
-                <a:spcPts val="0"/>
-              </a:spcAft>
-              <a:buNone/>
-            </a:pPr>
-            <a:endParaRPr sz="1800" b="0" i="0" u="none" strike="noStrike" cap="none">
-              <a:solidFill>
-                <a:schemeClr val="dk1"/>
-              </a:solidFill>
-              <a:latin typeface="Calibri"/>
-              <a:ea typeface="Calibri"/>
-              <a:cs typeface="Calibri"/>
-              <a:sym typeface="Calibri"/>
-            </a:endParaRPr>
-          </a:p>
-        </p:txBody>
-      </p:sp>
-      <p:pic>
-        <p:nvPicPr>
-          <p:cNvPr id="245" name="Google Shape;245;p21" descr="image.png"/>
-          <p:cNvPicPr preferRelativeResize="0"/>
-          <p:nvPr/>
-        </p:nvPicPr>
-        <p:blipFill rotWithShape="1">
-          <a:blip r:embed="rId4">
-            <a:alphaModFix/>
-          </a:blip>
-          <a:srcRect/>
-          <a:stretch/>
-        </p:blipFill>
-        <p:spPr>
-          <a:xfrm>
-            <a:off x="6096000" y="0"/>
-            <a:ext cx="6096000" cy="6858000"/>
-          </a:xfrm>
-          <a:prstGeom prst="rect">
-            <a:avLst/>
-          </a:prstGeom>
-          <a:noFill/>
-          <a:ln>
-            <a:noFill/>
-          </a:ln>
-        </p:spPr>
-      </p:pic>
-      <p:sp>
-        <p:nvSpPr>
-          <p:cNvPr id="246" name="Google Shape;246;p21"/>
-          <p:cNvSpPr txBox="1"/>
-          <p:nvPr/>
-        </p:nvSpPr>
-        <p:spPr>
-          <a:xfrm>
-            <a:off x="762000" y="2624137"/>
-            <a:ext cx="5100637" cy="266700"/>
-          </a:xfrm>
-          <a:prstGeom prst="rect">
-            <a:avLst/>
-          </a:prstGeom>
-          <a:noFill/>
-          <a:ln>
-            <a:noFill/>
-          </a:ln>
-        </p:spPr>
-        <p:txBody>
-          <a:bodyPr spcFirstLastPara="1" wrap="square" lIns="0" tIns="0" rIns="0" bIns="0" anchor="t" anchorCtr="0">
-            <a:spAutoFit/>
-          </a:bodyPr>
-          <a:lstStyle/>
-          <a:p>
-            <a:pPr marL="0" marR="0" lvl="0" indent="0" algn="l" rtl="0">
-              <a:spcBef>
-                <a:spcPts val="0"/>
-              </a:spcBef>
-              <a:spcAft>
-                <a:spcPts val="0"/>
-              </a:spcAft>
-              <a:buNone/>
-            </a:pPr>
-            <a:r>
-              <a:rPr lang="en-US" sz="1800" b="0" i="0" u="none" strike="noStrike" cap="none">
-                <a:solidFill>
-                  <a:srgbClr val="FFFFFF"/>
-                </a:solidFill>
-                <a:latin typeface="Outfit ExtraBold"/>
-                <a:ea typeface="Outfit ExtraBold"/>
-                <a:cs typeface="Outfit ExtraBold"/>
-                <a:sym typeface="Outfit ExtraBold"/>
-              </a:rPr>
-              <a:t>ETICA, TERRITORIO E COINVOLGIMENTO</a:t>
-            </a:r>
-            <a:endParaRPr/>
-          </a:p>
-        </p:txBody>
-      </p:sp>
-      <p:sp>
-        <p:nvSpPr>
-          <p:cNvPr id="247" name="Google Shape;247;p21"/>
-          <p:cNvSpPr txBox="1"/>
-          <p:nvPr/>
-        </p:nvSpPr>
-        <p:spPr>
-          <a:xfrm>
-            <a:off x="762000" y="3005137"/>
-            <a:ext cx="4857750" cy="457200"/>
-          </a:xfrm>
-          <a:prstGeom prst="rect">
-            <a:avLst/>
-          </a:prstGeom>
-          <a:noFill/>
-          <a:ln>
-            <a:noFill/>
-          </a:ln>
-        </p:spPr>
-        <p:txBody>
-          <a:bodyPr spcFirstLastPara="1" wrap="square" lIns="0" tIns="0" rIns="0" bIns="0" anchor="t" anchorCtr="0">
-            <a:spAutoFit/>
-          </a:bodyPr>
-          <a:lstStyle/>
-          <a:p>
-            <a:pPr marL="0" marR="0" lvl="0" indent="0" algn="l" rtl="0">
-              <a:lnSpc>
-                <a:spcPct val="160000"/>
-              </a:lnSpc>
-              <a:spcBef>
-                <a:spcPts val="0"/>
-              </a:spcBef>
-              <a:spcAft>
-                <a:spcPts val="0"/>
-              </a:spcAft>
-              <a:buNone/>
-            </a:pPr>
-            <a:r>
-              <a:rPr lang="en-US" sz="1125" b="0" i="0" u="none" strike="noStrike" cap="none">
-                <a:solidFill>
-                  <a:srgbClr val="A3A3A3"/>
-                </a:solidFill>
-                <a:latin typeface="Inter"/>
-                <a:ea typeface="Inter"/>
-                <a:cs typeface="Inter"/>
-                <a:sym typeface="Inter"/>
-              </a:rPr>
-              <a:t>Uniamo la convenienza delle promozioni a un forte posizionamento valoriale.</a:t>
-            </a:r>
-            <a:endParaRPr/>
-          </a:p>
-        </p:txBody>
-      </p:sp>
-      <p:sp>
-        <p:nvSpPr>
-          <p:cNvPr id="248" name="Google Shape;248;p21"/>
-          <p:cNvSpPr txBox="1"/>
-          <p:nvPr/>
-        </p:nvSpPr>
-        <p:spPr>
-          <a:xfrm>
-            <a:off x="1095375" y="3652837"/>
-            <a:ext cx="4524375" cy="428625"/>
-          </a:xfrm>
-          <a:prstGeom prst="rect">
-            <a:avLst/>
-          </a:prstGeom>
-          <a:noFill/>
-          <a:ln>
-            <a:noFill/>
-          </a:ln>
-        </p:spPr>
-        <p:txBody>
-          <a:bodyPr spcFirstLastPara="1" wrap="square" lIns="0" tIns="0" rIns="0" bIns="0" anchor="t" anchorCtr="0">
-            <a:spAutoFit/>
-          </a:bodyPr>
-          <a:lstStyle/>
-          <a:p>
-            <a:pPr marL="0" marR="0" lvl="0" indent="0" algn="l" rtl="0">
-              <a:lnSpc>
-                <a:spcPct val="149955"/>
-              </a:lnSpc>
-              <a:spcBef>
-                <a:spcPts val="0"/>
-              </a:spcBef>
-              <a:spcAft>
-                <a:spcPts val="0"/>
-              </a:spcAft>
-              <a:buNone/>
-            </a:pPr>
-            <a:r>
-              <a:rPr lang="en-US" sz="1125" b="1" i="0" u="none" strike="noStrike" cap="none">
-                <a:solidFill>
-                  <a:srgbClr val="B3B3B3"/>
-                </a:solidFill>
-                <a:latin typeface="Inter"/>
-                <a:ea typeface="Inter"/>
-                <a:cs typeface="Inter"/>
-                <a:sym typeface="Inter"/>
-              </a:rPr>
-              <a:t>Passaporto Digitale:</a:t>
-            </a:r>
-            <a:r>
-              <a:rPr lang="en-US" sz="1125" b="0" i="0" u="none" strike="noStrike" cap="none">
-                <a:solidFill>
-                  <a:srgbClr val="B3B3B3"/>
-                </a:solidFill>
-                <a:latin typeface="Inter"/>
-                <a:ea typeface="Inter"/>
-                <a:cs typeface="Inter"/>
-                <a:sym typeface="Inter"/>
-              </a:rPr>
-              <a:t> Accumulo di punti reali completando "missioni" nei nostri store fisici o ordinando online.</a:t>
-            </a:r>
-            <a:endParaRPr/>
-          </a:p>
-        </p:txBody>
-      </p:sp>
-      <p:sp>
-        <p:nvSpPr>
-          <p:cNvPr id="249" name="Google Shape;249;p21"/>
-          <p:cNvSpPr txBox="1"/>
-          <p:nvPr/>
-        </p:nvSpPr>
-        <p:spPr>
-          <a:xfrm>
-            <a:off x="1095375" y="4233862"/>
-            <a:ext cx="4524375" cy="428625"/>
-          </a:xfrm>
-          <a:prstGeom prst="rect">
-            <a:avLst/>
-          </a:prstGeom>
-          <a:noFill/>
-          <a:ln>
-            <a:noFill/>
-          </a:ln>
-        </p:spPr>
-        <p:txBody>
-          <a:bodyPr spcFirstLastPara="1" wrap="square" lIns="0" tIns="0" rIns="0" bIns="0" anchor="t" anchorCtr="0">
-            <a:spAutoFit/>
-          </a:bodyPr>
-          <a:lstStyle/>
-          <a:p>
-            <a:pPr marL="0" marR="0" lvl="0" indent="0" algn="l" rtl="0">
-              <a:lnSpc>
-                <a:spcPct val="149955"/>
-              </a:lnSpc>
-              <a:spcBef>
-                <a:spcPts val="0"/>
-              </a:spcBef>
-              <a:spcAft>
-                <a:spcPts val="0"/>
-              </a:spcAft>
-              <a:buNone/>
-            </a:pPr>
-            <a:r>
-              <a:rPr lang="en-US" sz="1125" b="1" i="0" u="none" strike="noStrike" cap="none">
-                <a:solidFill>
-                  <a:srgbClr val="B3B3B3"/>
-                </a:solidFill>
-                <a:latin typeface="Inter"/>
-                <a:ea typeface="Inter"/>
-                <a:cs typeface="Inter"/>
-                <a:sym typeface="Inter"/>
-              </a:rPr>
-              <a:t>Combo Etiche:</a:t>
-            </a:r>
-            <a:r>
-              <a:rPr lang="en-US" sz="1125" b="0" i="0" u="none" strike="noStrike" cap="none">
-                <a:solidFill>
-                  <a:srgbClr val="B3B3B3"/>
-                </a:solidFill>
-                <a:latin typeface="Inter"/>
-                <a:ea typeface="Inter"/>
-                <a:cs typeface="Inter"/>
-                <a:sym typeface="Inter"/>
-              </a:rPr>
-              <a:t> Menu speciali con parte del ricavato devoluto ad associazioni no-profit del territorio.</a:t>
-            </a:r>
-            <a:endParaRPr/>
-          </a:p>
-        </p:txBody>
-      </p:sp>
-      <p:sp>
-        <p:nvSpPr>
-          <p:cNvPr id="250" name="Google Shape;250;p21"/>
-          <p:cNvSpPr txBox="1"/>
-          <p:nvPr/>
-        </p:nvSpPr>
-        <p:spPr>
-          <a:xfrm>
-            <a:off x="1095375" y="4814887"/>
-            <a:ext cx="4524375" cy="428625"/>
-          </a:xfrm>
-          <a:prstGeom prst="rect">
-            <a:avLst/>
-          </a:prstGeom>
-          <a:noFill/>
-          <a:ln>
-            <a:noFill/>
-          </a:ln>
-        </p:spPr>
-        <p:txBody>
-          <a:bodyPr spcFirstLastPara="1" wrap="square" lIns="0" tIns="0" rIns="0" bIns="0" anchor="t" anchorCtr="0">
-            <a:spAutoFit/>
-          </a:bodyPr>
-          <a:lstStyle/>
-          <a:p>
-            <a:pPr marL="0" marR="0" lvl="0" indent="0" algn="l" rtl="0">
-              <a:lnSpc>
-                <a:spcPct val="149955"/>
-              </a:lnSpc>
-              <a:spcBef>
-                <a:spcPts val="0"/>
-              </a:spcBef>
-              <a:spcAft>
-                <a:spcPts val="0"/>
-              </a:spcAft>
-              <a:buNone/>
-            </a:pPr>
-            <a:r>
-              <a:rPr lang="en-US" sz="1125" b="1" i="0" u="none" strike="noStrike" cap="none">
-                <a:solidFill>
-                  <a:srgbClr val="B3B3B3"/>
-                </a:solidFill>
-                <a:latin typeface="Inter"/>
-                <a:ea typeface="Inter"/>
-                <a:cs typeface="Inter"/>
-                <a:sym typeface="Inter"/>
-              </a:rPr>
-              <a:t>Food Truck Network:</a:t>
-            </a:r>
-            <a:r>
-              <a:rPr lang="en-US" sz="1125" b="0" i="0" u="none" strike="noStrike" cap="none">
-                <a:solidFill>
-                  <a:srgbClr val="B3B3B3"/>
-                </a:solidFill>
-                <a:latin typeface="Inter"/>
-                <a:ea typeface="Inter"/>
-                <a:cs typeface="Inter"/>
-                <a:sym typeface="Inter"/>
-              </a:rPr>
-              <a:t> Stand itineranti nei grandi eventi per convertire i clienti fisici all'utilizzo dell'app mobile.</a:t>
-            </a:r>
-            <a:endParaRPr/>
-          </a:p>
-        </p:txBody>
-      </p:sp>
-      <p:pic>
-        <p:nvPicPr>
-          <p:cNvPr id="251" name="Google Shape;251;p21" descr="image.png"/>
-          <p:cNvPicPr preferRelativeResize="0"/>
-          <p:nvPr/>
-        </p:nvPicPr>
-        <p:blipFill rotWithShape="1">
-          <a:blip r:embed="rId5">
-            <a:alphaModFix/>
-          </a:blip>
-          <a:srcRect/>
-          <a:stretch/>
-        </p:blipFill>
-        <p:spPr>
-          <a:xfrm>
-            <a:off x="762000" y="3676650"/>
-            <a:ext cx="152400" cy="180975"/>
-          </a:xfrm>
-          <a:prstGeom prst="rect">
-            <a:avLst/>
-          </a:prstGeom>
-          <a:noFill/>
-          <a:ln>
-            <a:noFill/>
-          </a:ln>
-        </p:spPr>
-      </p:pic>
-      <p:pic>
-        <p:nvPicPr>
-          <p:cNvPr id="252" name="Google Shape;252;p21" descr="image.png"/>
-          <p:cNvPicPr preferRelativeResize="0"/>
-          <p:nvPr/>
-        </p:nvPicPr>
-        <p:blipFill rotWithShape="1">
-          <a:blip r:embed="rId6">
-            <a:alphaModFix/>
-          </a:blip>
-          <a:srcRect/>
-          <a:stretch/>
-        </p:blipFill>
-        <p:spPr>
-          <a:xfrm>
-            <a:off x="762000" y="4257675"/>
-            <a:ext cx="190500" cy="180975"/>
-          </a:xfrm>
-          <a:prstGeom prst="rect">
-            <a:avLst/>
-          </a:prstGeom>
-          <a:noFill/>
-          <a:ln>
-            <a:noFill/>
-          </a:ln>
-        </p:spPr>
-      </p:pic>
-      <p:pic>
-        <p:nvPicPr>
-          <p:cNvPr id="253" name="Google Shape;253;p21" descr="image.png"/>
-          <p:cNvPicPr preferRelativeResize="0"/>
-          <p:nvPr/>
-        </p:nvPicPr>
-        <p:blipFill rotWithShape="1">
-          <a:blip r:embed="rId7">
-            <a:alphaModFix/>
-          </a:blip>
-          <a:srcRect/>
-          <a:stretch/>
-        </p:blipFill>
-        <p:spPr>
-          <a:xfrm>
-            <a:off x="762000" y="4838700"/>
-            <a:ext cx="219075" cy="180975"/>
           </a:xfrm>
           <a:prstGeom prst="rect">
             <a:avLst/>

--- a/SecondaSuddivisioneGruppi/Logica/Materiale PPT/PPT VERSIONE FINALE.pptx
+++ b/SecondaSuddivisioneGruppi/Logica/Materiale PPT/PPT VERSIONE FINALE.pptx
@@ -66,16 +66,9 @@
       <p:boldItalic r:id="rId34"/>
     </p:embeddedFont>
     <p:embeddedFont>
-      <p:font typeface="Plus Jakarta Sans SemiBold" panose="020B0604020202020204" charset="0"/>
+      <p:font typeface="Poppins" panose="00000500000000000000" pitchFamily="2" charset="0"/>
       <p:regular r:id="rId35"/>
       <p:bold r:id="rId36"/>
-      <p:italic r:id="rId37"/>
-      <p:boldItalic r:id="rId38"/>
-    </p:embeddedFont>
-    <p:embeddedFont>
-      <p:font typeface="Poppins" panose="00000500000000000000" pitchFamily="2" charset="0"/>
-      <p:regular r:id="rId39"/>
-      <p:bold r:id="rId40"/>
     </p:embeddedFont>
   </p:embeddedFontLst>
   <p:defaultTextStyle>
@@ -398,6 +391,13 @@
             <a:tailEnd type="none" w="sm" len="sm"/>
           </a:ln>
         </p:spPr>
+        <p:txBody>
+          <a:bodyPr/>
+          <a:lstStyle/>
+          <a:p>
+            <a:endParaRPr lang="it-IT"/>
+          </a:p>
+        </p:txBody>
       </p:sp>
       <p:sp>
         <p:nvSpPr>
@@ -862,6 +862,13 @@
             </a:pathLst>
           </a:custGeom>
         </p:spPr>
+        <p:txBody>
+          <a:bodyPr/>
+          <a:lstStyle/>
+          <a:p>
+            <a:endParaRPr lang="it-IT"/>
+          </a:p>
+        </p:txBody>
       </p:sp>
     </p:spTree>
   </p:cSld>
@@ -938,8 +945,8 @@
         </p:nvSpPr>
         <p:spPr>
           <a:xfrm>
-            <a:off x="1143225" y="685800"/>
-            <a:ext cx="4572225" cy="3429000"/>
+            <a:off x="381000" y="685800"/>
+            <a:ext cx="6096000" cy="3429000"/>
           </a:xfrm>
           <a:custGeom>
             <a:avLst/>
@@ -966,6 +973,13 @@
             </a:pathLst>
           </a:custGeom>
         </p:spPr>
+        <p:txBody>
+          <a:bodyPr/>
+          <a:lstStyle/>
+          <a:p>
+            <a:endParaRPr lang="it-IT"/>
+          </a:p>
+        </p:txBody>
       </p:sp>
     </p:spTree>
   </p:cSld>
@@ -1042,8 +1056,8 @@
         </p:nvSpPr>
         <p:spPr>
           <a:xfrm>
-            <a:off x="1143225" y="685800"/>
-            <a:ext cx="4572225" cy="3429000"/>
+            <a:off x="381000" y="685800"/>
+            <a:ext cx="6096000" cy="3429000"/>
           </a:xfrm>
           <a:custGeom>
             <a:avLst/>
@@ -1070,6 +1084,13 @@
             </a:pathLst>
           </a:custGeom>
         </p:spPr>
+        <p:txBody>
+          <a:bodyPr/>
+          <a:lstStyle/>
+          <a:p>
+            <a:endParaRPr lang="it-IT"/>
+          </a:p>
+        </p:txBody>
       </p:sp>
     </p:spTree>
   </p:cSld>
@@ -1146,8 +1167,8 @@
         </p:nvSpPr>
         <p:spPr>
           <a:xfrm>
-            <a:off x="1143225" y="685800"/>
-            <a:ext cx="4572225" cy="3429000"/>
+            <a:off x="381000" y="685800"/>
+            <a:ext cx="6096000" cy="3429000"/>
           </a:xfrm>
           <a:custGeom>
             <a:avLst/>
@@ -1174,6 +1195,13 @@
             </a:pathLst>
           </a:custGeom>
         </p:spPr>
+        <p:txBody>
+          <a:bodyPr/>
+          <a:lstStyle/>
+          <a:p>
+            <a:endParaRPr lang="it-IT"/>
+          </a:p>
+        </p:txBody>
       </p:sp>
     </p:spTree>
   </p:cSld>
@@ -1278,6 +1306,13 @@
             </a:pathLst>
           </a:custGeom>
         </p:spPr>
+        <p:txBody>
+          <a:bodyPr/>
+          <a:lstStyle/>
+          <a:p>
+            <a:endParaRPr lang="it-IT"/>
+          </a:p>
+        </p:txBody>
       </p:sp>
     </p:spTree>
   </p:cSld>
@@ -1354,8 +1389,8 @@
         </p:nvSpPr>
         <p:spPr>
           <a:xfrm>
-            <a:off x="1143225" y="685800"/>
-            <a:ext cx="4572225" cy="3429000"/>
+            <a:off x="381000" y="685800"/>
+            <a:ext cx="6096000" cy="3429000"/>
           </a:xfrm>
           <a:custGeom>
             <a:avLst/>
@@ -1382,6 +1417,13 @@
             </a:pathLst>
           </a:custGeom>
         </p:spPr>
+        <p:txBody>
+          <a:bodyPr/>
+          <a:lstStyle/>
+          <a:p>
+            <a:endParaRPr lang="it-IT"/>
+          </a:p>
+        </p:txBody>
       </p:sp>
     </p:spTree>
   </p:cSld>
@@ -1458,8 +1500,8 @@
         </p:nvSpPr>
         <p:spPr>
           <a:xfrm>
-            <a:off x="1143225" y="685800"/>
-            <a:ext cx="4572225" cy="3429000"/>
+            <a:off x="381000" y="685800"/>
+            <a:ext cx="6096000" cy="3429000"/>
           </a:xfrm>
           <a:custGeom>
             <a:avLst/>
@@ -1486,6 +1528,13 @@
             </a:pathLst>
           </a:custGeom>
         </p:spPr>
+        <p:txBody>
+          <a:bodyPr/>
+          <a:lstStyle/>
+          <a:p>
+            <a:endParaRPr lang="it-IT"/>
+          </a:p>
+        </p:txBody>
       </p:sp>
     </p:spTree>
   </p:cSld>
@@ -1562,8 +1611,8 @@
         </p:nvSpPr>
         <p:spPr>
           <a:xfrm>
-            <a:off x="1143225" y="685800"/>
-            <a:ext cx="4572225" cy="3429000"/>
+            <a:off x="381000" y="685800"/>
+            <a:ext cx="6096000" cy="3429000"/>
           </a:xfrm>
           <a:custGeom>
             <a:avLst/>
@@ -1590,6 +1639,13 @@
             </a:pathLst>
           </a:custGeom>
         </p:spPr>
+        <p:txBody>
+          <a:bodyPr/>
+          <a:lstStyle/>
+          <a:p>
+            <a:endParaRPr lang="it-IT"/>
+          </a:p>
+        </p:txBody>
       </p:sp>
     </p:spTree>
   </p:cSld>
@@ -1666,8 +1722,8 @@
         </p:nvSpPr>
         <p:spPr>
           <a:xfrm>
-            <a:off x="1143225" y="685800"/>
-            <a:ext cx="4572225" cy="3429000"/>
+            <a:off x="381000" y="685800"/>
+            <a:ext cx="6096000" cy="3429000"/>
           </a:xfrm>
           <a:custGeom>
             <a:avLst/>
@@ -1694,6 +1750,13 @@
             </a:pathLst>
           </a:custGeom>
         </p:spPr>
+        <p:txBody>
+          <a:bodyPr/>
+          <a:lstStyle/>
+          <a:p>
+            <a:endParaRPr lang="it-IT"/>
+          </a:p>
+        </p:txBody>
       </p:sp>
     </p:spTree>
   </p:cSld>
@@ -1770,8 +1833,8 @@
         </p:nvSpPr>
         <p:spPr>
           <a:xfrm>
-            <a:off x="1143225" y="685800"/>
-            <a:ext cx="4572225" cy="3429000"/>
+            <a:off x="381000" y="685800"/>
+            <a:ext cx="6096000" cy="3429000"/>
           </a:xfrm>
           <a:custGeom>
             <a:avLst/>
@@ -1798,6 +1861,13 @@
             </a:pathLst>
           </a:custGeom>
         </p:spPr>
+        <p:txBody>
+          <a:bodyPr/>
+          <a:lstStyle/>
+          <a:p>
+            <a:endParaRPr lang="it-IT"/>
+          </a:p>
+        </p:txBody>
       </p:sp>
     </p:spTree>
   </p:cSld>
@@ -1874,8 +1944,8 @@
         </p:nvSpPr>
         <p:spPr>
           <a:xfrm>
-            <a:off x="1143225" y="685800"/>
-            <a:ext cx="4572225" cy="3429000"/>
+            <a:off x="381000" y="685800"/>
+            <a:ext cx="6096000" cy="3429000"/>
           </a:xfrm>
           <a:custGeom>
             <a:avLst/>
@@ -1902,6 +1972,13 @@
             </a:pathLst>
           </a:custGeom>
         </p:spPr>
+        <p:txBody>
+          <a:bodyPr/>
+          <a:lstStyle/>
+          <a:p>
+            <a:endParaRPr lang="it-IT"/>
+          </a:p>
+        </p:txBody>
       </p:sp>
     </p:spTree>
   </p:cSld>
@@ -2006,6 +2083,13 @@
             </a:pathLst>
           </a:custGeom>
         </p:spPr>
+        <p:txBody>
+          <a:bodyPr/>
+          <a:lstStyle/>
+          <a:p>
+            <a:endParaRPr lang="it-IT"/>
+          </a:p>
+        </p:txBody>
       </p:sp>
     </p:spTree>
   </p:cSld>
@@ -2110,6 +2194,13 @@
             </a:pathLst>
           </a:custGeom>
         </p:spPr>
+        <p:txBody>
+          <a:bodyPr/>
+          <a:lstStyle/>
+          <a:p>
+            <a:endParaRPr lang="it-IT"/>
+          </a:p>
+        </p:txBody>
       </p:sp>
     </p:spTree>
   </p:cSld>
@@ -2214,6 +2305,13 @@
             </a:pathLst>
           </a:custGeom>
         </p:spPr>
+        <p:txBody>
+          <a:bodyPr/>
+          <a:lstStyle/>
+          <a:p>
+            <a:endParaRPr lang="it-IT"/>
+          </a:p>
+        </p:txBody>
       </p:sp>
     </p:spTree>
   </p:cSld>
@@ -9789,6 +9887,13 @@
             <a:noFill/>
           </a:ln>
         </p:spPr>
+        <p:txBody>
+          <a:bodyPr/>
+          <a:lstStyle/>
+          <a:p>
+            <a:endParaRPr lang="it-IT"/>
+          </a:p>
+        </p:txBody>
       </p:sp>
       <p:sp>
         <p:nvSpPr>
@@ -12160,8 +12265,8 @@
         </p:nvSpPr>
         <p:spPr>
           <a:xfrm>
-            <a:off x="676275" y="623334"/>
-            <a:ext cx="6400800" cy="2243691"/>
+            <a:off x="718185" y="1018806"/>
+            <a:ext cx="6720840" cy="1495794"/>
           </a:xfrm>
           <a:prstGeom prst="rect">
             <a:avLst/>
@@ -12189,27 +12294,15 @@
               </a:spcAft>
               <a:buNone/>
             </a:pPr>
-            <a:r>
-              <a:rPr lang="en-US" sz="5400" dirty="0">
-                <a:latin typeface="Inter Black"/>
-                <a:ea typeface="Inter Black"/>
-                <a:cs typeface="Inter Black"/>
-                <a:sym typeface="Inter Black"/>
-              </a:rPr>
-              <a:t>J</a:t>
-            </a:r>
-            <a:r>
-              <a:rPr lang="en-US" sz="5400" b="0" i="0" u="none" strike="noStrike" cap="none" dirty="0">
-                <a:solidFill>
-                  <a:srgbClr val="000000"/>
-                </a:solidFill>
-                <a:latin typeface="Inter Black"/>
-                <a:ea typeface="Inter Black"/>
-                <a:cs typeface="Inter Black"/>
-                <a:sym typeface="Inter Black"/>
-              </a:rPr>
-              <a:t>ST</a:t>
-            </a:r>
+            <a:endParaRPr lang="en-US" sz="5400" b="0" i="0" u="none" strike="noStrike" cap="none" dirty="0">
+              <a:solidFill>
+                <a:srgbClr val="000000"/>
+              </a:solidFill>
+              <a:latin typeface="Inter Black"/>
+              <a:ea typeface="Inter Black"/>
+              <a:cs typeface="Inter Black"/>
+              <a:sym typeface="Inter Black"/>
+            </a:endParaRPr>
           </a:p>
           <a:p>
             <a:pPr marL="0" marR="0" lvl="0" indent="0" algn="l" rtl="0">
@@ -12234,33 +12327,7 @@
                 <a:cs typeface="Inter Black"/>
                 <a:sym typeface="Inter Black"/>
               </a:rPr>
-              <a:t>JUST </a:t>
-            </a:r>
-          </a:p>
-          <a:p>
-            <a:pPr marL="0" marR="0" lvl="0" indent="0" algn="l" rtl="0">
-              <a:lnSpc>
-                <a:spcPct val="89981"/>
-              </a:lnSpc>
-              <a:spcBef>
-                <a:spcPts val="0"/>
-              </a:spcBef>
-              <a:spcAft>
-                <a:spcPts val="0"/>
-              </a:spcAft>
-              <a:buNone/>
-            </a:pPr>
-            <a:r>
-              <a:rPr lang="en-US" sz="5400" b="0" i="0" u="none" strike="noStrike" cap="none" dirty="0">
-                <a:solidFill>
-                  <a:srgbClr val="F95707"/>
-                </a:solidFill>
-                <a:latin typeface="Inter Black"/>
-                <a:ea typeface="Inter Black"/>
-                <a:cs typeface="Inter Black"/>
-                <a:sym typeface="Inter Black"/>
-              </a:rPr>
-              <a:t>BURGERS</a:t>
+              <a:t>JUST BURGERS</a:t>
             </a:r>
             <a:endParaRPr dirty="0"/>
           </a:p>
@@ -12274,8 +12341,8 @@
         </p:nvSpPr>
         <p:spPr>
           <a:xfrm>
-            <a:off x="762000" y="2867025"/>
-            <a:ext cx="6400800" cy="200025"/>
+            <a:off x="759143" y="2774477"/>
+            <a:ext cx="6400800" cy="207749"/>
           </a:xfrm>
           <a:prstGeom prst="rect">
             <a:avLst/>
@@ -12310,7 +12377,7 @@
                 <a:cs typeface="Inter SemiBold"/>
                 <a:sym typeface="Inter SemiBold"/>
               </a:rPr>
-              <a:t>CAMPAGNA PUBBLICITARIA DIGITALE</a:t>
+              <a:t>CAMPAGNA PUBBLICITARIA</a:t>
             </a:r>
             <a:endParaRPr dirty="0"/>
           </a:p>
@@ -12324,8 +12391,8 @@
         </p:nvSpPr>
         <p:spPr>
           <a:xfrm>
-            <a:off x="762000" y="3181350"/>
-            <a:ext cx="6720840" cy="1005780"/>
+            <a:off x="759143" y="3329226"/>
+            <a:ext cx="6182497" cy="1151084"/>
           </a:xfrm>
           <a:prstGeom prst="rect">
             <a:avLst/>
@@ -12354,7 +12421,7 @@
               <a:buNone/>
             </a:pPr>
             <a:r>
-              <a:rPr lang="en-US" sz="3600" b="0" i="0" u="none" strike="noStrike" cap="none" dirty="0">
+              <a:rPr lang="en-US" sz="3400" b="0" i="0" u="none" strike="noStrike" cap="none" dirty="0">
                 <a:solidFill>
                   <a:srgbClr val="FFFFFF"/>
                 </a:solidFill>
@@ -12365,7 +12432,7 @@
               </a:rPr>
               <a:t>NUOVA ESPERIENZA MOBILE &amp; DELIVERY</a:t>
             </a:r>
-            <a:endParaRPr dirty="0"/>
+            <a:endParaRPr sz="3400" dirty="0"/>
           </a:p>
         </p:txBody>
       </p:sp>
@@ -12377,8 +12444,8 @@
         </p:nvSpPr>
         <p:spPr>
           <a:xfrm>
-            <a:off x="762000" y="4377630"/>
-            <a:ext cx="4953000" cy="457200"/>
+            <a:off x="718185" y="4725173"/>
+            <a:ext cx="4953000" cy="861774"/>
           </a:xfrm>
           <a:prstGeom prst="rect">
             <a:avLst/>
@@ -12394,221 +12461,52 @@
           </a:bodyPr>
           <a:lstStyle/>
           <a:p>
-            <a:pPr marL="0" marR="0" lvl="0" indent="0" algn="l" rtl="0">
-              <a:lnSpc>
-                <a:spcPct val="160000"/>
-              </a:lnSpc>
-              <a:spcBef>
-                <a:spcPts val="0"/>
-              </a:spcBef>
-              <a:spcAft>
-                <a:spcPts val="0"/>
-              </a:spcAft>
-              <a:buNone/>
-            </a:pPr>
-            <a:r>
-              <a:rPr lang="en-US" sz="1125" b="0" i="0" u="none" strike="noStrike" cap="none">
-                <a:solidFill>
-                  <a:srgbClr val="8F8F8F"/>
-                </a:solidFill>
-                <a:latin typeface="Inter"/>
-                <a:ea typeface="Inter"/>
-                <a:cs typeface="Inter"/>
-                <a:sym typeface="Inter"/>
-              </a:rPr>
-              <a:t>Unire un'identità culinaria forte a una tecnologia all'avanguardia per servire al meglio la nostra community, ovunque si trovi.</a:t>
-            </a:r>
-            <a:endParaRPr/>
+            <a:pPr fontAlgn="base"/>
+            <a:r>
+              <a:rPr lang="it-IT" i="1" dirty="0">
+                <a:solidFill>
+                  <a:srgbClr val="A5A5A5"/>
+                </a:solidFill>
+              </a:rPr>
+              <a:t>L’autenticità pura del chilometro zero incontra il design di un’esperienza moderna</a:t>
+            </a:r>
+          </a:p>
+          <a:p>
+            <a:br>
+              <a:rPr lang="it-IT" dirty="0"/>
+            </a:br>
+            <a:endParaRPr dirty="0"/>
           </a:p>
         </p:txBody>
       </p:sp>
       <p:pic>
         <p:nvPicPr>
-          <p:cNvPr id="92" name="Google Shape;92;p13" descr="image.png"/>
-          <p:cNvPicPr preferRelativeResize="0"/>
+          <p:cNvPr id="3" name="Immagine 2">
+            <a:extLst>
+              <a:ext uri="{FF2B5EF4-FFF2-40B4-BE49-F238E27FC236}">
+                <a16:creationId xmlns:a16="http://schemas.microsoft.com/office/drawing/2014/main" id="{D60F5194-9D53-453E-1115-679A5726E72F}"/>
+              </a:ext>
+            </a:extLst>
+          </p:cNvPr>
+          <p:cNvPicPr>
+            <a:picLocks noChangeAspect="1"/>
+          </p:cNvPicPr>
           <p:nvPr/>
         </p:nvPicPr>
-        <p:blipFill rotWithShape="1">
-          <a:blip r:embed="rId6">
-            <a:alphaModFix/>
-          </a:blip>
-          <a:srcRect/>
-          <a:stretch/>
+        <p:blipFill>
+          <a:blip r:embed="rId6"/>
+          <a:stretch>
+            <a:fillRect/>
+          </a:stretch>
         </p:blipFill>
         <p:spPr>
           <a:xfrm>
-            <a:off x="9086850" y="1914525"/>
-            <a:ext cx="419100" cy="419100"/>
-          </a:xfrm>
-          <a:prstGeom prst="rect">
-            <a:avLst/>
-          </a:prstGeom>
-          <a:noFill/>
-          <a:ln>
-            <a:noFill/>
-          </a:ln>
-        </p:spPr>
-      </p:pic>
-      <p:pic>
-        <p:nvPicPr>
-          <p:cNvPr id="93" name="Google Shape;93;p13" descr="image.png"/>
-          <p:cNvPicPr preferRelativeResize="0"/>
-          <p:nvPr/>
-        </p:nvPicPr>
-        <p:blipFill rotWithShape="1">
-          <a:blip r:embed="rId6">
-            <a:alphaModFix/>
-          </a:blip>
-          <a:srcRect/>
-          <a:stretch/>
-        </p:blipFill>
-        <p:spPr>
-          <a:xfrm>
-            <a:off x="7477125" y="3219450"/>
-            <a:ext cx="419100" cy="419100"/>
-          </a:xfrm>
-          <a:prstGeom prst="rect">
-            <a:avLst/>
-          </a:prstGeom>
-          <a:noFill/>
-          <a:ln>
-            <a:noFill/>
-          </a:ln>
-        </p:spPr>
-      </p:pic>
-      <p:pic>
-        <p:nvPicPr>
-          <p:cNvPr id="94" name="Google Shape;94;p13" descr="image.png"/>
-          <p:cNvPicPr preferRelativeResize="0"/>
-          <p:nvPr/>
-        </p:nvPicPr>
-        <p:blipFill rotWithShape="1">
-          <a:blip r:embed="rId6">
-            <a:alphaModFix/>
-          </a:blip>
-          <a:srcRect/>
-          <a:stretch/>
-        </p:blipFill>
-        <p:spPr>
-          <a:xfrm>
-            <a:off x="10546109" y="4905375"/>
-            <a:ext cx="419100" cy="419100"/>
-          </a:xfrm>
-          <a:prstGeom prst="rect">
-            <a:avLst/>
-          </a:prstGeom>
-          <a:noFill/>
-          <a:ln>
-            <a:noFill/>
-          </a:ln>
-        </p:spPr>
-      </p:pic>
-      <p:pic>
-        <p:nvPicPr>
-          <p:cNvPr id="96" name="Google Shape;96;p13" descr="image.png"/>
-          <p:cNvPicPr preferRelativeResize="0"/>
-          <p:nvPr/>
-        </p:nvPicPr>
-        <p:blipFill rotWithShape="1">
-          <a:blip r:embed="rId7">
-            <a:alphaModFix/>
-          </a:blip>
-          <a:srcRect/>
-          <a:stretch/>
-        </p:blipFill>
-        <p:spPr>
-          <a:xfrm>
-            <a:off x="9210675" y="2047875"/>
-            <a:ext cx="171450" cy="152400"/>
-          </a:xfrm>
-          <a:prstGeom prst="rect">
-            <a:avLst/>
-          </a:prstGeom>
-          <a:noFill/>
-          <a:ln>
-            <a:noFill/>
-          </a:ln>
-        </p:spPr>
-      </p:pic>
-      <p:pic>
-        <p:nvPicPr>
-          <p:cNvPr id="97" name="Google Shape;97;p13" descr="image.png"/>
-          <p:cNvPicPr preferRelativeResize="0"/>
-          <p:nvPr/>
-        </p:nvPicPr>
-        <p:blipFill rotWithShape="1">
-          <a:blip r:embed="rId8">
-            <a:alphaModFix/>
-          </a:blip>
-          <a:srcRect/>
-          <a:stretch/>
-        </p:blipFill>
-        <p:spPr>
-          <a:xfrm>
-            <a:off x="7620000" y="3352800"/>
-            <a:ext cx="133350" cy="152400"/>
-          </a:xfrm>
-          <a:prstGeom prst="rect">
-            <a:avLst/>
-          </a:prstGeom>
-          <a:noFill/>
-          <a:ln>
-            <a:noFill/>
-          </a:ln>
-        </p:spPr>
-      </p:pic>
-      <p:pic>
-        <p:nvPicPr>
-          <p:cNvPr id="98" name="Google Shape;98;p13" descr="image.png"/>
-          <p:cNvPicPr preferRelativeResize="0"/>
-          <p:nvPr/>
-        </p:nvPicPr>
-        <p:blipFill rotWithShape="1">
-          <a:blip r:embed="rId9">
-            <a:alphaModFix/>
-          </a:blip>
-          <a:srcRect/>
-          <a:stretch/>
-        </p:blipFill>
-        <p:spPr>
-          <a:xfrm>
-            <a:off x="10660409" y="5038725"/>
-            <a:ext cx="190500" cy="152400"/>
-          </a:xfrm>
-          <a:prstGeom prst="rect">
-            <a:avLst/>
-          </a:prstGeom>
-          <a:noFill/>
-          <a:ln>
-            <a:noFill/>
-          </a:ln>
-        </p:spPr>
-      </p:pic>
-      <p:pic>
-        <p:nvPicPr>
-          <p:cNvPr id="99" name="Google Shape;99;p13" descr="image.png"/>
-          <p:cNvPicPr preferRelativeResize="0"/>
-          <p:nvPr/>
-        </p:nvPicPr>
-        <p:blipFill rotWithShape="1">
-          <a:blip r:embed="rId10">
-            <a:alphaModFix/>
-          </a:blip>
-          <a:srcRect/>
-          <a:stretch/>
-        </p:blipFill>
-        <p:spPr>
-          <a:xfrm>
-            <a:off x="7772400" y="1905000"/>
-            <a:ext cx="3048000" cy="3048000"/>
-          </a:xfrm>
-          <a:prstGeom prst="rect">
-            <a:avLst/>
-          </a:prstGeom>
-          <a:noFill/>
-          <a:ln>
-            <a:noFill/>
-          </a:ln>
+            <a:off x="7760272" y="1988775"/>
+            <a:ext cx="3072256" cy="2880450"/>
+          </a:xfrm>
+          <a:prstGeom prst="rect">
+            <a:avLst/>
+          </a:prstGeom>
         </p:spPr>
       </p:pic>
     </p:spTree>
@@ -12734,7 +12632,7 @@
         <p:spPr>
           <a:xfrm>
             <a:off x="904875" y="571500"/>
-            <a:ext cx="11051381" cy="409575"/>
+            <a:ext cx="11051381" cy="438582"/>
           </a:xfrm>
           <a:prstGeom prst="rect">
             <a:avLst/>
@@ -12760,7 +12658,7 @@
               <a:buNone/>
             </a:pPr>
             <a:r>
-              <a:rPr lang="en-US" sz="2850" b="0" i="0" u="none" strike="noStrike" cap="none">
+              <a:rPr lang="en-US" sz="2850" b="0" i="0" u="none" strike="noStrike" cap="none" dirty="0">
                 <a:solidFill>
                   <a:srgbClr val="FFFFFF"/>
                 </a:solidFill>
@@ -12769,9 +12667,9 @@
                 <a:cs typeface="Outfit Black"/>
                 <a:sym typeface="Outfit Black"/>
               </a:rPr>
-              <a:t>MACRO 3: NUOVO SITO ATTRATTIVO</a:t>
-            </a:r>
-            <a:endParaRPr/>
+              <a:t>SITO ATTRATTIVO</a:t>
+            </a:r>
+            <a:endParaRPr dirty="0"/>
           </a:p>
         </p:txBody>
       </p:sp>
@@ -12832,7 +12730,7 @@
         <p:spPr>
           <a:xfrm>
             <a:off x="762000" y="1057275"/>
-            <a:ext cx="10668000" cy="243780"/>
+            <a:ext cx="10668000" cy="295466"/>
           </a:xfrm>
           <a:prstGeom prst="rect">
             <a:avLst/>
@@ -12861,7 +12759,7 @@
               <a:buNone/>
             </a:pPr>
             <a:r>
-              <a:rPr lang="en-US" sz="1200" b="0" i="0" u="none" strike="noStrike" cap="none">
+              <a:rPr lang="en-US" sz="1200" b="0" i="0" u="none" strike="noStrike" cap="none" dirty="0" err="1">
                 <a:solidFill>
                   <a:srgbClr val="A3A3A3"/>
                 </a:solidFill>
@@ -12870,9 +12768,69 @@
                 <a:cs typeface="Inter"/>
                 <a:sym typeface="Inter"/>
               </a:rPr>
-              <a:t>Progettato specificamente per le esigenze del mobile web e dell'instant ordering.</a:t>
-            </a:r>
-            <a:endParaRPr/>
+              <a:t>Progettato</a:t>
+            </a:r>
+            <a:r>
+              <a:rPr lang="en-US" sz="1200" b="0" i="0" u="none" strike="noStrike" cap="none" dirty="0">
+                <a:solidFill>
+                  <a:srgbClr val="A3A3A3"/>
+                </a:solidFill>
+                <a:latin typeface="Inter"/>
+                <a:ea typeface="Inter"/>
+                <a:cs typeface="Inter"/>
+                <a:sym typeface="Inter"/>
+              </a:rPr>
+              <a:t> </a:t>
+            </a:r>
+            <a:r>
+              <a:rPr lang="en-US" sz="1200" b="0" i="0" u="none" strike="noStrike" cap="none" dirty="0" err="1">
+                <a:solidFill>
+                  <a:srgbClr val="A3A3A3"/>
+                </a:solidFill>
+                <a:latin typeface="Inter"/>
+                <a:ea typeface="Inter"/>
+                <a:cs typeface="Inter"/>
+                <a:sym typeface="Inter"/>
+              </a:rPr>
+              <a:t>specificamente</a:t>
+            </a:r>
+            <a:r>
+              <a:rPr lang="en-US" sz="1200" b="0" i="0" u="none" strike="noStrike" cap="none" dirty="0">
+                <a:solidFill>
+                  <a:srgbClr val="A3A3A3"/>
+                </a:solidFill>
+                <a:latin typeface="Inter"/>
+                <a:ea typeface="Inter"/>
+                <a:cs typeface="Inter"/>
+                <a:sym typeface="Inter"/>
+              </a:rPr>
+              <a:t> per le </a:t>
+            </a:r>
+            <a:r>
+              <a:rPr lang="en-US" sz="1200" b="0" i="0" u="none" strike="noStrike" cap="none" dirty="0" err="1">
+                <a:solidFill>
+                  <a:srgbClr val="A3A3A3"/>
+                </a:solidFill>
+                <a:latin typeface="Inter"/>
+                <a:ea typeface="Inter"/>
+                <a:cs typeface="Inter"/>
+                <a:sym typeface="Inter"/>
+              </a:rPr>
+              <a:t>esigenze</a:t>
+            </a:r>
+            <a:r>
+              <a:rPr lang="en-US" sz="1200" b="0" i="0" u="none" strike="noStrike" cap="none" dirty="0">
+                <a:solidFill>
+                  <a:srgbClr val="A3A3A3"/>
+                </a:solidFill>
+                <a:latin typeface="Inter"/>
+                <a:ea typeface="Inter"/>
+                <a:cs typeface="Inter"/>
+                <a:sym typeface="Inter"/>
+              </a:rPr>
+              <a:t> del mobile web</a:t>
+            </a:r>
+            <a:endParaRPr dirty="0"/>
           </a:p>
         </p:txBody>
       </p:sp>
@@ -12935,7 +12893,7 @@
         <p:spPr>
           <a:xfrm>
             <a:off x="1104900" y="3647330"/>
-            <a:ext cx="4505325" cy="883443"/>
+            <a:ext cx="4505325" cy="535275"/>
           </a:xfrm>
           <a:prstGeom prst="rect">
             <a:avLst/>
@@ -12964,7 +12922,7 @@
               <a:buNone/>
             </a:pPr>
             <a:r>
-              <a:rPr lang="en-US" sz="1087" b="0" i="0" u="none" strike="noStrike" cap="none">
+              <a:rPr lang="en-US" sz="1087" dirty="0">
                 <a:solidFill>
                   <a:srgbClr val="A3A3A3"/>
                 </a:solidFill>
@@ -12973,9 +12931,165 @@
                 <a:cs typeface="Inter"/>
                 <a:sym typeface="Inter"/>
               </a:rPr>
-              <a:t>Il nuovo portale web è leggerissimo e ottimizzato per caricarsi istantaneamente anche sotto copertura di rete minima. Riduzione dei tempi di caricamento del 65% rispetto alla versione precedente, abbattendo il tasso di abbandono del carrello.</a:t>
-            </a:r>
-            <a:endParaRPr/>
+              <a:t>P</a:t>
+            </a:r>
+            <a:r>
+              <a:rPr lang="en-US" sz="1087" b="0" i="0" u="none" strike="noStrike" cap="none" dirty="0">
+                <a:solidFill>
+                  <a:srgbClr val="A3A3A3"/>
+                </a:solidFill>
+                <a:latin typeface="Inter"/>
+                <a:ea typeface="Inter"/>
+                <a:cs typeface="Inter"/>
+                <a:sym typeface="Inter"/>
+              </a:rPr>
+              <a:t>ortale web è </a:t>
+            </a:r>
+            <a:r>
+              <a:rPr lang="en-US" sz="1087" b="0" i="0" u="none" strike="noStrike" cap="none" dirty="0" err="1">
+                <a:solidFill>
+                  <a:srgbClr val="A3A3A3"/>
+                </a:solidFill>
+                <a:latin typeface="Inter"/>
+                <a:ea typeface="Inter"/>
+                <a:cs typeface="Inter"/>
+                <a:sym typeface="Inter"/>
+              </a:rPr>
+              <a:t>leggerissimo</a:t>
+            </a:r>
+            <a:r>
+              <a:rPr lang="en-US" sz="1087" b="0" i="0" u="none" strike="noStrike" cap="none" dirty="0">
+                <a:solidFill>
+                  <a:srgbClr val="A3A3A3"/>
+                </a:solidFill>
+                <a:latin typeface="Inter"/>
+                <a:ea typeface="Inter"/>
+                <a:cs typeface="Inter"/>
+                <a:sym typeface="Inter"/>
+              </a:rPr>
+              <a:t> e </a:t>
+            </a:r>
+            <a:r>
+              <a:rPr lang="en-US" sz="1087" b="0" i="0" u="none" strike="noStrike" cap="none" dirty="0" err="1">
+                <a:solidFill>
+                  <a:srgbClr val="A3A3A3"/>
+                </a:solidFill>
+                <a:latin typeface="Inter"/>
+                <a:ea typeface="Inter"/>
+                <a:cs typeface="Inter"/>
+                <a:sym typeface="Inter"/>
+              </a:rPr>
+              <a:t>ottimizzato</a:t>
+            </a:r>
+            <a:r>
+              <a:rPr lang="en-US" sz="1087" b="0" i="0" u="none" strike="noStrike" cap="none" dirty="0">
+                <a:solidFill>
+                  <a:srgbClr val="A3A3A3"/>
+                </a:solidFill>
+                <a:latin typeface="Inter"/>
+                <a:ea typeface="Inter"/>
+                <a:cs typeface="Inter"/>
+                <a:sym typeface="Inter"/>
+              </a:rPr>
+              <a:t> per </a:t>
+            </a:r>
+            <a:r>
+              <a:rPr lang="en-US" sz="1087" b="0" i="0" u="none" strike="noStrike" cap="none" dirty="0" err="1">
+                <a:solidFill>
+                  <a:srgbClr val="A3A3A3"/>
+                </a:solidFill>
+                <a:latin typeface="Inter"/>
+                <a:ea typeface="Inter"/>
+                <a:cs typeface="Inter"/>
+                <a:sym typeface="Inter"/>
+              </a:rPr>
+              <a:t>caricamento</a:t>
+            </a:r>
+            <a:r>
+              <a:rPr lang="en-US" sz="1087" b="0" i="0" u="none" strike="noStrike" cap="none" dirty="0">
+                <a:solidFill>
+                  <a:srgbClr val="A3A3A3"/>
+                </a:solidFill>
+                <a:latin typeface="Inter"/>
+                <a:ea typeface="Inter"/>
+                <a:cs typeface="Inter"/>
+                <a:sym typeface="Inter"/>
+              </a:rPr>
+              <a:t> </a:t>
+            </a:r>
+            <a:r>
+              <a:rPr lang="en-US" sz="1087" b="0" i="0" u="none" strike="noStrike" cap="none" dirty="0" err="1">
+                <a:solidFill>
+                  <a:srgbClr val="A3A3A3"/>
+                </a:solidFill>
+                <a:latin typeface="Inter"/>
+                <a:ea typeface="Inter"/>
+                <a:cs typeface="Inter"/>
+                <a:sym typeface="Inter"/>
+              </a:rPr>
+              <a:t>istantaneao</a:t>
+            </a:r>
+            <a:r>
+              <a:rPr lang="en-US" sz="1087" b="0" i="0" u="none" strike="noStrike" cap="none" dirty="0">
+                <a:solidFill>
+                  <a:srgbClr val="A3A3A3"/>
+                </a:solidFill>
+                <a:latin typeface="Inter"/>
+                <a:ea typeface="Inter"/>
+                <a:cs typeface="Inter"/>
+                <a:sym typeface="Inter"/>
+              </a:rPr>
+              <a:t> </a:t>
+            </a:r>
+            <a:r>
+              <a:rPr lang="en-US" sz="1087" b="0" i="0" u="none" strike="noStrike" cap="none" dirty="0" err="1">
+                <a:solidFill>
+                  <a:srgbClr val="A3A3A3"/>
+                </a:solidFill>
+                <a:latin typeface="Inter"/>
+                <a:ea typeface="Inter"/>
+                <a:cs typeface="Inter"/>
+                <a:sym typeface="Inter"/>
+              </a:rPr>
+              <a:t>anche</a:t>
+            </a:r>
+            <a:r>
+              <a:rPr lang="en-US" sz="1087" b="0" i="0" u="none" strike="noStrike" cap="none" dirty="0">
+                <a:solidFill>
+                  <a:srgbClr val="A3A3A3"/>
+                </a:solidFill>
+                <a:latin typeface="Inter"/>
+                <a:ea typeface="Inter"/>
+                <a:cs typeface="Inter"/>
+                <a:sym typeface="Inter"/>
+              </a:rPr>
+              <a:t> sotto </a:t>
+            </a:r>
+            <a:r>
+              <a:rPr lang="en-US" sz="1087" b="0" i="0" u="none" strike="noStrike" cap="none" dirty="0" err="1">
+                <a:solidFill>
+                  <a:srgbClr val="A3A3A3"/>
+                </a:solidFill>
+                <a:latin typeface="Inter"/>
+                <a:ea typeface="Inter"/>
+                <a:cs typeface="Inter"/>
+                <a:sym typeface="Inter"/>
+              </a:rPr>
+              <a:t>copertura</a:t>
+            </a:r>
+            <a:r>
+              <a:rPr lang="en-US" sz="1087" b="0" i="0" u="none" strike="noStrike" cap="none" dirty="0">
+                <a:solidFill>
+                  <a:srgbClr val="A3A3A3"/>
+                </a:solidFill>
+                <a:latin typeface="Inter"/>
+                <a:ea typeface="Inter"/>
+                <a:cs typeface="Inter"/>
+                <a:sym typeface="Inter"/>
+              </a:rPr>
+              <a:t> di rete minima.</a:t>
+            </a:r>
+            <a:endParaRPr dirty="0"/>
           </a:p>
         </p:txBody>
       </p:sp>
@@ -13038,7 +13152,7 @@
         <p:spPr>
           <a:xfrm>
             <a:off x="6581775" y="3647330"/>
-            <a:ext cx="4505325" cy="883443"/>
+            <a:ext cx="4505325" cy="535275"/>
           </a:xfrm>
           <a:prstGeom prst="rect">
             <a:avLst/>
@@ -13067,7 +13181,7 @@
               <a:buNone/>
             </a:pPr>
             <a:r>
-              <a:rPr lang="en-US" sz="1087" b="0" i="0" u="none" strike="noStrike" cap="none">
+              <a:rPr lang="en-US" sz="1087" b="0" i="0" u="none" strike="noStrike" cap="none" dirty="0" err="1">
                 <a:solidFill>
                   <a:srgbClr val="A3A3A3"/>
                 </a:solidFill>
@@ -13076,9 +13190,237 @@
                 <a:cs typeface="Inter"/>
                 <a:sym typeface="Inter"/>
               </a:rPr>
-              <a:t>Ogni elemento grafico è pensato per gli schermi verticali degli smartphone. Menu interattivo con foto HD a pieno schermo, navigazione tramite swipe e totale integrazione dinamica con il database centrale dell'app mobile.</a:t>
-            </a:r>
-            <a:endParaRPr/>
+              <a:t>Dedign</a:t>
+            </a:r>
+            <a:r>
+              <a:rPr lang="en-US" sz="1087" b="0" i="0" u="none" strike="noStrike" cap="none" dirty="0">
+                <a:solidFill>
+                  <a:srgbClr val="A3A3A3"/>
+                </a:solidFill>
+                <a:latin typeface="Inter"/>
+                <a:ea typeface="Inter"/>
+                <a:cs typeface="Inter"/>
+                <a:sym typeface="Inter"/>
+              </a:rPr>
+              <a:t> mobile-first ad </a:t>
+            </a:r>
+            <a:r>
+              <a:rPr lang="en-US" sz="1087" b="0" i="0" u="none" strike="noStrike" cap="none" dirty="0" err="1">
+                <a:solidFill>
+                  <a:srgbClr val="A3A3A3"/>
+                </a:solidFill>
+                <a:latin typeface="Inter"/>
+                <a:ea typeface="Inter"/>
+                <a:cs typeface="Inter"/>
+                <a:sym typeface="Inter"/>
+              </a:rPr>
+              <a:t>alte</a:t>
+            </a:r>
+            <a:r>
+              <a:rPr lang="en-US" sz="1087" b="0" i="0" u="none" strike="noStrike" cap="none" dirty="0">
+                <a:solidFill>
+                  <a:srgbClr val="A3A3A3"/>
+                </a:solidFill>
+                <a:latin typeface="Inter"/>
+                <a:ea typeface="Inter"/>
+                <a:cs typeface="Inter"/>
+                <a:sym typeface="Inter"/>
+              </a:rPr>
+              <a:t> </a:t>
+            </a:r>
+            <a:r>
+              <a:rPr lang="en-US" sz="1087" b="0" i="0" u="none" strike="noStrike" cap="none" dirty="0" err="1">
+                <a:solidFill>
+                  <a:srgbClr val="A3A3A3"/>
+                </a:solidFill>
+                <a:latin typeface="Inter"/>
+                <a:ea typeface="Inter"/>
+                <a:cs typeface="Inter"/>
+                <a:sym typeface="Inter"/>
+              </a:rPr>
+              <a:t>prestazioni</a:t>
+            </a:r>
+            <a:r>
+              <a:rPr lang="en-US" sz="1087" b="0" i="0" u="none" strike="noStrike" cap="none" dirty="0">
+                <a:solidFill>
+                  <a:srgbClr val="A3A3A3"/>
+                </a:solidFill>
+                <a:latin typeface="Inter"/>
+                <a:ea typeface="Inter"/>
+                <a:cs typeface="Inter"/>
+                <a:sym typeface="Inter"/>
+              </a:rPr>
+              <a:t> </a:t>
+            </a:r>
+            <a:r>
+              <a:rPr lang="en-US" sz="1087" b="0" i="0" u="none" strike="noStrike" cap="none" dirty="0" err="1">
+                <a:solidFill>
+                  <a:srgbClr val="A3A3A3"/>
+                </a:solidFill>
+                <a:latin typeface="Inter"/>
+                <a:ea typeface="Inter"/>
+                <a:cs typeface="Inter"/>
+                <a:sym typeface="Inter"/>
+              </a:rPr>
+              <a:t>studiato</a:t>
+            </a:r>
+            <a:r>
+              <a:rPr lang="en-US" sz="1087" b="0" i="0" u="none" strike="noStrike" cap="none" dirty="0">
+                <a:solidFill>
+                  <a:srgbClr val="A3A3A3"/>
+                </a:solidFill>
+                <a:latin typeface="Inter"/>
+                <a:ea typeface="Inter"/>
+                <a:cs typeface="Inter"/>
+                <a:sym typeface="Inter"/>
+              </a:rPr>
+              <a:t> per </a:t>
+            </a:r>
+            <a:r>
+              <a:rPr lang="en-US" sz="1087" b="0" i="0" u="none" strike="noStrike" cap="none" dirty="0" err="1">
+                <a:solidFill>
+                  <a:srgbClr val="A3A3A3"/>
+                </a:solidFill>
+                <a:latin typeface="Inter"/>
+                <a:ea typeface="Inter"/>
+                <a:cs typeface="Inter"/>
+                <a:sym typeface="Inter"/>
+              </a:rPr>
+              <a:t>garantire</a:t>
+            </a:r>
+            <a:r>
+              <a:rPr lang="en-US" sz="1087" b="0" i="0" u="none" strike="noStrike" cap="none" dirty="0">
+                <a:solidFill>
+                  <a:srgbClr val="A3A3A3"/>
+                </a:solidFill>
+                <a:latin typeface="Inter"/>
+                <a:ea typeface="Inter"/>
+                <a:cs typeface="Inter"/>
+                <a:sym typeface="Inter"/>
+              </a:rPr>
+              <a:t> </a:t>
+            </a:r>
+            <a:r>
+              <a:rPr lang="en-US" sz="1087" b="0" i="0" u="none" strike="noStrike" cap="none" dirty="0" err="1">
+                <a:solidFill>
+                  <a:srgbClr val="A3A3A3"/>
+                </a:solidFill>
+                <a:latin typeface="Inter"/>
+                <a:ea typeface="Inter"/>
+                <a:cs typeface="Inter"/>
+                <a:sym typeface="Inter"/>
+              </a:rPr>
+              <a:t>un’esperienza</a:t>
+            </a:r>
+            <a:r>
+              <a:rPr lang="en-US" sz="1087" b="0" i="0" u="none" strike="noStrike" cap="none" dirty="0">
+                <a:solidFill>
+                  <a:srgbClr val="A3A3A3"/>
+                </a:solidFill>
+                <a:latin typeface="Inter"/>
+                <a:ea typeface="Inter"/>
+                <a:cs typeface="Inter"/>
+                <a:sym typeface="Inter"/>
+              </a:rPr>
+              <a:t> </a:t>
+            </a:r>
+            <a:r>
+              <a:rPr lang="en-US" sz="1087" b="0" i="0" u="none" strike="noStrike" cap="none" dirty="0" err="1">
+                <a:solidFill>
+                  <a:srgbClr val="A3A3A3"/>
+                </a:solidFill>
+                <a:latin typeface="Inter"/>
+                <a:ea typeface="Inter"/>
+                <a:cs typeface="Inter"/>
+                <a:sym typeface="Inter"/>
+              </a:rPr>
+              <a:t>d’ordine</a:t>
+            </a:r>
+            <a:r>
+              <a:rPr lang="en-US" sz="1087" b="0" i="0" u="none" strike="noStrike" cap="none" dirty="0">
+                <a:solidFill>
+                  <a:srgbClr val="A3A3A3"/>
+                </a:solidFill>
+                <a:latin typeface="Inter"/>
+                <a:ea typeface="Inter"/>
+                <a:cs typeface="Inter"/>
+                <a:sym typeface="Inter"/>
+              </a:rPr>
+              <a:t> </a:t>
+            </a:r>
+            <a:r>
+              <a:rPr lang="en-US" sz="1087" b="0" i="0" u="none" strike="noStrike" cap="none" dirty="0" err="1">
+                <a:solidFill>
+                  <a:srgbClr val="A3A3A3"/>
+                </a:solidFill>
+                <a:latin typeface="Inter"/>
+                <a:ea typeface="Inter"/>
+                <a:cs typeface="Inter"/>
+                <a:sym typeface="Inter"/>
+              </a:rPr>
+              <a:t>fluida</a:t>
+            </a:r>
+            <a:r>
+              <a:rPr lang="en-US" sz="1087" b="0" i="0" u="none" strike="noStrike" cap="none" dirty="0">
+                <a:solidFill>
+                  <a:srgbClr val="A3A3A3"/>
+                </a:solidFill>
+                <a:latin typeface="Inter"/>
+                <a:ea typeface="Inter"/>
+                <a:cs typeface="Inter"/>
+                <a:sym typeface="Inter"/>
+              </a:rPr>
+              <a:t> e intuitive </a:t>
+            </a:r>
+            <a:r>
+              <a:rPr lang="en-US" sz="1087" b="0" i="0" u="none" strike="noStrike" cap="none" dirty="0" err="1">
+                <a:solidFill>
+                  <a:srgbClr val="A3A3A3"/>
+                </a:solidFill>
+                <a:latin typeface="Inter"/>
+                <a:ea typeface="Inter"/>
+                <a:cs typeface="Inter"/>
+                <a:sym typeface="Inter"/>
+              </a:rPr>
+              <a:t>su</a:t>
+            </a:r>
+            <a:r>
+              <a:rPr lang="en-US" sz="1087" b="0" i="0" u="none" strike="noStrike" cap="none" dirty="0">
+                <a:solidFill>
+                  <a:srgbClr val="A3A3A3"/>
+                </a:solidFill>
+                <a:latin typeface="Inter"/>
+                <a:ea typeface="Inter"/>
+                <a:cs typeface="Inter"/>
+                <a:sym typeface="Inter"/>
+              </a:rPr>
+              <a:t> ogni </a:t>
+            </a:r>
+            <a:r>
+              <a:rPr lang="en-US" sz="1087" b="0" i="0" u="none" strike="noStrike" cap="none" dirty="0" err="1">
+                <a:solidFill>
+                  <a:srgbClr val="A3A3A3"/>
+                </a:solidFill>
+                <a:latin typeface="Inter"/>
+                <a:ea typeface="Inter"/>
+                <a:cs typeface="Inter"/>
+                <a:sym typeface="Inter"/>
+              </a:rPr>
+              <a:t>schermo</a:t>
+            </a:r>
+            <a:r>
+              <a:rPr lang="en-US" sz="1087" b="0" i="0" u="none" strike="noStrike" cap="none" dirty="0">
+                <a:solidFill>
+                  <a:srgbClr val="A3A3A3"/>
+                </a:solidFill>
+                <a:latin typeface="Inter"/>
+                <a:ea typeface="Inter"/>
+                <a:cs typeface="Inter"/>
+                <a:sym typeface="Inter"/>
+              </a:rPr>
+              <a:t>.</a:t>
+            </a:r>
+            <a:endParaRPr dirty="0"/>
           </a:p>
         </p:txBody>
       </p:sp>
@@ -13205,7 +13547,7 @@
         <p:spPr>
           <a:xfrm>
             <a:off x="904875" y="571500"/>
-            <a:ext cx="4950618" cy="819150"/>
+            <a:ext cx="4950618" cy="438582"/>
           </a:xfrm>
           <a:prstGeom prst="rect">
             <a:avLst/>
@@ -13231,7 +13573,7 @@
               <a:buNone/>
             </a:pPr>
             <a:r>
-              <a:rPr lang="en-US" sz="2850" b="0" i="0" u="none" strike="noStrike" cap="none">
+              <a:rPr lang="en-US" sz="2850" b="0" i="0" u="none" strike="noStrike" cap="none" dirty="0">
                 <a:solidFill>
                   <a:srgbClr val="FFFFFF"/>
                 </a:solidFill>
@@ -13240,9 +13582,9 @@
                 <a:cs typeface="Outfit Black"/>
                 <a:sym typeface="Outfit Black"/>
               </a:rPr>
-              <a:t>MACRO 4: PROMO &amp; FILOSOFIA</a:t>
-            </a:r>
-            <a:endParaRPr/>
+              <a:t>PROMO &amp; FILOSOFIA</a:t>
+            </a:r>
+            <a:endParaRPr dirty="0"/>
           </a:p>
         </p:txBody>
       </p:sp>
@@ -13255,7 +13597,7 @@
         <p:spPr>
           <a:xfrm>
             <a:off x="762000" y="571500"/>
-            <a:ext cx="47625" cy="819150"/>
+            <a:ext cx="45719" cy="438582"/>
           </a:xfrm>
           <a:prstGeom prst="rect">
             <a:avLst/>
@@ -13330,7 +13672,7 @@
         <p:spPr>
           <a:xfrm>
             <a:off x="762000" y="2624137"/>
-            <a:ext cx="5100637" cy="266700"/>
+            <a:ext cx="5100637" cy="276999"/>
           </a:xfrm>
           <a:prstGeom prst="rect">
             <a:avLst/>
@@ -13356,7 +13698,7 @@
               <a:buNone/>
             </a:pPr>
             <a:r>
-              <a:rPr lang="en-US" sz="1800" b="0" i="0" u="none" strike="noStrike" cap="none">
+              <a:rPr lang="en-US" sz="1800" b="0" i="0" u="none" strike="noStrike" cap="none" dirty="0">
                 <a:solidFill>
                   <a:srgbClr val="FFFFFF"/>
                 </a:solidFill>
@@ -13365,9 +13707,33 @@
                 <a:cs typeface="Outfit ExtraBold"/>
                 <a:sym typeface="Outfit ExtraBold"/>
               </a:rPr>
-              <a:t>ETICA, TERRITORIO E COINVOLGIMENTO</a:t>
-            </a:r>
-            <a:endParaRPr/>
+              <a:t>ETICA</a:t>
+            </a:r>
+            <a:r>
+              <a:rPr lang="en-US" sz="1800" dirty="0">
+                <a:solidFill>
+                  <a:srgbClr val="FFFFFF"/>
+                </a:solidFill>
+                <a:latin typeface="Outfit ExtraBold"/>
+                <a:ea typeface="Outfit ExtraBold"/>
+                <a:cs typeface="Outfit ExtraBold"/>
+                <a:sym typeface="Outfit ExtraBold"/>
+              </a:rPr>
+              <a:t> E </a:t>
+            </a:r>
+            <a:r>
+              <a:rPr lang="en-US" sz="1800" b="0" i="0" u="none" strike="noStrike" cap="none" dirty="0">
+                <a:solidFill>
+                  <a:srgbClr val="FFFFFF"/>
+                </a:solidFill>
+                <a:latin typeface="Outfit ExtraBold"/>
+                <a:ea typeface="Outfit ExtraBold"/>
+                <a:cs typeface="Outfit ExtraBold"/>
+                <a:sym typeface="Outfit ExtraBold"/>
+              </a:rPr>
+              <a:t>TERRITORIO </a:t>
+            </a:r>
+            <a:endParaRPr dirty="0"/>
           </a:p>
         </p:txBody>
       </p:sp>
@@ -13380,7 +13746,7 @@
         <p:spPr>
           <a:xfrm>
             <a:off x="762000" y="3005137"/>
-            <a:ext cx="4857750" cy="457200"/>
+            <a:ext cx="4857750" cy="553998"/>
           </a:xfrm>
           <a:prstGeom prst="rect">
             <a:avLst/>
@@ -13409,7 +13775,7 @@
               <a:buNone/>
             </a:pPr>
             <a:r>
-              <a:rPr lang="en-US" sz="1125" b="0" i="0" u="none" strike="noStrike" cap="none">
+              <a:rPr lang="en-US" sz="1125" b="0" i="0" u="none" strike="noStrike" cap="none" dirty="0" err="1">
                 <a:solidFill>
                   <a:srgbClr val="A3A3A3"/>
                 </a:solidFill>
@@ -13418,22 +13784,158 @@
                 <a:cs typeface="Inter"/>
                 <a:sym typeface="Inter"/>
               </a:rPr>
-              <a:t>Uniamo la convenienza delle promozioni a un forte posizionamento valoriale.</a:t>
-            </a:r>
-            <a:endParaRPr/>
+              <a:t>Uniamo</a:t>
+            </a:r>
+            <a:r>
+              <a:rPr lang="en-US" sz="1125" b="0" i="0" u="none" strike="noStrike" cap="none" dirty="0">
+                <a:solidFill>
+                  <a:srgbClr val="A3A3A3"/>
+                </a:solidFill>
+                <a:latin typeface="Inter"/>
+                <a:ea typeface="Inter"/>
+                <a:cs typeface="Inter"/>
+                <a:sym typeface="Inter"/>
+              </a:rPr>
+              <a:t> la </a:t>
+            </a:r>
+            <a:r>
+              <a:rPr lang="en-US" sz="1125" b="0" i="0" u="none" strike="noStrike" cap="none" dirty="0" err="1">
+                <a:solidFill>
+                  <a:srgbClr val="A3A3A3"/>
+                </a:solidFill>
+                <a:latin typeface="Inter"/>
+                <a:ea typeface="Inter"/>
+                <a:cs typeface="Inter"/>
+                <a:sym typeface="Inter"/>
+              </a:rPr>
+              <a:t>convenienza</a:t>
+            </a:r>
+            <a:r>
+              <a:rPr lang="en-US" sz="1125" b="0" i="0" u="none" strike="noStrike" cap="none" dirty="0">
+                <a:solidFill>
+                  <a:srgbClr val="A3A3A3"/>
+                </a:solidFill>
+                <a:latin typeface="Inter"/>
+                <a:ea typeface="Inter"/>
+                <a:cs typeface="Inter"/>
+                <a:sym typeface="Inter"/>
+              </a:rPr>
+              <a:t> delle </a:t>
+            </a:r>
+            <a:r>
+              <a:rPr lang="en-US" sz="1125" b="0" i="0" u="none" strike="noStrike" cap="none" dirty="0" err="1">
+                <a:solidFill>
+                  <a:srgbClr val="A3A3A3"/>
+                </a:solidFill>
+                <a:latin typeface="Inter"/>
+                <a:ea typeface="Inter"/>
+                <a:cs typeface="Inter"/>
+                <a:sym typeface="Inter"/>
+              </a:rPr>
+              <a:t>promozioni</a:t>
+            </a:r>
+            <a:r>
+              <a:rPr lang="en-US" sz="1125" b="0" i="0" u="none" strike="noStrike" cap="none" dirty="0">
+                <a:solidFill>
+                  <a:srgbClr val="A3A3A3"/>
+                </a:solidFill>
+                <a:latin typeface="Inter"/>
+                <a:ea typeface="Inter"/>
+                <a:cs typeface="Inter"/>
+                <a:sym typeface="Inter"/>
+              </a:rPr>
+              <a:t> a un forte </a:t>
+            </a:r>
+            <a:r>
+              <a:rPr lang="en-US" sz="1125" b="0" i="0" u="none" strike="noStrike" cap="none" dirty="0" err="1">
+                <a:solidFill>
+                  <a:srgbClr val="A3A3A3"/>
+                </a:solidFill>
+                <a:latin typeface="Inter"/>
+                <a:ea typeface="Inter"/>
+                <a:cs typeface="Inter"/>
+                <a:sym typeface="Inter"/>
+              </a:rPr>
+              <a:t>posizionamento</a:t>
+            </a:r>
+            <a:r>
+              <a:rPr lang="en-US" sz="1125" b="0" i="0" u="none" strike="noStrike" cap="none" dirty="0">
+                <a:solidFill>
+                  <a:srgbClr val="A3A3A3"/>
+                </a:solidFill>
+                <a:latin typeface="Inter"/>
+                <a:ea typeface="Inter"/>
+                <a:cs typeface="Inter"/>
+                <a:sym typeface="Inter"/>
+              </a:rPr>
+              <a:t> </a:t>
+            </a:r>
+            <a:r>
+              <a:rPr lang="en-US" sz="1125" b="0" i="0" u="none" strike="noStrike" cap="none" dirty="0" err="1">
+                <a:solidFill>
+                  <a:srgbClr val="A3A3A3"/>
+                </a:solidFill>
+                <a:latin typeface="Inter"/>
+                <a:ea typeface="Inter"/>
+                <a:cs typeface="Inter"/>
+                <a:sym typeface="Inter"/>
+              </a:rPr>
+              <a:t>valoriale</a:t>
+            </a:r>
+            <a:r>
+              <a:rPr lang="en-US" sz="1125" b="0" i="0" u="none" strike="noStrike" cap="none" dirty="0">
+                <a:solidFill>
+                  <a:srgbClr val="A3A3A3"/>
+                </a:solidFill>
+                <a:latin typeface="Inter"/>
+                <a:ea typeface="Inter"/>
+                <a:cs typeface="Inter"/>
+                <a:sym typeface="Inter"/>
+              </a:rPr>
+              <a:t>. </a:t>
+            </a:r>
+            <a:r>
+              <a:rPr lang="en-US" sz="1125" b="0" i="0" u="none" strike="noStrike" cap="none" dirty="0">
+                <a:solidFill>
+                  <a:srgbClr val="298D68"/>
+                </a:solidFill>
+                <a:latin typeface="Inter"/>
+                <a:ea typeface="Inter"/>
+                <a:cs typeface="Inter"/>
+                <a:sym typeface="Inter"/>
+              </a:rPr>
+              <a:t>Da </a:t>
+            </a:r>
+            <a:r>
+              <a:rPr lang="en-US" sz="1125" b="0" i="0" u="none" strike="noStrike" cap="none" dirty="0" err="1">
+                <a:solidFill>
+                  <a:srgbClr val="298D68"/>
+                </a:solidFill>
+                <a:latin typeface="Inter"/>
+                <a:ea typeface="Inter"/>
+                <a:cs typeface="Inter"/>
+                <a:sym typeface="Inter"/>
+              </a:rPr>
+              <a:t>rivedere</a:t>
+            </a:r>
+            <a:endParaRPr dirty="0">
+              <a:solidFill>
+                <a:srgbClr val="298D68"/>
+              </a:solidFill>
+            </a:endParaRPr>
           </a:p>
         </p:txBody>
       </p:sp>
       <p:sp>
         <p:nvSpPr>
-          <p:cNvPr id="248" name="Google Shape;248;p21"/>
+          <p:cNvPr id="249" name="Google Shape;249;p21"/>
           <p:cNvSpPr txBox="1"/>
           <p:nvPr/>
         </p:nvSpPr>
         <p:spPr>
           <a:xfrm>
-            <a:off x="1095375" y="3652837"/>
-            <a:ext cx="4524375" cy="428625"/>
+            <a:off x="1117996" y="3669343"/>
+            <a:ext cx="4524375" cy="779059"/>
           </a:xfrm>
           <a:prstGeom prst="rect">
             <a:avLst/>
@@ -13462,7 +13964,7 @@
               <a:buNone/>
             </a:pPr>
             <a:r>
-              <a:rPr lang="en-US" sz="1125" b="1" i="0" u="none" strike="noStrike" cap="none">
+              <a:rPr lang="en-US" sz="1125" b="1" i="0" u="none" strike="noStrike" cap="none" dirty="0">
                 <a:solidFill>
                   <a:srgbClr val="B3B3B3"/>
                 </a:solidFill>
@@ -13471,10 +13973,10 @@
                 <a:cs typeface="Inter"/>
                 <a:sym typeface="Inter"/>
               </a:rPr>
-              <a:t>Passaporto Digitale:</a:t>
-            </a:r>
-            <a:r>
-              <a:rPr lang="en-US" sz="1125" b="0" i="0" u="none" strike="noStrike" cap="none">
+              <a:t>Le </a:t>
+            </a:r>
+            <a:r>
+              <a:rPr lang="en-US" sz="1125" b="1" i="0" u="none" strike="noStrike" cap="none" dirty="0" err="1">
                 <a:solidFill>
                   <a:srgbClr val="B3B3B3"/>
                 </a:solidFill>
@@ -13483,22 +13985,394 @@
                 <a:cs typeface="Inter"/>
                 <a:sym typeface="Inter"/>
               </a:rPr>
-              <a:t> Accumulo di punti reali completando "missioni" nei nostri store fisici o ordinando online.</a:t>
-            </a:r>
-            <a:endParaRPr/>
+              <a:t>persone</a:t>
+            </a:r>
+            <a:r>
+              <a:rPr lang="en-US" sz="1125" b="1" i="0" u="none" strike="noStrike" cap="none" dirty="0">
+                <a:solidFill>
+                  <a:srgbClr val="B3B3B3"/>
+                </a:solidFill>
+                <a:latin typeface="Inter"/>
+                <a:ea typeface="Inter"/>
+                <a:cs typeface="Inter"/>
+                <a:sym typeface="Inter"/>
+              </a:rPr>
+              <a:t> prima del </a:t>
+            </a:r>
+            <a:r>
+              <a:rPr lang="en-US" sz="1125" b="1" i="0" u="none" strike="noStrike" cap="none" dirty="0" err="1">
+                <a:solidFill>
+                  <a:srgbClr val="B3B3B3"/>
+                </a:solidFill>
+                <a:latin typeface="Inter"/>
+                <a:ea typeface="Inter"/>
+                <a:cs typeface="Inter"/>
+                <a:sym typeface="Inter"/>
+              </a:rPr>
+              <a:t>prodotto</a:t>
+            </a:r>
+            <a:r>
+              <a:rPr lang="en-US" sz="1125" b="1" i="0" u="none" strike="noStrike" cap="none" dirty="0">
+                <a:solidFill>
+                  <a:srgbClr val="B3B3B3"/>
+                </a:solidFill>
+                <a:latin typeface="Inter"/>
+                <a:ea typeface="Inter"/>
+                <a:cs typeface="Inter"/>
+                <a:sym typeface="Inter"/>
+              </a:rPr>
+              <a:t>: </a:t>
+            </a:r>
+            <a:r>
+              <a:rPr lang="en-US" sz="1125" i="0" u="none" strike="noStrike" cap="none" dirty="0" err="1">
+                <a:solidFill>
+                  <a:srgbClr val="B3B3B3"/>
+                </a:solidFill>
+                <a:latin typeface="Inter"/>
+                <a:ea typeface="Inter"/>
+                <a:cs typeface="Inter"/>
+                <a:sym typeface="Inter"/>
+              </a:rPr>
+              <a:t>Costruiamo</a:t>
+            </a:r>
+            <a:r>
+              <a:rPr lang="en-US" sz="1125" i="0" u="none" strike="noStrike" cap="none" dirty="0">
+                <a:solidFill>
+                  <a:srgbClr val="B3B3B3"/>
+                </a:solidFill>
+                <a:latin typeface="Inter"/>
+                <a:ea typeface="Inter"/>
+                <a:cs typeface="Inter"/>
+                <a:sym typeface="Inter"/>
+              </a:rPr>
+              <a:t> </a:t>
+            </a:r>
+            <a:r>
+              <a:rPr lang="en-US" sz="1125" i="0" u="none" strike="noStrike" cap="none" dirty="0" err="1">
+                <a:solidFill>
+                  <a:srgbClr val="B3B3B3"/>
+                </a:solidFill>
+                <a:latin typeface="Inter"/>
+                <a:ea typeface="Inter"/>
+                <a:cs typeface="Inter"/>
+                <a:sym typeface="Inter"/>
+              </a:rPr>
+              <a:t>valore</a:t>
+            </a:r>
+            <a:r>
+              <a:rPr lang="en-US" sz="1125" i="0" u="none" strike="noStrike" cap="none" dirty="0">
+                <a:solidFill>
+                  <a:srgbClr val="B3B3B3"/>
+                </a:solidFill>
+                <a:latin typeface="Inter"/>
+                <a:ea typeface="Inter"/>
+                <a:cs typeface="Inter"/>
+                <a:sym typeface="Inter"/>
+              </a:rPr>
+              <a:t> </a:t>
+            </a:r>
+            <a:r>
+              <a:rPr lang="en-US" sz="1125" i="0" u="none" strike="noStrike" cap="none" dirty="0" err="1">
+                <a:solidFill>
+                  <a:srgbClr val="B3B3B3"/>
+                </a:solidFill>
+                <a:latin typeface="Inter"/>
+                <a:ea typeface="Inter"/>
+                <a:cs typeface="Inter"/>
+                <a:sym typeface="Inter"/>
+              </a:rPr>
+              <a:t>attraverso</a:t>
+            </a:r>
+            <a:r>
+              <a:rPr lang="en-US" sz="1125" i="0" u="none" strike="noStrike" cap="none" dirty="0">
+                <a:solidFill>
+                  <a:srgbClr val="B3B3B3"/>
+                </a:solidFill>
+                <a:latin typeface="Inter"/>
+                <a:ea typeface="Inter"/>
+                <a:cs typeface="Inter"/>
+                <a:sym typeface="Inter"/>
+              </a:rPr>
+              <a:t> </a:t>
+            </a:r>
+            <a:r>
+              <a:rPr lang="en-US" sz="1125" i="0" u="none" strike="noStrike" cap="none" dirty="0" err="1">
+                <a:solidFill>
+                  <a:srgbClr val="B3B3B3"/>
+                </a:solidFill>
+                <a:latin typeface="Inter"/>
+                <a:ea typeface="Inter"/>
+                <a:cs typeface="Inter"/>
+                <a:sym typeface="Inter"/>
+              </a:rPr>
+              <a:t>filiere</a:t>
+            </a:r>
+            <a:r>
+              <a:rPr lang="en-US" sz="1125" i="0" u="none" strike="noStrike" cap="none" dirty="0">
+                <a:solidFill>
+                  <a:srgbClr val="B3B3B3"/>
+                </a:solidFill>
+                <a:latin typeface="Inter"/>
+                <a:ea typeface="Inter"/>
+                <a:cs typeface="Inter"/>
+                <a:sym typeface="Inter"/>
+              </a:rPr>
+              <a:t> </a:t>
+            </a:r>
+            <a:r>
+              <a:rPr lang="en-US" sz="1125" i="0" u="none" strike="noStrike" cap="none" dirty="0" err="1">
+                <a:solidFill>
+                  <a:srgbClr val="B3B3B3"/>
+                </a:solidFill>
+                <a:latin typeface="Inter"/>
+                <a:ea typeface="Inter"/>
+                <a:cs typeface="Inter"/>
+                <a:sym typeface="Inter"/>
+              </a:rPr>
+              <a:t>trasparenti</a:t>
+            </a:r>
+            <a:r>
+              <a:rPr lang="en-US" sz="1125" i="0" u="none" strike="noStrike" cap="none" dirty="0">
+                <a:solidFill>
+                  <a:srgbClr val="B3B3B3"/>
+                </a:solidFill>
+                <a:latin typeface="Inter"/>
+                <a:ea typeface="Inter"/>
+                <a:cs typeface="Inter"/>
+                <a:sym typeface="Inter"/>
+              </a:rPr>
+              <a:t>, </a:t>
+            </a:r>
+            <a:r>
+              <a:rPr lang="en-US" sz="1125" i="0" u="none" strike="noStrike" cap="none" dirty="0" err="1">
+                <a:solidFill>
+                  <a:srgbClr val="B3B3B3"/>
+                </a:solidFill>
+                <a:latin typeface="Inter"/>
+                <a:ea typeface="Inter"/>
+                <a:cs typeface="Inter"/>
+                <a:sym typeface="Inter"/>
+              </a:rPr>
+              <a:t>patership</a:t>
+            </a:r>
+            <a:r>
+              <a:rPr lang="en-US" sz="1125" i="0" u="none" strike="noStrike" cap="none" dirty="0">
+                <a:solidFill>
+                  <a:srgbClr val="B3B3B3"/>
+                </a:solidFill>
+                <a:latin typeface="Inter"/>
+                <a:ea typeface="Inter"/>
+                <a:cs typeface="Inter"/>
+                <a:sym typeface="Inter"/>
+              </a:rPr>
+              <a:t> </a:t>
+            </a:r>
+            <a:r>
+              <a:rPr lang="en-US" sz="1125" i="0" u="none" strike="noStrike" cap="none" dirty="0" err="1">
+                <a:solidFill>
+                  <a:srgbClr val="B3B3B3"/>
+                </a:solidFill>
+                <a:latin typeface="Inter"/>
+                <a:ea typeface="Inter"/>
+                <a:cs typeface="Inter"/>
+                <a:sym typeface="Inter"/>
+              </a:rPr>
+              <a:t>durature</a:t>
+            </a:r>
+            <a:r>
+              <a:rPr lang="en-US" sz="1125" i="0" u="none" strike="noStrike" cap="none" dirty="0">
+                <a:solidFill>
+                  <a:srgbClr val="B3B3B3"/>
+                </a:solidFill>
+                <a:latin typeface="Inter"/>
+                <a:ea typeface="Inter"/>
+                <a:cs typeface="Inter"/>
+                <a:sym typeface="Inter"/>
+              </a:rPr>
+              <a:t> con I </a:t>
+            </a:r>
+            <a:r>
+              <a:rPr lang="en-US" sz="1125" i="0" u="none" strike="noStrike" cap="none" dirty="0" err="1">
+                <a:solidFill>
+                  <a:srgbClr val="B3B3B3"/>
+                </a:solidFill>
+                <a:latin typeface="Inter"/>
+                <a:ea typeface="Inter"/>
+                <a:cs typeface="Inter"/>
+                <a:sym typeface="Inter"/>
+              </a:rPr>
+              <a:t>produttori</a:t>
+            </a:r>
+            <a:r>
+              <a:rPr lang="en-US" sz="1125" i="0" u="none" strike="noStrike" cap="none" dirty="0">
+                <a:solidFill>
+                  <a:srgbClr val="B3B3B3"/>
+                </a:solidFill>
+                <a:latin typeface="Inter"/>
+                <a:ea typeface="Inter"/>
+                <a:cs typeface="Inter"/>
+                <a:sym typeface="Inter"/>
+              </a:rPr>
+              <a:t> </a:t>
+            </a:r>
+            <a:r>
+              <a:rPr lang="en-US" sz="1125" i="0" u="none" strike="noStrike" cap="none" dirty="0" err="1">
+                <a:solidFill>
+                  <a:srgbClr val="B3B3B3"/>
+                </a:solidFill>
+                <a:latin typeface="Inter"/>
+                <a:ea typeface="Inter"/>
+                <a:cs typeface="Inter"/>
+                <a:sym typeface="Inter"/>
+              </a:rPr>
+              <a:t>locali</a:t>
+            </a:r>
+            <a:r>
+              <a:rPr lang="en-US" sz="1125" i="0" u="none" strike="noStrike" cap="none" dirty="0">
+                <a:solidFill>
+                  <a:srgbClr val="B3B3B3"/>
+                </a:solidFill>
+                <a:latin typeface="Inter"/>
+                <a:ea typeface="Inter"/>
+                <a:cs typeface="Inter"/>
+                <a:sym typeface="Inter"/>
+              </a:rPr>
+              <a:t> e </a:t>
+            </a:r>
+            <a:r>
+              <a:rPr lang="en-US" sz="1125" i="0" u="none" strike="noStrike" cap="none" dirty="0" err="1">
+                <a:solidFill>
+                  <a:srgbClr val="B3B3B3"/>
+                </a:solidFill>
+                <a:latin typeface="Inter"/>
+                <a:ea typeface="Inter"/>
+                <a:cs typeface="Inter"/>
+                <a:sym typeface="Inter"/>
+              </a:rPr>
+              <a:t>una</a:t>
+            </a:r>
+            <a:r>
+              <a:rPr lang="en-US" sz="1125" i="0" u="none" strike="noStrike" cap="none" dirty="0">
+                <a:solidFill>
+                  <a:srgbClr val="B3B3B3"/>
+                </a:solidFill>
+                <a:latin typeface="Inter"/>
+                <a:ea typeface="Inter"/>
+                <a:cs typeface="Inter"/>
+                <a:sym typeface="Inter"/>
+              </a:rPr>
+              <a:t> </a:t>
+            </a:r>
+            <a:r>
+              <a:rPr lang="en-US" sz="1125" i="0" u="none" strike="noStrike" cap="none" dirty="0" err="1">
+                <a:solidFill>
+                  <a:srgbClr val="B3B3B3"/>
+                </a:solidFill>
+                <a:latin typeface="Inter"/>
+                <a:ea typeface="Inter"/>
+                <a:cs typeface="Inter"/>
+                <a:sym typeface="Inter"/>
+              </a:rPr>
+              <a:t>selezione</a:t>
+            </a:r>
+            <a:r>
+              <a:rPr lang="en-US" sz="1125" i="0" u="none" strike="noStrike" cap="none" dirty="0">
+                <a:solidFill>
+                  <a:srgbClr val="B3B3B3"/>
+                </a:solidFill>
+                <a:latin typeface="Inter"/>
+                <a:ea typeface="Inter"/>
+                <a:cs typeface="Inter"/>
+                <a:sym typeface="Inter"/>
+              </a:rPr>
+              <a:t> </a:t>
+            </a:r>
+            <a:r>
+              <a:rPr lang="en-US" sz="1125" i="0" u="none" strike="noStrike" cap="none" dirty="0" err="1">
+                <a:solidFill>
+                  <a:srgbClr val="B3B3B3"/>
+                </a:solidFill>
+                <a:latin typeface="Inter"/>
+                <a:ea typeface="Inter"/>
+                <a:cs typeface="Inter"/>
+                <a:sym typeface="Inter"/>
+              </a:rPr>
+              <a:t>guidata</a:t>
+            </a:r>
+            <a:r>
+              <a:rPr lang="en-US" sz="1125" i="0" u="none" strike="noStrike" cap="none" dirty="0">
+                <a:solidFill>
+                  <a:srgbClr val="B3B3B3"/>
+                </a:solidFill>
+                <a:latin typeface="Inter"/>
+                <a:ea typeface="Inter"/>
+                <a:cs typeface="Inter"/>
+                <a:sym typeface="Inter"/>
+              </a:rPr>
+              <a:t> </a:t>
+            </a:r>
+            <a:r>
+              <a:rPr lang="en-US" sz="1125" i="0" u="none" strike="noStrike" cap="none" dirty="0" err="1">
+                <a:solidFill>
+                  <a:srgbClr val="B3B3B3"/>
+                </a:solidFill>
+                <a:latin typeface="Inter"/>
+                <a:ea typeface="Inter"/>
+                <a:cs typeface="Inter"/>
+                <a:sym typeface="Inter"/>
+              </a:rPr>
+              <a:t>dalla</a:t>
+            </a:r>
+            <a:r>
+              <a:rPr lang="en-US" sz="1125" i="0" u="none" strike="noStrike" cap="none" dirty="0">
+                <a:solidFill>
+                  <a:srgbClr val="B3B3B3"/>
+                </a:solidFill>
+                <a:latin typeface="Inter"/>
+                <a:ea typeface="Inter"/>
+                <a:cs typeface="Inter"/>
+                <a:sym typeface="Inter"/>
+              </a:rPr>
+              <a:t> </a:t>
+            </a:r>
+            <a:r>
+              <a:rPr lang="en-US" sz="1125" i="0" u="none" strike="noStrike" cap="none" dirty="0" err="1">
+                <a:solidFill>
+                  <a:srgbClr val="B3B3B3"/>
+                </a:solidFill>
+                <a:latin typeface="Inter"/>
+                <a:ea typeface="Inter"/>
+                <a:cs typeface="Inter"/>
+                <a:sym typeface="Inter"/>
+              </a:rPr>
+              <a:t>qualità</a:t>
+            </a:r>
+            <a:r>
+              <a:rPr lang="en-US" sz="1125" i="0" u="none" strike="noStrike" cap="none" dirty="0">
+                <a:solidFill>
+                  <a:srgbClr val="B3B3B3"/>
+                </a:solidFill>
+                <a:latin typeface="Inter"/>
+                <a:ea typeface="Inter"/>
+                <a:cs typeface="Inter"/>
+                <a:sym typeface="Inter"/>
+              </a:rPr>
+              <a:t>, non dal Prezzo.</a:t>
+            </a:r>
+            <a:endParaRPr b="1" dirty="0"/>
           </a:p>
         </p:txBody>
       </p:sp>
       <p:sp>
         <p:nvSpPr>
-          <p:cNvPr id="249" name="Google Shape;249;p21"/>
+          <p:cNvPr id="250" name="Google Shape;250;p21"/>
           <p:cNvSpPr txBox="1"/>
           <p:nvPr/>
         </p:nvSpPr>
         <p:spPr>
           <a:xfrm>
-            <a:off x="1095375" y="4233862"/>
-            <a:ext cx="4524375" cy="428625"/>
+            <a:off x="1117996" y="4624386"/>
+            <a:ext cx="4524375" cy="779059"/>
           </a:xfrm>
           <a:prstGeom prst="rect">
             <a:avLst/>
@@ -13527,101 +14401,34 @@
               <a:buNone/>
             </a:pPr>
             <a:r>
-              <a:rPr lang="en-US" sz="1125" b="1" i="0" u="none" strike="noStrike" cap="none">
+              <a:rPr lang="it-IT" sz="1125" b="1" dirty="0">
                 <a:solidFill>
                   <a:srgbClr val="B3B3B3"/>
                 </a:solidFill>
                 <a:latin typeface="Inter"/>
                 <a:ea typeface="Inter"/>
-                <a:cs typeface="Inter"/>
-                <a:sym typeface="Inter"/>
-              </a:rPr>
-              <a:t>Combo Etiche:</a:t>
-            </a:r>
-            <a:r>
-              <a:rPr lang="en-US" sz="1125" b="0" i="0" u="none" strike="noStrike" cap="none">
+                <a:sym typeface="Inter"/>
+              </a:rPr>
+              <a:t>Ogni store racconta il luogo in cui nasce: </a:t>
+            </a:r>
+            <a:r>
+              <a:rPr lang="it-IT" sz="1125" dirty="0">
                 <a:solidFill>
                   <a:srgbClr val="B3B3B3"/>
                 </a:solidFill>
                 <a:latin typeface="Inter"/>
                 <a:ea typeface="Inter"/>
-                <a:cs typeface="Inter"/>
-                <a:sym typeface="Inter"/>
-              </a:rPr>
-              <a:t> Menu speciali con parte del ricavato devoluto ad associazioni no-profit del territorio.</a:t>
-            </a:r>
-            <a:endParaRPr/>
-          </a:p>
-        </p:txBody>
-      </p:sp>
-      <p:sp>
-        <p:nvSpPr>
-          <p:cNvPr id="250" name="Google Shape;250;p21"/>
-          <p:cNvSpPr txBox="1"/>
-          <p:nvPr/>
-        </p:nvSpPr>
-        <p:spPr>
-          <a:xfrm>
-            <a:off x="1095375" y="4814887"/>
-            <a:ext cx="4524375" cy="428625"/>
-          </a:xfrm>
-          <a:prstGeom prst="rect">
-            <a:avLst/>
-          </a:prstGeom>
-          <a:noFill/>
-          <a:ln>
-            <a:noFill/>
-          </a:ln>
-        </p:spPr>
-        <p:txBody>
-          <a:bodyPr spcFirstLastPara="1" wrap="square" lIns="0" tIns="0" rIns="0" bIns="0" anchor="t" anchorCtr="0">
-            <a:spAutoFit/>
-          </a:bodyPr>
-          <a:lstStyle/>
-          <a:p>
-            <a:pPr marL="0" marR="0" lvl="0" indent="0" algn="l" rtl="0">
-              <a:lnSpc>
-                <a:spcPct val="149955"/>
-              </a:lnSpc>
-              <a:spcBef>
-                <a:spcPts val="0"/>
-              </a:spcBef>
-              <a:spcAft>
-                <a:spcPts val="0"/>
-              </a:spcAft>
-              <a:buNone/>
-            </a:pPr>
-            <a:r>
-              <a:rPr lang="en-US" sz="1125" b="1" i="0" u="none" strike="noStrike" cap="none">
-                <a:solidFill>
-                  <a:srgbClr val="B3B3B3"/>
-                </a:solidFill>
-                <a:latin typeface="Inter"/>
-                <a:ea typeface="Inter"/>
-                <a:cs typeface="Inter"/>
-                <a:sym typeface="Inter"/>
-              </a:rPr>
-              <a:t>Food Truck Network:</a:t>
-            </a:r>
-            <a:r>
-              <a:rPr lang="en-US" sz="1125" b="0" i="0" u="none" strike="noStrike" cap="none">
-                <a:solidFill>
-                  <a:srgbClr val="B3B3B3"/>
-                </a:solidFill>
-                <a:latin typeface="Inter"/>
-                <a:ea typeface="Inter"/>
-                <a:cs typeface="Inter"/>
-                <a:sym typeface="Inter"/>
-              </a:rPr>
-              <a:t> Stand itineranti nei grandi eventi per convertire i clienti fisici all'utilizzo dell'app mobile.</a:t>
-            </a:r>
-            <a:endParaRPr/>
+                <a:sym typeface="Inter"/>
+              </a:rPr>
+              <a:t>ogni apertura valorizza eccellenze locali, trasformando ingredienti del territorio in panini e piatti unici che non potrebbero esistere altrove.</a:t>
+            </a:r>
+            <a:endParaRPr lang="it-IT" dirty="0"/>
           </a:p>
         </p:txBody>
       </p:sp>
       <p:pic>
         <p:nvPicPr>
-          <p:cNvPr id="251" name="Google Shape;251;p21" descr="image.png"/>
+          <p:cNvPr id="252" name="Google Shape;252;p21" descr="image.png"/>
           <p:cNvPicPr preferRelativeResize="0"/>
           <p:nvPr/>
         </p:nvPicPr>
@@ -13634,8 +14441,8 @@
         </p:blipFill>
         <p:spPr>
           <a:xfrm>
-            <a:off x="762000" y="3676650"/>
-            <a:ext cx="152400" cy="180975"/>
+            <a:off x="776287" y="3702680"/>
+            <a:ext cx="190500" cy="180975"/>
           </a:xfrm>
           <a:prstGeom prst="rect">
             <a:avLst/>
@@ -13648,7 +14455,7 @@
       </p:pic>
       <p:pic>
         <p:nvPicPr>
-          <p:cNvPr id="252" name="Google Shape;252;p21" descr="image.png"/>
+          <p:cNvPr id="253" name="Google Shape;253;p21" descr="image.png"/>
           <p:cNvPicPr preferRelativeResize="0"/>
           <p:nvPr/>
         </p:nvPicPr>
@@ -13661,34 +14468,7 @@
         </p:blipFill>
         <p:spPr>
           <a:xfrm>
-            <a:off x="762000" y="4257675"/>
-            <a:ext cx="190500" cy="180975"/>
-          </a:xfrm>
-          <a:prstGeom prst="rect">
-            <a:avLst/>
-          </a:prstGeom>
-          <a:noFill/>
-          <a:ln>
-            <a:noFill/>
-          </a:ln>
-        </p:spPr>
-      </p:pic>
-      <p:pic>
-        <p:nvPicPr>
-          <p:cNvPr id="253" name="Google Shape;253;p21" descr="image.png"/>
-          <p:cNvPicPr preferRelativeResize="0"/>
-          <p:nvPr/>
-        </p:nvPicPr>
-        <p:blipFill rotWithShape="1">
-          <a:blip r:embed="rId7">
-            <a:alphaModFix/>
-          </a:blip>
-          <a:srcRect/>
-          <a:stretch/>
-        </p:blipFill>
-        <p:spPr>
-          <a:xfrm>
-            <a:off x="762000" y="4838700"/>
+            <a:off x="760396" y="4657723"/>
             <a:ext cx="219075" cy="180975"/>
           </a:xfrm>
           <a:prstGeom prst="rect">
@@ -13974,7 +14754,7 @@
         <p:spPr>
           <a:xfrm>
             <a:off x="1104900" y="3405336"/>
-            <a:ext cx="4730591" cy="219075"/>
+            <a:ext cx="4730591" cy="230832"/>
           </a:xfrm>
           <a:prstGeom prst="rect">
             <a:avLst/>
@@ -14000,18 +14780,16 @@
               <a:buNone/>
             </a:pPr>
             <a:r>
-              <a:rPr lang="en-US" sz="1500" b="0" i="0" u="none" strike="noStrike" cap="none">
+              <a:rPr lang="en-US" sz="1500" dirty="0">
                 <a:solidFill>
                   <a:srgbClr val="F95707"/>
                 </a:solidFill>
                 <a:latin typeface="Outfit ExtraBold"/>
-                <a:ea typeface="Outfit ExtraBold"/>
-                <a:cs typeface="Outfit ExtraBold"/>
                 <a:sym typeface="Outfit ExtraBold"/>
               </a:rPr>
-              <a:t>OMNICANALITÀ REALE</a:t>
-            </a:r>
-            <a:endParaRPr/>
+              <a:t>DIFFERENZIAZIONE COMPETITIVA</a:t>
+            </a:r>
+            <a:endParaRPr dirty="0"/>
           </a:p>
         </p:txBody>
       </p:sp>
@@ -14024,7 +14802,7 @@
         <p:spPr>
           <a:xfrm>
             <a:off x="1104900" y="3757761"/>
-            <a:ext cx="4505325" cy="662582"/>
+            <a:ext cx="4505325" cy="802912"/>
           </a:xfrm>
           <a:prstGeom prst="rect">
             <a:avLst/>
@@ -14053,18 +14831,314 @@
               <a:buNone/>
             </a:pPr>
             <a:r>
-              <a:rPr lang="en-US" sz="1087" b="0" i="0" u="none" strike="noStrike" cap="none">
+              <a:rPr lang="en-US" sz="1087" dirty="0" err="1">
                 <a:solidFill>
                   <a:srgbClr val="A3A3A3"/>
                 </a:solidFill>
                 <a:latin typeface="Inter"/>
                 <a:ea typeface="Inter"/>
-                <a:cs typeface="Inter"/>
-                <a:sym typeface="Inter"/>
-              </a:rPr>
-              <a:t>Nessun silos di dati. Che il cliente ordini dal sito, dall'app, via social o consumi direttamente al tavolo in store, lo storico degli ordini e i punti fedeltà del suo Passaporto Digitale sono sincronizzati in tempo reale.</a:t>
-            </a:r>
-            <a:endParaRPr/>
+                <a:sym typeface="Inter"/>
+              </a:rPr>
+              <a:t>Trasformiamo</a:t>
+            </a:r>
+            <a:r>
+              <a:rPr lang="en-US" sz="1087" dirty="0">
+                <a:solidFill>
+                  <a:srgbClr val="A3A3A3"/>
+                </a:solidFill>
+                <a:latin typeface="Inter"/>
+                <a:ea typeface="Inter"/>
+                <a:sym typeface="Inter"/>
+              </a:rPr>
+              <a:t> ogni punto </a:t>
+            </a:r>
+            <a:r>
+              <a:rPr lang="en-US" sz="1087" dirty="0" err="1">
+                <a:solidFill>
+                  <a:srgbClr val="A3A3A3"/>
+                </a:solidFill>
+                <a:latin typeface="Inter"/>
+                <a:ea typeface="Inter"/>
+                <a:sym typeface="Inter"/>
+              </a:rPr>
+              <a:t>vendita</a:t>
+            </a:r>
+            <a:r>
+              <a:rPr lang="en-US" sz="1087" dirty="0">
+                <a:solidFill>
+                  <a:srgbClr val="A3A3A3"/>
+                </a:solidFill>
+                <a:latin typeface="Inter"/>
+                <a:ea typeface="Inter"/>
+                <a:sym typeface="Inter"/>
+              </a:rPr>
+              <a:t> in </a:t>
+            </a:r>
+            <a:r>
+              <a:rPr lang="en-US" sz="1087" dirty="0" err="1">
+                <a:solidFill>
+                  <a:srgbClr val="A3A3A3"/>
+                </a:solidFill>
+                <a:latin typeface="Inter"/>
+                <a:ea typeface="Inter"/>
+                <a:sym typeface="Inter"/>
+              </a:rPr>
+              <a:t>un’esperienza</a:t>
+            </a:r>
+            <a:r>
+              <a:rPr lang="en-US" sz="1087" dirty="0">
+                <a:solidFill>
+                  <a:srgbClr val="A3A3A3"/>
+                </a:solidFill>
+                <a:latin typeface="Inter"/>
+                <a:ea typeface="Inter"/>
+                <a:sym typeface="Inter"/>
+              </a:rPr>
+              <a:t> a </a:t>
+            </a:r>
+            <a:r>
+              <a:rPr lang="en-US" sz="1087" dirty="0" err="1">
+                <a:solidFill>
+                  <a:srgbClr val="A3A3A3"/>
+                </a:solidFill>
+                <a:latin typeface="Inter"/>
+                <a:ea typeface="Inter"/>
+                <a:sym typeface="Inter"/>
+              </a:rPr>
+              <a:t>sè</a:t>
+            </a:r>
+            <a:r>
+              <a:rPr lang="en-US" sz="1087" dirty="0">
+                <a:solidFill>
+                  <a:srgbClr val="A3A3A3"/>
+                </a:solidFill>
+                <a:latin typeface="Inter"/>
+                <a:ea typeface="Inter"/>
+                <a:sym typeface="Inter"/>
+              </a:rPr>
+              <a:t>, </a:t>
+            </a:r>
+            <a:r>
+              <a:rPr lang="en-US" sz="1087" dirty="0" err="1">
+                <a:solidFill>
+                  <a:srgbClr val="A3A3A3"/>
+                </a:solidFill>
+                <a:latin typeface="Inter"/>
+                <a:ea typeface="Inter"/>
+                <a:sym typeface="Inter"/>
+              </a:rPr>
+              <a:t>grazie</a:t>
+            </a:r>
+            <a:r>
+              <a:rPr lang="en-US" sz="1087" dirty="0">
+                <a:solidFill>
+                  <a:srgbClr val="A3A3A3"/>
+                </a:solidFill>
+                <a:latin typeface="Inter"/>
+                <a:ea typeface="Inter"/>
+                <a:sym typeface="Inter"/>
+              </a:rPr>
+              <a:t> a </a:t>
+            </a:r>
+            <a:r>
+              <a:rPr lang="en-US" sz="1087" dirty="0" err="1">
+                <a:solidFill>
+                  <a:srgbClr val="A3A3A3"/>
+                </a:solidFill>
+                <a:latin typeface="Inter"/>
+                <a:ea typeface="Inter"/>
+                <a:sym typeface="Inter"/>
+              </a:rPr>
+              <a:t>un’offerta</a:t>
+            </a:r>
+            <a:r>
+              <a:rPr lang="en-US" sz="1087" dirty="0">
+                <a:solidFill>
+                  <a:srgbClr val="A3A3A3"/>
+                </a:solidFill>
+                <a:latin typeface="Inter"/>
+                <a:ea typeface="Inter"/>
+                <a:sym typeface="Inter"/>
+              </a:rPr>
+              <a:t> </a:t>
+            </a:r>
+            <a:r>
+              <a:rPr lang="en-US" sz="1087" dirty="0" err="1">
+                <a:solidFill>
+                  <a:srgbClr val="A3A3A3"/>
+                </a:solidFill>
+                <a:latin typeface="Inter"/>
+                <a:ea typeface="Inter"/>
+                <a:sym typeface="Inter"/>
+              </a:rPr>
+              <a:t>che</a:t>
+            </a:r>
+            <a:r>
+              <a:rPr lang="en-US" sz="1087" dirty="0">
+                <a:solidFill>
+                  <a:srgbClr val="A3A3A3"/>
+                </a:solidFill>
+                <a:latin typeface="Inter"/>
+                <a:ea typeface="Inter"/>
+                <a:sym typeface="Inter"/>
+              </a:rPr>
+              <a:t> integra le </a:t>
+            </a:r>
+            <a:r>
+              <a:rPr lang="en-US" sz="1087" dirty="0" err="1">
+                <a:solidFill>
+                  <a:srgbClr val="A3A3A3"/>
+                </a:solidFill>
+                <a:latin typeface="Inter"/>
+                <a:ea typeface="Inter"/>
+                <a:sym typeface="Inter"/>
+              </a:rPr>
+              <a:t>eccellenze</a:t>
+            </a:r>
+            <a:r>
+              <a:rPr lang="en-US" sz="1087" dirty="0">
+                <a:solidFill>
+                  <a:srgbClr val="A3A3A3"/>
+                </a:solidFill>
+                <a:latin typeface="Inter"/>
+                <a:ea typeface="Inter"/>
+                <a:sym typeface="Inter"/>
+              </a:rPr>
+              <a:t> </a:t>
+            </a:r>
+            <a:r>
+              <a:rPr lang="en-US" sz="1087" dirty="0" err="1">
+                <a:solidFill>
+                  <a:srgbClr val="A3A3A3"/>
+                </a:solidFill>
+                <a:latin typeface="Inter"/>
+                <a:ea typeface="Inter"/>
+                <a:sym typeface="Inter"/>
+              </a:rPr>
+              <a:t>locali</a:t>
+            </a:r>
+            <a:r>
+              <a:rPr lang="en-US" sz="1087" dirty="0">
+                <a:solidFill>
+                  <a:srgbClr val="A3A3A3"/>
+                </a:solidFill>
+                <a:latin typeface="Inter"/>
+                <a:ea typeface="Inter"/>
+                <a:sym typeface="Inter"/>
+              </a:rPr>
+              <a:t> </a:t>
+            </a:r>
+            <a:r>
+              <a:rPr lang="en-US" sz="1087" dirty="0" err="1">
+                <a:solidFill>
+                  <a:srgbClr val="A3A3A3"/>
+                </a:solidFill>
+                <a:latin typeface="Inter"/>
+                <a:ea typeface="Inter"/>
+                <a:sym typeface="Inter"/>
+              </a:rPr>
+              <a:t>mantenendo</a:t>
+            </a:r>
+            <a:r>
+              <a:rPr lang="en-US" sz="1087" dirty="0">
+                <a:solidFill>
+                  <a:srgbClr val="A3A3A3"/>
+                </a:solidFill>
+                <a:latin typeface="Inter"/>
+                <a:ea typeface="Inter"/>
+                <a:sym typeface="Inter"/>
+              </a:rPr>
+              <a:t> </a:t>
+            </a:r>
+            <a:r>
+              <a:rPr lang="en-US" sz="1087" dirty="0" err="1">
+                <a:solidFill>
+                  <a:srgbClr val="A3A3A3"/>
+                </a:solidFill>
+                <a:latin typeface="Inter"/>
+                <a:ea typeface="Inter"/>
+                <a:sym typeface="Inter"/>
+              </a:rPr>
+              <a:t>un’identità</a:t>
+            </a:r>
+            <a:r>
+              <a:rPr lang="en-US" sz="1087" dirty="0">
+                <a:solidFill>
+                  <a:srgbClr val="A3A3A3"/>
+                </a:solidFill>
+                <a:latin typeface="Inter"/>
+                <a:ea typeface="Inter"/>
+                <a:sym typeface="Inter"/>
+              </a:rPr>
+              <a:t> di brand unica </a:t>
+            </a:r>
+            <a:r>
+              <a:rPr lang="en-US" sz="1087" dirty="0" err="1">
+                <a:solidFill>
+                  <a:srgbClr val="A3A3A3"/>
+                </a:solidFill>
+                <a:latin typeface="Inter"/>
+                <a:ea typeface="Inter"/>
+                <a:sym typeface="Inter"/>
+              </a:rPr>
+              <a:t>nel</a:t>
+            </a:r>
+            <a:r>
+              <a:rPr lang="en-US" sz="1087" dirty="0">
+                <a:solidFill>
+                  <a:srgbClr val="A3A3A3"/>
+                </a:solidFill>
+                <a:latin typeface="Inter"/>
+                <a:ea typeface="Inter"/>
+                <a:sym typeface="Inter"/>
+              </a:rPr>
+              <a:t> </a:t>
+            </a:r>
+            <a:r>
+              <a:rPr lang="en-US" sz="1087" dirty="0" err="1">
+                <a:solidFill>
+                  <a:srgbClr val="A3A3A3"/>
+                </a:solidFill>
+                <a:latin typeface="Inter"/>
+                <a:ea typeface="Inter"/>
+                <a:sym typeface="Inter"/>
+              </a:rPr>
+              <a:t>suo</a:t>
+            </a:r>
+            <a:r>
+              <a:rPr lang="en-US" sz="1087" dirty="0">
+                <a:solidFill>
+                  <a:srgbClr val="A3A3A3"/>
+                </a:solidFill>
+                <a:latin typeface="Inter"/>
+                <a:ea typeface="Inter"/>
+                <a:sym typeface="Inter"/>
+              </a:rPr>
+              <a:t> </a:t>
+            </a:r>
+            <a:r>
+              <a:rPr lang="en-US" sz="1087" dirty="0" err="1">
+                <a:solidFill>
+                  <a:srgbClr val="A3A3A3"/>
+                </a:solidFill>
+                <a:latin typeface="Inter"/>
+                <a:ea typeface="Inter"/>
+                <a:sym typeface="Inter"/>
+              </a:rPr>
+              <a:t>genere</a:t>
+            </a:r>
+            <a:r>
+              <a:rPr lang="en-US" sz="1087" dirty="0">
+                <a:solidFill>
+                  <a:srgbClr val="A3A3A3"/>
+                </a:solidFill>
+                <a:latin typeface="Inter"/>
+                <a:ea typeface="Inter"/>
+                <a:sym typeface="Inter"/>
+              </a:rPr>
+              <a:t>.</a:t>
+            </a:r>
+            <a:endParaRPr dirty="0"/>
           </a:p>
         </p:txBody>
       </p:sp>
@@ -14077,7 +15151,7 @@
         <p:spPr>
           <a:xfrm>
             <a:off x="6581775" y="3405336"/>
-            <a:ext cx="4730591" cy="219075"/>
+            <a:ext cx="4730591" cy="230832"/>
           </a:xfrm>
           <a:prstGeom prst="rect">
             <a:avLst/>
@@ -14103,7 +15177,7 @@
               <a:buNone/>
             </a:pPr>
             <a:r>
-              <a:rPr lang="en-US" sz="1500" b="0" i="0" u="none" strike="noStrike" cap="none">
+              <a:rPr lang="en-US" sz="1500" b="0" i="0" u="none" strike="noStrike" cap="none" dirty="0">
                 <a:solidFill>
                   <a:srgbClr val="F95707"/>
                 </a:solidFill>
@@ -14112,9 +15186,9 @@
                 <a:cs typeface="Outfit ExtraBold"/>
                 <a:sym typeface="Outfit ExtraBold"/>
               </a:rPr>
-              <a:t>IPER-PERSONALIZZAZIONE</a:t>
-            </a:r>
-            <a:endParaRPr/>
+              <a:t>FIDELIZZAZIONE DEL CLIENTE</a:t>
+            </a:r>
+            <a:endParaRPr dirty="0"/>
           </a:p>
         </p:txBody>
       </p:sp>
@@ -14127,7 +15201,7 @@
         <p:spPr>
           <a:xfrm>
             <a:off x="6581775" y="3757761"/>
-            <a:ext cx="4505325" cy="662582"/>
+            <a:ext cx="4505325" cy="802912"/>
           </a:xfrm>
           <a:prstGeom prst="rect">
             <a:avLst/>
@@ -14156,7 +15230,7 @@
               <a:buNone/>
             </a:pPr>
             <a:r>
-              <a:rPr lang="en-US" sz="1087" b="0" i="0" u="none" strike="noStrike" cap="none">
+              <a:rPr lang="en-US" sz="1087" b="0" i="0" u="none" strike="noStrike" cap="none" dirty="0" err="1">
                 <a:solidFill>
                   <a:srgbClr val="A3A3A3"/>
                 </a:solidFill>
@@ -14165,9 +15239,309 @@
                 <a:cs typeface="Inter"/>
                 <a:sym typeface="Inter"/>
               </a:rPr>
-              <a:t>L'app analizza le preferenze, le intolleranze e gli acquisti passati per suggerire in automatico abbinamenti ideali, salse personalizzate e sconti dedicati esclusivamente ai gusti specifici di ciascun utente.</a:t>
-            </a:r>
-            <a:endParaRPr/>
+              <a:t>L’utilizzo</a:t>
+            </a:r>
+            <a:r>
+              <a:rPr lang="en-US" sz="1087" b="0" i="0" u="none" strike="noStrike" cap="none" dirty="0">
+                <a:solidFill>
+                  <a:srgbClr val="A3A3A3"/>
+                </a:solidFill>
+                <a:latin typeface="Inter"/>
+                <a:ea typeface="Inter"/>
+                <a:cs typeface="Inter"/>
+                <a:sym typeface="Inter"/>
+              </a:rPr>
+              <a:t> di </a:t>
+            </a:r>
+            <a:r>
+              <a:rPr lang="en-US" sz="1087" b="0" i="0" u="none" strike="noStrike" cap="none" dirty="0" err="1">
+                <a:solidFill>
+                  <a:srgbClr val="A3A3A3"/>
+                </a:solidFill>
+                <a:latin typeface="Inter"/>
+                <a:ea typeface="Inter"/>
+                <a:cs typeface="Inter"/>
+                <a:sym typeface="Inter"/>
+              </a:rPr>
+              <a:t>prodotti</a:t>
+            </a:r>
+            <a:r>
+              <a:rPr lang="en-US" sz="1087" b="0" i="0" u="none" strike="noStrike" cap="none" dirty="0">
+                <a:solidFill>
+                  <a:srgbClr val="A3A3A3"/>
+                </a:solidFill>
+                <a:latin typeface="Inter"/>
+                <a:ea typeface="Inter"/>
+                <a:cs typeface="Inter"/>
+                <a:sym typeface="Inter"/>
+              </a:rPr>
+              <a:t> del </a:t>
+            </a:r>
+            <a:r>
+              <a:rPr lang="en-US" sz="1087" b="0" i="0" u="none" strike="noStrike" cap="none" dirty="0" err="1">
+                <a:solidFill>
+                  <a:srgbClr val="A3A3A3"/>
+                </a:solidFill>
+                <a:latin typeface="Inter"/>
+                <a:ea typeface="Inter"/>
+                <a:cs typeface="Inter"/>
+                <a:sym typeface="Inter"/>
+              </a:rPr>
+              <a:t>territorio</a:t>
+            </a:r>
+            <a:r>
+              <a:rPr lang="en-US" sz="1087" b="0" i="0" u="none" strike="noStrike" cap="none" dirty="0">
+                <a:solidFill>
+                  <a:srgbClr val="A3A3A3"/>
+                </a:solidFill>
+                <a:latin typeface="Inter"/>
+                <a:ea typeface="Inter"/>
+                <a:cs typeface="Inter"/>
+                <a:sym typeface="Inter"/>
+              </a:rPr>
+              <a:t> genera </a:t>
+            </a:r>
+            <a:r>
+              <a:rPr lang="en-US" sz="1087" b="0" i="0" u="none" strike="noStrike" cap="none" dirty="0" err="1">
+                <a:solidFill>
+                  <a:srgbClr val="A3A3A3"/>
+                </a:solidFill>
+                <a:latin typeface="Inter"/>
+                <a:ea typeface="Inter"/>
+                <a:cs typeface="Inter"/>
+                <a:sym typeface="Inter"/>
+              </a:rPr>
+              <a:t>autenticità</a:t>
+            </a:r>
+            <a:r>
+              <a:rPr lang="en-US" sz="1087" dirty="0">
+                <a:solidFill>
+                  <a:srgbClr val="A3A3A3"/>
+                </a:solidFill>
+                <a:latin typeface="Inter"/>
+                <a:ea typeface="Inter"/>
+                <a:cs typeface="Inter"/>
+                <a:sym typeface="Inter"/>
+              </a:rPr>
+              <a:t>, </a:t>
+            </a:r>
+            <a:r>
+              <a:rPr lang="en-US" sz="1087" dirty="0" err="1">
+                <a:solidFill>
+                  <a:srgbClr val="A3A3A3"/>
+                </a:solidFill>
+                <a:latin typeface="Inter"/>
+                <a:ea typeface="Inter"/>
+                <a:cs typeface="Inter"/>
+                <a:sym typeface="Inter"/>
+              </a:rPr>
+              <a:t>aumenta</a:t>
+            </a:r>
+            <a:r>
+              <a:rPr lang="en-US" sz="1087" dirty="0">
+                <a:solidFill>
+                  <a:srgbClr val="A3A3A3"/>
+                </a:solidFill>
+                <a:latin typeface="Inter"/>
+                <a:ea typeface="Inter"/>
+                <a:cs typeface="Inter"/>
+                <a:sym typeface="Inter"/>
+              </a:rPr>
+              <a:t> il </a:t>
+            </a:r>
+            <a:r>
+              <a:rPr lang="en-US" sz="1087" dirty="0" err="1">
+                <a:solidFill>
+                  <a:srgbClr val="A3A3A3"/>
+                </a:solidFill>
+                <a:latin typeface="Inter"/>
+                <a:ea typeface="Inter"/>
+                <a:cs typeface="Inter"/>
+                <a:sym typeface="Inter"/>
+              </a:rPr>
+              <a:t>valore</a:t>
+            </a:r>
+            <a:r>
+              <a:rPr lang="en-US" sz="1087" dirty="0">
+                <a:solidFill>
+                  <a:srgbClr val="A3A3A3"/>
+                </a:solidFill>
+                <a:latin typeface="Inter"/>
+                <a:ea typeface="Inter"/>
+                <a:cs typeface="Inter"/>
+                <a:sym typeface="Inter"/>
+              </a:rPr>
+              <a:t> </a:t>
+            </a:r>
+            <a:r>
+              <a:rPr lang="en-US" sz="1087" dirty="0" err="1">
+                <a:solidFill>
+                  <a:srgbClr val="A3A3A3"/>
+                </a:solidFill>
+                <a:latin typeface="Inter"/>
+                <a:ea typeface="Inter"/>
+                <a:cs typeface="Inter"/>
+                <a:sym typeface="Inter"/>
+              </a:rPr>
+              <a:t>percepito</a:t>
+            </a:r>
+            <a:r>
+              <a:rPr lang="en-US" sz="1087" dirty="0">
+                <a:solidFill>
+                  <a:srgbClr val="A3A3A3"/>
+                </a:solidFill>
+                <a:latin typeface="Inter"/>
+                <a:ea typeface="Inter"/>
+                <a:cs typeface="Inter"/>
+                <a:sym typeface="Inter"/>
+              </a:rPr>
+              <a:t> e </a:t>
+            </a:r>
+            <a:r>
+              <a:rPr lang="en-US" sz="1087" dirty="0" err="1">
+                <a:solidFill>
+                  <a:srgbClr val="A3A3A3"/>
+                </a:solidFill>
+                <a:latin typeface="Inter"/>
+                <a:ea typeface="Inter"/>
+                <a:cs typeface="Inter"/>
+                <a:sym typeface="Inter"/>
+              </a:rPr>
+              <a:t>crea</a:t>
+            </a:r>
+            <a:r>
+              <a:rPr lang="en-US" sz="1087" dirty="0">
+                <a:solidFill>
+                  <a:srgbClr val="A3A3A3"/>
+                </a:solidFill>
+                <a:latin typeface="Inter"/>
+                <a:ea typeface="Inter"/>
+                <a:cs typeface="Inter"/>
+                <a:sym typeface="Inter"/>
+              </a:rPr>
+              <a:t> un </a:t>
+            </a:r>
+            <a:r>
+              <a:rPr lang="en-US" sz="1087" dirty="0" err="1">
+                <a:solidFill>
+                  <a:srgbClr val="A3A3A3"/>
+                </a:solidFill>
+                <a:latin typeface="Inter"/>
+                <a:ea typeface="Inter"/>
+                <a:cs typeface="Inter"/>
+                <a:sym typeface="Inter"/>
+              </a:rPr>
+              <a:t>legame</a:t>
+            </a:r>
+            <a:r>
+              <a:rPr lang="en-US" sz="1087" dirty="0">
+                <a:solidFill>
+                  <a:srgbClr val="A3A3A3"/>
+                </a:solidFill>
+                <a:latin typeface="Inter"/>
+                <a:ea typeface="Inter"/>
+                <a:cs typeface="Inter"/>
+                <a:sym typeface="Inter"/>
+              </a:rPr>
+              <a:t> emotive con la </a:t>
+            </a:r>
+            <a:r>
+              <a:rPr lang="en-US" sz="1087" dirty="0" err="1">
+                <a:solidFill>
+                  <a:srgbClr val="A3A3A3"/>
+                </a:solidFill>
+                <a:latin typeface="Inter"/>
+                <a:ea typeface="Inter"/>
+                <a:cs typeface="Inter"/>
+                <a:sym typeface="Inter"/>
+              </a:rPr>
+              <a:t>comunità</a:t>
+            </a:r>
+            <a:r>
+              <a:rPr lang="en-US" sz="1087" dirty="0">
+                <a:solidFill>
+                  <a:srgbClr val="A3A3A3"/>
+                </a:solidFill>
+                <a:latin typeface="Inter"/>
+                <a:ea typeface="Inter"/>
+                <a:cs typeface="Inter"/>
+                <a:sym typeface="Inter"/>
+              </a:rPr>
+              <a:t> locale, </a:t>
+            </a:r>
+            <a:r>
+              <a:rPr lang="en-US" sz="1087" dirty="0" err="1">
+                <a:solidFill>
+                  <a:srgbClr val="A3A3A3"/>
+                </a:solidFill>
+                <a:latin typeface="Inter"/>
+                <a:ea typeface="Inter"/>
+                <a:cs typeface="Inter"/>
+                <a:sym typeface="Inter"/>
+              </a:rPr>
+              <a:t>favorendo</a:t>
+            </a:r>
+            <a:r>
+              <a:rPr lang="en-US" sz="1087" dirty="0">
+                <a:solidFill>
+                  <a:srgbClr val="A3A3A3"/>
+                </a:solidFill>
+                <a:latin typeface="Inter"/>
+                <a:ea typeface="Inter"/>
+                <a:cs typeface="Inter"/>
+                <a:sym typeface="Inter"/>
+              </a:rPr>
+              <a:t> la </a:t>
+            </a:r>
+            <a:r>
+              <a:rPr lang="en-US" sz="1087" dirty="0" err="1">
+                <a:solidFill>
+                  <a:srgbClr val="A3A3A3"/>
+                </a:solidFill>
+                <a:latin typeface="Inter"/>
+                <a:ea typeface="Inter"/>
+                <a:cs typeface="Inter"/>
+                <a:sym typeface="Inter"/>
+              </a:rPr>
+              <a:t>fidelizzazione</a:t>
+            </a:r>
+            <a:r>
+              <a:rPr lang="en-US" sz="1087" dirty="0">
+                <a:solidFill>
+                  <a:srgbClr val="A3A3A3"/>
+                </a:solidFill>
+                <a:latin typeface="Inter"/>
+                <a:ea typeface="Inter"/>
+                <a:cs typeface="Inter"/>
+                <a:sym typeface="Inter"/>
+              </a:rPr>
+              <a:t> e il </a:t>
+            </a:r>
+            <a:r>
+              <a:rPr lang="en-US" sz="1087" dirty="0" err="1">
+                <a:solidFill>
+                  <a:srgbClr val="A3A3A3"/>
+                </a:solidFill>
+                <a:latin typeface="Inter"/>
+                <a:ea typeface="Inter"/>
+                <a:cs typeface="Inter"/>
+                <a:sym typeface="Inter"/>
+              </a:rPr>
+              <a:t>passaparola</a:t>
+            </a:r>
+            <a:r>
+              <a:rPr lang="en-US" sz="1087" dirty="0">
+                <a:solidFill>
+                  <a:srgbClr val="A3A3A3"/>
+                </a:solidFill>
+                <a:latin typeface="Inter"/>
+                <a:ea typeface="Inter"/>
+                <a:cs typeface="Inter"/>
+                <a:sym typeface="Inter"/>
+              </a:rPr>
+              <a:t>.</a:t>
+            </a:r>
+            <a:endParaRPr dirty="0"/>
           </a:p>
         </p:txBody>
       </p:sp>
@@ -15174,12 +16548,14 @@
       </p:pic>
       <p:pic>
         <p:nvPicPr>
-          <p:cNvPr id="298" name="Google Shape;298;p24" descr="image.png"/>
+          <p:cNvPr id="298" name="Google Shape;298;p24" descr="image.png">
+            <a:hlinkClick r:id="rId4"/>
+          </p:cNvPr>
           <p:cNvPicPr preferRelativeResize="0"/>
           <p:nvPr/>
         </p:nvPicPr>
         <p:blipFill rotWithShape="1">
-          <a:blip r:embed="rId4">
+          <a:blip r:embed="rId5">
             <a:alphaModFix/>
           </a:blip>
           <a:srcRect/>
@@ -15208,7 +16584,7 @@
         <p:spPr>
           <a:xfrm>
             <a:off x="2095500" y="2435572"/>
-            <a:ext cx="8001000" cy="590550"/>
+            <a:ext cx="8001000" cy="623248"/>
           </a:xfrm>
           <a:prstGeom prst="rect">
             <a:avLst/>
@@ -15234,7 +16610,7 @@
               <a:buNone/>
             </a:pPr>
             <a:r>
-              <a:rPr lang="en-US" sz="4050" b="0" i="0" u="none" strike="noStrike" cap="none">
+              <a:rPr lang="en-US" sz="4050" b="0" i="0" u="none" strike="noStrike" cap="none" dirty="0">
                 <a:solidFill>
                   <a:srgbClr val="FFFFFF"/>
                 </a:solidFill>
@@ -15246,7 +16622,7 @@
               <a:t>IL FUTURO È </a:t>
             </a:r>
             <a:r>
-              <a:rPr lang="en-US" sz="4050" b="0" i="0" u="none" strike="noStrike" cap="none">
+              <a:rPr lang="en-US" sz="4050" b="0" i="0" u="none" strike="noStrike" cap="none" dirty="0">
                 <a:solidFill>
                   <a:srgbClr val="F95707"/>
                 </a:solidFill>
@@ -15257,7 +16633,7 @@
               </a:rPr>
               <a:t>DIGITALE.</a:t>
             </a:r>
-            <a:endParaRPr/>
+            <a:endParaRPr dirty="0"/>
           </a:p>
         </p:txBody>
       </p:sp>
@@ -15270,7 +16646,7 @@
         <p:spPr>
           <a:xfrm>
             <a:off x="2286000" y="3168997"/>
-            <a:ext cx="7620000" cy="548580"/>
+            <a:ext cx="7620000" cy="664797"/>
           </a:xfrm>
           <a:prstGeom prst="rect">
             <a:avLst/>
@@ -15299,7 +16675,7 @@
               <a:buNone/>
             </a:pPr>
             <a:r>
-              <a:rPr lang="en-US" sz="1350" b="0" i="0" u="none" strike="noStrike" cap="none">
+              <a:rPr lang="en-US" sz="1350" b="0" i="0" u="none" strike="noStrike" cap="none" dirty="0">
                 <a:solidFill>
                   <a:srgbClr val="A3A3A3"/>
                 </a:solidFill>
@@ -15308,9 +16684,201 @@
                 <a:cs typeface="Inter"/>
                 <a:sym typeface="Inter"/>
               </a:rPr>
-              <a:t>Grazie per l'attenzione. Unisciti alla rivoluzione mobile di Just Burgers e scopri come stiamo ridefinendo l'esperienza del fast-food artigianale.</a:t>
-            </a:r>
-            <a:endParaRPr/>
+              <a:t>Grazie per </a:t>
+            </a:r>
+            <a:r>
+              <a:rPr lang="en-US" sz="1350" b="0" i="0" u="none" strike="noStrike" cap="none" dirty="0" err="1">
+                <a:solidFill>
+                  <a:srgbClr val="A3A3A3"/>
+                </a:solidFill>
+                <a:latin typeface="Inter"/>
+                <a:ea typeface="Inter"/>
+                <a:cs typeface="Inter"/>
+                <a:sym typeface="Inter"/>
+              </a:rPr>
+              <a:t>l'attenzione</a:t>
+            </a:r>
+            <a:r>
+              <a:rPr lang="en-US" sz="1350" b="0" i="0" u="none" strike="noStrike" cap="none" dirty="0">
+                <a:solidFill>
+                  <a:srgbClr val="A3A3A3"/>
+                </a:solidFill>
+                <a:latin typeface="Inter"/>
+                <a:ea typeface="Inter"/>
+                <a:cs typeface="Inter"/>
+                <a:sym typeface="Inter"/>
+              </a:rPr>
+              <a:t>. </a:t>
+            </a:r>
+            <a:r>
+              <a:rPr lang="en-US" sz="1350" b="0" i="0" u="none" strike="noStrike" cap="none" dirty="0" err="1">
+                <a:solidFill>
+                  <a:srgbClr val="A3A3A3"/>
+                </a:solidFill>
+                <a:latin typeface="Inter"/>
+                <a:ea typeface="Inter"/>
+                <a:cs typeface="Inter"/>
+                <a:sym typeface="Inter"/>
+              </a:rPr>
+              <a:t>Unisciti</a:t>
+            </a:r>
+            <a:r>
+              <a:rPr lang="en-US" sz="1350" b="0" i="0" u="none" strike="noStrike" cap="none" dirty="0">
+                <a:solidFill>
+                  <a:srgbClr val="A3A3A3"/>
+                </a:solidFill>
+                <a:latin typeface="Inter"/>
+                <a:ea typeface="Inter"/>
+                <a:cs typeface="Inter"/>
+                <a:sym typeface="Inter"/>
+              </a:rPr>
+              <a:t> alla </a:t>
+            </a:r>
+            <a:r>
+              <a:rPr lang="en-US" sz="1350" b="0" i="0" u="none" strike="noStrike" cap="none" dirty="0" err="1">
+                <a:solidFill>
+                  <a:srgbClr val="A3A3A3"/>
+                </a:solidFill>
+                <a:latin typeface="Inter"/>
+                <a:ea typeface="Inter"/>
+                <a:cs typeface="Inter"/>
+                <a:sym typeface="Inter"/>
+              </a:rPr>
+              <a:t>rivoluzione</a:t>
+            </a:r>
+            <a:r>
+              <a:rPr lang="en-US" sz="1350" b="0" i="0" u="none" strike="noStrike" cap="none" dirty="0">
+                <a:solidFill>
+                  <a:srgbClr val="A3A3A3"/>
+                </a:solidFill>
+                <a:latin typeface="Inter"/>
+                <a:ea typeface="Inter"/>
+                <a:cs typeface="Inter"/>
+                <a:sym typeface="Inter"/>
+              </a:rPr>
+              <a:t> mobile di Just Burgers e </a:t>
+            </a:r>
+            <a:r>
+              <a:rPr lang="en-US" sz="1350" b="0" i="0" u="none" strike="noStrike" cap="none" dirty="0" err="1">
+                <a:solidFill>
+                  <a:srgbClr val="A3A3A3"/>
+                </a:solidFill>
+                <a:latin typeface="Inter"/>
+                <a:ea typeface="Inter"/>
+                <a:cs typeface="Inter"/>
+                <a:sym typeface="Inter"/>
+              </a:rPr>
+              <a:t>scopri</a:t>
+            </a:r>
+            <a:r>
+              <a:rPr lang="en-US" sz="1350" b="0" i="0" u="none" strike="noStrike" cap="none" dirty="0">
+                <a:solidFill>
+                  <a:srgbClr val="A3A3A3"/>
+                </a:solidFill>
+                <a:latin typeface="Inter"/>
+                <a:ea typeface="Inter"/>
+                <a:cs typeface="Inter"/>
+                <a:sym typeface="Inter"/>
+              </a:rPr>
+              <a:t> come </a:t>
+            </a:r>
+            <a:r>
+              <a:rPr lang="en-US" sz="1350" b="0" i="0" u="none" strike="noStrike" cap="none" dirty="0" err="1">
+                <a:solidFill>
+                  <a:srgbClr val="A3A3A3"/>
+                </a:solidFill>
+                <a:latin typeface="Inter"/>
+                <a:ea typeface="Inter"/>
+                <a:cs typeface="Inter"/>
+                <a:sym typeface="Inter"/>
+              </a:rPr>
+              <a:t>stiamo</a:t>
+            </a:r>
+            <a:r>
+              <a:rPr lang="en-US" sz="1350" b="0" i="0" u="none" strike="noStrike" cap="none" dirty="0">
+                <a:solidFill>
+                  <a:srgbClr val="A3A3A3"/>
+                </a:solidFill>
+                <a:latin typeface="Inter"/>
+                <a:ea typeface="Inter"/>
+                <a:cs typeface="Inter"/>
+                <a:sym typeface="Inter"/>
+              </a:rPr>
+              <a:t> </a:t>
+            </a:r>
+            <a:r>
+              <a:rPr lang="en-US" sz="1350" b="0" i="0" u="none" strike="noStrike" cap="none" dirty="0" err="1">
+                <a:solidFill>
+                  <a:srgbClr val="A3A3A3"/>
+                </a:solidFill>
+                <a:latin typeface="Inter"/>
+                <a:ea typeface="Inter"/>
+                <a:cs typeface="Inter"/>
+                <a:sym typeface="Inter"/>
+              </a:rPr>
+              <a:t>ridefinendo</a:t>
+            </a:r>
+            <a:r>
+              <a:rPr lang="en-US" sz="1350" b="0" i="0" u="none" strike="noStrike" cap="none" dirty="0">
+                <a:solidFill>
+                  <a:srgbClr val="A3A3A3"/>
+                </a:solidFill>
+                <a:latin typeface="Inter"/>
+                <a:ea typeface="Inter"/>
+                <a:cs typeface="Inter"/>
+                <a:sym typeface="Inter"/>
+              </a:rPr>
+              <a:t> </a:t>
+            </a:r>
+            <a:r>
+              <a:rPr lang="en-US" sz="1350" b="0" i="0" u="none" strike="noStrike" cap="none" dirty="0" err="1">
+                <a:solidFill>
+                  <a:srgbClr val="A3A3A3"/>
+                </a:solidFill>
+                <a:latin typeface="Inter"/>
+                <a:ea typeface="Inter"/>
+                <a:cs typeface="Inter"/>
+                <a:sym typeface="Inter"/>
+              </a:rPr>
+              <a:t>l'esperienza</a:t>
+            </a:r>
+            <a:r>
+              <a:rPr lang="en-US" sz="1350" b="0" i="0" u="none" strike="noStrike" cap="none" dirty="0">
+                <a:solidFill>
+                  <a:srgbClr val="A3A3A3"/>
+                </a:solidFill>
+                <a:latin typeface="Inter"/>
+                <a:ea typeface="Inter"/>
+                <a:cs typeface="Inter"/>
+                <a:sym typeface="Inter"/>
+              </a:rPr>
+              <a:t> del fast-food </a:t>
+            </a:r>
+            <a:r>
+              <a:rPr lang="en-US" sz="1350" b="0" i="0" u="none" strike="noStrike" cap="none" dirty="0" err="1">
+                <a:solidFill>
+                  <a:srgbClr val="A3A3A3"/>
+                </a:solidFill>
+                <a:latin typeface="Inter"/>
+                <a:ea typeface="Inter"/>
+                <a:cs typeface="Inter"/>
+                <a:sym typeface="Inter"/>
+              </a:rPr>
+              <a:t>artigianale</a:t>
+            </a:r>
+            <a:r>
+              <a:rPr lang="en-US" sz="1350" dirty="0">
+                <a:solidFill>
+                  <a:srgbClr val="A3A3A3"/>
+                </a:solidFill>
+                <a:latin typeface="Inter"/>
+                <a:ea typeface="Inter"/>
+                <a:cs typeface="Inter"/>
+                <a:sym typeface="Inter"/>
+              </a:rPr>
+              <a:t>.</a:t>
+            </a:r>
+            <a:endParaRPr dirty="0"/>
           </a:p>
         </p:txBody>
       </p:sp>
@@ -15321,7 +16889,7 @@
           <p:nvPr/>
         </p:nvPicPr>
         <p:blipFill rotWithShape="1">
-          <a:blip r:embed="rId5">
+          <a:blip r:embed="rId6">
             <a:alphaModFix/>
           </a:blip>
           <a:srcRect/>
@@ -15341,6 +16909,42 @@
           </a:ln>
         </p:spPr>
       </p:pic>
+      <p:sp>
+        <p:nvSpPr>
+          <p:cNvPr id="3" name="CasellaDiTesto 2">
+            <a:extLst>
+              <a:ext uri="{FF2B5EF4-FFF2-40B4-BE49-F238E27FC236}">
+                <a16:creationId xmlns:a16="http://schemas.microsoft.com/office/drawing/2014/main" id="{9D882C17-407D-1D59-7A89-D0148B18BD88}"/>
+              </a:ext>
+            </a:extLst>
+          </p:cNvPr>
+          <p:cNvSpPr txBox="1"/>
+          <p:nvPr/>
+        </p:nvSpPr>
+        <p:spPr>
+          <a:xfrm>
+            <a:off x="3006894" y="1307602"/>
+            <a:ext cx="6178062" cy="307777"/>
+          </a:xfrm>
+          <a:prstGeom prst="rect">
+            <a:avLst/>
+          </a:prstGeom>
+          <a:noFill/>
+        </p:spPr>
+        <p:txBody>
+          <a:bodyPr wrap="square">
+            <a:spAutoFit/>
+          </a:bodyPr>
+          <a:lstStyle/>
+          <a:p>
+            <a:endParaRPr lang="it-IT" dirty="0">
+              <a:solidFill>
+                <a:srgbClr val="F5F5F0"/>
+              </a:solidFill>
+            </a:endParaRPr>
+          </a:p>
+        </p:txBody>
+      </p:sp>
     </p:spTree>
   </p:cSld>
   <p:clrMapOvr>
@@ -15381,8 +16985,8 @@
         </p:blipFill>
         <p:spPr>
           <a:xfrm>
-            <a:off x="0" y="0"/>
-            <a:ext cx="12192000" cy="6858000"/>
+            <a:off x="-111211" y="-160639"/>
+            <a:ext cx="12303211" cy="7166919"/>
           </a:xfrm>
           <a:prstGeom prst="rect">
             <a:avLst/>
@@ -15409,7 +17013,7 @@
         <p:spPr>
           <a:xfrm>
             <a:off x="771525" y="1882229"/>
-            <a:ext cx="3397299" cy="3836491"/>
+            <a:ext cx="3397299" cy="2998690"/>
           </a:xfrm>
           <a:prstGeom prst="rect">
             <a:avLst/>
@@ -15435,8 +17039,8 @@
         </p:blipFill>
         <p:spPr>
           <a:xfrm>
-            <a:off x="4397424" y="1882229"/>
-            <a:ext cx="3397299" cy="3836491"/>
+            <a:off x="4397424" y="1882230"/>
+            <a:ext cx="3397299" cy="2998690"/>
           </a:xfrm>
           <a:prstGeom prst="rect">
             <a:avLst/>
@@ -15462,8 +17066,8 @@
         </p:blipFill>
         <p:spPr>
           <a:xfrm>
-            <a:off x="8023324" y="1882229"/>
-            <a:ext cx="3397299" cy="3836491"/>
+            <a:off x="8023324" y="1882230"/>
+            <a:ext cx="3397299" cy="2998690"/>
           </a:xfrm>
           <a:prstGeom prst="rect">
             <a:avLst/>
@@ -15476,7 +17080,7 @@
       </p:pic>
       <p:pic>
         <p:nvPicPr>
-          <p:cNvPr id="97" name="Google Shape;97;p14" descr="image.png"/>
+          <p:cNvPr id="98" name="Google Shape;98;p14" descr="image.png"/>
           <p:cNvPicPr preferRelativeResize="0"/>
           <p:nvPr/>
         </p:nvPicPr>
@@ -15489,8 +17093,8 @@
         </p:blipFill>
         <p:spPr>
           <a:xfrm>
-            <a:off x="1066800" y="3101429"/>
-            <a:ext cx="2806749" cy="1089570"/>
+            <a:off x="1066652" y="3120081"/>
+            <a:ext cx="2877065" cy="1501346"/>
           </a:xfrm>
           <a:prstGeom prst="rect">
             <a:avLst/>
@@ -15503,34 +17107,7 @@
       </p:pic>
       <p:pic>
         <p:nvPicPr>
-          <p:cNvPr id="98" name="Google Shape;98;p14" descr="image.png"/>
-          <p:cNvPicPr preferRelativeResize="0"/>
-          <p:nvPr/>
-        </p:nvPicPr>
-        <p:blipFill rotWithShape="1">
-          <a:blip r:embed="rId8">
-            <a:alphaModFix/>
-          </a:blip>
-          <a:srcRect/>
-          <a:stretch/>
-        </p:blipFill>
-        <p:spPr>
-          <a:xfrm>
-            <a:off x="1066800" y="4333875"/>
-            <a:ext cx="2806749" cy="1089570"/>
-          </a:xfrm>
-          <a:prstGeom prst="rect">
-            <a:avLst/>
-          </a:prstGeom>
-          <a:noFill/>
-          <a:ln>
-            <a:noFill/>
-          </a:ln>
-        </p:spPr>
-      </p:pic>
-      <p:pic>
-        <p:nvPicPr>
-          <p:cNvPr id="99" name="Google Shape;99;p14" descr="image.png"/>
+          <p:cNvPr id="100" name="Google Shape;100;p14" descr="image.png"/>
           <p:cNvPicPr preferRelativeResize="0"/>
           <p:nvPr/>
         </p:nvPicPr>
@@ -15543,8 +17120,8 @@
         </p:blipFill>
         <p:spPr>
           <a:xfrm>
-            <a:off x="4692699" y="3101429"/>
-            <a:ext cx="2806749" cy="1089570"/>
+            <a:off x="4692699" y="3120081"/>
+            <a:ext cx="2806749" cy="1501346"/>
           </a:xfrm>
           <a:prstGeom prst="rect">
             <a:avLst/>
@@ -15557,34 +17134,7 @@
       </p:pic>
       <p:pic>
         <p:nvPicPr>
-          <p:cNvPr id="100" name="Google Shape;100;p14" descr="image.png"/>
-          <p:cNvPicPr preferRelativeResize="0"/>
-          <p:nvPr/>
-        </p:nvPicPr>
-        <p:blipFill rotWithShape="1">
-          <a:blip r:embed="rId8">
-            <a:alphaModFix/>
-          </a:blip>
-          <a:srcRect/>
-          <a:stretch/>
-        </p:blipFill>
-        <p:spPr>
-          <a:xfrm>
-            <a:off x="4692699" y="4333875"/>
-            <a:ext cx="2806749" cy="1089570"/>
-          </a:xfrm>
-          <a:prstGeom prst="rect">
-            <a:avLst/>
-          </a:prstGeom>
-          <a:noFill/>
-          <a:ln>
-            <a:noFill/>
-          </a:ln>
-        </p:spPr>
-      </p:pic>
-      <p:pic>
-        <p:nvPicPr>
-          <p:cNvPr id="101" name="Google Shape;101;p14" descr="image.png"/>
+          <p:cNvPr id="102" name="Google Shape;102;p14" descr="image.png"/>
           <p:cNvPicPr preferRelativeResize="0"/>
           <p:nvPr/>
         </p:nvPicPr>
@@ -15597,35 +17147,8 @@
         </p:blipFill>
         <p:spPr>
           <a:xfrm>
-            <a:off x="8318599" y="3101429"/>
-            <a:ext cx="2806749" cy="1089570"/>
-          </a:xfrm>
-          <a:prstGeom prst="rect">
-            <a:avLst/>
-          </a:prstGeom>
-          <a:noFill/>
-          <a:ln>
-            <a:noFill/>
-          </a:ln>
-        </p:spPr>
-      </p:pic>
-      <p:pic>
-        <p:nvPicPr>
-          <p:cNvPr id="102" name="Google Shape;102;p14" descr="image.png"/>
-          <p:cNvPicPr preferRelativeResize="0"/>
-          <p:nvPr/>
-        </p:nvPicPr>
-        <p:blipFill rotWithShape="1">
-          <a:blip r:embed="rId8">
-            <a:alphaModFix/>
-          </a:blip>
-          <a:srcRect/>
-          <a:stretch/>
-        </p:blipFill>
-        <p:spPr>
-          <a:xfrm>
-            <a:off x="8318599" y="4333875"/>
-            <a:ext cx="2806749" cy="1089570"/>
+            <a:off x="8318599" y="3120081"/>
+            <a:ext cx="2806749" cy="1501346"/>
           </a:xfrm>
           <a:prstGeom prst="rect">
             <a:avLst/>
@@ -15645,7 +17168,7 @@
         <p:spPr>
           <a:xfrm>
             <a:off x="962025" y="581025"/>
-            <a:ext cx="10981372" cy="409575"/>
+            <a:ext cx="10981372" cy="438582"/>
           </a:xfrm>
           <a:prstGeom prst="rect">
             <a:avLst/>
@@ -15671,18 +17194,17 @@
               <a:buNone/>
             </a:pPr>
             <a:r>
-              <a:rPr lang="en-US" sz="2850" b="1" i="0" u="none" strike="noStrike" cap="none">
+              <a:rPr lang="en-US" sz="2850" b="1" dirty="0">
                 <a:solidFill>
                   <a:srgbClr val="FFFFFF"/>
                 </a:solidFill>
                 <a:latin typeface="Poppins"/>
-                <a:ea typeface="Poppins"/>
                 <a:cs typeface="Poppins"/>
                 <a:sym typeface="Poppins"/>
               </a:rPr>
-              <a:t>SFIDE RISCONTRATE &amp; SOLUZIONI</a:t>
-            </a:r>
-            <a:endParaRPr/>
+              <a:t>IL TEAM</a:t>
+            </a:r>
+            <a:endParaRPr dirty="0"/>
           </a:p>
         </p:txBody>
       </p:sp>
@@ -15743,7 +17265,7 @@
         <p:spPr>
           <a:xfrm>
             <a:off x="1066800" y="2768054"/>
-            <a:ext cx="2947087" cy="219075"/>
+            <a:ext cx="2947087" cy="230832"/>
           </a:xfrm>
           <a:prstGeom prst="rect">
             <a:avLst/>
@@ -15769,28 +17291,15 @@
               <a:buNone/>
             </a:pPr>
             <a:r>
-              <a:rPr lang="en-US" sz="1500" b="1" i="0" u="none" strike="noStrike" cap="none" dirty="0">
+              <a:rPr lang="en-US" sz="1500" b="1" dirty="0">
                 <a:solidFill>
                   <a:srgbClr val="FFFFFF"/>
                 </a:solidFill>
                 <a:latin typeface="Poppins"/>
-                <a:ea typeface="Poppins"/>
                 <a:cs typeface="Poppins"/>
                 <a:sym typeface="Poppins"/>
               </a:rPr>
-              <a:t>Costi di </a:t>
-            </a:r>
-            <a:r>
-              <a:rPr lang="en-US" sz="1500" b="1" i="0" u="none" strike="noStrike" cap="none" dirty="0" err="1">
-                <a:solidFill>
-                  <a:srgbClr val="FFFFFF"/>
-                </a:solidFill>
-                <a:latin typeface="Poppins"/>
-                <a:ea typeface="Poppins"/>
-                <a:cs typeface="Poppins"/>
-                <a:sym typeface="Poppins"/>
-              </a:rPr>
-              <a:t>Consegna</a:t>
+              <a:t>Logica</a:t>
             </a:r>
             <a:endParaRPr dirty="0"/>
           </a:p>
@@ -15805,7 +17314,7 @@
         <p:spPr>
           <a:xfrm>
             <a:off x="4692699" y="2768054"/>
-            <a:ext cx="2947087" cy="219075"/>
+            <a:ext cx="2947087" cy="230832"/>
           </a:xfrm>
           <a:prstGeom prst="rect">
             <a:avLst/>
@@ -15831,7 +17340,7 @@
               <a:buNone/>
             </a:pPr>
             <a:r>
-              <a:rPr lang="en-US" sz="1500" b="1" i="0" u="none" strike="noStrike" cap="none" dirty="0" err="1">
+              <a:rPr lang="en-US" sz="1500" b="1" i="0" u="none" strike="noStrike" cap="none" dirty="0">
                 <a:solidFill>
                   <a:srgbClr val="FFFFFF"/>
                 </a:solidFill>
@@ -15840,31 +17349,7 @@
                 <a:cs typeface="Poppins"/>
                 <a:sym typeface="Poppins"/>
               </a:rPr>
-              <a:t>Frizione</a:t>
-            </a:r>
-            <a:r>
-              <a:rPr lang="en-US" sz="1500" b="1" i="0" u="none" strike="noStrike" cap="none" dirty="0">
-                <a:solidFill>
-                  <a:srgbClr val="FFFFFF"/>
-                </a:solidFill>
-                <a:latin typeface="Poppins"/>
-                <a:ea typeface="Poppins"/>
-                <a:cs typeface="Poppins"/>
-                <a:sym typeface="Poppins"/>
-              </a:rPr>
-              <a:t> </a:t>
-            </a:r>
-            <a:r>
-              <a:rPr lang="en-US" sz="1500" b="1" i="0" u="none" strike="noStrike" cap="none" dirty="0" err="1">
-                <a:solidFill>
-                  <a:srgbClr val="FFFFFF"/>
-                </a:solidFill>
-                <a:latin typeface="Poppins"/>
-                <a:ea typeface="Poppins"/>
-                <a:cs typeface="Poppins"/>
-                <a:sym typeface="Poppins"/>
-              </a:rPr>
-              <a:t>d'acquisto</a:t>
+              <a:t>Design</a:t>
             </a:r>
             <a:endParaRPr dirty="0"/>
           </a:p>
@@ -15879,7 +17364,7 @@
         <p:spPr>
           <a:xfrm>
             <a:off x="8318599" y="2768054"/>
-            <a:ext cx="2947087" cy="219075"/>
+            <a:ext cx="2947087" cy="230832"/>
           </a:xfrm>
           <a:prstGeom prst="rect">
             <a:avLst/>
@@ -15905,7 +17390,7 @@
               <a:buNone/>
             </a:pPr>
             <a:r>
-              <a:rPr lang="en-US" sz="1500" b="1" i="0" u="none" strike="noStrike" cap="none" dirty="0" err="1">
+              <a:rPr lang="en-US" sz="1500" b="1" i="0" u="none" strike="noStrike" cap="none" dirty="0">
                 <a:solidFill>
                   <a:srgbClr val="FFFFFF"/>
                 </a:solidFill>
@@ -15914,61 +17399,22 @@
                 <a:cs typeface="Poppins"/>
                 <a:sym typeface="Poppins"/>
               </a:rPr>
-              <a:t>Fidelizzazione</a:t>
-            </a:r>
-            <a:r>
-              <a:rPr lang="en-US" sz="1500" b="1" i="0" u="none" strike="noStrike" cap="none" dirty="0">
-                <a:solidFill>
-                  <a:srgbClr val="FFFFFF"/>
-                </a:solidFill>
-                <a:latin typeface="Poppins"/>
-                <a:ea typeface="Poppins"/>
-                <a:cs typeface="Poppins"/>
-                <a:sym typeface="Poppins"/>
-              </a:rPr>
-              <a:t> &amp; Loop</a:t>
+              <a:t>Software</a:t>
             </a:r>
             <a:endParaRPr dirty="0"/>
           </a:p>
         </p:txBody>
       </p:sp>
-      <p:pic>
-        <p:nvPicPr>
-          <p:cNvPr id="108" name="Google Shape;108;p14" descr="image.png"/>
-          <p:cNvPicPr preferRelativeResize="0"/>
-          <p:nvPr/>
-        </p:nvPicPr>
-        <p:blipFill rotWithShape="1">
-          <a:blip r:embed="rId9">
-            <a:alphaModFix/>
-          </a:blip>
-          <a:srcRect/>
-          <a:stretch/>
-        </p:blipFill>
-        <p:spPr>
-          <a:xfrm>
-            <a:off x="1066800" y="2196554"/>
-            <a:ext cx="342900" cy="342900"/>
-          </a:xfrm>
-          <a:prstGeom prst="rect">
-            <a:avLst/>
-          </a:prstGeom>
-          <a:noFill/>
-          <a:ln>
-            <a:noFill/>
-          </a:ln>
-        </p:spPr>
-      </p:pic>
       <p:sp>
         <p:nvSpPr>
-          <p:cNvPr id="109" name="Google Shape;109;p14"/>
+          <p:cNvPr id="111" name="Google Shape;111;p14"/>
           <p:cNvSpPr txBox="1"/>
           <p:nvPr/>
         </p:nvSpPr>
         <p:spPr>
           <a:xfrm>
-            <a:off x="1295400" y="3244304"/>
-            <a:ext cx="2507032" cy="161925"/>
+            <a:off x="1295400" y="3325266"/>
+            <a:ext cx="2507032" cy="830997"/>
           </a:xfrm>
           <a:prstGeom prst="rect">
             <a:avLst/>
@@ -15984,41 +17430,34 @@
           </a:bodyPr>
           <a:lstStyle/>
           <a:p>
-            <a:pPr marL="0" marR="0" lvl="0" indent="0" algn="l" rtl="0">
-              <a:spcBef>
-                <a:spcPts val="0"/>
-              </a:spcBef>
-              <a:spcAft>
-                <a:spcPts val="0"/>
-              </a:spcAft>
-              <a:buNone/>
-            </a:pPr>
-            <a:r>
-              <a:rPr lang="en-US" sz="1125" b="0" i="0" u="none" strike="noStrike" cap="none">
-                <a:solidFill>
-                  <a:srgbClr val="F87171"/>
-                </a:solidFill>
-                <a:latin typeface="Plus Jakarta Sans SemiBold"/>
-                <a:ea typeface="Plus Jakarta Sans SemiBold"/>
-                <a:cs typeface="Plus Jakarta Sans SemiBold"/>
-                <a:sym typeface="Plus Jakarta Sans SemiBold"/>
-              </a:rPr>
-              <a:t>PROBLEMA</a:t>
-            </a:r>
-            <a:endParaRPr/>
+            <a:pPr fontAlgn="base"/>
+            <a:r>
+              <a:rPr lang="it-IT" sz="1800" dirty="0">
+                <a:solidFill>
+                  <a:srgbClr val="298D68"/>
+                </a:solidFill>
+              </a:rPr>
+              <a:t>Modello di Business</a:t>
+            </a:r>
+          </a:p>
+          <a:p>
+            <a:br>
+              <a:rPr lang="it-IT" sz="1800" dirty="0"/>
+            </a:br>
+            <a:endParaRPr sz="1800" dirty="0"/>
           </a:p>
         </p:txBody>
       </p:sp>
       <p:sp>
         <p:nvSpPr>
-          <p:cNvPr id="110" name="Google Shape;110;p14"/>
+          <p:cNvPr id="112" name="Google Shape;112;p14"/>
           <p:cNvSpPr txBox="1"/>
           <p:nvPr/>
         </p:nvSpPr>
         <p:spPr>
           <a:xfrm>
-            <a:off x="1295400" y="3453854"/>
-            <a:ext cx="2387649" cy="594270"/>
+            <a:off x="1409700" y="3692376"/>
+            <a:ext cx="2387649" cy="689420"/>
           </a:xfrm>
           <a:prstGeom prst="rect">
             <a:avLst/>
@@ -16047,31 +17486,59 @@
               <a:buNone/>
             </a:pPr>
             <a:r>
-              <a:rPr lang="en-US" sz="975" b="0" i="0" u="none" strike="noStrike" cap="none">
-                <a:solidFill>
-                  <a:srgbClr val="E4E4E7"/>
+              <a:rPr lang="en-US" dirty="0">
+                <a:solidFill>
+                  <a:srgbClr val="F5F5F0"/>
                 </a:solidFill>
                 <a:latin typeface="Plus Jakarta Sans"/>
-                <a:ea typeface="Plus Jakarta Sans"/>
                 <a:cs typeface="Plus Jakarta Sans"/>
                 <a:sym typeface="Plus Jakarta Sans"/>
               </a:rPr>
-              <a:t>Le piattaforme terze erodono i margini fino al 30% per transazione e limitano il controllo sulla qualità.</a:t>
-            </a:r>
-            <a:endParaRPr/>
+              <a:t>Giagnorio Simone</a:t>
+            </a:r>
+          </a:p>
+          <a:p>
+            <a:pPr marL="0" marR="0" lvl="0" indent="0" algn="l" rtl="0">
+              <a:lnSpc>
+                <a:spcPct val="160000"/>
+              </a:lnSpc>
+              <a:spcBef>
+                <a:spcPts val="0"/>
+              </a:spcBef>
+              <a:spcAft>
+                <a:spcPts val="0"/>
+              </a:spcAft>
+              <a:buNone/>
+            </a:pPr>
+            <a:r>
+              <a:rPr lang="en-US" dirty="0">
+                <a:solidFill>
+                  <a:srgbClr val="F5F5F0"/>
+                </a:solidFill>
+                <a:latin typeface="Plus Jakarta Sans"/>
+                <a:cs typeface="Plus Jakarta Sans"/>
+                <a:sym typeface="Plus Jakarta Sans"/>
+              </a:rPr>
+              <a:t>Rizzi Mattia</a:t>
+            </a:r>
+            <a:endParaRPr sz="2800" dirty="0">
+              <a:solidFill>
+                <a:srgbClr val="F5F5F0"/>
+              </a:solidFill>
+            </a:endParaRPr>
           </a:p>
         </p:txBody>
       </p:sp>
       <p:sp>
         <p:nvSpPr>
-          <p:cNvPr id="111" name="Google Shape;111;p14"/>
+          <p:cNvPr id="116" name="Google Shape;116;p14"/>
           <p:cNvSpPr txBox="1"/>
           <p:nvPr/>
         </p:nvSpPr>
         <p:spPr>
           <a:xfrm>
-            <a:off x="1295400" y="4476750"/>
-            <a:ext cx="2507032" cy="161925"/>
+            <a:off x="4921299" y="3325967"/>
+            <a:ext cx="2507032" cy="830997"/>
           </a:xfrm>
           <a:prstGeom prst="rect">
             <a:avLst/>
@@ -16087,41 +17554,34 @@
           </a:bodyPr>
           <a:lstStyle/>
           <a:p>
-            <a:pPr marL="0" marR="0" lvl="0" indent="0" algn="l" rtl="0">
-              <a:spcBef>
-                <a:spcPts val="0"/>
-              </a:spcBef>
-              <a:spcAft>
-                <a:spcPts val="0"/>
-              </a:spcAft>
-              <a:buNone/>
-            </a:pPr>
-            <a:r>
-              <a:rPr lang="en-US" sz="1125" b="0" i="0" u="none" strike="noStrike" cap="none">
-                <a:solidFill>
-                  <a:srgbClr val="34D399"/>
-                </a:solidFill>
-                <a:latin typeface="Plus Jakarta Sans SemiBold"/>
-                <a:ea typeface="Plus Jakarta Sans SemiBold"/>
-                <a:cs typeface="Plus Jakarta Sans SemiBold"/>
-                <a:sym typeface="Plus Jakarta Sans SemiBold"/>
-              </a:rPr>
-              <a:t>SOLUZIONE</a:t>
-            </a:r>
-            <a:endParaRPr/>
+            <a:pPr fontAlgn="base"/>
+            <a:r>
+              <a:rPr lang="it-IT" sz="1800" dirty="0">
+                <a:solidFill>
+                  <a:srgbClr val="298D68"/>
+                </a:solidFill>
+              </a:rPr>
+              <a:t>User Experience &amp; UI</a:t>
+            </a:r>
+          </a:p>
+          <a:p>
+            <a:br>
+              <a:rPr lang="it-IT" sz="1800" dirty="0"/>
+            </a:br>
+            <a:endParaRPr sz="1800" dirty="0"/>
           </a:p>
         </p:txBody>
       </p:sp>
       <p:sp>
         <p:nvSpPr>
-          <p:cNvPr id="112" name="Google Shape;112;p14"/>
+          <p:cNvPr id="117" name="Google Shape;117;p14"/>
           <p:cNvSpPr txBox="1"/>
           <p:nvPr/>
         </p:nvSpPr>
         <p:spPr>
           <a:xfrm>
-            <a:off x="1295400" y="4686300"/>
-            <a:ext cx="2387649" cy="594270"/>
+            <a:off x="4972417" y="3654012"/>
+            <a:ext cx="2387649" cy="689420"/>
           </a:xfrm>
           <a:prstGeom prst="rect">
             <a:avLst/>
@@ -16150,58 +17610,53 @@
               <a:buNone/>
             </a:pPr>
             <a:r>
-              <a:rPr lang="en-US" sz="975" b="0" i="0" u="none" strike="noStrike" cap="none">
-                <a:solidFill>
-                  <a:srgbClr val="E4E4E7"/>
-                </a:solidFill>
-                <a:latin typeface="Plus Jakarta Sans"/>
-                <a:ea typeface="Plus Jakarta Sans"/>
-                <a:cs typeface="Plus Jakarta Sans"/>
-                <a:sym typeface="Plus Jakarta Sans"/>
-              </a:rPr>
-              <a:t>Creazione di un servizio di delivery proprietario, flotta interna e disintermediazione totale dei canali.</a:t>
-            </a:r>
-            <a:endParaRPr/>
+              <a:rPr lang="it-IT" dirty="0">
+                <a:solidFill>
+                  <a:srgbClr val="F5F5F0"/>
+                </a:solidFill>
+              </a:rPr>
+              <a:t>Balaban Giulia</a:t>
+            </a:r>
+          </a:p>
+          <a:p>
+            <a:pPr marL="0" marR="0" lvl="0" indent="0" algn="l" rtl="0">
+              <a:lnSpc>
+                <a:spcPct val="160000"/>
+              </a:lnSpc>
+              <a:spcBef>
+                <a:spcPts val="0"/>
+              </a:spcBef>
+              <a:spcAft>
+                <a:spcPts val="0"/>
+              </a:spcAft>
+              <a:buNone/>
+            </a:pPr>
+            <a:r>
+              <a:rPr lang="it-IT" dirty="0">
+                <a:solidFill>
+                  <a:srgbClr val="F5F5F0"/>
+                </a:solidFill>
+              </a:rPr>
+              <a:t>Torre Francesco</a:t>
+            </a:r>
+            <a:endParaRPr dirty="0">
+              <a:solidFill>
+                <a:srgbClr val="F5F5F0"/>
+              </a:solidFill>
+            </a:endParaRPr>
           </a:p>
         </p:txBody>
       </p:sp>
-      <p:pic>
-        <p:nvPicPr>
-          <p:cNvPr id="113" name="Google Shape;113;p14" descr="image.png"/>
-          <p:cNvPicPr preferRelativeResize="0"/>
-          <p:nvPr/>
-        </p:nvPicPr>
-        <p:blipFill rotWithShape="1">
-          <a:blip r:embed="rId10">
-            <a:alphaModFix/>
-          </a:blip>
-          <a:srcRect/>
-          <a:stretch/>
-        </p:blipFill>
-        <p:spPr>
-          <a:xfrm>
-            <a:off x="4692699" y="2196554"/>
-            <a:ext cx="390525" cy="342900"/>
-          </a:xfrm>
-          <a:prstGeom prst="rect">
-            <a:avLst/>
-          </a:prstGeom>
-          <a:noFill/>
-          <a:ln>
-            <a:noFill/>
-          </a:ln>
-        </p:spPr>
-      </p:pic>
       <p:sp>
         <p:nvSpPr>
-          <p:cNvPr id="114" name="Google Shape;114;p14"/>
+          <p:cNvPr id="121" name="Google Shape;121;p14"/>
           <p:cNvSpPr txBox="1"/>
           <p:nvPr/>
         </p:nvSpPr>
         <p:spPr>
           <a:xfrm>
-            <a:off x="4921299" y="3244304"/>
-            <a:ext cx="2507032" cy="161925"/>
+            <a:off x="8618316" y="3291018"/>
+            <a:ext cx="2507032" cy="276999"/>
           </a:xfrm>
           <a:prstGeom prst="rect">
             <a:avLst/>
@@ -16217,41 +17672,28 @@
           </a:bodyPr>
           <a:lstStyle/>
           <a:p>
-            <a:pPr marL="0" marR="0" lvl="0" indent="0" algn="l" rtl="0">
-              <a:spcBef>
-                <a:spcPts val="0"/>
-              </a:spcBef>
-              <a:spcAft>
-                <a:spcPts val="0"/>
-              </a:spcAft>
-              <a:buNone/>
-            </a:pPr>
-            <a:r>
-              <a:rPr lang="en-US" sz="1125" b="0" i="0" u="none" strike="noStrike" cap="none" dirty="0">
-                <a:solidFill>
-                  <a:srgbClr val="F87171"/>
-                </a:solidFill>
-                <a:latin typeface="Plus Jakarta Sans SemiBold"/>
-                <a:ea typeface="Plus Jakarta Sans SemiBold"/>
-                <a:cs typeface="Plus Jakarta Sans SemiBold"/>
-                <a:sym typeface="Plus Jakarta Sans SemiBold"/>
-              </a:rPr>
-              <a:t>PROBLEMA</a:t>
-            </a:r>
-            <a:endParaRPr dirty="0"/>
+            <a:pPr fontAlgn="base"/>
+            <a:r>
+              <a:rPr lang="it-IT" sz="1800" dirty="0">
+                <a:solidFill>
+                  <a:srgbClr val="298D68"/>
+                </a:solidFill>
+              </a:rPr>
+              <a:t>Tech &amp; Automazione</a:t>
+            </a:r>
           </a:p>
         </p:txBody>
       </p:sp>
       <p:sp>
         <p:nvSpPr>
-          <p:cNvPr id="115" name="Google Shape;115;p14"/>
+          <p:cNvPr id="122" name="Google Shape;122;p14"/>
           <p:cNvSpPr txBox="1"/>
           <p:nvPr/>
         </p:nvSpPr>
         <p:spPr>
           <a:xfrm>
-            <a:off x="4921299" y="3453854"/>
-            <a:ext cx="2387649" cy="594270"/>
+            <a:off x="8598317" y="3648431"/>
+            <a:ext cx="2387649" cy="689420"/>
           </a:xfrm>
           <a:prstGeom prst="rect">
             <a:avLst/>
@@ -16280,192 +17722,252 @@
               <a:buNone/>
             </a:pPr>
             <a:r>
-              <a:rPr lang="en-US" sz="975" b="0" i="0" u="none" strike="noStrike" cap="none">
-                <a:solidFill>
-                  <a:srgbClr val="E4E4E7"/>
-                </a:solidFill>
-                <a:latin typeface="Plus Jakarta Sans"/>
-                <a:ea typeface="Plus Jakarta Sans"/>
-                <a:cs typeface="Plus Jakarta Sans"/>
-                <a:sym typeface="Plus Jakarta Sans"/>
-              </a:rPr>
-              <a:t>Sito precedente lento e non ottimizzato mobile, con un tasso di abbandono carrello superiore al 60%.</a:t>
-            </a:r>
-            <a:endParaRPr/>
+              <a:rPr lang="it-IT" dirty="0">
+                <a:solidFill>
+                  <a:srgbClr val="F5F5F0"/>
+                </a:solidFill>
+              </a:rPr>
+              <a:t>Archetti Giacomo</a:t>
+            </a:r>
+          </a:p>
+          <a:p>
+            <a:pPr marL="0" marR="0" lvl="0" indent="0" algn="l" rtl="0">
+              <a:lnSpc>
+                <a:spcPct val="160000"/>
+              </a:lnSpc>
+              <a:spcBef>
+                <a:spcPts val="0"/>
+              </a:spcBef>
+              <a:spcAft>
+                <a:spcPts val="0"/>
+              </a:spcAft>
+              <a:buNone/>
+            </a:pPr>
+            <a:r>
+              <a:rPr lang="it-IT" dirty="0">
+                <a:solidFill>
+                  <a:srgbClr val="F5F5F0"/>
+                </a:solidFill>
+              </a:rPr>
+              <a:t>Barbieri Andrea</a:t>
+            </a:r>
+            <a:endParaRPr dirty="0">
+              <a:solidFill>
+                <a:srgbClr val="F5F5F0"/>
+              </a:solidFill>
+            </a:endParaRPr>
+          </a:p>
+        </p:txBody>
+      </p:sp>
+      <p:pic>
+        <p:nvPicPr>
+          <p:cNvPr id="3" name="Immagine 2">
+            <a:extLst>
+              <a:ext uri="{FF2B5EF4-FFF2-40B4-BE49-F238E27FC236}">
+                <a16:creationId xmlns:a16="http://schemas.microsoft.com/office/drawing/2014/main" id="{CFECD8A9-7191-A628-3485-E6125C056B90}"/>
+              </a:ext>
+            </a:extLst>
+          </p:cNvPr>
+          <p:cNvPicPr>
+            <a:picLocks noChangeAspect="1"/>
+          </p:cNvPicPr>
+          <p:nvPr/>
+        </p:nvPicPr>
+        <p:blipFill>
+          <a:blip r:embed="rId8"/>
+          <a:stretch>
+            <a:fillRect/>
+          </a:stretch>
+        </p:blipFill>
+        <p:spPr>
+          <a:xfrm>
+            <a:off x="8283228" y="2037706"/>
+            <a:ext cx="660220" cy="649572"/>
+          </a:xfrm>
+          <a:prstGeom prst="rect">
+            <a:avLst/>
+          </a:prstGeom>
+        </p:spPr>
+      </p:pic>
+      <p:pic>
+        <p:nvPicPr>
+          <p:cNvPr id="5" name="Immagine 4">
+            <a:extLst>
+              <a:ext uri="{FF2B5EF4-FFF2-40B4-BE49-F238E27FC236}">
+                <a16:creationId xmlns:a16="http://schemas.microsoft.com/office/drawing/2014/main" id="{B122A590-749E-B9CE-1807-24F69DDCE4AF}"/>
+              </a:ext>
+            </a:extLst>
+          </p:cNvPr>
+          <p:cNvPicPr>
+            <a:picLocks noChangeAspect="1"/>
+          </p:cNvPicPr>
+          <p:nvPr/>
+        </p:nvPicPr>
+        <p:blipFill>
+          <a:blip r:embed="rId9"/>
+          <a:stretch>
+            <a:fillRect/>
+          </a:stretch>
+        </p:blipFill>
+        <p:spPr>
+          <a:xfrm>
+            <a:off x="1066800" y="2037706"/>
+            <a:ext cx="616027" cy="636561"/>
+          </a:xfrm>
+          <a:prstGeom prst="rect">
+            <a:avLst/>
+          </a:prstGeom>
+        </p:spPr>
+      </p:pic>
+      <p:pic>
+        <p:nvPicPr>
+          <p:cNvPr id="7" name="Immagine 6">
+            <a:extLst>
+              <a:ext uri="{FF2B5EF4-FFF2-40B4-BE49-F238E27FC236}">
+                <a16:creationId xmlns:a16="http://schemas.microsoft.com/office/drawing/2014/main" id="{358CF374-3D6A-0DCE-FA29-AA9C7D2EADC0}"/>
+              </a:ext>
+            </a:extLst>
+          </p:cNvPr>
+          <p:cNvPicPr>
+            <a:picLocks noChangeAspect="1"/>
+          </p:cNvPicPr>
+          <p:nvPr/>
+        </p:nvPicPr>
+        <p:blipFill>
+          <a:blip r:embed="rId10"/>
+          <a:stretch>
+            <a:fillRect/>
+          </a:stretch>
+        </p:blipFill>
+        <p:spPr>
+          <a:xfrm>
+            <a:off x="4692699" y="2037706"/>
+            <a:ext cx="728817" cy="686444"/>
+          </a:xfrm>
+          <a:prstGeom prst="rect">
+            <a:avLst/>
+          </a:prstGeom>
+        </p:spPr>
+      </p:pic>
+      <p:pic>
+        <p:nvPicPr>
+          <p:cNvPr id="15" name="Google Shape;94;p14" descr="image.png">
+            <a:extLst>
+              <a:ext uri="{FF2B5EF4-FFF2-40B4-BE49-F238E27FC236}">
+                <a16:creationId xmlns:a16="http://schemas.microsoft.com/office/drawing/2014/main" id="{0CD005D4-42F0-85CC-78F9-4527624F25E0}"/>
+              </a:ext>
+            </a:extLst>
+          </p:cNvPr>
+          <p:cNvPicPr preferRelativeResize="0"/>
+          <p:nvPr/>
+        </p:nvPicPr>
+        <p:blipFill rotWithShape="1">
+          <a:blip r:embed="rId4">
+            <a:alphaModFix/>
+          </a:blip>
+          <a:srcRect/>
+          <a:stretch/>
+        </p:blipFill>
+        <p:spPr>
+          <a:xfrm>
+            <a:off x="762313" y="5219308"/>
+            <a:ext cx="10649098" cy="1440984"/>
+          </a:xfrm>
+          <a:prstGeom prst="rect">
+            <a:avLst/>
+          </a:prstGeom>
+          <a:noFill/>
+          <a:ln>
+            <a:noFill/>
+          </a:ln>
+        </p:spPr>
+      </p:pic>
+      <p:sp>
+        <p:nvSpPr>
+          <p:cNvPr id="16" name="CasellaDiTesto 15">
+            <a:extLst>
+              <a:ext uri="{FF2B5EF4-FFF2-40B4-BE49-F238E27FC236}">
+                <a16:creationId xmlns:a16="http://schemas.microsoft.com/office/drawing/2014/main" id="{FE1D9BEB-9653-CFB3-4F5F-A99D2FF14030}"/>
+              </a:ext>
+            </a:extLst>
+          </p:cNvPr>
+          <p:cNvSpPr txBox="1"/>
+          <p:nvPr/>
+        </p:nvSpPr>
+        <p:spPr>
+          <a:xfrm>
+            <a:off x="2135586" y="5551502"/>
+            <a:ext cx="7920681" cy="307777"/>
+          </a:xfrm>
+          <a:prstGeom prst="rect">
+            <a:avLst/>
+          </a:prstGeom>
+          <a:noFill/>
+        </p:spPr>
+        <p:txBody>
+          <a:bodyPr wrap="square" rtlCol="0">
+            <a:spAutoFit/>
+          </a:bodyPr>
+          <a:lstStyle/>
+          <a:p>
+            <a:endParaRPr lang="it-IT" dirty="0"/>
           </a:p>
         </p:txBody>
       </p:sp>
       <p:sp>
         <p:nvSpPr>
-          <p:cNvPr id="116" name="Google Shape;116;p14"/>
+          <p:cNvPr id="18" name="CasellaDiTesto 17">
+            <a:extLst>
+              <a:ext uri="{FF2B5EF4-FFF2-40B4-BE49-F238E27FC236}">
+                <a16:creationId xmlns:a16="http://schemas.microsoft.com/office/drawing/2014/main" id="{9AD0766E-E4A0-CA50-1483-B68F3662B3E8}"/>
+              </a:ext>
+            </a:extLst>
+          </p:cNvPr>
           <p:cNvSpPr txBox="1"/>
           <p:nvPr/>
         </p:nvSpPr>
         <p:spPr>
           <a:xfrm>
-            <a:off x="4921299" y="4476750"/>
-            <a:ext cx="2507032" cy="161925"/>
-          </a:xfrm>
-          <a:prstGeom prst="rect">
-            <a:avLst/>
-          </a:prstGeom>
-          <a:noFill/>
-          <a:ln>
-            <a:noFill/>
-          </a:ln>
+            <a:off x="780441" y="5326733"/>
+            <a:ext cx="10630969" cy="369332"/>
+          </a:xfrm>
+          <a:prstGeom prst="rect">
+            <a:avLst/>
+          </a:prstGeom>
+          <a:noFill/>
         </p:spPr>
         <p:txBody>
-          <a:bodyPr spcFirstLastPara="1" wrap="square" lIns="0" tIns="0" rIns="0" bIns="0" anchor="t" anchorCtr="0">
+          <a:bodyPr wrap="square">
             <a:spAutoFit/>
           </a:bodyPr>
           <a:lstStyle/>
           <a:p>
-            <a:pPr marL="0" marR="0" lvl="0" indent="0" algn="l" rtl="0">
-              <a:spcBef>
-                <a:spcPts val="0"/>
-              </a:spcBef>
-              <a:spcAft>
-                <a:spcPts val="0"/>
-              </a:spcAft>
-              <a:buNone/>
-            </a:pPr>
-            <a:r>
-              <a:rPr lang="en-US" sz="1125" b="0" i="0" u="none" strike="noStrike" cap="none">
-                <a:solidFill>
-                  <a:srgbClr val="34D399"/>
-                </a:solidFill>
-                <a:latin typeface="Plus Jakarta Sans SemiBold"/>
-                <a:ea typeface="Plus Jakarta Sans SemiBold"/>
-                <a:cs typeface="Plus Jakarta Sans SemiBold"/>
-                <a:sym typeface="Plus Jakarta Sans SemiBold"/>
-              </a:rPr>
-              <a:t>SOLUZIONE</a:t>
-            </a:r>
-            <a:endParaRPr/>
-          </a:p>
-        </p:txBody>
-      </p:sp>
-      <p:sp>
-        <p:nvSpPr>
-          <p:cNvPr id="117" name="Google Shape;117;p14"/>
-          <p:cNvSpPr txBox="1"/>
-          <p:nvPr/>
-        </p:nvSpPr>
-        <p:spPr>
-          <a:xfrm>
-            <a:off x="4921299" y="4686300"/>
-            <a:ext cx="2387649" cy="594270"/>
-          </a:xfrm>
-          <a:prstGeom prst="rect">
-            <a:avLst/>
-          </a:prstGeom>
-          <a:noFill/>
-          <a:ln>
-            <a:noFill/>
-          </a:ln>
-        </p:spPr>
-        <p:txBody>
-          <a:bodyPr spcFirstLastPara="1" wrap="square" lIns="0" tIns="0" rIns="0" bIns="0" anchor="t" anchorCtr="0">
-            <a:spAutoFit/>
-          </a:bodyPr>
-          <a:lstStyle/>
-          <a:p>
-            <a:pPr marL="0" marR="0" lvl="0" indent="0" algn="l" rtl="0">
-              <a:lnSpc>
-                <a:spcPct val="160000"/>
-              </a:lnSpc>
-              <a:spcBef>
-                <a:spcPts val="0"/>
-              </a:spcBef>
-              <a:spcAft>
-                <a:spcPts val="0"/>
-              </a:spcAft>
-              <a:buNone/>
-            </a:pPr>
-            <a:r>
-              <a:rPr lang="en-US" sz="975" b="0" i="0" u="none" strike="noStrike" cap="none" dirty="0" err="1">
-                <a:solidFill>
-                  <a:srgbClr val="E4E4E7"/>
-                </a:solidFill>
-                <a:latin typeface="Plus Jakarta Sans"/>
-                <a:ea typeface="Plus Jakarta Sans"/>
-                <a:cs typeface="Plus Jakarta Sans"/>
-                <a:sym typeface="Plus Jakarta Sans"/>
-              </a:rPr>
-              <a:t>Riprogettazione</a:t>
-            </a:r>
-            <a:r>
-              <a:rPr lang="en-US" sz="975" b="0" i="0" u="none" strike="noStrike" cap="none" dirty="0">
-                <a:solidFill>
-                  <a:srgbClr val="E4E4E7"/>
-                </a:solidFill>
-                <a:latin typeface="Plus Jakarta Sans"/>
-                <a:ea typeface="Plus Jakarta Sans"/>
-                <a:cs typeface="Plus Jakarta Sans"/>
-                <a:sym typeface="Plus Jakarta Sans"/>
-              </a:rPr>
-              <a:t> con </a:t>
-            </a:r>
-            <a:r>
-              <a:rPr lang="en-US" sz="975" b="0" i="0" u="none" strike="noStrike" cap="none" dirty="0" err="1">
-                <a:solidFill>
-                  <a:srgbClr val="E4E4E7"/>
-                </a:solidFill>
-                <a:latin typeface="Plus Jakarta Sans"/>
-                <a:ea typeface="Plus Jakarta Sans"/>
-                <a:cs typeface="Plus Jakarta Sans"/>
-                <a:sym typeface="Plus Jakarta Sans"/>
-              </a:rPr>
-              <a:t>approccio</a:t>
-            </a:r>
-            <a:r>
-              <a:rPr lang="en-US" sz="975" b="0" i="0" u="none" strike="noStrike" cap="none" dirty="0">
-                <a:solidFill>
-                  <a:srgbClr val="E4E4E7"/>
-                </a:solidFill>
-                <a:latin typeface="Plus Jakarta Sans"/>
-                <a:ea typeface="Plus Jakarta Sans"/>
-                <a:cs typeface="Plus Jakarta Sans"/>
-                <a:sym typeface="Plus Jakarta Sans"/>
-              </a:rPr>
-              <a:t> mobile-first ultra-veloce, checkout "3-click" e </a:t>
-            </a:r>
-            <a:r>
-              <a:rPr lang="en-US" sz="975" b="0" i="0" u="none" strike="noStrike" cap="none" dirty="0" err="1">
-                <a:solidFill>
-                  <a:srgbClr val="E4E4E7"/>
-                </a:solidFill>
-                <a:latin typeface="Plus Jakarta Sans"/>
-                <a:ea typeface="Plus Jakarta Sans"/>
-                <a:cs typeface="Plus Jakarta Sans"/>
-                <a:sym typeface="Plus Jakarta Sans"/>
-              </a:rPr>
-              <a:t>pagamenti</a:t>
-            </a:r>
-            <a:r>
-              <a:rPr lang="en-US" sz="975" b="0" i="0" u="none" strike="noStrike" cap="none" dirty="0">
-                <a:solidFill>
-                  <a:srgbClr val="E4E4E7"/>
-                </a:solidFill>
-                <a:latin typeface="Plus Jakarta Sans"/>
-                <a:ea typeface="Plus Jakarta Sans"/>
-                <a:cs typeface="Plus Jakarta Sans"/>
-                <a:sym typeface="Plus Jakarta Sans"/>
-              </a:rPr>
-              <a:t> Apple/Google Pay.</a:t>
-            </a:r>
-            <a:endParaRPr dirty="0"/>
+            <a:pPr algn="ctr" fontAlgn="base"/>
+            <a:r>
+              <a:rPr lang="it-IT" sz="1800" dirty="0">
+                <a:solidFill>
+                  <a:srgbClr val="298D68"/>
+                </a:solidFill>
+              </a:rPr>
+              <a:t>Project lead</a:t>
+            </a:r>
           </a:p>
         </p:txBody>
       </p:sp>
       <p:pic>
         <p:nvPicPr>
-          <p:cNvPr id="118" name="Google Shape;118;p14" descr="image.png"/>
+          <p:cNvPr id="22" name="Google Shape;100;p14" descr="image.png">
+            <a:extLst>
+              <a:ext uri="{FF2B5EF4-FFF2-40B4-BE49-F238E27FC236}">
+                <a16:creationId xmlns:a16="http://schemas.microsoft.com/office/drawing/2014/main" id="{79070F3F-982D-5985-DA57-D5CED4069EC2}"/>
+              </a:ext>
+            </a:extLst>
+          </p:cNvPr>
           <p:cNvPicPr preferRelativeResize="0"/>
           <p:nvPr/>
         </p:nvPicPr>
         <p:blipFill rotWithShape="1">
-          <a:blip r:embed="rId11">
+          <a:blip r:embed="rId7">
             <a:alphaModFix/>
           </a:blip>
           <a:srcRect/>
@@ -16473,8 +17975,8 @@
         </p:blipFill>
         <p:spPr>
           <a:xfrm>
-            <a:off x="8318599" y="2196554"/>
-            <a:ext cx="304800" cy="342900"/>
+            <a:off x="4013887" y="5834670"/>
+            <a:ext cx="4374882" cy="564884"/>
           </a:xfrm>
           <a:prstGeom prst="rect">
             <a:avLst/>
@@ -16487,387 +17989,41 @@
       </p:pic>
       <p:sp>
         <p:nvSpPr>
-          <p:cNvPr id="119" name="Google Shape;119;p14"/>
+          <p:cNvPr id="20" name="CasellaDiTesto 19">
+            <a:extLst>
+              <a:ext uri="{FF2B5EF4-FFF2-40B4-BE49-F238E27FC236}">
+                <a16:creationId xmlns:a16="http://schemas.microsoft.com/office/drawing/2014/main" id="{EE4757D6-0C22-29FF-C73E-4777D7482389}"/>
+              </a:ext>
+            </a:extLst>
+          </p:cNvPr>
           <p:cNvSpPr txBox="1"/>
           <p:nvPr/>
         </p:nvSpPr>
         <p:spPr>
           <a:xfrm>
-            <a:off x="8547199" y="3244304"/>
-            <a:ext cx="2507032" cy="161925"/>
-          </a:xfrm>
-          <a:prstGeom prst="rect">
-            <a:avLst/>
-          </a:prstGeom>
-          <a:noFill/>
-          <a:ln>
-            <a:noFill/>
-          </a:ln>
+            <a:off x="780441" y="5917748"/>
+            <a:ext cx="10630969" cy="338554"/>
+          </a:xfrm>
+          <a:prstGeom prst="rect">
+            <a:avLst/>
+          </a:prstGeom>
+          <a:noFill/>
         </p:spPr>
         <p:txBody>
-          <a:bodyPr spcFirstLastPara="1" wrap="square" lIns="0" tIns="0" rIns="0" bIns="0" anchor="t" anchorCtr="0">
+          <a:bodyPr wrap="square">
             <a:spAutoFit/>
           </a:bodyPr>
           <a:lstStyle/>
           <a:p>
-            <a:pPr marL="0" marR="0" lvl="0" indent="0" algn="l" rtl="0">
-              <a:spcBef>
-                <a:spcPts val="0"/>
-              </a:spcBef>
-              <a:spcAft>
-                <a:spcPts val="0"/>
-              </a:spcAft>
-              <a:buNone/>
-            </a:pPr>
-            <a:r>
-              <a:rPr lang="en-US" sz="1125" b="0" i="0" u="none" strike="noStrike" cap="none" dirty="0">
-                <a:solidFill>
-                  <a:srgbClr val="F87171"/>
-                </a:solidFill>
-                <a:latin typeface="Plus Jakarta Sans SemiBold"/>
-                <a:ea typeface="Plus Jakarta Sans SemiBold"/>
-                <a:cs typeface="Plus Jakarta Sans SemiBold"/>
-                <a:sym typeface="Plus Jakarta Sans SemiBold"/>
-              </a:rPr>
-              <a:t>PROBLEMA</a:t>
-            </a:r>
-            <a:endParaRPr dirty="0"/>
-          </a:p>
-        </p:txBody>
-      </p:sp>
-      <p:sp>
-        <p:nvSpPr>
-          <p:cNvPr id="120" name="Google Shape;120;p14"/>
-          <p:cNvSpPr txBox="1"/>
-          <p:nvPr/>
-        </p:nvSpPr>
-        <p:spPr>
-          <a:xfrm>
-            <a:off x="8547199" y="3453854"/>
-            <a:ext cx="2387649" cy="594270"/>
-          </a:xfrm>
-          <a:prstGeom prst="rect">
-            <a:avLst/>
-          </a:prstGeom>
-          <a:noFill/>
-          <a:ln>
-            <a:noFill/>
-          </a:ln>
-        </p:spPr>
-        <p:txBody>
-          <a:bodyPr spcFirstLastPara="1" wrap="square" lIns="0" tIns="0" rIns="0" bIns="0" anchor="t" anchorCtr="0">
-            <a:spAutoFit/>
-          </a:bodyPr>
-          <a:lstStyle/>
-          <a:p>
-            <a:pPr marL="0" marR="0" lvl="0" indent="0" algn="l" rtl="0">
-              <a:lnSpc>
-                <a:spcPct val="160000"/>
-              </a:lnSpc>
-              <a:spcBef>
-                <a:spcPts val="0"/>
-              </a:spcBef>
-              <a:spcAft>
-                <a:spcPts val="0"/>
-              </a:spcAft>
-              <a:buNone/>
-            </a:pPr>
-            <a:r>
-              <a:rPr lang="en-US" sz="975" b="0" i="0" u="none" strike="noStrike" cap="none">
-                <a:solidFill>
-                  <a:srgbClr val="E4E4E7"/>
-                </a:solidFill>
-                <a:latin typeface="Plus Jakarta Sans"/>
-                <a:ea typeface="Plus Jakarta Sans"/>
-                <a:cs typeface="Plus Jakarta Sans"/>
-                <a:sym typeface="Plus Jakarta Sans"/>
-              </a:rPr>
-              <a:t>I follower social visualizzano i post passivamente senza completare l'ordine sul web.</a:t>
-            </a:r>
-            <a:endParaRPr/>
-          </a:p>
-        </p:txBody>
-      </p:sp>
-      <p:sp>
-        <p:nvSpPr>
-          <p:cNvPr id="121" name="Google Shape;121;p14"/>
-          <p:cNvSpPr txBox="1"/>
-          <p:nvPr/>
-        </p:nvSpPr>
-        <p:spPr>
-          <a:xfrm>
-            <a:off x="8547199" y="4476750"/>
-            <a:ext cx="2507032" cy="161925"/>
-          </a:xfrm>
-          <a:prstGeom prst="rect">
-            <a:avLst/>
-          </a:prstGeom>
-          <a:noFill/>
-          <a:ln>
-            <a:noFill/>
-          </a:ln>
-        </p:spPr>
-        <p:txBody>
-          <a:bodyPr spcFirstLastPara="1" wrap="square" lIns="0" tIns="0" rIns="0" bIns="0" anchor="t" anchorCtr="0">
-            <a:spAutoFit/>
-          </a:bodyPr>
-          <a:lstStyle/>
-          <a:p>
-            <a:pPr marL="0" marR="0" lvl="0" indent="0" algn="l" rtl="0">
-              <a:spcBef>
-                <a:spcPts val="0"/>
-              </a:spcBef>
-              <a:spcAft>
-                <a:spcPts val="0"/>
-              </a:spcAft>
-              <a:buNone/>
-            </a:pPr>
-            <a:r>
-              <a:rPr lang="en-US" sz="1125" b="0" i="0" u="none" strike="noStrike" cap="none" dirty="0">
-                <a:solidFill>
-                  <a:srgbClr val="34D399"/>
-                </a:solidFill>
-                <a:latin typeface="Plus Jakarta Sans SemiBold"/>
-                <a:ea typeface="Plus Jakarta Sans SemiBold"/>
-                <a:cs typeface="Plus Jakarta Sans SemiBold"/>
-                <a:sym typeface="Plus Jakarta Sans SemiBold"/>
-              </a:rPr>
-              <a:t>SOLUZIONE</a:t>
-            </a:r>
-            <a:endParaRPr dirty="0"/>
-          </a:p>
-        </p:txBody>
-      </p:sp>
-      <p:sp>
-        <p:nvSpPr>
-          <p:cNvPr id="122" name="Google Shape;122;p14"/>
-          <p:cNvSpPr txBox="1"/>
-          <p:nvPr/>
-        </p:nvSpPr>
-        <p:spPr>
-          <a:xfrm>
-            <a:off x="8547199" y="4686300"/>
-            <a:ext cx="2387649" cy="594270"/>
-          </a:xfrm>
-          <a:prstGeom prst="rect">
-            <a:avLst/>
-          </a:prstGeom>
-          <a:noFill/>
-          <a:ln>
-            <a:noFill/>
-          </a:ln>
-        </p:spPr>
-        <p:txBody>
-          <a:bodyPr spcFirstLastPara="1" wrap="square" lIns="0" tIns="0" rIns="0" bIns="0" anchor="t" anchorCtr="0">
-            <a:spAutoFit/>
-          </a:bodyPr>
-          <a:lstStyle/>
-          <a:p>
-            <a:pPr marL="0" marR="0" lvl="0" indent="0" algn="l" rtl="0">
-              <a:lnSpc>
-                <a:spcPct val="160000"/>
-              </a:lnSpc>
-              <a:spcBef>
-                <a:spcPts val="0"/>
-              </a:spcBef>
-              <a:spcAft>
-                <a:spcPts val="0"/>
-              </a:spcAft>
-              <a:buNone/>
-            </a:pPr>
-            <a:r>
-              <a:rPr lang="en-US" sz="975" b="0" i="0" u="none" strike="noStrike" cap="none" dirty="0" err="1">
-                <a:solidFill>
-                  <a:srgbClr val="E4E4E7"/>
-                </a:solidFill>
-                <a:latin typeface="Plus Jakarta Sans"/>
-                <a:ea typeface="Plus Jakarta Sans"/>
-                <a:cs typeface="Plus Jakarta Sans"/>
-                <a:sym typeface="Plus Jakarta Sans"/>
-              </a:rPr>
-              <a:t>Integrazione</a:t>
-            </a:r>
-            <a:r>
-              <a:rPr lang="en-US" sz="975" b="0" i="0" u="none" strike="noStrike" cap="none" dirty="0">
-                <a:solidFill>
-                  <a:srgbClr val="E4E4E7"/>
-                </a:solidFill>
-                <a:latin typeface="Plus Jakarta Sans"/>
-                <a:ea typeface="Plus Jakarta Sans"/>
-                <a:cs typeface="Plus Jakarta Sans"/>
-                <a:sym typeface="Plus Jakarta Sans"/>
-              </a:rPr>
-              <a:t> </a:t>
-            </a:r>
-            <a:r>
-              <a:rPr lang="en-US" sz="975" b="0" i="0" u="none" strike="noStrike" cap="none" dirty="0" err="1">
-                <a:solidFill>
-                  <a:srgbClr val="E4E4E7"/>
-                </a:solidFill>
-                <a:latin typeface="Plus Jakarta Sans"/>
-                <a:ea typeface="Plus Jakarta Sans"/>
-                <a:cs typeface="Plus Jakarta Sans"/>
-                <a:sym typeface="Plus Jakarta Sans"/>
-              </a:rPr>
-              <a:t>automatica</a:t>
-            </a:r>
-            <a:r>
-              <a:rPr lang="en-US" sz="975" b="0" i="0" u="none" strike="noStrike" cap="none" dirty="0">
-                <a:solidFill>
-                  <a:srgbClr val="E4E4E7"/>
-                </a:solidFill>
-                <a:latin typeface="Plus Jakarta Sans"/>
-                <a:ea typeface="Plus Jakarta Sans"/>
-                <a:cs typeface="Plus Jakarta Sans"/>
-                <a:sym typeface="Plus Jakarta Sans"/>
-              </a:rPr>
-              <a:t> Instagram/FB Shop e chatbot </a:t>
-            </a:r>
-            <a:r>
-              <a:rPr lang="en-US" sz="975" b="0" i="0" u="none" strike="noStrike" cap="none" dirty="0" err="1">
-                <a:solidFill>
-                  <a:srgbClr val="E4E4E7"/>
-                </a:solidFill>
-                <a:latin typeface="Plus Jakarta Sans"/>
-                <a:ea typeface="Plus Jakarta Sans"/>
-                <a:cs typeface="Plus Jakarta Sans"/>
-                <a:sym typeface="Plus Jakarta Sans"/>
-              </a:rPr>
-              <a:t>intelligenti</a:t>
-            </a:r>
-            <a:r>
-              <a:rPr lang="en-US" sz="975" b="0" i="0" u="none" strike="noStrike" cap="none" dirty="0">
-                <a:solidFill>
-                  <a:srgbClr val="E4E4E7"/>
-                </a:solidFill>
-                <a:latin typeface="Plus Jakarta Sans"/>
-                <a:ea typeface="Plus Jakarta Sans"/>
-                <a:cs typeface="Plus Jakarta Sans"/>
-                <a:sym typeface="Plus Jakarta Sans"/>
-              </a:rPr>
-              <a:t> per </a:t>
-            </a:r>
-            <a:r>
-              <a:rPr lang="en-US" sz="975" b="0" i="0" u="none" strike="noStrike" cap="none" dirty="0" err="1">
-                <a:solidFill>
-                  <a:srgbClr val="E4E4E7"/>
-                </a:solidFill>
-                <a:latin typeface="Plus Jakarta Sans"/>
-                <a:ea typeface="Plus Jakarta Sans"/>
-                <a:cs typeface="Plus Jakarta Sans"/>
-                <a:sym typeface="Plus Jakarta Sans"/>
-              </a:rPr>
-              <a:t>inviare</a:t>
-            </a:r>
-            <a:r>
-              <a:rPr lang="en-US" sz="975" b="0" i="0" u="none" strike="noStrike" cap="none" dirty="0">
-                <a:solidFill>
-                  <a:srgbClr val="E4E4E7"/>
-                </a:solidFill>
-                <a:latin typeface="Plus Jakarta Sans"/>
-                <a:ea typeface="Plus Jakarta Sans"/>
-                <a:cs typeface="Plus Jakarta Sans"/>
-                <a:sym typeface="Plus Jakarta Sans"/>
-              </a:rPr>
-              <a:t> coupon </a:t>
-            </a:r>
-            <a:r>
-              <a:rPr lang="en-US" sz="975" b="0" i="0" u="none" strike="noStrike" cap="none" dirty="0" err="1">
-                <a:solidFill>
-                  <a:srgbClr val="E4E4E7"/>
-                </a:solidFill>
-                <a:latin typeface="Plus Jakarta Sans"/>
-                <a:ea typeface="Plus Jakarta Sans"/>
-                <a:cs typeface="Plus Jakarta Sans"/>
-                <a:sym typeface="Plus Jakarta Sans"/>
-              </a:rPr>
-              <a:t>diretti</a:t>
-            </a:r>
-            <a:r>
-              <a:rPr lang="en-US" sz="975" b="0" i="0" u="none" strike="noStrike" cap="none" dirty="0">
-                <a:solidFill>
-                  <a:srgbClr val="E4E4E7"/>
-                </a:solidFill>
-                <a:latin typeface="Plus Jakarta Sans"/>
-                <a:ea typeface="Plus Jakarta Sans"/>
-                <a:cs typeface="Plus Jakarta Sans"/>
-                <a:sym typeface="Plus Jakarta Sans"/>
-              </a:rPr>
-              <a:t> </a:t>
-            </a:r>
-            <a:r>
-              <a:rPr lang="en-US" sz="975" b="0" i="0" u="none" strike="noStrike" cap="none" dirty="0" err="1">
-                <a:solidFill>
-                  <a:srgbClr val="E4E4E7"/>
-                </a:solidFill>
-                <a:latin typeface="Plus Jakarta Sans"/>
-                <a:ea typeface="Plus Jakarta Sans"/>
-                <a:cs typeface="Plus Jakarta Sans"/>
-                <a:sym typeface="Plus Jakarta Sans"/>
-              </a:rPr>
-              <a:t>nei</a:t>
-            </a:r>
-            <a:r>
-              <a:rPr lang="en-US" sz="975" b="0" i="0" u="none" strike="noStrike" cap="none" dirty="0">
-                <a:solidFill>
-                  <a:srgbClr val="E4E4E7"/>
-                </a:solidFill>
-                <a:latin typeface="Plus Jakarta Sans"/>
-                <a:ea typeface="Plus Jakarta Sans"/>
-                <a:cs typeface="Plus Jakarta Sans"/>
-                <a:sym typeface="Plus Jakarta Sans"/>
-              </a:rPr>
-              <a:t> </a:t>
-            </a:r>
-            <a:r>
-              <a:rPr lang="en-US" sz="975" b="0" i="0" u="none" strike="noStrike" cap="none" dirty="0" err="1">
-                <a:solidFill>
-                  <a:srgbClr val="E4E4E7"/>
-                </a:solidFill>
-                <a:latin typeface="Plus Jakarta Sans"/>
-                <a:ea typeface="Plus Jakarta Sans"/>
-                <a:cs typeface="Plus Jakarta Sans"/>
-                <a:sym typeface="Plus Jakarta Sans"/>
-              </a:rPr>
-              <a:t>messaggi</a:t>
-            </a:r>
-            <a:r>
-              <a:rPr lang="en-US" sz="975" b="0" i="0" u="none" strike="noStrike" cap="none" dirty="0">
-                <a:solidFill>
-                  <a:srgbClr val="E4E4E7"/>
-                </a:solidFill>
-                <a:latin typeface="Plus Jakarta Sans"/>
-                <a:ea typeface="Plus Jakarta Sans"/>
-                <a:cs typeface="Plus Jakarta Sans"/>
-                <a:sym typeface="Plus Jakarta Sans"/>
-              </a:rPr>
-              <a:t> </a:t>
-            </a:r>
-            <a:r>
-              <a:rPr lang="en-US" sz="975" b="0" i="0" u="none" strike="noStrike" cap="none" dirty="0" err="1">
-                <a:solidFill>
-                  <a:srgbClr val="E4E4E7"/>
-                </a:solidFill>
-                <a:latin typeface="Plus Jakarta Sans"/>
-                <a:ea typeface="Plus Jakarta Sans"/>
-                <a:cs typeface="Plus Jakarta Sans"/>
-                <a:sym typeface="Plus Jakarta Sans"/>
-              </a:rPr>
-              <a:t>privati</a:t>
-            </a:r>
-            <a:r>
-              <a:rPr lang="en-US" sz="975" b="0" i="0" u="none" strike="noStrike" cap="none" dirty="0">
-                <a:solidFill>
-                  <a:srgbClr val="E4E4E7"/>
-                </a:solidFill>
-                <a:latin typeface="Plus Jakarta Sans"/>
-                <a:ea typeface="Plus Jakarta Sans"/>
-                <a:cs typeface="Plus Jakarta Sans"/>
-                <a:sym typeface="Plus Jakarta Sans"/>
-              </a:rPr>
-              <a:t>.</a:t>
-            </a:r>
-            <a:endParaRPr dirty="0"/>
+            <a:pPr algn="ctr" fontAlgn="base"/>
+            <a:r>
+              <a:rPr lang="it-IT" sz="1600" dirty="0">
+                <a:solidFill>
+                  <a:srgbClr val="F5F5F0"/>
+                </a:solidFill>
+              </a:rPr>
+              <a:t>Camoirano Alberto</a:t>
+            </a:r>
           </a:p>
         </p:txBody>
       </p:sp>
@@ -16911,8 +18067,8 @@
         </p:blipFill>
         <p:spPr>
           <a:xfrm>
-            <a:off x="0" y="0"/>
-            <a:ext cx="12192000" cy="6858000"/>
+            <a:off x="-86497" y="-98854"/>
+            <a:ext cx="12278497" cy="7117492"/>
           </a:xfrm>
           <a:prstGeom prst="rect">
             <a:avLst/>
@@ -17013,7 +18169,7 @@
         <p:spPr>
           <a:xfrm>
             <a:off x="962025" y="581025"/>
-            <a:ext cx="10981372" cy="409575"/>
+            <a:ext cx="10981372" cy="438582"/>
           </a:xfrm>
           <a:prstGeom prst="rect">
             <a:avLst/>
@@ -17039,7 +18195,7 @@
               <a:buNone/>
             </a:pPr>
             <a:r>
-              <a:rPr lang="en-US" sz="2850" b="1" i="0" u="none" strike="noStrike" cap="none">
+              <a:rPr lang="en-US" sz="2850" b="1" i="0" u="none" strike="noStrike" cap="none" dirty="0">
                 <a:solidFill>
                   <a:srgbClr val="FFFFFF"/>
                 </a:solidFill>
@@ -17048,9 +18204,9 @@
                 <a:cs typeface="Poppins"/>
                 <a:sym typeface="Poppins"/>
               </a:rPr>
-              <a:t>SOLUZIONI CREATIVE OUT-OF-THE-BOX</a:t>
-            </a:r>
-            <a:endParaRPr/>
+              <a:t>FRAMEWORK OPERATIVO</a:t>
+            </a:r>
+            <a:endParaRPr dirty="0"/>
           </a:p>
         </p:txBody>
       </p:sp>
@@ -17110,8 +18266,8 @@
         </p:nvSpPr>
         <p:spPr>
           <a:xfrm>
-            <a:off x="1066800" y="3207990"/>
-            <a:ext cx="2947087" cy="219075"/>
+            <a:off x="962025" y="2564191"/>
+            <a:ext cx="2947087" cy="230832"/>
           </a:xfrm>
           <a:prstGeom prst="rect">
             <a:avLst/>
@@ -17137,18 +18293,22 @@
               <a:buNone/>
             </a:pPr>
             <a:r>
-              <a:rPr lang="en-US" sz="1500" b="1" i="0" u="none" strike="noStrike" cap="none">
-                <a:solidFill>
-                  <a:srgbClr val="FFFFFF"/>
+              <a:rPr lang="en-US" sz="1500" b="1" i="0" u="none" strike="noStrike" cap="none" dirty="0">
+                <a:solidFill>
+                  <a:srgbClr val="298D68"/>
                 </a:solidFill>
                 <a:latin typeface="Poppins"/>
                 <a:ea typeface="Poppins"/>
                 <a:cs typeface="Poppins"/>
                 <a:sym typeface="Poppins"/>
               </a:rPr>
-              <a:t>Configuratore AR 3D</a:t>
-            </a:r>
-            <a:endParaRPr/>
+              <a:t>Roadmap Synchronization</a:t>
+            </a:r>
+            <a:endParaRPr dirty="0">
+              <a:solidFill>
+                <a:srgbClr val="298D68"/>
+              </a:solidFill>
+            </a:endParaRPr>
           </a:p>
         </p:txBody>
       </p:sp>
@@ -17160,8 +18320,8 @@
         </p:nvSpPr>
         <p:spPr>
           <a:xfrm>
-            <a:off x="1066800" y="3541365"/>
-            <a:ext cx="2806749" cy="213270"/>
+            <a:off x="962024" y="2929676"/>
+            <a:ext cx="2806749" cy="258532"/>
           </a:xfrm>
           <a:prstGeom prst="rect">
             <a:avLst/>
@@ -17190,18 +18350,18 @@
               <a:buNone/>
             </a:pPr>
             <a:r>
-              <a:rPr lang="en-US" sz="1050" b="0" i="0" u="none" strike="noStrike" cap="none">
-                <a:solidFill>
-                  <a:srgbClr val="FFFFFF"/>
-                </a:solidFill>
-                <a:latin typeface="Plus Jakarta Sans SemiBold"/>
-                <a:ea typeface="Plus Jakarta Sans SemiBold"/>
-                <a:cs typeface="Plus Jakarta Sans SemiBold"/>
-                <a:sym typeface="Plus Jakarta Sans SemiBold"/>
-              </a:rPr>
-              <a:t>VISUALIZZAZIONE INTERATTIVA</a:t>
-            </a:r>
-            <a:endParaRPr/>
+              <a:rPr lang="it-IT" sz="1050" b="1" i="1" dirty="0">
+                <a:solidFill>
+                  <a:srgbClr val="F5F5F0"/>
+                </a:solidFill>
+              </a:rPr>
+              <a:t>SINCRONIZZAZIONE STRATEGICA</a:t>
+            </a:r>
+            <a:endParaRPr sz="1050" b="1" i="1" dirty="0">
+              <a:solidFill>
+                <a:srgbClr val="F5F5F0"/>
+              </a:solidFill>
+            </a:endParaRPr>
           </a:p>
         </p:txBody>
       </p:sp>
@@ -17213,8 +18373,8 @@
         </p:nvSpPr>
         <p:spPr>
           <a:xfrm>
-            <a:off x="1066800" y="3868935"/>
-            <a:ext cx="2806749" cy="928687"/>
+            <a:off x="962024" y="3459892"/>
+            <a:ext cx="2806749" cy="678647"/>
           </a:xfrm>
           <a:prstGeom prst="rect">
             <a:avLst/>
@@ -17230,31 +18390,24 @@
           </a:bodyPr>
           <a:lstStyle/>
           <a:p>
-            <a:pPr marL="0" marR="0" lvl="0" indent="0" algn="l" rtl="0">
+            <a:pPr lvl="0">
               <a:lnSpc>
                 <a:spcPct val="149948"/>
               </a:lnSpc>
-              <a:spcBef>
-                <a:spcPts val="0"/>
-              </a:spcBef>
-              <a:spcAft>
-                <a:spcPts val="0"/>
-              </a:spcAft>
-              <a:buNone/>
             </a:pPr>
             <a:r>
-              <a:rPr lang="en-US" sz="975" b="0" i="0" u="none" strike="noStrike" cap="none">
-                <a:solidFill>
-                  <a:srgbClr val="A1A1AA"/>
-                </a:solidFill>
-                <a:latin typeface="Plus Jakarta Sans"/>
-                <a:ea typeface="Plus Jakarta Sans"/>
-                <a:cs typeface="Plus Jakarta Sans"/>
-                <a:sym typeface="Plus Jakarta Sans"/>
-              </a:rPr>
-              <a:t>Un configuratore 3D in-app e un filtro Instagram in Realtà Aumentata (AR) per comporre virtualmente il proprio burger strato dopo strato. Risolve l'indecisione sulla scelta degli ingredienti extra, aumentando lo scontrino medio stimato del 18%.</a:t>
-            </a:r>
-            <a:endParaRPr/>
+              <a:rPr lang="it-IT" sz="980" dirty="0">
+                <a:solidFill>
+                  <a:srgbClr val="A5A5A5"/>
+                </a:solidFill>
+              </a:rPr>
+              <a:t>Allineamento totale tra obiettivi di business, design e sviluppo per garantire una visione condivisa e priorità chiare</a:t>
+            </a:r>
+            <a:endParaRPr sz="980" dirty="0">
+              <a:solidFill>
+                <a:srgbClr val="A5A5A5"/>
+              </a:solidFill>
+            </a:endParaRPr>
           </a:p>
         </p:txBody>
       </p:sp>
@@ -17266,8 +18419,8 @@
         </p:nvSpPr>
         <p:spPr>
           <a:xfrm>
-            <a:off x="4692699" y="3207990"/>
-            <a:ext cx="2947087" cy="219075"/>
+            <a:off x="4552361" y="2564191"/>
+            <a:ext cx="2947087" cy="677108"/>
           </a:xfrm>
           <a:prstGeom prst="rect">
             <a:avLst/>
@@ -17283,28 +18436,34 @@
           </a:bodyPr>
           <a:lstStyle/>
           <a:p>
-            <a:pPr marL="0" marR="0" lvl="0" indent="0" algn="l" rtl="0">
-              <a:spcBef>
-                <a:spcPts val="0"/>
-              </a:spcBef>
-              <a:spcAft>
-                <a:spcPts val="0"/>
-              </a:spcAft>
-              <a:buNone/>
-            </a:pPr>
-            <a:r>
-              <a:rPr lang="en-US" sz="1500" b="1" i="0" u="none" strike="noStrike" cap="none">
-                <a:solidFill>
-                  <a:srgbClr val="FFFFFF"/>
-                </a:solidFill>
-                <a:latin typeface="Poppins"/>
-                <a:ea typeface="Poppins"/>
-                <a:cs typeface="Poppins"/>
-                <a:sym typeface="Poppins"/>
-              </a:rPr>
-              <a:t>"Waiting-Time" Experience</a:t>
-            </a:r>
-            <a:endParaRPr/>
+            <a:pPr fontAlgn="base"/>
+            <a:r>
+              <a:rPr lang="it-IT" sz="1500" b="1" dirty="0">
+                <a:solidFill>
+                  <a:srgbClr val="298D68"/>
+                </a:solidFill>
+              </a:rPr>
+              <a:t>Sprint </a:t>
+            </a:r>
+            <a:r>
+              <a:rPr lang="it-IT" sz="1500" b="1" dirty="0" err="1">
+                <a:solidFill>
+                  <a:srgbClr val="298D68"/>
+                </a:solidFill>
+              </a:rPr>
+              <a:t>Execution</a:t>
+            </a:r>
+            <a:endParaRPr lang="it-IT" sz="1500" b="1" dirty="0">
+              <a:solidFill>
+                <a:srgbClr val="298D68"/>
+              </a:solidFill>
+            </a:endParaRPr>
+          </a:p>
+          <a:p>
+            <a:br>
+              <a:rPr lang="it-IT" dirty="0"/>
+            </a:br>
+            <a:endParaRPr dirty="0"/>
           </a:p>
         </p:txBody>
       </p:sp>
@@ -17316,8 +18475,8 @@
         </p:nvSpPr>
         <p:spPr>
           <a:xfrm>
-            <a:off x="4692699" y="3541365"/>
-            <a:ext cx="2806749" cy="213270"/>
+            <a:off x="4552361" y="2988558"/>
+            <a:ext cx="2806749" cy="592470"/>
           </a:xfrm>
           <a:prstGeom prst="rect">
             <a:avLst/>
@@ -17333,31 +18492,21 @@
           </a:bodyPr>
           <a:lstStyle/>
           <a:p>
-            <a:pPr marL="0" marR="0" lvl="0" indent="0" algn="l" rtl="0">
-              <a:lnSpc>
-                <a:spcPct val="159904"/>
-              </a:lnSpc>
-              <a:spcBef>
-                <a:spcPts val="0"/>
-              </a:spcBef>
-              <a:spcAft>
-                <a:spcPts val="0"/>
-              </a:spcAft>
-              <a:buNone/>
-            </a:pPr>
-            <a:r>
-              <a:rPr lang="en-US" sz="1050" b="0" i="0" u="none" strike="noStrike" cap="none">
-                <a:solidFill>
-                  <a:srgbClr val="FFFFFF"/>
-                </a:solidFill>
-                <a:latin typeface="Plus Jakarta Sans SemiBold"/>
-                <a:ea typeface="Plus Jakarta Sans SemiBold"/>
-                <a:cs typeface="Plus Jakarta Sans SemiBold"/>
-                <a:sym typeface="Plus Jakarta Sans SemiBold"/>
-              </a:rPr>
-              <a:t>INTRATTENIMENTO &amp; ENGAGEMENT</a:t>
-            </a:r>
-            <a:endParaRPr/>
+            <a:pPr fontAlgn="base"/>
+            <a:r>
+              <a:rPr lang="it-IT" sz="1050" b="1" i="1" dirty="0">
+                <a:solidFill>
+                  <a:srgbClr val="F5F5F0"/>
+                </a:solidFill>
+              </a:rPr>
+              <a:t>ESECUZIONE AGILE</a:t>
+            </a:r>
+          </a:p>
+          <a:p>
+            <a:br>
+              <a:rPr lang="it-IT" dirty="0"/>
+            </a:br>
+            <a:endParaRPr dirty="0"/>
           </a:p>
         </p:txBody>
       </p:sp>
@@ -17369,8 +18518,8 @@
         </p:nvSpPr>
         <p:spPr>
           <a:xfrm>
-            <a:off x="4692699" y="3868935"/>
-            <a:ext cx="2806749" cy="1114425"/>
+            <a:off x="4552361" y="3513817"/>
+            <a:ext cx="2806749" cy="883319"/>
           </a:xfrm>
           <a:prstGeom prst="rect">
             <a:avLst/>
@@ -17386,31 +18535,21 @@
           </a:bodyPr>
           <a:lstStyle/>
           <a:p>
-            <a:pPr marL="0" marR="0" lvl="0" indent="0" algn="l" rtl="0">
-              <a:lnSpc>
-                <a:spcPct val="149948"/>
-              </a:lnSpc>
-              <a:spcBef>
-                <a:spcPts val="0"/>
-              </a:spcBef>
-              <a:spcAft>
-                <a:spcPts val="0"/>
-              </a:spcAft>
-              <a:buNone/>
-            </a:pPr>
-            <a:r>
-              <a:rPr lang="en-US" sz="975" b="0" i="0" u="none" strike="noStrike" cap="none">
-                <a:solidFill>
-                  <a:srgbClr val="A1A1AA"/>
-                </a:solidFill>
-                <a:latin typeface="Plus Jakarta Sans"/>
-                <a:ea typeface="Plus Jakarta Sans"/>
-                <a:cs typeface="Plus Jakarta Sans"/>
-                <a:sym typeface="Plus Jakarta Sans"/>
-              </a:rPr>
-              <a:t>Trasforma il "tempo morto" dell'attesa della consegna in un'esperienza branded. Tramite notifiche push divertenti e geo-localizzate ("Il rider sta piegando in curva", "La piastra è bollente") e una playlist Spotify esclusiva co-brandizzata sbloccata alla spedizione.</a:t>
-            </a:r>
-            <a:endParaRPr/>
+            <a:pPr fontAlgn="base"/>
+            <a:r>
+              <a:rPr lang="it-IT" sz="980" dirty="0">
+                <a:solidFill>
+                  <a:srgbClr val="A5A5A5"/>
+                </a:solidFill>
+              </a:rPr>
+              <a:t>Cicli di lavoro brevi e focalizzati per trasformare le priorità in soluzioni concrete, mantenendo alta la produttività.</a:t>
+            </a:r>
+          </a:p>
+          <a:p>
+            <a:br>
+              <a:rPr lang="it-IT" dirty="0"/>
+            </a:br>
+            <a:endParaRPr dirty="0"/>
           </a:p>
         </p:txBody>
       </p:sp>
@@ -17422,8 +18561,8 @@
         </p:nvSpPr>
         <p:spPr>
           <a:xfrm>
-            <a:off x="8318599" y="3207990"/>
-            <a:ext cx="2947087" cy="219075"/>
+            <a:off x="8178261" y="2564191"/>
+            <a:ext cx="2947087" cy="661720"/>
           </a:xfrm>
           <a:prstGeom prst="rect">
             <a:avLst/>
@@ -17439,28 +18578,34 @@
           </a:bodyPr>
           <a:lstStyle/>
           <a:p>
-            <a:pPr marL="0" marR="0" lvl="0" indent="0" algn="l" rtl="0">
-              <a:spcBef>
-                <a:spcPts val="0"/>
-              </a:spcBef>
-              <a:spcAft>
-                <a:spcPts val="0"/>
-              </a:spcAft>
-              <a:buNone/>
-            </a:pPr>
-            <a:r>
-              <a:rPr lang="en-US" sz="1500" b="1" i="0" u="none" strike="noStrike" cap="none">
-                <a:solidFill>
-                  <a:srgbClr val="FFFFFF"/>
-                </a:solidFill>
-                <a:latin typeface="Poppins"/>
-                <a:ea typeface="Poppins"/>
-                <a:cs typeface="Poppins"/>
-                <a:sym typeface="Poppins"/>
-              </a:rPr>
-              <a:t>"Secret Menu" Gamification</a:t>
-            </a:r>
-            <a:endParaRPr/>
+            <a:pPr fontAlgn="base"/>
+            <a:r>
+              <a:rPr lang="it-IT" sz="1500" b="1" dirty="0">
+                <a:solidFill>
+                  <a:srgbClr val="298D68"/>
+                </a:solidFill>
+              </a:rPr>
+              <a:t>Iterative </a:t>
+            </a:r>
+            <a:r>
+              <a:rPr lang="it-IT" sz="1500" b="1" dirty="0" err="1">
+                <a:solidFill>
+                  <a:srgbClr val="298D68"/>
+                </a:solidFill>
+              </a:rPr>
+              <a:t>Validation</a:t>
+            </a:r>
+            <a:endParaRPr lang="it-IT" sz="1500" b="1" dirty="0">
+              <a:solidFill>
+                <a:srgbClr val="298D68"/>
+              </a:solidFill>
+            </a:endParaRPr>
+          </a:p>
+          <a:p>
+            <a:br>
+              <a:rPr lang="it-IT" dirty="0"/>
+            </a:br>
+            <a:endParaRPr dirty="0"/>
           </a:p>
         </p:txBody>
       </p:sp>
@@ -17472,8 +18617,8 @@
         </p:nvSpPr>
         <p:spPr>
           <a:xfrm>
-            <a:off x="8318599" y="3541365"/>
-            <a:ext cx="2806749" cy="213270"/>
+            <a:off x="8199683" y="2988558"/>
+            <a:ext cx="2806749" cy="592470"/>
           </a:xfrm>
           <a:prstGeom prst="rect">
             <a:avLst/>
@@ -17489,31 +18634,21 @@
           </a:bodyPr>
           <a:lstStyle/>
           <a:p>
-            <a:pPr marL="0" marR="0" lvl="0" indent="0" algn="l" rtl="0">
-              <a:lnSpc>
-                <a:spcPct val="159904"/>
-              </a:lnSpc>
-              <a:spcBef>
-                <a:spcPts val="0"/>
-              </a:spcBef>
-              <a:spcAft>
-                <a:spcPts val="0"/>
-              </a:spcAft>
-              <a:buNone/>
-            </a:pPr>
-            <a:r>
-              <a:rPr lang="en-US" sz="1050" b="0" i="0" u="none" strike="noStrike" cap="none">
-                <a:solidFill>
-                  <a:srgbClr val="FFFFFF"/>
-                </a:solidFill>
-                <a:latin typeface="Plus Jakarta Sans SemiBold"/>
-                <a:ea typeface="Plus Jakarta Sans SemiBold"/>
-                <a:cs typeface="Plus Jakarta Sans SemiBold"/>
-                <a:sym typeface="Plus Jakarta Sans SemiBold"/>
-              </a:rPr>
-              <a:t>COLLEZIONISMO &amp; FOMO</a:t>
-            </a:r>
-            <a:endParaRPr/>
+            <a:pPr fontAlgn="base"/>
+            <a:r>
+              <a:rPr lang="it-IT" sz="1050" b="1" i="1" dirty="0">
+                <a:solidFill>
+                  <a:srgbClr val="F5F5F0"/>
+                </a:solidFill>
+              </a:rPr>
+              <a:t>VALIDAZIONE ITERATIVA</a:t>
+            </a:r>
+          </a:p>
+          <a:p>
+            <a:br>
+              <a:rPr lang="it-IT" dirty="0"/>
+            </a:br>
+            <a:endParaRPr dirty="0"/>
           </a:p>
         </p:txBody>
       </p:sp>
@@ -17525,8 +18660,8 @@
         </p:nvSpPr>
         <p:spPr>
           <a:xfrm>
-            <a:off x="8318599" y="3868935"/>
-            <a:ext cx="2806749" cy="928687"/>
+            <a:off x="8199683" y="3513817"/>
+            <a:ext cx="2806749" cy="452432"/>
           </a:xfrm>
           <a:prstGeom prst="rect">
             <a:avLst/>
@@ -17542,115 +18677,18 @@
           </a:bodyPr>
           <a:lstStyle/>
           <a:p>
-            <a:pPr marL="0" marR="0" lvl="0" indent="0" algn="l" rtl="0">
-              <a:lnSpc>
-                <a:spcPct val="149948"/>
-              </a:lnSpc>
-              <a:spcBef>
-                <a:spcPts val="0"/>
-              </a:spcBef>
-              <a:spcAft>
-                <a:spcPts val="0"/>
-              </a:spcAft>
-              <a:buNone/>
-            </a:pPr>
-            <a:r>
-              <a:rPr lang="en-US" sz="975" b="0" i="0" u="none" strike="noStrike" cap="none">
-                <a:solidFill>
-                  <a:srgbClr val="A1A1AA"/>
-                </a:solidFill>
-                <a:latin typeface="Plus Jakarta Sans"/>
-                <a:ea typeface="Plus Jakarta Sans"/>
-                <a:cs typeface="Plus Jakarta Sans"/>
-                <a:sym typeface="Plus Jakarta Sans"/>
-              </a:rPr>
-              <a:t>Incentiva la ricorrenza degli ordini tramite ricette "segrete" a tempo limitato sbloccabili solo con il completamento di sfide digitali in-app (es. effettuare un ordine durante una serata piovosa o collezionare 3 badge con ordini di salse speciali).</a:t>
-            </a:r>
-            <a:endParaRPr/>
+            <a:pPr fontAlgn="base"/>
+            <a:r>
+              <a:rPr lang="it-IT" sz="980" dirty="0">
+                <a:solidFill>
+                  <a:srgbClr val="A5A5A5"/>
+                </a:solidFill>
+              </a:rPr>
+              <a:t>Test e revisione continua del prodotto basati su feedback reali e dati, per ottimizzare costantemente i risultati.</a:t>
+            </a:r>
           </a:p>
         </p:txBody>
       </p:sp>
-      <p:pic>
-        <p:nvPicPr>
-          <p:cNvPr id="142" name="Google Shape;142;p15" descr="image.png"/>
-          <p:cNvPicPr preferRelativeResize="0"/>
-          <p:nvPr/>
-        </p:nvPicPr>
-        <p:blipFill rotWithShape="1">
-          <a:blip r:embed="rId7">
-            <a:alphaModFix/>
-          </a:blip>
-          <a:srcRect/>
-          <a:stretch/>
-        </p:blipFill>
-        <p:spPr>
-          <a:xfrm>
-            <a:off x="1066800" y="2636490"/>
-            <a:ext cx="390525" cy="342900"/>
-          </a:xfrm>
-          <a:prstGeom prst="rect">
-            <a:avLst/>
-          </a:prstGeom>
-          <a:noFill/>
-          <a:ln>
-            <a:noFill/>
-          </a:ln>
-        </p:spPr>
-      </p:pic>
-      <p:pic>
-        <p:nvPicPr>
-          <p:cNvPr id="143" name="Google Shape;143;p15" descr="image.png"/>
-          <p:cNvPicPr preferRelativeResize="0"/>
-          <p:nvPr/>
-        </p:nvPicPr>
-        <p:blipFill rotWithShape="1">
-          <a:blip r:embed="rId8">
-            <a:alphaModFix/>
-          </a:blip>
-          <a:srcRect/>
-          <a:stretch/>
-        </p:blipFill>
-        <p:spPr>
-          <a:xfrm>
-            <a:off x="4692699" y="2636490"/>
-            <a:ext cx="342900" cy="342900"/>
-          </a:xfrm>
-          <a:prstGeom prst="rect">
-            <a:avLst/>
-          </a:prstGeom>
-          <a:noFill/>
-          <a:ln>
-            <a:noFill/>
-          </a:ln>
-        </p:spPr>
-      </p:pic>
-      <p:pic>
-        <p:nvPicPr>
-          <p:cNvPr id="144" name="Google Shape;144;p15" descr="image.png"/>
-          <p:cNvPicPr preferRelativeResize="0"/>
-          <p:nvPr/>
-        </p:nvPicPr>
-        <p:blipFill rotWithShape="1">
-          <a:blip r:embed="rId9">
-            <a:alphaModFix/>
-          </a:blip>
-          <a:srcRect/>
-          <a:stretch/>
-        </p:blipFill>
-        <p:spPr>
-          <a:xfrm>
-            <a:off x="8318599" y="2636490"/>
-            <a:ext cx="342900" cy="342900"/>
-          </a:xfrm>
-          <a:prstGeom prst="rect">
-            <a:avLst/>
-          </a:prstGeom>
-          <a:noFill/>
-          <a:ln>
-            <a:noFill/>
-          </a:ln>
-        </p:spPr>
-      </p:pic>
     </p:spTree>
   </p:cSld>
   <p:clrMapOvr>
@@ -17895,7 +18933,7 @@
         <p:spPr>
           <a:xfrm>
             <a:off x="762000" y="1057275"/>
-            <a:ext cx="10668000" cy="243780"/>
+            <a:ext cx="10668000" cy="295466"/>
           </a:xfrm>
           <a:prstGeom prst="rect">
             <a:avLst/>
@@ -17924,7 +18962,7 @@
               <a:buNone/>
             </a:pPr>
             <a:r>
-              <a:rPr lang="en-US" sz="1200" b="0" i="0" u="none" strike="noStrike" cap="none">
+              <a:rPr lang="it-IT" sz="1200" b="0" i="0" u="none" strike="noStrike" cap="none" dirty="0">
                 <a:solidFill>
                   <a:srgbClr val="A3A3A3"/>
                 </a:solidFill>
@@ -17933,9 +18971,33 @@
                 <a:cs typeface="Inter"/>
                 <a:sym typeface="Inter"/>
               </a:rPr>
-              <a:t>Andiamo oltre la classica paninoteca: creiamo un vero e proprio ecosistema digitale integrato.</a:t>
-            </a:r>
-            <a:endParaRPr/>
+              <a:t>Andiamo oltre la classica </a:t>
+            </a:r>
+            <a:r>
+              <a:rPr lang="it-IT" sz="1200" b="0" i="0" u="none" strike="noStrike" cap="none" dirty="0" err="1">
+                <a:solidFill>
+                  <a:srgbClr val="A3A3A3"/>
+                </a:solidFill>
+                <a:latin typeface="Inter"/>
+                <a:ea typeface="Inter"/>
+                <a:cs typeface="Inter"/>
+                <a:sym typeface="Inter"/>
+              </a:rPr>
+              <a:t>burgeria</a:t>
+            </a:r>
+            <a:r>
+              <a:rPr lang="it-IT" sz="1200" b="0" i="0" u="none" strike="noStrike" cap="none" dirty="0">
+                <a:solidFill>
+                  <a:srgbClr val="A3A3A3"/>
+                </a:solidFill>
+                <a:latin typeface="Inter"/>
+                <a:ea typeface="Inter"/>
+                <a:cs typeface="Inter"/>
+                <a:sym typeface="Inter"/>
+              </a:rPr>
+              <a:t>: creiamo un vero e proprio ecosistema digitale integrato.</a:t>
+            </a:r>
+            <a:endParaRPr lang="it-IT" dirty="0"/>
           </a:p>
         </p:txBody>
       </p:sp>
@@ -17954,7 +19016,7 @@
         </p:blipFill>
         <p:spPr>
           <a:xfrm>
-            <a:off x="762000" y="2753915"/>
+            <a:off x="733552" y="2825873"/>
             <a:ext cx="419100" cy="419100"/>
           </a:xfrm>
           <a:prstGeom prst="rect">
@@ -17981,7 +19043,7 @@
         </p:blipFill>
         <p:spPr>
           <a:xfrm>
-            <a:off x="762000" y="3609082"/>
+            <a:off x="772037" y="4192647"/>
             <a:ext cx="419100" cy="419100"/>
           </a:xfrm>
           <a:prstGeom prst="rect">
@@ -18008,7 +19070,7 @@
         </p:blipFill>
         <p:spPr>
           <a:xfrm>
-            <a:off x="762000" y="4464248"/>
+            <a:off x="733552" y="5409752"/>
             <a:ext cx="419100" cy="419100"/>
           </a:xfrm>
           <a:prstGeom prst="rect">
@@ -18186,7 +19248,7 @@
               <a:buNone/>
             </a:pPr>
             <a:r>
-              <a:rPr lang="en-US" sz="825" b="1" i="0" u="none" strike="noStrike" cap="none">
+              <a:rPr lang="en-US" sz="825" b="1" i="0" u="none" strike="noStrike" cap="none" dirty="0">
                 <a:solidFill>
                   <a:srgbClr val="FFFFFF"/>
                 </a:solidFill>
@@ -18197,7 +19259,7 @@
               </a:rPr>
               <a:t>QUALITÀ</a:t>
             </a:r>
-            <a:endParaRPr/>
+            <a:endParaRPr dirty="0"/>
           </a:p>
         </p:txBody>
       </p:sp>
@@ -18216,7 +19278,7 @@
         </p:blipFill>
         <p:spPr>
           <a:xfrm>
-            <a:off x="904875" y="2877740"/>
+            <a:off x="857377" y="2949698"/>
             <a:ext cx="133350" cy="171450"/>
           </a:xfrm>
           <a:prstGeom prst="rect">
@@ -18236,8 +19298,8 @@
         </p:nvSpPr>
         <p:spPr>
           <a:xfrm>
-            <a:off x="1323975" y="2725340"/>
-            <a:ext cx="5350668" cy="200025"/>
+            <a:off x="1323975" y="2234046"/>
+            <a:ext cx="5350668" cy="207749"/>
           </a:xfrm>
           <a:prstGeom prst="rect">
             <a:avLst/>
@@ -18263,7 +19325,7 @@
               <a:buNone/>
             </a:pPr>
             <a:r>
-              <a:rPr lang="en-US" sz="1350" b="0" i="0" u="none" strike="noStrike" cap="none">
+              <a:rPr lang="en-US" sz="1350" b="0" i="0" u="none" strike="noStrike" cap="none" dirty="0">
                 <a:solidFill>
                   <a:srgbClr val="FFFFFF"/>
                 </a:solidFill>
@@ -18272,9 +19334,9 @@
                 <a:cs typeface="Outfit ExtraBold"/>
                 <a:sym typeface="Outfit ExtraBold"/>
               </a:rPr>
-              <a:t>IDENTITÀ CULINARIA &amp; TECH</a:t>
-            </a:r>
-            <a:endParaRPr/>
+              <a:t>IDENTITÀ CULINARIA</a:t>
+            </a:r>
+            <a:endParaRPr dirty="0"/>
           </a:p>
         </p:txBody>
       </p:sp>
@@ -18286,8 +19348,8 @@
         </p:nvSpPr>
         <p:spPr>
           <a:xfrm>
-            <a:off x="1323975" y="2963465"/>
-            <a:ext cx="5095875" cy="426541"/>
+            <a:off x="1310879" y="2520417"/>
+            <a:ext cx="5095875" cy="1034129"/>
           </a:xfrm>
           <a:prstGeom prst="rect">
             <a:avLst/>
@@ -18303,31 +19365,28 @@
           </a:bodyPr>
           <a:lstStyle/>
           <a:p>
-            <a:pPr marL="0" marR="0" lvl="0" indent="0" algn="l" rtl="0">
+            <a:pPr lvl="0">
               <a:lnSpc>
                 <a:spcPct val="159904"/>
               </a:lnSpc>
-              <a:spcBef>
-                <a:spcPts val="0"/>
-              </a:spcBef>
-              <a:spcAft>
-                <a:spcPts val="0"/>
-              </a:spcAft>
-              <a:buNone/>
             </a:pPr>
             <a:r>
-              <a:rPr lang="en-US" sz="1050" b="0" i="0" u="none" strike="noStrike" cap="none">
-                <a:solidFill>
-                  <a:srgbClr val="A3A3A3"/>
-                </a:solidFill>
-                <a:latin typeface="Inter"/>
-                <a:ea typeface="Inter"/>
-                <a:cs typeface="Inter"/>
-                <a:sym typeface="Inter"/>
-              </a:rPr>
-              <a:t>Fondere la passione artigianale per gli hamburger gourmet a una filiera digitale iper-connessa per azzerare le distanze con il cliente.</a:t>
-            </a:r>
-            <a:endParaRPr/>
+              <a:rPr lang="it-IT" sz="1050" dirty="0">
+                <a:solidFill>
+                  <a:srgbClr val="A5A5A5"/>
+                </a:solidFill>
+                <a:latin typeface="Inter" panose="020B0604020202020204" charset="0"/>
+                <a:ea typeface="Inter" panose="020B0604020202020204" charset="0"/>
+              </a:rPr>
+              <a:t>Fondere la passione per gli hamburger americani rivisitati con l'eccellenza delle materie prime DOC, DOP e a Km0. Attraverso la tecnologia, garantiamo la totale tracciabilità di una proposta sana e naturale, rispondendo ai valori di una clientela attenta alla bontà e all'ambiente.</a:t>
+            </a:r>
+            <a:endParaRPr dirty="0">
+              <a:solidFill>
+                <a:srgbClr val="A5A5A5"/>
+              </a:solidFill>
+              <a:latin typeface="Inter" panose="020B0604020202020204" charset="0"/>
+              <a:ea typeface="Inter" panose="020B0604020202020204" charset="0"/>
+            </a:endParaRPr>
           </a:p>
         </p:txBody>
       </p:sp>
@@ -18346,7 +19405,7 @@
         </p:blipFill>
         <p:spPr>
           <a:xfrm>
-            <a:off x="862012" y="3732907"/>
+            <a:off x="877585" y="4337148"/>
             <a:ext cx="219075" cy="171450"/>
           </a:xfrm>
           <a:prstGeom prst="rect">
@@ -18366,7 +19425,7 @@
         </p:nvSpPr>
         <p:spPr>
           <a:xfrm>
-            <a:off x="1323975" y="3580507"/>
+            <a:off x="1323975" y="3803898"/>
             <a:ext cx="5350668" cy="200025"/>
           </a:xfrm>
           <a:prstGeom prst="rect">
@@ -18393,7 +19452,7 @@
               <a:buNone/>
             </a:pPr>
             <a:r>
-              <a:rPr lang="en-US" sz="1350" b="0" i="0" u="none" strike="noStrike" cap="none">
+              <a:rPr lang="en-US" sz="1350" b="0" i="0" u="none" strike="noStrike" cap="none" dirty="0">
                 <a:solidFill>
                   <a:srgbClr val="FFFFFF"/>
                 </a:solidFill>
@@ -18404,7 +19463,7 @@
               </a:rPr>
               <a:t>FOCUS SULLA COMMUNITY LOCALE</a:t>
             </a:r>
-            <a:endParaRPr/>
+            <a:endParaRPr dirty="0"/>
           </a:p>
         </p:txBody>
       </p:sp>
@@ -18416,7 +19475,7 @@
         </p:nvSpPr>
         <p:spPr>
           <a:xfrm>
-            <a:off x="1323975" y="3818632"/>
+            <a:off x="1323973" y="4123878"/>
             <a:ext cx="5095875" cy="426541"/>
           </a:xfrm>
           <a:prstGeom prst="rect">
@@ -18446,7 +19505,7 @@
               <a:buNone/>
             </a:pPr>
             <a:r>
-              <a:rPr lang="en-US" sz="1050" b="0" i="0" u="none" strike="noStrike" cap="none">
+              <a:rPr lang="en-US" sz="1050" b="0" i="0" u="none" strike="noStrike" cap="none" dirty="0" err="1">
                 <a:solidFill>
                   <a:srgbClr val="A3A3A3"/>
                 </a:solidFill>
@@ -18455,9 +19514,237 @@
                 <a:cs typeface="Inter"/>
                 <a:sym typeface="Inter"/>
               </a:rPr>
-              <a:t>Trasformare ogni ordinazione in un punto di contatto interattivo, stimolando la fidelizzazione attraverso logiche di gamification ed eventi dedicati.</a:t>
-            </a:r>
-            <a:endParaRPr/>
+              <a:t>Trasformare</a:t>
+            </a:r>
+            <a:r>
+              <a:rPr lang="en-US" sz="1050" b="0" i="0" u="none" strike="noStrike" cap="none" dirty="0">
+                <a:solidFill>
+                  <a:srgbClr val="A3A3A3"/>
+                </a:solidFill>
+                <a:latin typeface="Inter"/>
+                <a:ea typeface="Inter"/>
+                <a:cs typeface="Inter"/>
+                <a:sym typeface="Inter"/>
+              </a:rPr>
+              <a:t> ogni </a:t>
+            </a:r>
+            <a:r>
+              <a:rPr lang="en-US" sz="1050" b="0" i="0" u="none" strike="noStrike" cap="none" dirty="0" err="1">
+                <a:solidFill>
+                  <a:srgbClr val="A3A3A3"/>
+                </a:solidFill>
+                <a:latin typeface="Inter"/>
+                <a:ea typeface="Inter"/>
+                <a:cs typeface="Inter"/>
+                <a:sym typeface="Inter"/>
+              </a:rPr>
+              <a:t>ordinazione</a:t>
+            </a:r>
+            <a:r>
+              <a:rPr lang="en-US" sz="1050" b="0" i="0" u="none" strike="noStrike" cap="none" dirty="0">
+                <a:solidFill>
+                  <a:srgbClr val="A3A3A3"/>
+                </a:solidFill>
+                <a:latin typeface="Inter"/>
+                <a:ea typeface="Inter"/>
+                <a:cs typeface="Inter"/>
+                <a:sym typeface="Inter"/>
+              </a:rPr>
+              <a:t> in un punto di </a:t>
+            </a:r>
+            <a:r>
+              <a:rPr lang="en-US" sz="1050" b="0" i="0" u="none" strike="noStrike" cap="none" dirty="0" err="1">
+                <a:solidFill>
+                  <a:srgbClr val="A3A3A3"/>
+                </a:solidFill>
+                <a:latin typeface="Inter"/>
+                <a:ea typeface="Inter"/>
+                <a:cs typeface="Inter"/>
+                <a:sym typeface="Inter"/>
+              </a:rPr>
+              <a:t>contatto</a:t>
+            </a:r>
+            <a:r>
+              <a:rPr lang="en-US" sz="1050" b="0" i="0" u="none" strike="noStrike" cap="none" dirty="0">
+                <a:solidFill>
+                  <a:srgbClr val="A3A3A3"/>
+                </a:solidFill>
+                <a:latin typeface="Inter"/>
+                <a:ea typeface="Inter"/>
+                <a:cs typeface="Inter"/>
+                <a:sym typeface="Inter"/>
+              </a:rPr>
+              <a:t> </a:t>
+            </a:r>
+            <a:r>
+              <a:rPr lang="en-US" sz="1050" b="0" i="0" u="none" strike="noStrike" cap="none" dirty="0" err="1">
+                <a:solidFill>
+                  <a:srgbClr val="A3A3A3"/>
+                </a:solidFill>
+                <a:latin typeface="Inter"/>
+                <a:ea typeface="Inter"/>
+                <a:cs typeface="Inter"/>
+                <a:sym typeface="Inter"/>
+              </a:rPr>
+              <a:t>interattivo</a:t>
+            </a:r>
+            <a:r>
+              <a:rPr lang="en-US" sz="1050" b="0" i="0" u="none" strike="noStrike" cap="none" dirty="0">
+                <a:solidFill>
+                  <a:srgbClr val="A3A3A3"/>
+                </a:solidFill>
+                <a:latin typeface="Inter"/>
+                <a:ea typeface="Inter"/>
+                <a:cs typeface="Inter"/>
+                <a:sym typeface="Inter"/>
+              </a:rPr>
+              <a:t>, </a:t>
+            </a:r>
+            <a:r>
+              <a:rPr lang="en-US" sz="1050" b="0" i="0" u="none" strike="noStrike" cap="none" dirty="0" err="1">
+                <a:solidFill>
+                  <a:srgbClr val="A3A3A3"/>
+                </a:solidFill>
+                <a:latin typeface="Inter"/>
+                <a:ea typeface="Inter"/>
+                <a:cs typeface="Inter"/>
+                <a:sym typeface="Inter"/>
+              </a:rPr>
+              <a:t>stimolando</a:t>
+            </a:r>
+            <a:r>
+              <a:rPr lang="en-US" sz="1050" b="0" i="0" u="none" strike="noStrike" cap="none" dirty="0">
+                <a:solidFill>
+                  <a:srgbClr val="A3A3A3"/>
+                </a:solidFill>
+                <a:latin typeface="Inter"/>
+                <a:ea typeface="Inter"/>
+                <a:cs typeface="Inter"/>
+                <a:sym typeface="Inter"/>
+              </a:rPr>
+              <a:t> la </a:t>
+            </a:r>
+            <a:r>
+              <a:rPr lang="en-US" sz="1050" b="0" i="0" u="none" strike="noStrike" cap="none" dirty="0" err="1">
+                <a:solidFill>
+                  <a:srgbClr val="A3A3A3"/>
+                </a:solidFill>
+                <a:latin typeface="Inter"/>
+                <a:ea typeface="Inter"/>
+                <a:cs typeface="Inter"/>
+                <a:sym typeface="Inter"/>
+              </a:rPr>
+              <a:t>fidelizzazione</a:t>
+            </a:r>
+            <a:r>
+              <a:rPr lang="en-US" sz="1050" b="0" i="0" u="none" strike="noStrike" cap="none" dirty="0">
+                <a:solidFill>
+                  <a:srgbClr val="A3A3A3"/>
+                </a:solidFill>
+                <a:latin typeface="Inter"/>
+                <a:ea typeface="Inter"/>
+                <a:cs typeface="Inter"/>
+                <a:sym typeface="Inter"/>
+              </a:rPr>
+              <a:t> </a:t>
+            </a:r>
+            <a:r>
+              <a:rPr lang="en-US" sz="1050" b="0" i="0" u="none" strike="noStrike" cap="none" dirty="0" err="1">
+                <a:solidFill>
+                  <a:srgbClr val="A3A3A3"/>
+                </a:solidFill>
+                <a:latin typeface="Inter"/>
+                <a:ea typeface="Inter"/>
+                <a:cs typeface="Inter"/>
+                <a:sym typeface="Inter"/>
+              </a:rPr>
+              <a:t>attraverso</a:t>
+            </a:r>
+            <a:r>
+              <a:rPr lang="en-US" sz="1050" b="0" i="0" u="none" strike="noStrike" cap="none" dirty="0">
+                <a:solidFill>
+                  <a:srgbClr val="A3A3A3"/>
+                </a:solidFill>
+                <a:latin typeface="Inter"/>
+                <a:ea typeface="Inter"/>
+                <a:cs typeface="Inter"/>
+                <a:sym typeface="Inter"/>
+              </a:rPr>
+              <a:t> </a:t>
+            </a:r>
+            <a:r>
+              <a:rPr lang="en-US" sz="1050" b="0" i="0" u="none" strike="noStrike" cap="none" dirty="0" err="1">
+                <a:solidFill>
+                  <a:srgbClr val="A3A3A3"/>
+                </a:solidFill>
+                <a:latin typeface="Inter"/>
+                <a:ea typeface="Inter"/>
+                <a:cs typeface="Inter"/>
+                <a:sym typeface="Inter"/>
+              </a:rPr>
+              <a:t>logiche</a:t>
+            </a:r>
+            <a:r>
+              <a:rPr lang="en-US" sz="1050" b="0" i="0" u="none" strike="noStrike" cap="none" dirty="0">
+                <a:solidFill>
+                  <a:srgbClr val="A3A3A3"/>
+                </a:solidFill>
+                <a:latin typeface="Inter"/>
+                <a:ea typeface="Inter"/>
+                <a:cs typeface="Inter"/>
+                <a:sym typeface="Inter"/>
+              </a:rPr>
+              <a:t> di gamification ed </a:t>
+            </a:r>
+            <a:r>
+              <a:rPr lang="en-US" sz="1050" b="0" i="0" u="none" strike="noStrike" cap="none" dirty="0" err="1">
+                <a:solidFill>
+                  <a:srgbClr val="A3A3A3"/>
+                </a:solidFill>
+                <a:latin typeface="Inter"/>
+                <a:ea typeface="Inter"/>
+                <a:cs typeface="Inter"/>
+                <a:sym typeface="Inter"/>
+              </a:rPr>
+              <a:t>eventi</a:t>
+            </a:r>
+            <a:r>
+              <a:rPr lang="en-US" sz="1050" b="0" i="0" u="none" strike="noStrike" cap="none" dirty="0">
+                <a:solidFill>
+                  <a:srgbClr val="A3A3A3"/>
+                </a:solidFill>
+                <a:latin typeface="Inter"/>
+                <a:ea typeface="Inter"/>
+                <a:cs typeface="Inter"/>
+                <a:sym typeface="Inter"/>
+              </a:rPr>
+              <a:t> </a:t>
+            </a:r>
+            <a:r>
+              <a:rPr lang="en-US" sz="1050" b="0" i="0" u="none" strike="noStrike" cap="none" dirty="0" err="1">
+                <a:solidFill>
+                  <a:srgbClr val="A3A3A3"/>
+                </a:solidFill>
+                <a:latin typeface="Inter"/>
+                <a:ea typeface="Inter"/>
+                <a:cs typeface="Inter"/>
+                <a:sym typeface="Inter"/>
+              </a:rPr>
+              <a:t>dedicati</a:t>
+            </a:r>
+            <a:r>
+              <a:rPr lang="en-US" sz="1050" b="0" i="0" u="none" strike="noStrike" cap="none" dirty="0">
+                <a:solidFill>
+                  <a:srgbClr val="A3A3A3"/>
+                </a:solidFill>
+                <a:latin typeface="Inter"/>
+                <a:ea typeface="Inter"/>
+                <a:cs typeface="Inter"/>
+                <a:sym typeface="Inter"/>
+              </a:rPr>
+              <a:t>.</a:t>
+            </a:r>
+            <a:endParaRPr dirty="0"/>
           </a:p>
         </p:txBody>
       </p:sp>
@@ -18476,7 +19763,7 @@
         </p:blipFill>
         <p:spPr>
           <a:xfrm>
-            <a:off x="885825" y="4588073"/>
+            <a:off x="857377" y="5533577"/>
             <a:ext cx="171450" cy="171450"/>
           </a:xfrm>
           <a:prstGeom prst="rect">
@@ -18488,56 +19775,6 @@
           </a:ln>
         </p:spPr>
       </p:pic>
-      <p:sp>
-        <p:nvSpPr>
-          <p:cNvPr id="125" name="Google Shape;125;p14"/>
-          <p:cNvSpPr txBox="1"/>
-          <p:nvPr/>
-        </p:nvSpPr>
-        <p:spPr>
-          <a:xfrm>
-            <a:off x="1323975" y="4435673"/>
-            <a:ext cx="5350668" cy="200025"/>
-          </a:xfrm>
-          <a:prstGeom prst="rect">
-            <a:avLst/>
-          </a:prstGeom>
-          <a:noFill/>
-          <a:ln>
-            <a:noFill/>
-          </a:ln>
-        </p:spPr>
-        <p:txBody>
-          <a:bodyPr spcFirstLastPara="1" wrap="square" lIns="0" tIns="0" rIns="0" bIns="0" anchor="t" anchorCtr="0">
-            <a:spAutoFit/>
-          </a:bodyPr>
-          <a:lstStyle/>
-          <a:p>
-            <a:pPr marL="0" marR="0" lvl="0" indent="0" algn="l" rtl="0">
-              <a:spcBef>
-                <a:spcPts val="0"/>
-              </a:spcBef>
-              <a:spcAft>
-                <a:spcPts val="0"/>
-              </a:spcAft>
-              <a:buNone/>
-            </a:pPr>
-            <a:r>
-              <a:rPr lang="en-US" sz="1350" b="0" i="0" u="none" strike="noStrike" cap="none">
-                <a:solidFill>
-                  <a:srgbClr val="FFFFFF"/>
-                </a:solidFill>
-                <a:latin typeface="Outfit ExtraBold"/>
-                <a:ea typeface="Outfit ExtraBold"/>
-                <a:cs typeface="Outfit ExtraBold"/>
-                <a:sym typeface="Outfit ExtraBold"/>
-              </a:rPr>
-              <a:t>SOSTENIBILITÀ TRASPARENTE</a:t>
-            </a:r>
-            <a:endParaRPr/>
-          </a:p>
-        </p:txBody>
-      </p:sp>
       <p:sp>
         <p:nvSpPr>
           <p:cNvPr id="126" name="Google Shape;126;p14"/>
@@ -18546,8 +19783,8 @@
         </p:nvSpPr>
         <p:spPr>
           <a:xfrm>
-            <a:off x="1323975" y="4673798"/>
-            <a:ext cx="5095875" cy="426541"/>
+            <a:off x="1310879" y="5360769"/>
+            <a:ext cx="5095875" cy="517065"/>
           </a:xfrm>
           <a:prstGeom prst="rect">
             <a:avLst/>
@@ -18576,18 +19813,258 @@
               <a:buNone/>
             </a:pPr>
             <a:r>
-              <a:rPr lang="en-US" sz="1050" b="0" i="0" u="none" strike="noStrike" cap="none">
+              <a:rPr lang="en-US" sz="1050" dirty="0" err="1">
                 <a:solidFill>
                   <a:srgbClr val="A3A3A3"/>
                 </a:solidFill>
                 <a:latin typeface="Inter"/>
                 <a:ea typeface="Inter"/>
-                <a:cs typeface="Inter"/>
-                <a:sym typeface="Inter"/>
-              </a:rPr>
-              <a:t>Utilizzare la tecnologia per mostrare e garantire la tracciabilità totale degli ingredienti a Km0, stringendo un patto di fiducia con chi ci sceglie.</a:t>
-            </a:r>
-            <a:endParaRPr/>
+                <a:sym typeface="Inter"/>
+              </a:rPr>
+              <a:t>Superare</a:t>
+            </a:r>
+            <a:r>
+              <a:rPr lang="en-US" sz="1050" dirty="0">
+                <a:solidFill>
+                  <a:srgbClr val="A3A3A3"/>
+                </a:solidFill>
+                <a:latin typeface="Inter"/>
+                <a:ea typeface="Inter"/>
+                <a:sym typeface="Inter"/>
+              </a:rPr>
+              <a:t> la </a:t>
+            </a:r>
+            <a:r>
+              <a:rPr lang="en-US" sz="1050" dirty="0" err="1">
+                <a:solidFill>
+                  <a:srgbClr val="A3A3A3"/>
+                </a:solidFill>
+                <a:latin typeface="Inter"/>
+                <a:ea typeface="Inter"/>
+                <a:sym typeface="Inter"/>
+              </a:rPr>
+              <a:t>frammentazione</a:t>
+            </a:r>
+            <a:r>
+              <a:rPr lang="en-US" sz="1050" dirty="0">
+                <a:solidFill>
+                  <a:srgbClr val="A3A3A3"/>
+                </a:solidFill>
+                <a:latin typeface="Inter"/>
+                <a:ea typeface="Inter"/>
+                <a:sym typeface="Inter"/>
+              </a:rPr>
+              <a:t> delle </a:t>
+            </a:r>
+            <a:r>
+              <a:rPr lang="en-US" sz="1050" dirty="0" err="1">
+                <a:solidFill>
+                  <a:srgbClr val="A3A3A3"/>
+                </a:solidFill>
+                <a:latin typeface="Inter"/>
+                <a:ea typeface="Inter"/>
+                <a:sym typeface="Inter"/>
+              </a:rPr>
+              <a:t>ordinazioni</a:t>
+            </a:r>
+            <a:r>
+              <a:rPr lang="en-US" sz="1050" dirty="0">
+                <a:solidFill>
+                  <a:srgbClr val="A3A3A3"/>
+                </a:solidFill>
+                <a:latin typeface="Inter"/>
+                <a:ea typeface="Inter"/>
+                <a:sym typeface="Inter"/>
+              </a:rPr>
+              <a:t> </a:t>
+            </a:r>
+            <a:r>
+              <a:rPr lang="en-US" sz="1050" dirty="0" err="1">
+                <a:solidFill>
+                  <a:srgbClr val="A3A3A3"/>
+                </a:solidFill>
+                <a:latin typeface="Inter"/>
+                <a:ea typeface="Inter"/>
+                <a:sym typeface="Inter"/>
+              </a:rPr>
+              <a:t>attraverso</a:t>
+            </a:r>
+            <a:r>
+              <a:rPr lang="en-US" sz="1050" dirty="0">
+                <a:solidFill>
+                  <a:srgbClr val="A3A3A3"/>
+                </a:solidFill>
+                <a:latin typeface="Inter"/>
+                <a:ea typeface="Inter"/>
+                <a:sym typeface="Inter"/>
+              </a:rPr>
+              <a:t> </a:t>
+            </a:r>
+            <a:r>
+              <a:rPr lang="en-US" sz="1050" dirty="0" err="1">
+                <a:solidFill>
+                  <a:srgbClr val="A3A3A3"/>
+                </a:solidFill>
+                <a:latin typeface="Inter"/>
+                <a:ea typeface="Inter"/>
+                <a:sym typeface="Inter"/>
+              </a:rPr>
+              <a:t>una</a:t>
+            </a:r>
+            <a:r>
+              <a:rPr lang="en-US" sz="1050" dirty="0">
+                <a:solidFill>
+                  <a:srgbClr val="A3A3A3"/>
+                </a:solidFill>
+                <a:latin typeface="Inter"/>
+                <a:ea typeface="Inter"/>
+                <a:sym typeface="Inter"/>
+              </a:rPr>
+              <a:t> </a:t>
+            </a:r>
+            <a:r>
+              <a:rPr lang="en-US" sz="1050" dirty="0" err="1">
+                <a:solidFill>
+                  <a:srgbClr val="A3A3A3"/>
+                </a:solidFill>
+                <a:latin typeface="Inter"/>
+                <a:ea typeface="Inter"/>
+                <a:sym typeface="Inter"/>
+              </a:rPr>
+              <a:t>piattaforma</a:t>
+            </a:r>
+            <a:r>
+              <a:rPr lang="en-US" sz="1050" dirty="0">
+                <a:solidFill>
+                  <a:srgbClr val="A3A3A3"/>
+                </a:solidFill>
+                <a:latin typeface="Inter"/>
+                <a:ea typeface="Inter"/>
+                <a:sym typeface="Inter"/>
+              </a:rPr>
+              <a:t> unica </a:t>
+            </a:r>
+            <a:r>
+              <a:rPr lang="en-US" sz="1050" dirty="0" err="1">
+                <a:solidFill>
+                  <a:srgbClr val="A3A3A3"/>
+                </a:solidFill>
+                <a:latin typeface="Inter"/>
+                <a:ea typeface="Inter"/>
+                <a:sym typeface="Inter"/>
+              </a:rPr>
+              <a:t>che</a:t>
+            </a:r>
+            <a:r>
+              <a:rPr lang="en-US" sz="1050" dirty="0">
+                <a:solidFill>
+                  <a:srgbClr val="A3A3A3"/>
+                </a:solidFill>
+                <a:latin typeface="Inter"/>
+                <a:ea typeface="Inter"/>
+                <a:sym typeface="Inter"/>
+              </a:rPr>
+              <a:t> </a:t>
+            </a:r>
+            <a:r>
+              <a:rPr lang="en-US" sz="1050" dirty="0" err="1">
+                <a:solidFill>
+                  <a:srgbClr val="A3A3A3"/>
+                </a:solidFill>
+                <a:latin typeface="Inter"/>
+                <a:ea typeface="Inter"/>
+                <a:sym typeface="Inter"/>
+              </a:rPr>
+              <a:t>rende</a:t>
+            </a:r>
+            <a:r>
+              <a:rPr lang="en-US" sz="1050" dirty="0">
+                <a:solidFill>
+                  <a:srgbClr val="A3A3A3"/>
+                </a:solidFill>
+                <a:latin typeface="Inter"/>
+                <a:ea typeface="Inter"/>
+                <a:sym typeface="Inter"/>
+              </a:rPr>
+              <a:t> il delivery semplice, intuitive, e </a:t>
+            </a:r>
+            <a:r>
+              <a:rPr lang="en-US" sz="1050" dirty="0" err="1">
+                <a:solidFill>
+                  <a:srgbClr val="A3A3A3"/>
+                </a:solidFill>
+                <a:latin typeface="Inter"/>
+                <a:ea typeface="Inter"/>
+                <a:sym typeface="Inter"/>
+              </a:rPr>
+              <a:t>rapido</a:t>
+            </a:r>
+            <a:r>
+              <a:rPr lang="en-US" sz="1050" dirty="0">
+                <a:solidFill>
+                  <a:srgbClr val="A3A3A3"/>
+                </a:solidFill>
+                <a:latin typeface="Inter"/>
+                <a:ea typeface="Inter"/>
+                <a:sym typeface="Inter"/>
+              </a:rPr>
+              <a:t>.</a:t>
+            </a:r>
+            <a:endParaRPr dirty="0"/>
+          </a:p>
+        </p:txBody>
+      </p:sp>
+      <p:sp>
+        <p:nvSpPr>
+          <p:cNvPr id="5" name="Google Shape;122;p14">
+            <a:extLst>
+              <a:ext uri="{FF2B5EF4-FFF2-40B4-BE49-F238E27FC236}">
+                <a16:creationId xmlns:a16="http://schemas.microsoft.com/office/drawing/2014/main" id="{F99529D0-94E2-C0DB-E8F1-81AA66A7B6B5}"/>
+              </a:ext>
+            </a:extLst>
+          </p:cNvPr>
+          <p:cNvSpPr txBox="1"/>
+          <p:nvPr/>
+        </p:nvSpPr>
+        <p:spPr>
+          <a:xfrm>
+            <a:off x="1310879" y="5040789"/>
+            <a:ext cx="5350668" cy="215444"/>
+          </a:xfrm>
+          <a:prstGeom prst="rect">
+            <a:avLst/>
+          </a:prstGeom>
+          <a:noFill/>
+          <a:ln>
+            <a:noFill/>
+          </a:ln>
+        </p:spPr>
+        <p:txBody>
+          <a:bodyPr spcFirstLastPara="1" wrap="square" lIns="0" tIns="0" rIns="0" bIns="0" anchor="t" anchorCtr="0">
+            <a:spAutoFit/>
+          </a:bodyPr>
+          <a:lstStyle/>
+          <a:p>
+            <a:pPr marL="0" marR="0" lvl="0" indent="0" algn="l" rtl="0">
+              <a:spcBef>
+                <a:spcPts val="0"/>
+              </a:spcBef>
+              <a:spcAft>
+                <a:spcPts val="0"/>
+              </a:spcAft>
+              <a:buNone/>
+            </a:pPr>
+            <a:r>
+              <a:rPr lang="en-US" sz="1350" dirty="0">
+                <a:solidFill>
+                  <a:srgbClr val="FFFFFF"/>
+                </a:solidFill>
+                <a:latin typeface="Outfit ExtraBold"/>
+                <a:sym typeface="Outfit ExtraBold"/>
+              </a:rPr>
+              <a:t>ORDINAZIONI DIGITALI PREMIUM</a:t>
+            </a:r>
+            <a:endParaRPr dirty="0"/>
           </a:p>
         </p:txBody>
       </p:sp>
@@ -18915,7 +20392,7 @@
         <p:spPr>
           <a:xfrm>
             <a:off x="1104900" y="3647330"/>
-            <a:ext cx="4505325" cy="662582"/>
+            <a:ext cx="4505325" cy="1083374"/>
           </a:xfrm>
           <a:prstGeom prst="rect">
             <a:avLst/>
@@ -18944,7 +20421,7 @@
               <a:buNone/>
             </a:pPr>
             <a:r>
-              <a:rPr lang="en-US" sz="1087" b="0" i="0" u="none" strike="noStrike" cap="none">
+              <a:rPr lang="en-US" sz="1100" b="0" i="0" u="none" strike="noStrike" cap="none" dirty="0" err="1">
                 <a:solidFill>
                   <a:srgbClr val="A3A3A3"/>
                 </a:solidFill>
@@ -18953,9 +20430,381 @@
                 <a:cs typeface="Inter"/>
                 <a:sym typeface="Inter"/>
               </a:rPr>
-              <a:t>Abbiamo studiato la fluidità e la gamification dei leader mondiali (es. McDonald's App). L'obiettivo è replicare la velocità d'acquisto a 3 click inserendo però elementi di unicità artigianale e narrazione del prodotto.</a:t>
-            </a:r>
-            <a:endParaRPr/>
+              <a:t>Abbiamo</a:t>
+            </a:r>
+            <a:r>
+              <a:rPr lang="en-US" sz="1100" b="0" i="0" u="none" strike="noStrike" cap="none" dirty="0">
+                <a:solidFill>
+                  <a:srgbClr val="A3A3A3"/>
+                </a:solidFill>
+                <a:latin typeface="Inter"/>
+                <a:ea typeface="Inter"/>
+                <a:cs typeface="Inter"/>
+                <a:sym typeface="Inter"/>
+              </a:rPr>
+              <a:t> </a:t>
+            </a:r>
+            <a:r>
+              <a:rPr lang="en-US" sz="1100" b="0" i="0" u="none" strike="noStrike" cap="none" dirty="0" err="1">
+                <a:solidFill>
+                  <a:srgbClr val="A3A3A3"/>
+                </a:solidFill>
+                <a:latin typeface="Inter"/>
+                <a:ea typeface="Inter"/>
+                <a:cs typeface="Inter"/>
+                <a:sym typeface="Inter"/>
+              </a:rPr>
+              <a:t>studiato</a:t>
+            </a:r>
+            <a:r>
+              <a:rPr lang="en-US" sz="1100" b="0" i="0" u="none" strike="noStrike" cap="none" dirty="0">
+                <a:solidFill>
+                  <a:srgbClr val="A3A3A3"/>
+                </a:solidFill>
+                <a:latin typeface="Inter"/>
+                <a:ea typeface="Inter"/>
+                <a:cs typeface="Inter"/>
+                <a:sym typeface="Inter"/>
+              </a:rPr>
+              <a:t> la </a:t>
+            </a:r>
+            <a:r>
+              <a:rPr lang="en-US" sz="1100" b="0" i="0" u="none" strike="noStrike" cap="none" dirty="0" err="1">
+                <a:solidFill>
+                  <a:srgbClr val="A3A3A3"/>
+                </a:solidFill>
+                <a:latin typeface="Inter"/>
+                <a:ea typeface="Inter"/>
+                <a:cs typeface="Inter"/>
+                <a:sym typeface="Inter"/>
+              </a:rPr>
+              <a:t>fluidità</a:t>
+            </a:r>
+            <a:r>
+              <a:rPr lang="en-US" sz="1100" b="0" i="0" u="none" strike="noStrike" cap="none" dirty="0">
+                <a:solidFill>
+                  <a:srgbClr val="A3A3A3"/>
+                </a:solidFill>
+                <a:latin typeface="Inter"/>
+                <a:ea typeface="Inter"/>
+                <a:cs typeface="Inter"/>
+                <a:sym typeface="Inter"/>
+              </a:rPr>
+              <a:t> e la gamification </a:t>
+            </a:r>
+            <a:r>
+              <a:rPr lang="en-US" sz="1100" b="0" i="0" u="none" strike="noStrike" cap="none" dirty="0" err="1">
+                <a:solidFill>
+                  <a:srgbClr val="A3A3A3"/>
+                </a:solidFill>
+                <a:latin typeface="Inter"/>
+                <a:ea typeface="Inter"/>
+                <a:cs typeface="Inter"/>
+                <a:sym typeface="Inter"/>
+              </a:rPr>
+              <a:t>dei</a:t>
+            </a:r>
+            <a:r>
+              <a:rPr lang="en-US" sz="1100" b="0" i="0" u="none" strike="noStrike" cap="none" dirty="0">
+                <a:solidFill>
+                  <a:srgbClr val="A3A3A3"/>
+                </a:solidFill>
+                <a:latin typeface="Inter"/>
+                <a:ea typeface="Inter"/>
+                <a:cs typeface="Inter"/>
+                <a:sym typeface="Inter"/>
+              </a:rPr>
+              <a:t> leader </a:t>
+            </a:r>
+            <a:r>
+              <a:rPr lang="en-US" sz="1100" b="0" i="0" u="none" strike="noStrike" cap="none" dirty="0" err="1">
+                <a:solidFill>
+                  <a:srgbClr val="A3A3A3"/>
+                </a:solidFill>
+                <a:latin typeface="Inter"/>
+                <a:ea typeface="Inter"/>
+                <a:cs typeface="Inter"/>
+                <a:sym typeface="Inter"/>
+              </a:rPr>
+              <a:t>mondiali</a:t>
+            </a:r>
+            <a:r>
+              <a:rPr lang="en-US" sz="1100" b="0" i="0" u="none" strike="noStrike" cap="none" dirty="0">
+                <a:solidFill>
+                  <a:srgbClr val="A3A3A3"/>
+                </a:solidFill>
+                <a:latin typeface="Inter"/>
+                <a:ea typeface="Inter"/>
+                <a:cs typeface="Inter"/>
+                <a:sym typeface="Inter"/>
+              </a:rPr>
+              <a:t> (es. McDonald's App). </a:t>
+            </a:r>
+            <a:r>
+              <a:rPr lang="en-US" sz="1100" b="0" i="0" u="none" strike="noStrike" cap="none" dirty="0" err="1">
+                <a:solidFill>
+                  <a:srgbClr val="A3A3A3"/>
+                </a:solidFill>
+                <a:latin typeface="Inter"/>
+                <a:ea typeface="Inter"/>
+                <a:cs typeface="Inter"/>
+                <a:sym typeface="Inter"/>
+              </a:rPr>
+              <a:t>L'obiettivo</a:t>
+            </a:r>
+            <a:r>
+              <a:rPr lang="en-US" sz="1100" b="0" i="0" u="none" strike="noStrike" cap="none" dirty="0">
+                <a:solidFill>
+                  <a:srgbClr val="A3A3A3"/>
+                </a:solidFill>
+                <a:latin typeface="Inter"/>
+                <a:ea typeface="Inter"/>
+                <a:cs typeface="Inter"/>
+                <a:sym typeface="Inter"/>
+              </a:rPr>
+              <a:t> è </a:t>
+            </a:r>
+            <a:r>
+              <a:rPr lang="en-US" sz="1100" b="0" i="0" u="none" strike="noStrike" cap="none" dirty="0" err="1">
+                <a:solidFill>
+                  <a:srgbClr val="A3A3A3"/>
+                </a:solidFill>
+                <a:latin typeface="Inter"/>
+                <a:ea typeface="Inter"/>
+                <a:cs typeface="Inter"/>
+                <a:sym typeface="Inter"/>
+              </a:rPr>
+              <a:t>replicare</a:t>
+            </a:r>
+            <a:r>
+              <a:rPr lang="en-US" sz="1100" b="0" i="0" u="none" strike="noStrike" cap="none" dirty="0">
+                <a:solidFill>
+                  <a:srgbClr val="A3A3A3"/>
+                </a:solidFill>
+                <a:latin typeface="Inter"/>
+                <a:ea typeface="Inter"/>
+                <a:cs typeface="Inter"/>
+                <a:sym typeface="Inter"/>
+              </a:rPr>
+              <a:t> la </a:t>
+            </a:r>
+            <a:r>
+              <a:rPr lang="en-US" sz="1100" b="0" i="0" u="none" strike="noStrike" cap="none" dirty="0" err="1">
+                <a:solidFill>
+                  <a:srgbClr val="A3A3A3"/>
+                </a:solidFill>
+                <a:latin typeface="Inter"/>
+                <a:ea typeface="Inter"/>
+                <a:cs typeface="Inter"/>
+                <a:sym typeface="Inter"/>
+              </a:rPr>
+              <a:t>velocità</a:t>
+            </a:r>
+            <a:r>
+              <a:rPr lang="en-US" sz="1100" b="0" i="0" u="none" strike="noStrike" cap="none" dirty="0">
+                <a:solidFill>
+                  <a:srgbClr val="A3A3A3"/>
+                </a:solidFill>
+                <a:latin typeface="Inter"/>
+                <a:ea typeface="Inter"/>
+                <a:cs typeface="Inter"/>
+                <a:sym typeface="Inter"/>
+              </a:rPr>
+              <a:t> </a:t>
+            </a:r>
+            <a:r>
+              <a:rPr lang="en-US" sz="1100" b="0" i="0" u="none" strike="noStrike" cap="none" dirty="0" err="1">
+                <a:solidFill>
+                  <a:srgbClr val="A3A3A3"/>
+                </a:solidFill>
+                <a:latin typeface="Inter"/>
+                <a:ea typeface="Inter"/>
+                <a:cs typeface="Inter"/>
+                <a:sym typeface="Inter"/>
+              </a:rPr>
+              <a:t>d'acquisto</a:t>
+            </a:r>
+            <a:r>
+              <a:rPr lang="en-US" sz="1100" b="0" i="0" u="none" strike="noStrike" cap="none" dirty="0">
+                <a:solidFill>
+                  <a:srgbClr val="A3A3A3"/>
+                </a:solidFill>
+                <a:latin typeface="Inter"/>
+                <a:ea typeface="Inter"/>
+                <a:cs typeface="Inter"/>
+                <a:sym typeface="Inter"/>
+              </a:rPr>
+              <a:t> a 3 click </a:t>
+            </a:r>
+            <a:r>
+              <a:rPr lang="en-US" sz="1100" b="0" i="0" u="none" strike="noStrike" cap="none" dirty="0" err="1">
+                <a:solidFill>
+                  <a:srgbClr val="A3A3A3"/>
+                </a:solidFill>
+                <a:latin typeface="Inter"/>
+                <a:ea typeface="Inter"/>
+                <a:cs typeface="Inter"/>
+                <a:sym typeface="Inter"/>
+              </a:rPr>
+              <a:t>inserendo</a:t>
+            </a:r>
+            <a:r>
+              <a:rPr lang="en-US" sz="1100" b="0" i="0" u="none" strike="noStrike" cap="none" dirty="0">
+                <a:solidFill>
+                  <a:srgbClr val="A3A3A3"/>
+                </a:solidFill>
+                <a:latin typeface="Inter"/>
+                <a:ea typeface="Inter"/>
+                <a:cs typeface="Inter"/>
+                <a:sym typeface="Inter"/>
+              </a:rPr>
+              <a:t> </a:t>
+            </a:r>
+            <a:r>
+              <a:rPr lang="en-US" sz="1100" b="0" i="0" u="none" strike="noStrike" cap="none" dirty="0" err="1">
+                <a:solidFill>
+                  <a:srgbClr val="A3A3A3"/>
+                </a:solidFill>
+                <a:latin typeface="Inter"/>
+                <a:ea typeface="Inter"/>
+                <a:cs typeface="Inter"/>
+                <a:sym typeface="Inter"/>
+              </a:rPr>
+              <a:t>però</a:t>
+            </a:r>
+            <a:r>
+              <a:rPr lang="en-US" sz="1100" b="0" i="0" u="none" strike="noStrike" cap="none" dirty="0">
+                <a:solidFill>
+                  <a:srgbClr val="A3A3A3"/>
+                </a:solidFill>
+                <a:latin typeface="Inter"/>
+                <a:ea typeface="Inter"/>
+                <a:cs typeface="Inter"/>
+                <a:sym typeface="Inter"/>
+              </a:rPr>
+              <a:t> </a:t>
+            </a:r>
+            <a:r>
+              <a:rPr lang="en-US" sz="1100" b="0" i="0" u="none" strike="noStrike" cap="none" dirty="0" err="1">
+                <a:solidFill>
+                  <a:srgbClr val="A3A3A3"/>
+                </a:solidFill>
+                <a:latin typeface="Inter"/>
+                <a:ea typeface="Inter"/>
+                <a:cs typeface="Inter"/>
+                <a:sym typeface="Inter"/>
+              </a:rPr>
+              <a:t>elementi</a:t>
+            </a:r>
+            <a:r>
+              <a:rPr lang="en-US" sz="1100" b="0" i="0" u="none" strike="noStrike" cap="none" dirty="0">
+                <a:solidFill>
+                  <a:srgbClr val="A3A3A3"/>
+                </a:solidFill>
+                <a:latin typeface="Inter"/>
+                <a:ea typeface="Inter"/>
+                <a:cs typeface="Inter"/>
+                <a:sym typeface="Inter"/>
+              </a:rPr>
+              <a:t> di </a:t>
+            </a:r>
+            <a:r>
+              <a:rPr lang="en-US" sz="1100" b="0" i="0" u="none" strike="noStrike" cap="none" dirty="0" err="1">
+                <a:solidFill>
+                  <a:srgbClr val="A3A3A3"/>
+                </a:solidFill>
+                <a:latin typeface="Inter"/>
+                <a:ea typeface="Inter"/>
+                <a:cs typeface="Inter"/>
+                <a:sym typeface="Inter"/>
+              </a:rPr>
+              <a:t>unicità</a:t>
+            </a:r>
+            <a:r>
+              <a:rPr lang="en-US" sz="1100" b="0" i="0" u="none" strike="noStrike" cap="none" dirty="0">
+                <a:solidFill>
+                  <a:srgbClr val="A3A3A3"/>
+                </a:solidFill>
+                <a:latin typeface="Inter"/>
+                <a:ea typeface="Inter"/>
+                <a:cs typeface="Inter"/>
+                <a:sym typeface="Inter"/>
+              </a:rPr>
+              <a:t> </a:t>
+            </a:r>
+            <a:r>
+              <a:rPr lang="en-US" sz="1100" b="0" i="0" u="none" strike="noStrike" cap="none" dirty="0" err="1">
+                <a:solidFill>
+                  <a:srgbClr val="A3A3A3"/>
+                </a:solidFill>
+                <a:latin typeface="Inter"/>
+                <a:ea typeface="Inter"/>
+                <a:cs typeface="Inter"/>
+                <a:sym typeface="Inter"/>
+              </a:rPr>
+              <a:t>artigianale</a:t>
+            </a:r>
+            <a:r>
+              <a:rPr lang="en-US" sz="1100" b="0" i="0" u="none" strike="noStrike" cap="none" dirty="0">
+                <a:solidFill>
+                  <a:srgbClr val="A3A3A3"/>
+                </a:solidFill>
+                <a:latin typeface="Inter"/>
+                <a:ea typeface="Inter"/>
+                <a:cs typeface="Inter"/>
+                <a:sym typeface="Inter"/>
+              </a:rPr>
+              <a:t> e </a:t>
+            </a:r>
+            <a:r>
+              <a:rPr lang="en-US" sz="1100" b="0" i="0" u="none" strike="noStrike" cap="none" dirty="0" err="1">
+                <a:solidFill>
+                  <a:srgbClr val="A3A3A3"/>
+                </a:solidFill>
+                <a:latin typeface="Inter"/>
+                <a:ea typeface="Inter"/>
+                <a:cs typeface="Inter"/>
+                <a:sym typeface="Inter"/>
+              </a:rPr>
+              <a:t>narrazione</a:t>
+            </a:r>
+            <a:r>
+              <a:rPr lang="en-US" sz="1100" b="0" i="0" u="none" strike="noStrike" cap="none" dirty="0">
+                <a:solidFill>
+                  <a:srgbClr val="A3A3A3"/>
+                </a:solidFill>
+                <a:latin typeface="Inter"/>
+                <a:ea typeface="Inter"/>
+                <a:cs typeface="Inter"/>
+                <a:sym typeface="Inter"/>
+              </a:rPr>
+              <a:t> del </a:t>
+            </a:r>
+            <a:r>
+              <a:rPr lang="en-US" sz="1100" b="0" i="0" u="none" strike="noStrike" cap="none" dirty="0" err="1">
+                <a:solidFill>
+                  <a:srgbClr val="A3A3A3"/>
+                </a:solidFill>
+                <a:latin typeface="Inter"/>
+                <a:ea typeface="Inter"/>
+                <a:cs typeface="Inter"/>
+                <a:sym typeface="Inter"/>
+              </a:rPr>
+              <a:t>prodotto</a:t>
+            </a:r>
+            <a:r>
+              <a:rPr lang="en-US" sz="1100" b="0" i="0" u="none" strike="noStrike" cap="none" dirty="0">
+                <a:solidFill>
+                  <a:srgbClr val="A3A3A3"/>
+                </a:solidFill>
+                <a:latin typeface="Inter"/>
+                <a:ea typeface="Inter"/>
+                <a:cs typeface="Inter"/>
+                <a:sym typeface="Inter"/>
+              </a:rPr>
+              <a:t>.</a:t>
+            </a:r>
+            <a:endParaRPr sz="1100" dirty="0"/>
           </a:p>
         </p:txBody>
       </p:sp>
@@ -19018,7 +20867,7 @@
         <p:spPr>
           <a:xfrm>
             <a:off x="6581775" y="3647330"/>
-            <a:ext cx="4505325" cy="883443"/>
+            <a:ext cx="4505325" cy="1083374"/>
           </a:xfrm>
           <a:prstGeom prst="rect">
             <a:avLst/>
@@ -19034,31 +20883,28 @@
           </a:bodyPr>
           <a:lstStyle/>
           <a:p>
-            <a:pPr marL="0" marR="0" lvl="0" indent="0" algn="l" rtl="0">
+            <a:pPr lvl="0">
               <a:lnSpc>
                 <a:spcPct val="159981"/>
               </a:lnSpc>
-              <a:spcBef>
-                <a:spcPts val="0"/>
-              </a:spcBef>
-              <a:spcAft>
-                <a:spcPts val="0"/>
-              </a:spcAft>
-              <a:buNone/>
             </a:pPr>
             <a:r>
-              <a:rPr lang="en-US" sz="1087" b="0" i="0" u="none" strike="noStrike" cap="none">
-                <a:solidFill>
-                  <a:srgbClr val="A3A3A3"/>
-                </a:solidFill>
-                <a:latin typeface="Inter"/>
-                <a:ea typeface="Inter"/>
-                <a:cs typeface="Inter"/>
-                <a:sym typeface="Inter"/>
-              </a:rPr>
-              <a:t>L'integrazione logistica si ispira alla precisione di Deliveroo, ma puntiamo a un delivery proprietario. In questo modo evitiamo commissioni esterne, gestiamo direttamente la flotta e manteniamo il controllo totale sulla qualità della consegna.</a:t>
-            </a:r>
-            <a:endParaRPr/>
+              <a:rPr lang="it-IT" sz="1100" dirty="0">
+                <a:solidFill>
+                  <a:srgbClr val="A5A5A5"/>
+                </a:solidFill>
+                <a:latin typeface="Inter" panose="020B0604020202020204" charset="0"/>
+                <a:ea typeface="Inter" panose="020B0604020202020204" charset="0"/>
+              </a:rPr>
+              <a:t>L'integrazione logistica si ispira alla precisione di Deliveroo, ma puntiamo a un delivery proprietario. In questo modo evitiamo commissioni esterne, gestiamo direttamente i nostri rider e manteniamo il controllo totale sulla qualità della consegna.</a:t>
+            </a:r>
+            <a:endParaRPr dirty="0">
+              <a:solidFill>
+                <a:srgbClr val="A5A5A5"/>
+              </a:solidFill>
+              <a:latin typeface="Inter" panose="020B0604020202020204" charset="0"/>
+              <a:ea typeface="Inter" panose="020B0604020202020204" charset="0"/>
+            </a:endParaRPr>
           </a:p>
         </p:txBody>
       </p:sp>
@@ -19446,7 +21292,7 @@
         </p:blipFill>
         <p:spPr>
           <a:xfrm>
-            <a:off x="762000" y="4036665"/>
+            <a:off x="746225" y="4672012"/>
             <a:ext cx="419100" cy="419100"/>
           </a:xfrm>
           <a:prstGeom prst="rect">
@@ -19725,7 +21571,7 @@
         <p:spPr>
           <a:xfrm>
             <a:off x="1323975" y="3177778"/>
-            <a:ext cx="5095875" cy="639812"/>
+            <a:ext cx="5095875" cy="517065"/>
           </a:xfrm>
           <a:prstGeom prst="rect">
             <a:avLst/>
@@ -19741,31 +21587,28 @@
           </a:bodyPr>
           <a:lstStyle/>
           <a:p>
-            <a:pPr marL="0" marR="0" lvl="0" indent="0" algn="l" rtl="0">
+            <a:pPr lvl="0">
               <a:lnSpc>
                 <a:spcPct val="159904"/>
               </a:lnSpc>
-              <a:spcBef>
-                <a:spcPts val="0"/>
-              </a:spcBef>
-              <a:spcAft>
-                <a:spcPts val="0"/>
-              </a:spcAft>
-              <a:buNone/>
             </a:pPr>
             <a:r>
-              <a:rPr lang="en-US" sz="1050" b="0" i="0" u="none" strike="noStrike" cap="none">
-                <a:solidFill>
-                  <a:srgbClr val="A3A3A3"/>
-                </a:solidFill>
-                <a:latin typeface="Inter"/>
-                <a:ea typeface="Inter"/>
-                <a:cs typeface="Inter"/>
-                <a:sym typeface="Inter"/>
-              </a:rPr>
-              <a:t>Ispirati dal social marketing basato sui contenuti virali generati dagli utenti (UGC). I social non mostrano solo grafiche promozionali, ma persone reali, ingredienti freschi e la vita quotidiana in cucina.</a:t>
-            </a:r>
-            <a:endParaRPr/>
+              <a:rPr lang="it-IT" sz="1050" dirty="0">
+                <a:solidFill>
+                  <a:srgbClr val="A5A5A5"/>
+                </a:solidFill>
+                <a:latin typeface="Inter" panose="020B0604020202020204" charset="0"/>
+                <a:ea typeface="Inter" panose="020B0604020202020204" charset="0"/>
+              </a:rPr>
+              <a:t>Contenuti video settimanali dedicati al "Food Porn" artigianale, al dietro le quinte in cucina e all’esaltazione delle materie prime locali, dalle carni ai vini.</a:t>
+            </a:r>
+            <a:endParaRPr sz="1050" dirty="0">
+              <a:solidFill>
+                <a:srgbClr val="A5A5A5"/>
+              </a:solidFill>
+              <a:latin typeface="Inter" panose="020B0604020202020204" charset="0"/>
+              <a:ea typeface="Inter" panose="020B0604020202020204" charset="0"/>
+            </a:endParaRPr>
           </a:p>
         </p:txBody>
       </p:sp>
@@ -19784,7 +21627,7 @@
         </p:blipFill>
         <p:spPr>
           <a:xfrm>
-            <a:off x="885825" y="4160490"/>
+            <a:off x="870050" y="4801379"/>
             <a:ext cx="171450" cy="171450"/>
           </a:xfrm>
           <a:prstGeom prst="rect">
@@ -19804,8 +21647,8 @@
         </p:nvSpPr>
         <p:spPr>
           <a:xfrm>
-            <a:off x="1323975" y="4008090"/>
-            <a:ext cx="5350668" cy="200025"/>
+            <a:off x="1323975" y="4231927"/>
+            <a:ext cx="5350668" cy="215444"/>
           </a:xfrm>
           <a:prstGeom prst="rect">
             <a:avLst/>
@@ -19831,18 +21674,16 @@
               <a:buNone/>
             </a:pPr>
             <a:r>
-              <a:rPr lang="en-US" sz="1350" b="0" i="0" u="none" strike="noStrike" cap="none">
+              <a:rPr lang="en-US" sz="1350" dirty="0">
                 <a:solidFill>
                   <a:srgbClr val="FFFFFF"/>
                 </a:solidFill>
                 <a:latin typeface="Outfit ExtraBold"/>
-                <a:ea typeface="Outfit ExtraBold"/>
-                <a:cs typeface="Outfit ExtraBold"/>
                 <a:sym typeface="Outfit ExtraBold"/>
               </a:rPr>
-              <a:t>INTERATTIVITÀ FLUIDA</a:t>
-            </a:r>
-            <a:endParaRPr/>
+              <a:t>ISPIRAZIONE</a:t>
+            </a:r>
+            <a:endParaRPr dirty="0"/>
           </a:p>
         </p:txBody>
       </p:sp>
@@ -19854,8 +21695,8 @@
         </p:nvSpPr>
         <p:spPr>
           <a:xfrm>
-            <a:off x="1323975" y="4246215"/>
-            <a:ext cx="5095875" cy="639812"/>
+            <a:off x="1323975" y="4455765"/>
+            <a:ext cx="5095875" cy="1034129"/>
           </a:xfrm>
           <a:prstGeom prst="rect">
             <a:avLst/>
@@ -19871,31 +21712,48 @@
           </a:bodyPr>
           <a:lstStyle/>
           <a:p>
-            <a:pPr marL="0" marR="0" lvl="0" indent="0" algn="l" rtl="0">
+            <a:pPr lvl="0">
               <a:lnSpc>
                 <a:spcPct val="159904"/>
               </a:lnSpc>
-              <a:spcBef>
-                <a:spcPts val="0"/>
-              </a:spcBef>
-              <a:spcAft>
-                <a:spcPts val="0"/>
-              </a:spcAft>
-              <a:buNone/>
             </a:pPr>
             <a:r>
-              <a:rPr lang="en-US" sz="1050" b="0" i="0" u="none" strike="noStrike" cap="none">
-                <a:solidFill>
-                  <a:srgbClr val="A3A3A3"/>
-                </a:solidFill>
-                <a:latin typeface="Inter"/>
-                <a:ea typeface="Inter"/>
-                <a:cs typeface="Inter"/>
-                <a:sym typeface="Inter"/>
-              </a:rPr>
-              <a:t>Il sito web deve fungere da hub interattivo. Un'unica interfaccia reattiva che connette i post Instagram e Facebook direttamente al carrello d'acquisto per eliminare ogni frizione nel customer journey.</a:t>
-            </a:r>
-            <a:endParaRPr/>
+              <a:rPr lang="it-IT" sz="1050" dirty="0">
+                <a:solidFill>
+                  <a:srgbClr val="A5A5A5"/>
+                </a:solidFill>
+                <a:latin typeface="Inter" panose="020B0604020202020204" charset="0"/>
+                <a:ea typeface="Inter" panose="020B0604020202020204" charset="0"/>
+              </a:rPr>
+              <a:t>Ispirandoci al modello di successo del sito web di </a:t>
+            </a:r>
+            <a:r>
+              <a:rPr lang="it-IT" sz="1050" i="1" dirty="0">
+                <a:solidFill>
+                  <a:srgbClr val="A5A5A5"/>
+                </a:solidFill>
+                <a:latin typeface="Inter" panose="020B0604020202020204" charset="0"/>
+                <a:ea typeface="Inter" panose="020B0604020202020204" charset="0"/>
+              </a:rPr>
+              <a:t>Holy Cow</a:t>
+            </a:r>
+            <a:r>
+              <a:rPr lang="it-IT" sz="1050" dirty="0">
+                <a:solidFill>
+                  <a:srgbClr val="A5A5A5"/>
+                </a:solidFill>
+                <a:latin typeface="Inter" panose="020B0604020202020204" charset="0"/>
+                <a:ea typeface="Inter" panose="020B0604020202020204" charset="0"/>
+              </a:rPr>
+              <a:t>, puntiamo a creare una piattaforma focalizzata sull'impatto visivo e sulla massima semplicità d'uso. Un percorso utente ottimizzato che riduca a zero i passaggi superflui, convertendo i follower social in clienti attivi e semplificando il delivery. </a:t>
+            </a:r>
+            <a:endParaRPr dirty="0">
+              <a:solidFill>
+                <a:srgbClr val="A5A5A5"/>
+              </a:solidFill>
+              <a:latin typeface="Inter" panose="020B0604020202020204" charset="0"/>
+              <a:ea typeface="Inter" panose="020B0604020202020204" charset="0"/>
+            </a:endParaRPr>
           </a:p>
         </p:txBody>
       </p:sp>
@@ -20174,7 +22032,7 @@
         <p:spPr>
           <a:xfrm>
             <a:off x="762000" y="1057275"/>
-            <a:ext cx="10668000" cy="243780"/>
+            <a:ext cx="10668000" cy="295466"/>
           </a:xfrm>
           <a:prstGeom prst="rect">
             <a:avLst/>
@@ -20190,31 +22048,28 @@
           </a:bodyPr>
           <a:lstStyle/>
           <a:p>
-            <a:pPr marL="0" marR="0" lvl="0" indent="0" algn="l" rtl="0">
+            <a:pPr lvl="0">
               <a:lnSpc>
                 <a:spcPct val="160000"/>
               </a:lnSpc>
-              <a:spcBef>
-                <a:spcPts val="0"/>
-              </a:spcBef>
-              <a:spcAft>
-                <a:spcPts val="0"/>
-              </a:spcAft>
-              <a:buNone/>
             </a:pPr>
             <a:r>
-              <a:rPr lang="en-US" sz="1200" b="0" i="0" u="none" strike="noStrike" cap="none">
-                <a:solidFill>
-                  <a:srgbClr val="A3A3A3"/>
-                </a:solidFill>
-                <a:latin typeface="Inter"/>
-                <a:ea typeface="Inter"/>
-                <a:cs typeface="Inter"/>
-                <a:sym typeface="Inter"/>
-              </a:rPr>
-              <a:t>Quattro pilastri strategici macro su cui abbiamo concentrato le nostre forze.</a:t>
-            </a:r>
-            <a:endParaRPr/>
+              <a:rPr lang="it-IT" sz="1200" dirty="0">
+                <a:solidFill>
+                  <a:srgbClr val="A5A5A5"/>
+                </a:solidFill>
+                <a:latin typeface="Inter" panose="020B0604020202020204" charset="0"/>
+                <a:ea typeface="Inter" panose="020B0604020202020204" charset="0"/>
+              </a:rPr>
+              <a:t>Rafforzare la presenza del brand attraverso una strategia digitale integrata, orientata a visibilità e crescita.</a:t>
+            </a:r>
+            <a:endParaRPr sz="1200" dirty="0">
+              <a:solidFill>
+                <a:srgbClr val="A5A5A5"/>
+              </a:solidFill>
+              <a:latin typeface="Inter" panose="020B0604020202020204" charset="0"/>
+              <a:ea typeface="Inter" panose="020B0604020202020204" charset="0"/>
+            </a:endParaRPr>
           </a:p>
         </p:txBody>
       </p:sp>
@@ -20432,8 +22287,8 @@
         </p:nvSpPr>
         <p:spPr>
           <a:xfrm>
-            <a:off x="6689076" y="3680209"/>
-            <a:ext cx="1528472" cy="200025"/>
+            <a:off x="6660709" y="3780510"/>
+            <a:ext cx="1687794" cy="210911"/>
           </a:xfrm>
           <a:prstGeom prst="rect">
             <a:avLst/>
@@ -20483,7 +22338,7 @@
         <p:spPr>
           <a:xfrm>
             <a:off x="6381750" y="4086671"/>
-            <a:ext cx="2143125" cy="557212"/>
+            <a:ext cx="2143125" cy="675185"/>
           </a:xfrm>
           <a:prstGeom prst="rect">
             <a:avLst/>
@@ -20512,7 +22367,7 @@
               <a:buNone/>
             </a:pPr>
             <a:r>
-              <a:rPr lang="en-US" sz="975" b="0" i="0" u="none" strike="noStrike" cap="none">
+              <a:rPr lang="en-US" sz="975" b="0" i="0" u="none" strike="noStrike" cap="none" dirty="0">
                 <a:solidFill>
                   <a:srgbClr val="9C9C9C"/>
                 </a:solidFill>
@@ -20521,9 +22376,81 @@
                 <a:cs typeface="Inter"/>
                 <a:sym typeface="Inter"/>
               </a:rPr>
-              <a:t>Sito internet ultra-veloce e perfettamente ottimizzato per acquisti via smartphone.</a:t>
-            </a:r>
-            <a:endParaRPr/>
+              <a:t>Sito internet </a:t>
+            </a:r>
+            <a:r>
+              <a:rPr lang="en-US" sz="975" b="0" i="0" u="none" strike="noStrike" cap="none" dirty="0" err="1">
+                <a:solidFill>
+                  <a:srgbClr val="9C9C9C"/>
+                </a:solidFill>
+                <a:latin typeface="Inter"/>
+                <a:ea typeface="Inter"/>
+                <a:cs typeface="Inter"/>
+                <a:sym typeface="Inter"/>
+              </a:rPr>
+              <a:t>perfettamente</a:t>
+            </a:r>
+            <a:r>
+              <a:rPr lang="en-US" sz="975" b="0" i="0" u="none" strike="noStrike" cap="none" dirty="0">
+                <a:solidFill>
+                  <a:srgbClr val="9C9C9C"/>
+                </a:solidFill>
+                <a:latin typeface="Inter"/>
+                <a:ea typeface="Inter"/>
+                <a:cs typeface="Inter"/>
+                <a:sym typeface="Inter"/>
+              </a:rPr>
+              <a:t> </a:t>
+            </a:r>
+            <a:r>
+              <a:rPr lang="en-US" sz="975" b="0" i="0" u="none" strike="noStrike" cap="none" dirty="0" err="1">
+                <a:solidFill>
+                  <a:srgbClr val="9C9C9C"/>
+                </a:solidFill>
+                <a:latin typeface="Inter"/>
+                <a:ea typeface="Inter"/>
+                <a:cs typeface="Inter"/>
+                <a:sym typeface="Inter"/>
+              </a:rPr>
+              <a:t>ottimizzato</a:t>
+            </a:r>
+            <a:r>
+              <a:rPr lang="en-US" sz="975" b="0" i="0" u="none" strike="noStrike" cap="none" dirty="0">
+                <a:solidFill>
+                  <a:srgbClr val="9C9C9C"/>
+                </a:solidFill>
+                <a:latin typeface="Inter"/>
+                <a:ea typeface="Inter"/>
+                <a:cs typeface="Inter"/>
+                <a:sym typeface="Inter"/>
+              </a:rPr>
+              <a:t> per </a:t>
+            </a:r>
+            <a:r>
+              <a:rPr lang="en-US" sz="975" b="0" i="0" u="none" strike="noStrike" cap="none" dirty="0" err="1">
+                <a:solidFill>
+                  <a:srgbClr val="9C9C9C"/>
+                </a:solidFill>
+                <a:latin typeface="Inter"/>
+                <a:ea typeface="Inter"/>
+                <a:cs typeface="Inter"/>
+                <a:sym typeface="Inter"/>
+              </a:rPr>
+              <a:t>acquisti</a:t>
+            </a:r>
+            <a:r>
+              <a:rPr lang="en-US" sz="975" b="0" i="0" u="none" strike="noStrike" cap="none" dirty="0">
+                <a:solidFill>
+                  <a:srgbClr val="9C9C9C"/>
+                </a:solidFill>
+                <a:latin typeface="Inter"/>
+                <a:ea typeface="Inter"/>
+                <a:cs typeface="Inter"/>
+                <a:sym typeface="Inter"/>
+              </a:rPr>
+              <a:t> via smartphone.</a:t>
+            </a:r>
+            <a:endParaRPr dirty="0"/>
           </a:p>
         </p:txBody>
       </p:sp>
@@ -20586,7 +22513,7 @@
         <p:spPr>
           <a:xfrm>
             <a:off x="9096375" y="4086671"/>
-            <a:ext cx="2143125" cy="557212"/>
+            <a:ext cx="2143125" cy="450123"/>
           </a:xfrm>
           <a:prstGeom prst="rect">
             <a:avLst/>
@@ -20615,7 +22542,7 @@
               <a:buNone/>
             </a:pPr>
             <a:r>
-              <a:rPr lang="en-US" sz="975" b="0" i="0" u="none" strike="noStrike" cap="none">
+              <a:rPr lang="en-US" sz="975" dirty="0" err="1">
                 <a:solidFill>
                   <a:srgbClr val="9C9C9C"/>
                 </a:solidFill>
@@ -20624,9 +22551,57 @@
                 <a:cs typeface="Inter"/>
                 <a:sym typeface="Inter"/>
               </a:rPr>
-              <a:t>Connettere i profili social (IG e FB) direttamente all'acquisto per un'esperienza a 360°.</a:t>
-            </a:r>
-            <a:endParaRPr/>
+              <a:t>P</a:t>
+            </a:r>
+            <a:r>
+              <a:rPr lang="en-US" sz="975" b="0" i="0" u="none" strike="noStrike" cap="none" dirty="0" err="1">
+                <a:solidFill>
+                  <a:srgbClr val="9C9C9C"/>
+                </a:solidFill>
+                <a:latin typeface="Inter"/>
+                <a:ea typeface="Inter"/>
+                <a:cs typeface="Inter"/>
+                <a:sym typeface="Inter"/>
+              </a:rPr>
+              <a:t>rofili</a:t>
+            </a:r>
+            <a:r>
+              <a:rPr lang="en-US" sz="975" b="0" i="0" u="none" strike="noStrike" cap="none" dirty="0">
+                <a:solidFill>
+                  <a:srgbClr val="9C9C9C"/>
+                </a:solidFill>
+                <a:latin typeface="Inter"/>
+                <a:ea typeface="Inter"/>
+                <a:cs typeface="Inter"/>
+                <a:sym typeface="Inter"/>
+              </a:rPr>
+              <a:t> social per </a:t>
+            </a:r>
+            <a:r>
+              <a:rPr lang="en-US" sz="975" b="0" i="0" u="none" strike="noStrike" cap="none" dirty="0" err="1">
+                <a:solidFill>
+                  <a:srgbClr val="9C9C9C"/>
+                </a:solidFill>
+                <a:latin typeface="Inter"/>
+                <a:ea typeface="Inter"/>
+                <a:cs typeface="Inter"/>
+                <a:sym typeface="Inter"/>
+              </a:rPr>
+              <a:t>un'esperienza</a:t>
+            </a:r>
+            <a:r>
+              <a:rPr lang="en-US" sz="975" b="0" i="0" u="none" strike="noStrike" cap="none" dirty="0">
+                <a:solidFill>
+                  <a:srgbClr val="9C9C9C"/>
+                </a:solidFill>
+                <a:latin typeface="Inter"/>
+                <a:ea typeface="Inter"/>
+                <a:cs typeface="Inter"/>
+                <a:sym typeface="Inter"/>
+              </a:rPr>
+              <a:t> a 360°.</a:t>
+            </a:r>
+            <a:endParaRPr dirty="0"/>
           </a:p>
         </p:txBody>
       </p:sp>
@@ -20834,7 +22809,7 @@
         <p:spPr>
           <a:xfrm>
             <a:off x="904875" y="571500"/>
-            <a:ext cx="11051381" cy="409575"/>
+            <a:ext cx="11051381" cy="654025"/>
           </a:xfrm>
           <a:prstGeom prst="rect">
             <a:avLst/>
@@ -20850,6 +22825,16 @@
           </a:bodyPr>
           <a:lstStyle/>
           <a:p>
+            <a:r>
+              <a:rPr lang="it-IT" sz="2850" dirty="0">
+                <a:solidFill>
+                  <a:srgbClr val="F5F5F0"/>
+                </a:solidFill>
+              </a:rPr>
+              <a:t>SOCIAL PERFORMANCE STRATEGY</a:t>
+            </a:r>
+          </a:p>
+          <a:p>
             <a:pPr marL="0" marR="0" lvl="0" indent="0" algn="l" rtl="0">
               <a:spcBef>
                 <a:spcPts val="0"/>
@@ -20859,19 +22844,7 @@
               </a:spcAft>
               <a:buNone/>
             </a:pPr>
-            <a:r>
-              <a:rPr lang="en-US" sz="2850" b="0" i="0" u="none" strike="noStrike" cap="none">
-                <a:solidFill>
-                  <a:srgbClr val="FFFFFF"/>
-                </a:solidFill>
-                <a:latin typeface="Outfit Black"/>
-                <a:ea typeface="Outfit Black"/>
-                <a:cs typeface="Outfit Black"/>
-                <a:sym typeface="Outfit Black"/>
-              </a:rPr>
-              <a:t>MACRO 1: NUOVE STRATEGIE SOCIAL</a:t>
-            </a:r>
-            <a:endParaRPr/>
+            <a:endParaRPr dirty="0"/>
           </a:p>
         </p:txBody>
       </p:sp>
@@ -20932,7 +22905,7 @@
         <p:spPr>
           <a:xfrm>
             <a:off x="762000" y="1057275"/>
-            <a:ext cx="10668000" cy="243780"/>
+            <a:ext cx="10668000" cy="295466"/>
           </a:xfrm>
           <a:prstGeom prst="rect">
             <a:avLst/>
@@ -20961,7 +22934,7 @@
               <a:buNone/>
             </a:pPr>
             <a:r>
-              <a:rPr lang="en-US" sz="1200" b="0" i="0" u="none" strike="noStrike" cap="none">
+              <a:rPr lang="en-US" sz="1200" b="0" i="0" u="none" strike="noStrike" cap="none" dirty="0" err="1">
                 <a:solidFill>
                   <a:srgbClr val="A3A3A3"/>
                 </a:solidFill>
@@ -20970,9 +22943,21 @@
                 <a:cs typeface="Inter"/>
                 <a:sym typeface="Inter"/>
               </a:rPr>
-              <a:t>Implementazione del "Social Loop" per convertire i follower in clienti attivi.</a:t>
-            </a:r>
-            <a:endParaRPr/>
+              <a:t>Implementazione</a:t>
+            </a:r>
+            <a:r>
+              <a:rPr lang="en-US" sz="1200" b="0" i="0" u="none" strike="noStrike" cap="none" dirty="0">
+                <a:solidFill>
+                  <a:srgbClr val="A3A3A3"/>
+                </a:solidFill>
+                <a:latin typeface="Inter"/>
+                <a:ea typeface="Inter"/>
+                <a:cs typeface="Inter"/>
+                <a:sym typeface="Inter"/>
+              </a:rPr>
+              <a:t> del "Social Loop“.</a:t>
+            </a:r>
+            <a:endParaRPr dirty="0"/>
           </a:p>
         </p:txBody>
       </p:sp>
@@ -21012,7 +22997,7 @@
         <p:spPr>
           <a:xfrm>
             <a:off x="1095374" y="2786506"/>
-            <a:ext cx="5838825" cy="428625"/>
+            <a:ext cx="5838825" cy="521681"/>
           </a:xfrm>
           <a:prstGeom prst="rect">
             <a:avLst/>
@@ -21028,331 +23013,27 @@
           </a:bodyPr>
           <a:lstStyle/>
           <a:p>
-            <a:pPr marL="0" marR="0" lvl="0" indent="0" algn="l" rtl="0">
-              <a:lnSpc>
-                <a:spcPct val="149955"/>
-              </a:lnSpc>
-              <a:spcBef>
-                <a:spcPts val="0"/>
-              </a:spcBef>
-              <a:spcAft>
-                <a:spcPts val="0"/>
-              </a:spcAft>
-              <a:buNone/>
-            </a:pPr>
-            <a:r>
-              <a:rPr lang="en-US" sz="1125" b="1" i="0" u="none" strike="noStrike" cap="none" dirty="0">
-                <a:solidFill>
-                  <a:srgbClr val="B3B3B3"/>
-                </a:solidFill>
-                <a:latin typeface="Inter"/>
-                <a:ea typeface="Inter"/>
-                <a:cs typeface="Inter"/>
-                <a:sym typeface="Inter"/>
-              </a:rPr>
-              <a:t>Format Video </a:t>
-            </a:r>
-            <a:r>
-              <a:rPr lang="en-US" sz="1125" b="1" i="0" u="none" strike="noStrike" cap="none" dirty="0" err="1">
-                <a:solidFill>
-                  <a:srgbClr val="B3B3B3"/>
-                </a:solidFill>
-                <a:latin typeface="Inter"/>
-                <a:ea typeface="Inter"/>
-                <a:cs typeface="Inter"/>
-                <a:sym typeface="Inter"/>
-              </a:rPr>
-              <a:t>Brevi</a:t>
-            </a:r>
-            <a:r>
-              <a:rPr lang="en-US" sz="1125" b="1" i="0" u="none" strike="noStrike" cap="none" dirty="0">
-                <a:solidFill>
-                  <a:srgbClr val="B3B3B3"/>
-                </a:solidFill>
-                <a:latin typeface="Inter"/>
-                <a:ea typeface="Inter"/>
-                <a:cs typeface="Inter"/>
-                <a:sym typeface="Inter"/>
-              </a:rPr>
-              <a:t> (Reels &amp; TikTok):</a:t>
-            </a:r>
-            <a:r>
-              <a:rPr lang="en-US" sz="1125" b="0" i="0" u="none" strike="noStrike" cap="none" dirty="0">
-                <a:solidFill>
-                  <a:srgbClr val="B3B3B3"/>
-                </a:solidFill>
-                <a:latin typeface="Inter"/>
-                <a:ea typeface="Inter"/>
-                <a:cs typeface="Inter"/>
-                <a:sym typeface="Inter"/>
-              </a:rPr>
-              <a:t> </a:t>
-            </a:r>
-            <a:r>
-              <a:rPr lang="en-US" sz="1125" b="0" i="0" u="none" strike="noStrike" cap="none" dirty="0" err="1">
-                <a:solidFill>
-                  <a:srgbClr val="B3B3B3"/>
-                </a:solidFill>
-                <a:latin typeface="Inter"/>
-                <a:ea typeface="Inter"/>
-                <a:cs typeface="Inter"/>
-                <a:sym typeface="Inter"/>
-              </a:rPr>
-              <a:t>Creazione</a:t>
-            </a:r>
-            <a:r>
-              <a:rPr lang="en-US" sz="1125" b="0" i="0" u="none" strike="noStrike" cap="none" dirty="0">
-                <a:solidFill>
-                  <a:srgbClr val="B3B3B3"/>
-                </a:solidFill>
-                <a:latin typeface="Inter"/>
-                <a:ea typeface="Inter"/>
-                <a:cs typeface="Inter"/>
-                <a:sym typeface="Inter"/>
-              </a:rPr>
-              <a:t> di </a:t>
-            </a:r>
-            <a:r>
-              <a:rPr lang="en-US" sz="1125" b="0" i="0" u="none" strike="noStrike" cap="none" dirty="0" err="1">
-                <a:solidFill>
-                  <a:srgbClr val="B3B3B3"/>
-                </a:solidFill>
-                <a:latin typeface="Inter"/>
-                <a:ea typeface="Inter"/>
-                <a:cs typeface="Inter"/>
-                <a:sym typeface="Inter"/>
-              </a:rPr>
-              <a:t>contenuti</a:t>
-            </a:r>
-            <a:r>
-              <a:rPr lang="en-US" sz="1125" b="0" i="0" u="none" strike="noStrike" cap="none" dirty="0">
-                <a:solidFill>
-                  <a:srgbClr val="B3B3B3"/>
-                </a:solidFill>
-                <a:latin typeface="Inter"/>
-                <a:ea typeface="Inter"/>
-                <a:cs typeface="Inter"/>
-                <a:sym typeface="Inter"/>
-              </a:rPr>
-              <a:t> video </a:t>
-            </a:r>
-            <a:r>
-              <a:rPr lang="en-US" sz="1125" b="0" i="0" u="none" strike="noStrike" cap="none" dirty="0" err="1">
-                <a:solidFill>
-                  <a:srgbClr val="B3B3B3"/>
-                </a:solidFill>
-                <a:latin typeface="Inter"/>
-                <a:ea typeface="Inter"/>
-                <a:cs typeface="Inter"/>
-                <a:sym typeface="Inter"/>
-              </a:rPr>
-              <a:t>settimanali</a:t>
-            </a:r>
-            <a:r>
-              <a:rPr lang="en-US" sz="1125" b="0" i="0" u="none" strike="noStrike" cap="none" dirty="0">
-                <a:solidFill>
-                  <a:srgbClr val="B3B3B3"/>
-                </a:solidFill>
-                <a:latin typeface="Inter"/>
-                <a:ea typeface="Inter"/>
-                <a:cs typeface="Inter"/>
-                <a:sym typeface="Inter"/>
-              </a:rPr>
-              <a:t> </a:t>
-            </a:r>
-            <a:r>
-              <a:rPr lang="en-US" sz="1125" b="0" i="0" u="none" strike="noStrike" cap="none" dirty="0" err="1">
-                <a:solidFill>
-                  <a:srgbClr val="B3B3B3"/>
-                </a:solidFill>
-                <a:latin typeface="Inter"/>
-                <a:ea typeface="Inter"/>
-                <a:cs typeface="Inter"/>
-                <a:sym typeface="Inter"/>
-              </a:rPr>
-              <a:t>dedicati</a:t>
-            </a:r>
-            <a:r>
-              <a:rPr lang="en-US" sz="1125" b="0" i="0" u="none" strike="noStrike" cap="none" dirty="0">
-                <a:solidFill>
-                  <a:srgbClr val="B3B3B3"/>
-                </a:solidFill>
-                <a:latin typeface="Inter"/>
-                <a:ea typeface="Inter"/>
-                <a:cs typeface="Inter"/>
-                <a:sym typeface="Inter"/>
-              </a:rPr>
-              <a:t> al "Food Porn" </a:t>
-            </a:r>
-            <a:r>
-              <a:rPr lang="en-US" sz="1125" b="0" i="0" u="none" strike="noStrike" cap="none" dirty="0" err="1">
-                <a:solidFill>
-                  <a:srgbClr val="B3B3B3"/>
-                </a:solidFill>
-                <a:latin typeface="Inter"/>
-                <a:ea typeface="Inter"/>
-                <a:cs typeface="Inter"/>
-                <a:sym typeface="Inter"/>
-              </a:rPr>
-              <a:t>artigianale</a:t>
-            </a:r>
-            <a:r>
-              <a:rPr lang="en-US" sz="1125" b="0" i="0" u="none" strike="noStrike" cap="none" dirty="0">
-                <a:solidFill>
-                  <a:srgbClr val="B3B3B3"/>
-                </a:solidFill>
-                <a:latin typeface="Inter"/>
-                <a:ea typeface="Inter"/>
-                <a:cs typeface="Inter"/>
-                <a:sym typeface="Inter"/>
-              </a:rPr>
-              <a:t>, al </a:t>
-            </a:r>
-            <a:r>
-              <a:rPr lang="en-US" sz="1125" b="0" i="0" u="none" strike="noStrike" cap="none" dirty="0" err="1">
-                <a:solidFill>
-                  <a:srgbClr val="B3B3B3"/>
-                </a:solidFill>
-                <a:latin typeface="Inter"/>
-                <a:ea typeface="Inter"/>
-                <a:cs typeface="Inter"/>
-                <a:sym typeface="Inter"/>
-              </a:rPr>
-              <a:t>dietro</a:t>
-            </a:r>
-            <a:r>
-              <a:rPr lang="en-US" sz="1125" b="0" i="0" u="none" strike="noStrike" cap="none" dirty="0">
-                <a:solidFill>
-                  <a:srgbClr val="B3B3B3"/>
-                </a:solidFill>
-                <a:latin typeface="Inter"/>
-                <a:ea typeface="Inter"/>
-                <a:cs typeface="Inter"/>
-                <a:sym typeface="Inter"/>
-              </a:rPr>
-              <a:t> le quinte in cucina e </a:t>
-            </a:r>
-            <a:r>
-              <a:rPr lang="en-US" sz="1125" b="0" i="0" u="none" strike="noStrike" cap="none" dirty="0" err="1">
-                <a:solidFill>
-                  <a:srgbClr val="B3B3B3"/>
-                </a:solidFill>
-                <a:latin typeface="Inter"/>
-                <a:ea typeface="Inter"/>
-                <a:cs typeface="Inter"/>
-                <a:sym typeface="Inter"/>
-              </a:rPr>
-              <a:t>alla</a:t>
-            </a:r>
-            <a:r>
-              <a:rPr lang="en-US" sz="1125" b="0" i="0" u="none" strike="noStrike" cap="none" dirty="0">
-                <a:solidFill>
-                  <a:srgbClr val="B3B3B3"/>
-                </a:solidFill>
-                <a:latin typeface="Inter"/>
-                <a:ea typeface="Inter"/>
-                <a:cs typeface="Inter"/>
-                <a:sym typeface="Inter"/>
-              </a:rPr>
-              <a:t> </a:t>
-            </a:r>
-            <a:r>
-              <a:rPr lang="en-US" sz="1125" b="0" i="0" u="none" strike="noStrike" cap="none" dirty="0" err="1">
-                <a:solidFill>
-                  <a:srgbClr val="B3B3B3"/>
-                </a:solidFill>
-                <a:latin typeface="Inter"/>
-                <a:ea typeface="Inter"/>
-                <a:cs typeface="Inter"/>
-                <a:sym typeface="Inter"/>
-              </a:rPr>
-              <a:t>preparazione</a:t>
-            </a:r>
-            <a:r>
-              <a:rPr lang="en-US" sz="1125" b="0" i="0" u="none" strike="noStrike" cap="none" dirty="0">
-                <a:solidFill>
-                  <a:srgbClr val="B3B3B3"/>
-                </a:solidFill>
-                <a:latin typeface="Inter"/>
-                <a:ea typeface="Inter"/>
-                <a:cs typeface="Inter"/>
-                <a:sym typeface="Inter"/>
-              </a:rPr>
-              <a:t> </a:t>
-            </a:r>
-            <a:r>
-              <a:rPr lang="en-US" sz="1125" b="0" i="0" u="none" strike="noStrike" cap="none" dirty="0" err="1">
-                <a:solidFill>
-                  <a:srgbClr val="B3B3B3"/>
-                </a:solidFill>
-                <a:latin typeface="Inter"/>
-                <a:ea typeface="Inter"/>
-                <a:cs typeface="Inter"/>
-                <a:sym typeface="Inter"/>
-              </a:rPr>
-              <a:t>delle</a:t>
-            </a:r>
-            <a:r>
-              <a:rPr lang="en-US" sz="1125" b="0" i="0" u="none" strike="noStrike" cap="none" dirty="0">
-                <a:solidFill>
-                  <a:srgbClr val="B3B3B3"/>
-                </a:solidFill>
-                <a:latin typeface="Inter"/>
-                <a:ea typeface="Inter"/>
-                <a:cs typeface="Inter"/>
-                <a:sym typeface="Inter"/>
-              </a:rPr>
-              <a:t> </a:t>
-            </a:r>
-            <a:r>
-              <a:rPr lang="en-US" sz="1125" b="0" i="0" u="none" strike="noStrike" cap="none" dirty="0" err="1">
-                <a:solidFill>
-                  <a:srgbClr val="B3B3B3"/>
-                </a:solidFill>
-                <a:latin typeface="Inter"/>
-                <a:ea typeface="Inter"/>
-                <a:cs typeface="Inter"/>
-                <a:sym typeface="Inter"/>
-              </a:rPr>
-              <a:t>salse</a:t>
-            </a:r>
-            <a:r>
-              <a:rPr lang="en-US" sz="1125" b="0" i="0" u="none" strike="noStrike" cap="none" dirty="0">
-                <a:solidFill>
-                  <a:srgbClr val="B3B3B3"/>
-                </a:solidFill>
-                <a:latin typeface="Inter"/>
-                <a:ea typeface="Inter"/>
-                <a:cs typeface="Inter"/>
-                <a:sym typeface="Inter"/>
-              </a:rPr>
-              <a:t> </a:t>
-            </a:r>
-            <a:r>
-              <a:rPr lang="en-US" sz="1125" b="0" i="0" u="none" strike="noStrike" cap="none" dirty="0" err="1">
-                <a:solidFill>
-                  <a:srgbClr val="B3B3B3"/>
-                </a:solidFill>
-                <a:latin typeface="Inter"/>
-                <a:ea typeface="Inter"/>
-                <a:cs typeface="Inter"/>
-                <a:sym typeface="Inter"/>
-              </a:rPr>
-              <a:t>segrete</a:t>
-            </a:r>
-            <a:r>
-              <a:rPr lang="en-US" sz="1125" b="0" i="0" u="none" strike="noStrike" cap="none" dirty="0">
-                <a:solidFill>
-                  <a:srgbClr val="B3B3B3"/>
-                </a:solidFill>
-                <a:latin typeface="Inter"/>
-                <a:ea typeface="Inter"/>
-                <a:cs typeface="Inter"/>
-                <a:sym typeface="Inter"/>
-              </a:rPr>
-              <a:t>.</a:t>
-            </a:r>
-            <a:endParaRPr dirty="0"/>
+            <a:pPr fontAlgn="base"/>
+            <a:r>
+              <a:rPr lang="it-IT" sz="1130" b="1" dirty="0">
+                <a:solidFill>
+                  <a:srgbClr val="A5A5A5"/>
+                </a:solidFill>
+                <a:latin typeface="Inter" panose="020B0604020202020204" charset="0"/>
+                <a:ea typeface="Inter" panose="020B0604020202020204" charset="0"/>
+              </a:rPr>
+              <a:t>Strategia Video "Short-Form":</a:t>
+            </a:r>
+            <a:r>
+              <a:rPr lang="it-IT" sz="1130" dirty="0">
+                <a:solidFill>
+                  <a:srgbClr val="A5A5A5"/>
+                </a:solidFill>
+                <a:latin typeface="Inter" panose="020B0604020202020204" charset="0"/>
+                <a:ea typeface="Inter" panose="020B0604020202020204" charset="0"/>
+              </a:rPr>
+              <a:t> Creazione di contenuti video settimanali dedicati al "Food Porn" artigianale, al dietro le quinte in cucina e all’esaltazione delle materie prime locali.</a:t>
+            </a:r>
           </a:p>
         </p:txBody>
       </p:sp>
@@ -21365,7 +23046,7 @@
         <p:spPr>
           <a:xfrm>
             <a:off x="1095375" y="3591371"/>
-            <a:ext cx="5838825" cy="642937"/>
+            <a:ext cx="5838825" cy="519373"/>
           </a:xfrm>
           <a:prstGeom prst="rect">
             <a:avLst/>
@@ -21381,20 +23062,13 @@
           </a:bodyPr>
           <a:lstStyle/>
           <a:p>
-            <a:pPr marL="0" marR="0" lvl="0" indent="0" algn="l" rtl="0">
+            <a:pPr lvl="0">
               <a:lnSpc>
                 <a:spcPct val="149955"/>
               </a:lnSpc>
-              <a:spcBef>
-                <a:spcPts val="0"/>
-              </a:spcBef>
-              <a:spcAft>
-                <a:spcPts val="0"/>
-              </a:spcAft>
-              <a:buNone/>
             </a:pPr>
             <a:r>
-              <a:rPr lang="en-US" sz="1125" b="1" i="0" u="none" strike="noStrike" cap="none" dirty="0" err="1">
+              <a:rPr lang="it-IT" sz="1125" b="1" dirty="0">
                 <a:solidFill>
                   <a:srgbClr val="B3B3B3"/>
                 </a:solidFill>
@@ -21403,10 +23077,10 @@
                 <a:cs typeface="Inter"/>
                 <a:sym typeface="Inter"/>
               </a:rPr>
-              <a:t>Integrazione</a:t>
-            </a:r>
-            <a:r>
-              <a:rPr lang="en-US" sz="1125" b="1" i="0" u="none" strike="noStrike" cap="none" dirty="0">
+              <a:t>Coinvolgimento della Community: </a:t>
+            </a:r>
+            <a:r>
+              <a:rPr lang="it-IT" sz="1125" dirty="0">
                 <a:solidFill>
                   <a:srgbClr val="B3B3B3"/>
                 </a:solidFill>
@@ -21415,379 +23089,7 @@
                 <a:cs typeface="Inter"/>
                 <a:sym typeface="Inter"/>
               </a:rPr>
-              <a:t> Instagram &amp; Facebook Shop:</a:t>
-            </a:r>
-            <a:r>
-              <a:rPr lang="en-US" sz="1125" b="0" i="0" u="none" strike="noStrike" cap="none" dirty="0">
-                <a:solidFill>
-                  <a:srgbClr val="B3B3B3"/>
-                </a:solidFill>
-                <a:latin typeface="Inter"/>
-                <a:ea typeface="Inter"/>
-                <a:cs typeface="Inter"/>
-                <a:sym typeface="Inter"/>
-              </a:rPr>
-              <a:t> Tag </a:t>
-            </a:r>
-            <a:r>
-              <a:rPr lang="en-US" sz="1125" b="0" i="0" u="none" strike="noStrike" cap="none" dirty="0" err="1">
-                <a:solidFill>
-                  <a:srgbClr val="B3B3B3"/>
-                </a:solidFill>
-                <a:latin typeface="Inter"/>
-                <a:ea typeface="Inter"/>
-                <a:cs typeface="Inter"/>
-                <a:sym typeface="Inter"/>
-              </a:rPr>
-              <a:t>diretto</a:t>
-            </a:r>
-            <a:r>
-              <a:rPr lang="en-US" sz="1125" b="0" i="0" u="none" strike="noStrike" cap="none" dirty="0">
-                <a:solidFill>
-                  <a:srgbClr val="B3B3B3"/>
-                </a:solidFill>
-                <a:latin typeface="Inter"/>
-                <a:ea typeface="Inter"/>
-                <a:cs typeface="Inter"/>
-                <a:sym typeface="Inter"/>
-              </a:rPr>
-              <a:t> </a:t>
-            </a:r>
-            <a:r>
-              <a:rPr lang="en-US" sz="1125" b="0" i="0" u="none" strike="noStrike" cap="none" dirty="0" err="1">
-                <a:solidFill>
-                  <a:srgbClr val="B3B3B3"/>
-                </a:solidFill>
-                <a:latin typeface="Inter"/>
-                <a:ea typeface="Inter"/>
-                <a:cs typeface="Inter"/>
-                <a:sym typeface="Inter"/>
-              </a:rPr>
-              <a:t>dei</a:t>
-            </a:r>
-            <a:r>
-              <a:rPr lang="en-US" sz="1125" b="0" i="0" u="none" strike="noStrike" cap="none" dirty="0">
-                <a:solidFill>
-                  <a:srgbClr val="B3B3B3"/>
-                </a:solidFill>
-                <a:latin typeface="Inter"/>
-                <a:ea typeface="Inter"/>
-                <a:cs typeface="Inter"/>
-                <a:sym typeface="Inter"/>
-              </a:rPr>
-              <a:t> burger </a:t>
-            </a:r>
-            <a:r>
-              <a:rPr lang="en-US" sz="1125" b="0" i="0" u="none" strike="noStrike" cap="none" dirty="0" err="1">
-                <a:solidFill>
-                  <a:srgbClr val="B3B3B3"/>
-                </a:solidFill>
-                <a:latin typeface="Inter"/>
-                <a:ea typeface="Inter"/>
-                <a:cs typeface="Inter"/>
-                <a:sym typeface="Inter"/>
-              </a:rPr>
-              <a:t>nei</a:t>
-            </a:r>
-            <a:r>
-              <a:rPr lang="en-US" sz="1125" b="0" i="0" u="none" strike="noStrike" cap="none" dirty="0">
-                <a:solidFill>
-                  <a:srgbClr val="B3B3B3"/>
-                </a:solidFill>
-                <a:latin typeface="Inter"/>
-                <a:ea typeface="Inter"/>
-                <a:cs typeface="Inter"/>
-                <a:sym typeface="Inter"/>
-              </a:rPr>
-              <a:t> post e </a:t>
-            </a:r>
-            <a:r>
-              <a:rPr lang="en-US" sz="1125" b="0" i="0" u="none" strike="noStrike" cap="none" dirty="0" err="1">
-                <a:solidFill>
-                  <a:srgbClr val="B3B3B3"/>
-                </a:solidFill>
-                <a:latin typeface="Inter"/>
-                <a:ea typeface="Inter"/>
-                <a:cs typeface="Inter"/>
-                <a:sym typeface="Inter"/>
-              </a:rPr>
-              <a:t>nelle</a:t>
-            </a:r>
-            <a:r>
-              <a:rPr lang="en-US" sz="1125" b="0" i="0" u="none" strike="noStrike" cap="none" dirty="0">
-                <a:solidFill>
-                  <a:srgbClr val="B3B3B3"/>
-                </a:solidFill>
-                <a:latin typeface="Inter"/>
-                <a:ea typeface="Inter"/>
-                <a:cs typeface="Inter"/>
-                <a:sym typeface="Inter"/>
-              </a:rPr>
-              <a:t> </a:t>
-            </a:r>
-            <a:r>
-              <a:rPr lang="en-US" sz="1125" b="0" i="0" u="none" strike="noStrike" cap="none" dirty="0" err="1">
-                <a:solidFill>
-                  <a:srgbClr val="B3B3B3"/>
-                </a:solidFill>
-                <a:latin typeface="Inter"/>
-                <a:ea typeface="Inter"/>
-                <a:cs typeface="Inter"/>
-                <a:sym typeface="Inter"/>
-              </a:rPr>
-              <a:t>storie</a:t>
-            </a:r>
-            <a:r>
-              <a:rPr lang="en-US" sz="1125" b="0" i="0" u="none" strike="noStrike" cap="none" dirty="0">
-                <a:solidFill>
-                  <a:srgbClr val="B3B3B3"/>
-                </a:solidFill>
-                <a:latin typeface="Inter"/>
-                <a:ea typeface="Inter"/>
-                <a:cs typeface="Inter"/>
-                <a:sym typeface="Inter"/>
-              </a:rPr>
-              <a:t>. </a:t>
-            </a:r>
-            <a:r>
-              <a:rPr lang="en-US" sz="1125" b="0" i="0" u="none" strike="noStrike" cap="none" dirty="0" err="1">
-                <a:solidFill>
-                  <a:srgbClr val="B3B3B3"/>
-                </a:solidFill>
-                <a:latin typeface="Inter"/>
-                <a:ea typeface="Inter"/>
-                <a:cs typeface="Inter"/>
-                <a:sym typeface="Inter"/>
-              </a:rPr>
-              <a:t>Cliccando</a:t>
-            </a:r>
-            <a:r>
-              <a:rPr lang="en-US" sz="1125" b="0" i="0" u="none" strike="noStrike" cap="none" dirty="0">
-                <a:solidFill>
-                  <a:srgbClr val="B3B3B3"/>
-                </a:solidFill>
-                <a:latin typeface="Inter"/>
-                <a:ea typeface="Inter"/>
-                <a:cs typeface="Inter"/>
-                <a:sym typeface="Inter"/>
-              </a:rPr>
-              <a:t> </a:t>
-            </a:r>
-            <a:r>
-              <a:rPr lang="en-US" sz="1125" b="0" i="0" u="none" strike="noStrike" cap="none" dirty="0" err="1">
-                <a:solidFill>
-                  <a:srgbClr val="B3B3B3"/>
-                </a:solidFill>
-                <a:latin typeface="Inter"/>
-                <a:ea typeface="Inter"/>
-                <a:cs typeface="Inter"/>
-                <a:sym typeface="Inter"/>
-              </a:rPr>
-              <a:t>sull'ingrediente</a:t>
-            </a:r>
-            <a:r>
-              <a:rPr lang="en-US" sz="1125" b="0" i="0" u="none" strike="noStrike" cap="none" dirty="0">
-                <a:solidFill>
-                  <a:srgbClr val="B3B3B3"/>
-                </a:solidFill>
-                <a:latin typeface="Inter"/>
-                <a:ea typeface="Inter"/>
-                <a:cs typeface="Inter"/>
-                <a:sym typeface="Inter"/>
-              </a:rPr>
-              <a:t>, </a:t>
-            </a:r>
-            <a:r>
-              <a:rPr lang="en-US" sz="1125" b="0" i="0" u="none" strike="noStrike" cap="none" dirty="0" err="1">
-                <a:solidFill>
-                  <a:srgbClr val="B3B3B3"/>
-                </a:solidFill>
-                <a:latin typeface="Inter"/>
-                <a:ea typeface="Inter"/>
-                <a:cs typeface="Inter"/>
-                <a:sym typeface="Inter"/>
-              </a:rPr>
-              <a:t>l'utente</a:t>
-            </a:r>
-            <a:r>
-              <a:rPr lang="en-US" sz="1125" b="0" i="0" u="none" strike="noStrike" cap="none" dirty="0">
-                <a:solidFill>
-                  <a:srgbClr val="B3B3B3"/>
-                </a:solidFill>
-                <a:latin typeface="Inter"/>
-                <a:ea typeface="Inter"/>
-                <a:cs typeface="Inter"/>
-                <a:sym typeface="Inter"/>
-              </a:rPr>
-              <a:t> </a:t>
-            </a:r>
-            <a:r>
-              <a:rPr lang="en-US" sz="1125" b="0" i="0" u="none" strike="noStrike" cap="none" dirty="0" err="1">
-                <a:solidFill>
-                  <a:srgbClr val="B3B3B3"/>
-                </a:solidFill>
-                <a:latin typeface="Inter"/>
-                <a:ea typeface="Inter"/>
-                <a:cs typeface="Inter"/>
-                <a:sym typeface="Inter"/>
-              </a:rPr>
-              <a:t>viene</a:t>
-            </a:r>
-            <a:r>
-              <a:rPr lang="en-US" sz="1125" b="0" i="0" u="none" strike="noStrike" cap="none" dirty="0">
-                <a:solidFill>
-                  <a:srgbClr val="B3B3B3"/>
-                </a:solidFill>
-                <a:latin typeface="Inter"/>
-                <a:ea typeface="Inter"/>
-                <a:cs typeface="Inter"/>
-                <a:sym typeface="Inter"/>
-              </a:rPr>
-              <a:t> </a:t>
-            </a:r>
-            <a:r>
-              <a:rPr lang="en-US" sz="1125" b="0" i="0" u="none" strike="noStrike" cap="none" dirty="0" err="1">
-                <a:solidFill>
-                  <a:srgbClr val="B3B3B3"/>
-                </a:solidFill>
-                <a:latin typeface="Inter"/>
-                <a:ea typeface="Inter"/>
-                <a:cs typeface="Inter"/>
-                <a:sym typeface="Inter"/>
-              </a:rPr>
-              <a:t>reindirizzato</a:t>
-            </a:r>
-            <a:r>
-              <a:rPr lang="en-US" sz="1125" b="0" i="0" u="none" strike="noStrike" cap="none" dirty="0">
-                <a:solidFill>
-                  <a:srgbClr val="B3B3B3"/>
-                </a:solidFill>
-                <a:latin typeface="Inter"/>
-                <a:ea typeface="Inter"/>
-                <a:cs typeface="Inter"/>
-                <a:sym typeface="Inter"/>
-              </a:rPr>
-              <a:t> in </a:t>
-            </a:r>
-            <a:r>
-              <a:rPr lang="en-US" sz="1125" b="0" i="0" u="none" strike="noStrike" cap="none" dirty="0" err="1">
-                <a:solidFill>
-                  <a:srgbClr val="B3B3B3"/>
-                </a:solidFill>
-                <a:latin typeface="Inter"/>
-                <a:ea typeface="Inter"/>
-                <a:cs typeface="Inter"/>
-                <a:sym typeface="Inter"/>
-              </a:rPr>
-              <a:t>automatico</a:t>
-            </a:r>
-            <a:r>
-              <a:rPr lang="en-US" sz="1125" b="0" i="0" u="none" strike="noStrike" cap="none" dirty="0">
-                <a:solidFill>
-                  <a:srgbClr val="B3B3B3"/>
-                </a:solidFill>
-                <a:latin typeface="Inter"/>
-                <a:ea typeface="Inter"/>
-                <a:cs typeface="Inter"/>
-                <a:sym typeface="Inter"/>
-              </a:rPr>
-              <a:t> </a:t>
-            </a:r>
-            <a:r>
-              <a:rPr lang="en-US" sz="1125" b="0" i="0" u="none" strike="noStrike" cap="none" dirty="0" err="1">
-                <a:solidFill>
-                  <a:srgbClr val="B3B3B3"/>
-                </a:solidFill>
-                <a:latin typeface="Inter"/>
-                <a:ea typeface="Inter"/>
-                <a:cs typeface="Inter"/>
-                <a:sym typeface="Inter"/>
-              </a:rPr>
-              <a:t>alla</a:t>
-            </a:r>
-            <a:r>
-              <a:rPr lang="en-US" sz="1125" b="0" i="0" u="none" strike="noStrike" cap="none" dirty="0">
-                <a:solidFill>
-                  <a:srgbClr val="B3B3B3"/>
-                </a:solidFill>
-                <a:latin typeface="Inter"/>
-                <a:ea typeface="Inter"/>
-                <a:cs typeface="Inter"/>
-                <a:sym typeface="Inter"/>
-              </a:rPr>
-              <a:t> </a:t>
-            </a:r>
-            <a:r>
-              <a:rPr lang="en-US" sz="1125" b="0" i="0" u="none" strike="noStrike" cap="none" dirty="0" err="1">
-                <a:solidFill>
-                  <a:srgbClr val="B3B3B3"/>
-                </a:solidFill>
-                <a:latin typeface="Inter"/>
-                <a:ea typeface="Inter"/>
-                <a:cs typeface="Inter"/>
-                <a:sym typeface="Inter"/>
-              </a:rPr>
-              <a:t>pagina</a:t>
-            </a:r>
-            <a:r>
-              <a:rPr lang="en-US" sz="1125" b="0" i="0" u="none" strike="noStrike" cap="none" dirty="0">
-                <a:solidFill>
-                  <a:srgbClr val="B3B3B3"/>
-                </a:solidFill>
-                <a:latin typeface="Inter"/>
-                <a:ea typeface="Inter"/>
-                <a:cs typeface="Inter"/>
-                <a:sym typeface="Inter"/>
-              </a:rPr>
-              <a:t> di </a:t>
-            </a:r>
-            <a:r>
-              <a:rPr lang="en-US" sz="1125" b="0" i="0" u="none" strike="noStrike" cap="none" dirty="0" err="1">
-                <a:solidFill>
-                  <a:srgbClr val="B3B3B3"/>
-                </a:solidFill>
-                <a:latin typeface="Inter"/>
-                <a:ea typeface="Inter"/>
-                <a:cs typeface="Inter"/>
-                <a:sym typeface="Inter"/>
-              </a:rPr>
-              <a:t>ordine</a:t>
-            </a:r>
-            <a:r>
-              <a:rPr lang="en-US" sz="1125" b="0" i="0" u="none" strike="noStrike" cap="none" dirty="0">
-                <a:solidFill>
-                  <a:srgbClr val="B3B3B3"/>
-                </a:solidFill>
-                <a:latin typeface="Inter"/>
-                <a:ea typeface="Inter"/>
-                <a:cs typeface="Inter"/>
-                <a:sym typeface="Inter"/>
-              </a:rPr>
-              <a:t> </a:t>
-            </a:r>
-            <a:r>
-              <a:rPr lang="en-US" sz="1125" b="0" i="0" u="none" strike="noStrike" cap="none" dirty="0" err="1">
-                <a:solidFill>
-                  <a:srgbClr val="B3B3B3"/>
-                </a:solidFill>
-                <a:latin typeface="Inter"/>
-                <a:ea typeface="Inter"/>
-                <a:cs typeface="Inter"/>
-                <a:sym typeface="Inter"/>
-              </a:rPr>
-              <a:t>rapido</a:t>
-            </a:r>
-            <a:r>
-              <a:rPr lang="en-US" sz="1125" b="0" i="0" u="none" strike="noStrike" cap="none" dirty="0">
-                <a:solidFill>
-                  <a:srgbClr val="B3B3B3"/>
-                </a:solidFill>
-                <a:latin typeface="Inter"/>
-                <a:ea typeface="Inter"/>
-                <a:cs typeface="Inter"/>
-                <a:sym typeface="Inter"/>
-              </a:rPr>
-              <a:t>.</a:t>
+              <a:t>Gestione attiva delle interazioni per trasformare i follower in fan del brand, costruendo una relazione autentica.</a:t>
             </a:r>
             <a:endParaRPr dirty="0"/>
           </a:p>
@@ -21802,7 +23104,7 @@
         <p:spPr>
           <a:xfrm>
             <a:off x="1095375" y="4386708"/>
-            <a:ext cx="5838825" cy="428625"/>
+            <a:ext cx="5838825" cy="779059"/>
           </a:xfrm>
           <a:prstGeom prst="rect">
             <a:avLst/>
@@ -21818,20 +23120,13 @@
           </a:bodyPr>
           <a:lstStyle/>
           <a:p>
-            <a:pPr marL="0" marR="0" lvl="0" indent="0" algn="l" rtl="0">
+            <a:pPr lvl="0">
               <a:lnSpc>
                 <a:spcPct val="149955"/>
               </a:lnSpc>
-              <a:spcBef>
-                <a:spcPts val="0"/>
-              </a:spcBef>
-              <a:spcAft>
-                <a:spcPts val="0"/>
-              </a:spcAft>
-              <a:buNone/>
             </a:pPr>
             <a:r>
-              <a:rPr lang="en-US" sz="1125" b="1" i="0" u="none" strike="noStrike" cap="none">
+              <a:rPr lang="it-IT" sz="1125" b="1" dirty="0">
                 <a:solidFill>
                   <a:srgbClr val="B3B3B3"/>
                 </a:solidFill>
@@ -21840,10 +23135,10 @@
                 <a:cs typeface="Inter"/>
                 <a:sym typeface="Inter"/>
               </a:rPr>
-              <a:t>Social Commerce &amp; Chatbot:</a:t>
-            </a:r>
-            <a:r>
-              <a:rPr lang="en-US" sz="1125" b="0" i="0" u="none" strike="noStrike" cap="none">
+              <a:t>Vendita Conversazionale: </a:t>
+            </a:r>
+            <a:r>
+              <a:rPr lang="it-IT" sz="1125" dirty="0">
                 <a:solidFill>
                   <a:srgbClr val="B3B3B3"/>
                 </a:solidFill>
@@ -21852,9 +23147,33 @@
                 <a:cs typeface="Inter"/>
                 <a:sym typeface="Inter"/>
               </a:rPr>
-              <a:t> Risposte automatiche intelligenti su Messenger e DM di Instagram per inviare coupon esclusivi a chi commenta o interagisce con i nostri post.</a:t>
-            </a:r>
-            <a:endParaRPr/>
+              <a:t>Ottimizzazione dei </a:t>
+            </a:r>
+            <a:r>
+              <a:rPr lang="it-IT" sz="1125" dirty="0" err="1">
+                <a:solidFill>
+                  <a:srgbClr val="B3B3B3"/>
+                </a:solidFill>
+                <a:latin typeface="Inter"/>
+                <a:ea typeface="Inter"/>
+                <a:cs typeface="Inter"/>
+                <a:sym typeface="Inter"/>
+              </a:rPr>
+              <a:t>touchpoint</a:t>
+            </a:r>
+            <a:r>
+              <a:rPr lang="it-IT" sz="1125" dirty="0">
+                <a:solidFill>
+                  <a:srgbClr val="B3B3B3"/>
+                </a:solidFill>
+                <a:latin typeface="Inter"/>
+                <a:ea typeface="Inter"/>
+                <a:cs typeface="Inter"/>
+                <a:sym typeface="Inter"/>
+              </a:rPr>
+              <a:t> social tramite interfacce conversazionali avanzate, per offrire un’esperienza d’acquisto rapida, diretta e sempre attiva.</a:t>
+            </a:r>
+            <a:endParaRPr dirty="0"/>
           </a:p>
         </p:txBody>
       </p:sp>
@@ -22035,7 +23354,7 @@
         <p:spPr>
           <a:xfrm>
             <a:off x="904875" y="571500"/>
-            <a:ext cx="11051381" cy="409575"/>
+            <a:ext cx="11051381" cy="438582"/>
           </a:xfrm>
           <a:prstGeom prst="rect">
             <a:avLst/>
@@ -22061,7 +23380,7 @@
               <a:buNone/>
             </a:pPr>
             <a:r>
-              <a:rPr lang="en-US" sz="2850" b="0" i="0" u="none" strike="noStrike" cap="none">
+              <a:rPr lang="en-US" sz="2850" b="0" i="0" u="none" strike="noStrike" cap="none" dirty="0">
                 <a:solidFill>
                   <a:srgbClr val="FFFFFF"/>
                 </a:solidFill>
@@ -22070,9 +23389,21 @@
                 <a:cs typeface="Outfit Black"/>
                 <a:sym typeface="Outfit Black"/>
               </a:rPr>
-              <a:t>MACRO 2: L'APP MOBILE &amp; ORDINAZIONI</a:t>
-            </a:r>
-            <a:endParaRPr/>
+              <a:t>MOBILE &amp; </a:t>
+            </a:r>
+            <a:r>
+              <a:rPr lang="en-US" sz="2850" dirty="0">
+                <a:solidFill>
+                  <a:srgbClr val="FFFFFF"/>
+                </a:solidFill>
+                <a:latin typeface="Outfit Black"/>
+                <a:ea typeface="Outfit Black"/>
+                <a:cs typeface="Outfit Black"/>
+                <a:sym typeface="Outfit Black"/>
+              </a:rPr>
+              <a:t>DELIVERY</a:t>
+            </a:r>
+            <a:endParaRPr dirty="0"/>
           </a:p>
         </p:txBody>
       </p:sp>
@@ -22133,7 +23464,7 @@
         <p:spPr>
           <a:xfrm>
             <a:off x="762000" y="1057275"/>
-            <a:ext cx="10668000" cy="243780"/>
+            <a:ext cx="10668000" cy="295466"/>
           </a:xfrm>
           <a:prstGeom prst="rect">
             <a:avLst/>
@@ -22162,7 +23493,7 @@
               <a:buNone/>
             </a:pPr>
             <a:r>
-              <a:rPr lang="en-US" sz="1200" b="0" i="0" u="none" strike="noStrike" cap="none">
+              <a:rPr lang="en-US" sz="1200" b="0" i="0" u="none" strike="noStrike" cap="none" dirty="0" err="1">
                 <a:solidFill>
                   <a:srgbClr val="A3A3A3"/>
                 </a:solidFill>
@@ -22171,9 +23502,57 @@
                 <a:cs typeface="Inter"/>
                 <a:sym typeface="Inter"/>
               </a:rPr>
-              <a:t>Un'interfaccia proprietaria ad altissimo tasso di conversione.</a:t>
-            </a:r>
-            <a:endParaRPr/>
+              <a:t>Ecosistema</a:t>
+            </a:r>
+            <a:r>
+              <a:rPr lang="en-US" sz="1200" b="0" i="0" u="none" strike="noStrike" cap="none" dirty="0">
+                <a:solidFill>
+                  <a:srgbClr val="A3A3A3"/>
+                </a:solidFill>
+                <a:latin typeface="Inter"/>
+                <a:ea typeface="Inter"/>
+                <a:cs typeface="Inter"/>
+                <a:sym typeface="Inter"/>
+              </a:rPr>
+              <a:t> Mobile-First ad </a:t>
+            </a:r>
+            <a:r>
+              <a:rPr lang="en-US" sz="1200" b="0" i="0" u="none" strike="noStrike" cap="none" dirty="0" err="1">
+                <a:solidFill>
+                  <a:srgbClr val="A3A3A3"/>
+                </a:solidFill>
+                <a:latin typeface="Inter"/>
+                <a:ea typeface="Inter"/>
+                <a:cs typeface="Inter"/>
+                <a:sym typeface="Inter"/>
+              </a:rPr>
+              <a:t>alta</a:t>
+            </a:r>
+            <a:r>
+              <a:rPr lang="en-US" sz="1200" b="0" i="0" u="none" strike="noStrike" cap="none" dirty="0">
+                <a:solidFill>
+                  <a:srgbClr val="A3A3A3"/>
+                </a:solidFill>
+                <a:latin typeface="Inter"/>
+                <a:ea typeface="Inter"/>
+                <a:cs typeface="Inter"/>
+                <a:sym typeface="Inter"/>
+              </a:rPr>
+              <a:t> </a:t>
+            </a:r>
+            <a:r>
+              <a:rPr lang="en-US" sz="1200" b="0" i="0" u="none" strike="noStrike" cap="none" dirty="0" err="1">
+                <a:solidFill>
+                  <a:srgbClr val="A3A3A3"/>
+                </a:solidFill>
+                <a:latin typeface="Inter"/>
+                <a:ea typeface="Inter"/>
+                <a:cs typeface="Inter"/>
+                <a:sym typeface="Inter"/>
+              </a:rPr>
+              <a:t>conversione</a:t>
+            </a:r>
+            <a:endParaRPr dirty="0"/>
           </a:p>
         </p:txBody>
       </p:sp>
@@ -22213,7 +23592,7 @@
         <p:spPr>
           <a:xfrm>
             <a:off x="1095374" y="2862230"/>
-            <a:ext cx="5838825" cy="428625"/>
+            <a:ext cx="5838825" cy="519373"/>
           </a:xfrm>
           <a:prstGeom prst="rect">
             <a:avLst/>
@@ -22407,10 +23786,10 @@
                 <a:cs typeface="Inter"/>
                 <a:sym typeface="Inter"/>
               </a:rPr>
-              <a:t> in </a:t>
-            </a:r>
-            <a:r>
-              <a:rPr lang="en-US" sz="1125" b="0" i="0" u="none" strike="noStrike" cap="none" dirty="0" err="1">
+              <a:t> </a:t>
+            </a:r>
+            <a:r>
+              <a:rPr lang="en-US" sz="1125" dirty="0">
                 <a:solidFill>
                   <a:srgbClr val="B3B3B3"/>
                 </a:solidFill>
@@ -22419,10 +23798,10 @@
                 <a:cs typeface="Inter"/>
                 <a:sym typeface="Inter"/>
               </a:rPr>
-              <a:t>mobilità</a:t>
-            </a:r>
-            <a:r>
-              <a:rPr lang="en-US" sz="1125" b="0" i="0" u="none" strike="noStrike" cap="none" dirty="0">
+              <a:t>e </a:t>
+            </a:r>
+            <a:r>
+              <a:rPr lang="en-US" sz="1125" dirty="0" err="1">
                 <a:solidFill>
                   <a:srgbClr val="B3B3B3"/>
                 </a:solidFill>
@@ -22431,10 +23810,10 @@
                 <a:cs typeface="Inter"/>
                 <a:sym typeface="Inter"/>
               </a:rPr>
-              <a:t>. </a:t>
-            </a:r>
-            <a:r>
-              <a:rPr lang="en-US" sz="1125" b="0" i="0" u="none" strike="noStrike" cap="none" dirty="0" err="1">
+              <a:t>connesso</a:t>
+            </a:r>
+            <a:r>
+              <a:rPr lang="en-US" sz="1125" dirty="0">
                 <a:solidFill>
                   <a:srgbClr val="B3B3B3"/>
                 </a:solidFill>
@@ -22443,10 +23822,10 @@
                 <a:cs typeface="Inter"/>
                 <a:sym typeface="Inter"/>
               </a:rPr>
-              <a:t>Selezione</a:t>
-            </a:r>
-            <a:r>
-              <a:rPr lang="en-US" sz="1125" b="0" i="0" u="none" strike="noStrike" cap="none" dirty="0">
+              <a:t> alle app di </a:t>
+            </a:r>
+            <a:r>
+              <a:rPr lang="en-US" sz="1125" dirty="0" err="1">
                 <a:solidFill>
                   <a:srgbClr val="B3B3B3"/>
                 </a:solidFill>
@@ -22455,10 +23834,10 @@
                 <a:cs typeface="Inter"/>
                 <a:sym typeface="Inter"/>
               </a:rPr>
-              <a:t> del panino, </a:t>
-            </a:r>
-            <a:r>
-              <a:rPr lang="en-US" sz="1125" b="0" i="0" u="none" strike="noStrike" cap="none" dirty="0" err="1">
+              <a:t>messaggistica</a:t>
+            </a:r>
+            <a:r>
+              <a:rPr lang="en-US" sz="1125" dirty="0">
                 <a:solidFill>
                   <a:srgbClr val="B3B3B3"/>
                 </a:solidFill>
@@ -22467,10 +23846,10 @@
                 <a:cs typeface="Inter"/>
                 <a:sym typeface="Inter"/>
               </a:rPr>
-              <a:t>scelta</a:t>
-            </a:r>
-            <a:r>
-              <a:rPr lang="en-US" sz="1125" b="0" i="0" u="none" strike="noStrike" cap="none" dirty="0">
+              <a:t> </a:t>
+            </a:r>
+            <a:r>
+              <a:rPr lang="en-US" sz="1125" dirty="0" err="1">
                 <a:solidFill>
                   <a:srgbClr val="B3B3B3"/>
                 </a:solidFill>
@@ -22479,142 +23858,10 @@
                 <a:cs typeface="Inter"/>
                 <a:sym typeface="Inter"/>
               </a:rPr>
-              <a:t> </a:t>
-            </a:r>
-            <a:r>
-              <a:rPr lang="en-US" sz="1125" b="0" i="0" u="none" strike="noStrike" cap="none" dirty="0" err="1">
-                <a:solidFill>
-                  <a:srgbClr val="B3B3B3"/>
-                </a:solidFill>
-                <a:latin typeface="Inter"/>
-                <a:ea typeface="Inter"/>
-                <a:cs typeface="Inter"/>
-                <a:sym typeface="Inter"/>
-              </a:rPr>
-              <a:t>dell'orario</a:t>
-            </a:r>
-            <a:r>
-              <a:rPr lang="en-US" sz="1125" b="0" i="0" u="none" strike="noStrike" cap="none" dirty="0">
-                <a:solidFill>
-                  <a:srgbClr val="B3B3B3"/>
-                </a:solidFill>
-                <a:latin typeface="Inter"/>
-                <a:ea typeface="Inter"/>
-                <a:cs typeface="Inter"/>
-                <a:sym typeface="Inter"/>
-              </a:rPr>
-              <a:t> di </a:t>
-            </a:r>
-            <a:r>
-              <a:rPr lang="en-US" sz="1125" b="0" i="0" u="none" strike="noStrike" cap="none" dirty="0" err="1">
-                <a:solidFill>
-                  <a:srgbClr val="B3B3B3"/>
-                </a:solidFill>
-                <a:latin typeface="Inter"/>
-                <a:ea typeface="Inter"/>
-                <a:cs typeface="Inter"/>
-                <a:sym typeface="Inter"/>
-              </a:rPr>
-              <a:t>ritiro</a:t>
-            </a:r>
-            <a:r>
-              <a:rPr lang="en-US" sz="1125" b="0" i="0" u="none" strike="noStrike" cap="none" dirty="0">
-                <a:solidFill>
-                  <a:srgbClr val="B3B3B3"/>
-                </a:solidFill>
-                <a:latin typeface="Inter"/>
-                <a:ea typeface="Inter"/>
-                <a:cs typeface="Inter"/>
-                <a:sym typeface="Inter"/>
-              </a:rPr>
-              <a:t> o </a:t>
-            </a:r>
-            <a:r>
-              <a:rPr lang="en-US" sz="1125" b="0" i="0" u="none" strike="noStrike" cap="none" dirty="0" err="1">
-                <a:solidFill>
-                  <a:srgbClr val="B3B3B3"/>
-                </a:solidFill>
-                <a:latin typeface="Inter"/>
-                <a:ea typeface="Inter"/>
-                <a:cs typeface="Inter"/>
-                <a:sym typeface="Inter"/>
-              </a:rPr>
-              <a:t>consegna</a:t>
-            </a:r>
-            <a:r>
-              <a:rPr lang="en-US" sz="1125" b="0" i="0" u="none" strike="noStrike" cap="none" dirty="0">
-                <a:solidFill>
-                  <a:srgbClr val="B3B3B3"/>
-                </a:solidFill>
-                <a:latin typeface="Inter"/>
-                <a:ea typeface="Inter"/>
-                <a:cs typeface="Inter"/>
-                <a:sym typeface="Inter"/>
-              </a:rPr>
-              <a:t> e </a:t>
-            </a:r>
-            <a:r>
-              <a:rPr lang="en-US" sz="1125" b="0" i="0" u="none" strike="noStrike" cap="none" dirty="0" err="1">
-                <a:solidFill>
-                  <a:srgbClr val="B3B3B3"/>
-                </a:solidFill>
-                <a:latin typeface="Inter"/>
-                <a:ea typeface="Inter"/>
-                <a:cs typeface="Inter"/>
-                <a:sym typeface="Inter"/>
-              </a:rPr>
-              <a:t>pagamento</a:t>
-            </a:r>
-            <a:r>
-              <a:rPr lang="en-US" sz="1125" b="0" i="0" u="none" strike="noStrike" cap="none" dirty="0">
-                <a:solidFill>
-                  <a:srgbClr val="B3B3B3"/>
-                </a:solidFill>
-                <a:latin typeface="Inter"/>
-                <a:ea typeface="Inter"/>
-                <a:cs typeface="Inter"/>
-                <a:sym typeface="Inter"/>
-              </a:rPr>
-              <a:t> </a:t>
-            </a:r>
-            <a:r>
-              <a:rPr lang="en-US" sz="1125" b="0" i="0" u="none" strike="noStrike" cap="none" dirty="0" err="1">
-                <a:solidFill>
-                  <a:srgbClr val="B3B3B3"/>
-                </a:solidFill>
-                <a:latin typeface="Inter"/>
-                <a:ea typeface="Inter"/>
-                <a:cs typeface="Inter"/>
-                <a:sym typeface="Inter"/>
-              </a:rPr>
-              <a:t>sicuro</a:t>
-            </a:r>
-            <a:r>
-              <a:rPr lang="en-US" sz="1125" b="0" i="0" u="none" strike="noStrike" cap="none" dirty="0">
-                <a:solidFill>
-                  <a:srgbClr val="B3B3B3"/>
-                </a:solidFill>
-                <a:latin typeface="Inter"/>
-                <a:ea typeface="Inter"/>
-                <a:cs typeface="Inter"/>
-                <a:sym typeface="Inter"/>
-              </a:rPr>
-              <a:t> </a:t>
-            </a:r>
-            <a:r>
-              <a:rPr lang="en-US" sz="1125" b="0" i="0" u="none" strike="noStrike" cap="none" dirty="0" err="1">
-                <a:solidFill>
-                  <a:srgbClr val="B3B3B3"/>
-                </a:solidFill>
-                <a:latin typeface="Inter"/>
-                <a:ea typeface="Inter"/>
-                <a:cs typeface="Inter"/>
-                <a:sym typeface="Inter"/>
-              </a:rPr>
-              <a:t>immediato</a:t>
-            </a:r>
-            <a:r>
-              <a:rPr lang="en-US" sz="1125" b="0" i="0" u="none" strike="noStrike" cap="none" dirty="0">
+              <a:t>principali</a:t>
+            </a:r>
+            <a:r>
+              <a:rPr lang="en-US" sz="1125" dirty="0">
                 <a:solidFill>
                   <a:srgbClr val="B3B3B3"/>
                 </a:solidFill>
@@ -22638,7 +23885,7 @@
         <p:spPr>
           <a:xfrm>
             <a:off x="1095375" y="3698527"/>
-            <a:ext cx="5838825" cy="428625"/>
+            <a:ext cx="5838825" cy="519373"/>
           </a:xfrm>
           <a:prstGeom prst="rect">
             <a:avLst/>
@@ -22667,7 +23914,7 @@
               <a:buNone/>
             </a:pPr>
             <a:r>
-              <a:rPr lang="en-US" sz="1125" b="1" i="0" u="none" strike="noStrike" cap="none">
+              <a:rPr lang="en-US" sz="1125" b="1" i="0" u="none" strike="noStrike" cap="none" dirty="0" err="1">
                 <a:solidFill>
                   <a:srgbClr val="B3B3B3"/>
                 </a:solidFill>
@@ -22676,10 +23923,10 @@
                 <a:cs typeface="Inter"/>
                 <a:sym typeface="Inter"/>
               </a:rPr>
-              <a:t>Notifiche Push Geolocalizzate:</a:t>
-            </a:r>
-            <a:r>
-              <a:rPr lang="en-US" sz="1125" b="0" i="0" u="none" strike="noStrike" cap="none">
+              <a:t>Notifiche</a:t>
+            </a:r>
+            <a:r>
+              <a:rPr lang="en-US" sz="1125" b="1" i="0" u="none" strike="noStrike" cap="none" dirty="0">
                 <a:solidFill>
                   <a:srgbClr val="B3B3B3"/>
                 </a:solidFill>
@@ -22688,9 +23935,141 @@
                 <a:cs typeface="Inter"/>
                 <a:sym typeface="Inter"/>
               </a:rPr>
-              <a:t> Avvisi contestuali inviati quando l'utente si trova in prossimità dello store per proporre l'offerta del giorno o ricordare i punti fedeltà attivi.</a:t>
-            </a:r>
-            <a:endParaRPr/>
+              <a:t> Push </a:t>
+            </a:r>
+            <a:r>
+              <a:rPr lang="en-US" sz="1125" b="1" i="0" u="none" strike="noStrike" cap="none" dirty="0" err="1">
+                <a:solidFill>
+                  <a:srgbClr val="B3B3B3"/>
+                </a:solidFill>
+                <a:latin typeface="Inter"/>
+                <a:ea typeface="Inter"/>
+                <a:cs typeface="Inter"/>
+                <a:sym typeface="Inter"/>
+              </a:rPr>
+              <a:t>Geolocalizzate</a:t>
+            </a:r>
+            <a:r>
+              <a:rPr lang="en-US" sz="1125" b="1" i="0" u="none" strike="noStrike" cap="none" dirty="0">
+                <a:solidFill>
+                  <a:srgbClr val="B3B3B3"/>
+                </a:solidFill>
+                <a:latin typeface="Inter"/>
+                <a:ea typeface="Inter"/>
+                <a:cs typeface="Inter"/>
+                <a:sym typeface="Inter"/>
+              </a:rPr>
+              <a:t>:</a:t>
+            </a:r>
+            <a:r>
+              <a:rPr lang="en-US" sz="1125" b="0" i="0" u="none" strike="noStrike" cap="none" dirty="0">
+                <a:solidFill>
+                  <a:srgbClr val="B3B3B3"/>
+                </a:solidFill>
+                <a:latin typeface="Inter"/>
+                <a:ea typeface="Inter"/>
+                <a:cs typeface="Inter"/>
+                <a:sym typeface="Inter"/>
+              </a:rPr>
+              <a:t> </a:t>
+            </a:r>
+            <a:r>
+              <a:rPr lang="en-US" sz="1125" b="0" i="0" u="none" strike="noStrike" cap="none" dirty="0" err="1">
+                <a:solidFill>
+                  <a:srgbClr val="B3B3B3"/>
+                </a:solidFill>
+                <a:latin typeface="Inter"/>
+                <a:ea typeface="Inter"/>
+                <a:cs typeface="Inter"/>
+                <a:sym typeface="Inter"/>
+              </a:rPr>
+              <a:t>Avvisi</a:t>
+            </a:r>
+            <a:r>
+              <a:rPr lang="en-US" sz="1125" b="0" i="0" u="none" strike="noStrike" cap="none" dirty="0">
+                <a:solidFill>
+                  <a:srgbClr val="B3B3B3"/>
+                </a:solidFill>
+                <a:latin typeface="Inter"/>
+                <a:ea typeface="Inter"/>
+                <a:cs typeface="Inter"/>
+                <a:sym typeface="Inter"/>
+              </a:rPr>
+              <a:t> </a:t>
+            </a:r>
+            <a:r>
+              <a:rPr lang="en-US" sz="1125" b="0" i="0" u="none" strike="noStrike" cap="none" dirty="0" err="1">
+                <a:solidFill>
+                  <a:srgbClr val="B3B3B3"/>
+                </a:solidFill>
+                <a:latin typeface="Inter"/>
+                <a:ea typeface="Inter"/>
+                <a:cs typeface="Inter"/>
+                <a:sym typeface="Inter"/>
+              </a:rPr>
+              <a:t>contestuali</a:t>
+            </a:r>
+            <a:r>
+              <a:rPr lang="en-US" sz="1125" b="0" i="0" u="none" strike="noStrike" cap="none" dirty="0">
+                <a:solidFill>
+                  <a:srgbClr val="B3B3B3"/>
+                </a:solidFill>
+                <a:latin typeface="Inter"/>
+                <a:ea typeface="Inter"/>
+                <a:cs typeface="Inter"/>
+                <a:sym typeface="Inter"/>
+              </a:rPr>
+              <a:t>, </a:t>
+            </a:r>
+            <a:r>
+              <a:rPr lang="en-US" sz="1125" b="0" i="0" u="none" strike="noStrike" cap="none" dirty="0" err="1">
+                <a:solidFill>
+                  <a:srgbClr val="B3B3B3"/>
+                </a:solidFill>
+                <a:latin typeface="Inter"/>
+                <a:ea typeface="Inter"/>
+                <a:cs typeface="Inter"/>
+                <a:sym typeface="Inter"/>
+              </a:rPr>
+              <a:t>sincronizzati</a:t>
+            </a:r>
+            <a:r>
+              <a:rPr lang="en-US" sz="1125" b="0" i="0" u="none" strike="noStrike" cap="none" dirty="0">
+                <a:solidFill>
+                  <a:srgbClr val="B3B3B3"/>
+                </a:solidFill>
+                <a:latin typeface="Inter"/>
+                <a:ea typeface="Inter"/>
+                <a:cs typeface="Inter"/>
+                <a:sym typeface="Inter"/>
+              </a:rPr>
+              <a:t> con data, ora e </a:t>
+            </a:r>
+            <a:r>
+              <a:rPr lang="en-US" sz="1125" b="0" i="0" u="none" strike="noStrike" cap="none" dirty="0" err="1">
+                <a:solidFill>
+                  <a:srgbClr val="B3B3B3"/>
+                </a:solidFill>
+                <a:latin typeface="Inter"/>
+                <a:ea typeface="Inter"/>
+                <a:cs typeface="Inter"/>
+                <a:sym typeface="Inter"/>
+              </a:rPr>
+              <a:t>posizione</a:t>
+            </a:r>
+            <a:r>
+              <a:rPr lang="en-US" sz="1125" b="0" i="0" u="none" strike="noStrike" cap="none" dirty="0">
+                <a:solidFill>
+                  <a:srgbClr val="B3B3B3"/>
+                </a:solidFill>
+                <a:latin typeface="Inter"/>
+                <a:ea typeface="Inter"/>
+                <a:cs typeface="Inter"/>
+                <a:sym typeface="Inter"/>
+              </a:rPr>
+              <a:t>.</a:t>
+            </a:r>
+            <a:endParaRPr dirty="0"/>
           </a:p>
         </p:txBody>
       </p:sp>
@@ -22703,7 +24082,7 @@
         <p:spPr>
           <a:xfrm>
             <a:off x="1095373" y="4581532"/>
-            <a:ext cx="5838825" cy="428625"/>
+            <a:ext cx="5838825" cy="519373"/>
           </a:xfrm>
           <a:prstGeom prst="rect">
             <a:avLst/>
@@ -22753,7 +24132,31 @@
                 <a:cs typeface="Inter"/>
                 <a:sym typeface="Inter"/>
               </a:rPr>
-              <a:t> One-Touch:</a:t>
+              <a:t> One-Touch: </a:t>
+            </a:r>
+            <a:r>
+              <a:rPr lang="en-US" sz="1125" b="1" dirty="0">
+                <a:solidFill>
+                  <a:srgbClr val="B3B3B3"/>
+                </a:solidFill>
+                <a:latin typeface="Inter"/>
+                <a:ea typeface="Inter"/>
+                <a:cs typeface="Inter"/>
+                <a:sym typeface="Inter"/>
+              </a:rPr>
+              <a:t>D</a:t>
+            </a:r>
+            <a:r>
+              <a:rPr lang="en-US" sz="1125" i="0" u="none" strike="noStrike" cap="none" dirty="0">
+                <a:solidFill>
+                  <a:srgbClr val="B3B3B3"/>
+                </a:solidFill>
+                <a:latin typeface="Inter"/>
+                <a:ea typeface="Inter"/>
+                <a:cs typeface="Inter"/>
+                <a:sym typeface="Inter"/>
+              </a:rPr>
+              <a:t>elivery super intuitive e</a:t>
             </a:r>
             <a:r>
               <a:rPr lang="en-US" sz="1125" b="0" i="0" u="none" strike="noStrike" cap="none" dirty="0">
@@ -22768,6 +24171,18 @@
               <a:t> </a:t>
             </a:r>
             <a:r>
+              <a:rPr lang="en-US" sz="1125" dirty="0" err="1">
+                <a:solidFill>
+                  <a:srgbClr val="B3B3B3"/>
+                </a:solidFill>
+                <a:latin typeface="Inter"/>
+                <a:ea typeface="Inter"/>
+                <a:cs typeface="Inter"/>
+                <a:sym typeface="Inter"/>
+              </a:rPr>
+              <a:t>i</a:t>
+            </a:r>
+            <a:r>
               <a:rPr lang="en-US" sz="1125" b="0" i="0" u="none" strike="noStrike" cap="none" dirty="0" err="1">
                 <a:solidFill>
                   <a:srgbClr val="B3B3B3"/>
@@ -22777,7 +24192,7 @@
                 <a:cs typeface="Inter"/>
                 <a:sym typeface="Inter"/>
               </a:rPr>
-              <a:t>Integrazione</a:t>
+              <a:t>ntegrazione</a:t>
             </a:r>
             <a:r>
               <a:rPr lang="en-US" sz="1125" b="0" i="0" u="none" strike="noStrike" cap="none" dirty="0">
@@ -22813,7 +24228,7 @@
                 <a:cs typeface="Inter"/>
                 <a:sym typeface="Inter"/>
               </a:rPr>
-              <a:t> con Apple Pay, Google Pay e le </a:t>
+              <a:t> con Apple Pay, Google Pay e I </a:t>
             </a:r>
             <a:r>
               <a:rPr lang="en-US" sz="1125" b="0" i="0" u="none" strike="noStrike" cap="none" dirty="0" err="1">
@@ -22837,7 +24252,7 @@
                 <a:cs typeface="Inter"/>
                 <a:sym typeface="Inter"/>
               </a:rPr>
-              <a:t> carte di </a:t>
+              <a:t> Metodi di </a:t>
             </a:r>
             <a:r>
               <a:rPr lang="en-US" sz="1125" b="0" i="0" u="none" strike="noStrike" cap="none" dirty="0" err="1">
@@ -22849,7 +24264,7 @@
                 <a:cs typeface="Inter"/>
                 <a:sym typeface="Inter"/>
               </a:rPr>
-              <a:t>credito</a:t>
+              <a:t>pagamento</a:t>
             </a:r>
             <a:r>
               <a:rPr lang="en-US" sz="1125" b="0" i="0" u="none" strike="noStrike" cap="none" dirty="0">
@@ -22861,7 +24276,7 @@
                 <a:cs typeface="Inter"/>
                 <a:sym typeface="Inter"/>
               </a:rPr>
-              <a:t> per </a:t>
+              <a:t> </a:t>
             </a:r>
             <a:r>
               <a:rPr lang="en-US" sz="1125" b="0" i="0" u="none" strike="noStrike" cap="none" dirty="0" err="1">
@@ -22873,7 +24288,7 @@
                 <a:cs typeface="Inter"/>
                 <a:sym typeface="Inter"/>
               </a:rPr>
-              <a:t>velocizzare</a:t>
+              <a:t>elettronici</a:t>
             </a:r>
             <a:r>
               <a:rPr lang="en-US" sz="1125" b="0" i="0" u="none" strike="noStrike" cap="none" dirty="0">
@@ -22885,55 +24300,7 @@
                 <a:cs typeface="Inter"/>
                 <a:sym typeface="Inter"/>
               </a:rPr>
-              <a:t> </a:t>
-            </a:r>
-            <a:r>
-              <a:rPr lang="en-US" sz="1125" b="0" i="0" u="none" strike="noStrike" cap="none" dirty="0" err="1">
-                <a:solidFill>
-                  <a:srgbClr val="B3B3B3"/>
-                </a:solidFill>
-                <a:latin typeface="Inter"/>
-                <a:ea typeface="Inter"/>
-                <a:cs typeface="Inter"/>
-                <a:sym typeface="Inter"/>
-              </a:rPr>
-              <a:t>drasticamente</a:t>
-            </a:r>
-            <a:r>
-              <a:rPr lang="en-US" sz="1125" b="0" i="0" u="none" strike="noStrike" cap="none" dirty="0">
-                <a:solidFill>
-                  <a:srgbClr val="B3B3B3"/>
-                </a:solidFill>
-                <a:latin typeface="Inter"/>
-                <a:ea typeface="Inter"/>
-                <a:cs typeface="Inter"/>
-                <a:sym typeface="Inter"/>
-              </a:rPr>
-              <a:t> la </a:t>
-            </a:r>
-            <a:r>
-              <a:rPr lang="en-US" sz="1125" b="0" i="0" u="none" strike="noStrike" cap="none" dirty="0" err="1">
-                <a:solidFill>
-                  <a:srgbClr val="B3B3B3"/>
-                </a:solidFill>
-                <a:latin typeface="Inter"/>
-                <a:ea typeface="Inter"/>
-                <a:cs typeface="Inter"/>
-                <a:sym typeface="Inter"/>
-              </a:rPr>
-              <a:t>fase</a:t>
-            </a:r>
-            <a:r>
-              <a:rPr lang="en-US" sz="1125" b="0" i="0" u="none" strike="noStrike" cap="none" dirty="0">
-                <a:solidFill>
-                  <a:srgbClr val="B3B3B3"/>
-                </a:solidFill>
-                <a:latin typeface="Inter"/>
-                <a:ea typeface="Inter"/>
-                <a:cs typeface="Inter"/>
-                <a:sym typeface="Inter"/>
-              </a:rPr>
-              <a:t> di checkout.</a:t>
+              <a:t>.</a:t>
             </a:r>
             <a:endParaRPr dirty="0"/>
           </a:p>
@@ -22954,7 +24321,7 @@
         </p:blipFill>
         <p:spPr>
           <a:xfrm>
-            <a:off x="752475" y="2896050"/>
+            <a:off x="751010" y="2940941"/>
             <a:ext cx="190500" cy="180975"/>
           </a:xfrm>
           <a:prstGeom prst="rect">
@@ -22981,7 +24348,7 @@
         </p:blipFill>
         <p:spPr>
           <a:xfrm>
-            <a:off x="762000" y="3722340"/>
+            <a:off x="762000" y="3822352"/>
             <a:ext cx="152400" cy="180975"/>
           </a:xfrm>
           <a:prstGeom prst="rect">
@@ -23008,7 +24375,7 @@
         </p:blipFill>
         <p:spPr>
           <a:xfrm>
-            <a:off x="781050" y="4581532"/>
+            <a:off x="781050" y="4660243"/>
             <a:ext cx="171450" cy="180975"/>
           </a:xfrm>
           <a:prstGeom prst="rect">
